--- a/presentation/gender_bias_llm_hiring.pptx
+++ b/presentation/gender_bias_llm_hiring.pptx
@@ -16,7 +16,6 @@
     <p:sldId id="264" r:id="rId15"/>
     <p:sldId id="265" r:id="rId16"/>
     <p:sldId id="266" r:id="rId17"/>
-    <p:sldId id="267" r:id="rId18"/>
   </p:sldIdLst>
   <p:sldSz cx="12191695" cy="6858000" type="screen4x3"/>
   <p:notesSz cx="6858000" cy="9144000"/>
@@ -3116,13 +3115,13 @@
           <a:gradFill rotWithShape="1">
             <a:gsLst>
               <a:gs pos="0">
-                <a:srgbClr val="FDEEF4"/>
+                <a:srgbClr val="F5EDDF"/>
               </a:gs>
               <a:gs pos="100000">
-                <a:srgbClr val="E9F1FC"/>
+                <a:srgbClr val="E7D3B8"/>
               </a:gs>
             </a:gsLst>
-            <a:lin scaled="0" ang="13500000"/>
+            <a:lin scaled="0" ang="14400000"/>
           </a:gradFill>
           <a:ln>
             <a:noFill/>
@@ -3168,17 +3167,17 @@
             </a:avLst>
           </a:prstGeom>
           <a:solidFill>
-            <a:srgbClr val="FFFFFF"/>
+            <a:srgbClr val="FCF7EF"/>
           </a:solidFill>
           <a:ln w="12700">
             <a:solidFill>
-              <a:srgbClr val="EFDFE9"/>
+              <a:srgbClr val="E4D5C0"/>
             </a:solidFill>
           </a:ln>
           <a:effectLst>
-            <a:outerShdw blurRad="228600" dist="127000" dir="5400000" rotWithShape="0">
-              <a:srgbClr val="C880A8">
-                <a:alpha val="78000"/>
+            <a:outerShdw blurRad="254000" dist="139700" dir="5400000" rotWithShape="0">
+              <a:srgbClr val="6B4A34">
+                <a:alpha val="76000"/>
               </a:srgbClr>
             </a:outerShdw>
           </a:effectLst>
@@ -3222,17 +3221,17 @@
             </a:avLst>
           </a:prstGeom>
           <a:solidFill>
-            <a:srgbClr val="FFFFFF"/>
+            <a:srgbClr val="FCF7EF"/>
           </a:solidFill>
           <a:ln w="12700">
             <a:solidFill>
-              <a:srgbClr val="EFDFE9"/>
+              <a:srgbClr val="E4D5C0"/>
             </a:solidFill>
           </a:ln>
           <a:effectLst>
-            <a:outerShdw blurRad="228600" dist="127000" dir="5400000" rotWithShape="0">
-              <a:srgbClr val="C880A8">
-                <a:alpha val="78000"/>
+            <a:outerShdw blurRad="254000" dist="139700" dir="5400000" rotWithShape="0">
+              <a:srgbClr val="6B4A34">
+                <a:alpha val="76000"/>
               </a:srgbClr>
             </a:outerShdw>
           </a:effectLst>
@@ -3267,8 +3266,8 @@
         </p:nvSpPr>
         <p:spPr>
           <a:xfrm>
-            <a:off x="3169767" y="1280160"/>
-            <a:ext cx="5852160" cy="1371600"/>
+            <a:off x="3169767" y="1325880"/>
+            <a:ext cx="5852160" cy="1280160"/>
           </a:xfrm>
           <a:prstGeom prst="rect">
             <a:avLst/>
@@ -3287,27 +3286,27 @@
               </a:lnSpc>
             </a:pPr>
             <a:r>
-              <a:rPr sz="6400" b="0" i="0">
+              <a:rPr sz="6200" b="0" i="0">
                 <a:solidFill>
-                  <a:srgbClr val="E888B4"/>
+                  <a:srgbClr val="B0563A"/>
                 </a:solidFill>
                 <a:latin typeface="Calibri"/>
               </a:rPr>
               <a:t>♀</a:t>
             </a:r>
             <a:r>
-              <a:rPr sz="6400" b="0" i="0">
+              <a:rPr sz="6200" b="0" i="0">
                 <a:solidFill>
-                  <a:srgbClr val="B0A4BB"/>
+                  <a:srgbClr val="9B8571"/>
                 </a:solidFill>
                 <a:latin typeface="Calibri"/>
               </a:rPr>
               <a:t>   vs   </a:t>
             </a:r>
             <a:r>
-              <a:rPr sz="6400" b="0" i="0">
+              <a:rPr sz="6200" b="0" i="0">
                 <a:solidFill>
-                  <a:srgbClr val="6FA0DD"/>
+                  <a:srgbClr val="6B4A34"/>
                 </a:solidFill>
                 <a:latin typeface="Calibri"/>
               </a:rPr>
@@ -3324,8 +3323,8 @@
         </p:nvSpPr>
         <p:spPr>
           <a:xfrm>
-            <a:off x="975207" y="2880360"/>
-            <a:ext cx="10241280" cy="1737360"/>
+            <a:off x="883767" y="2880360"/>
+            <a:ext cx="10424160" cy="1737360"/>
           </a:xfrm>
           <a:prstGeom prst="rect">
             <a:avLst/>
@@ -3340,33 +3339,33 @@
           <a:p>
             <a:pPr algn="ctr">
               <a:lnSpc>
-                <a:spcPct val="102000"/>
+                <a:spcPct val="103000"/>
               </a:lnSpc>
             </a:pPr>
             <a:r>
               <a:rPr sz="4000" b="1" i="0">
                 <a:solidFill>
-                  <a:srgbClr val="463A53"/>
+                  <a:srgbClr val="3E2C1E"/>
                 </a:solidFill>
-                <a:latin typeface="Century Gothic"/>
+                <a:latin typeface="Georgia"/>
               </a:rPr>
               <a:t>Gender bias when </a:t>
             </a:r>
             <a:r>
               <a:rPr sz="4000" b="1" i="0">
                 <a:solidFill>
-                  <a:srgbClr val="E07AA8"/>
+                  <a:srgbClr val="B0563A"/>
                 </a:solidFill>
-                <a:latin typeface="Century Gothic"/>
+                <a:latin typeface="Georgia"/>
               </a:rPr>
               <a:t>AI</a:t>
             </a:r>
             <a:r>
               <a:rPr sz="4000" b="1" i="0">
                 <a:solidFill>
-                  <a:srgbClr val="463A53"/>
+                  <a:srgbClr val="3E2C1E"/>
                 </a:solidFill>
-                <a:latin typeface="Century Gothic"/>
+                <a:latin typeface="Georgia"/>
               </a:rPr>
               <a:t> screens résumés</a:t>
             </a:r>
@@ -3381,7 +3380,7 @@
         </p:nvSpPr>
         <p:spPr>
           <a:xfrm>
-            <a:off x="2438247" y="4754880"/>
+            <a:off x="2438247" y="4800600"/>
             <a:ext cx="7315200" cy="457200"/>
           </a:xfrm>
           <a:prstGeom prst="rect">
@@ -3401,11 +3400,11 @@
               </a:lnSpc>
             </a:pPr>
             <a:r>
-              <a:rPr sz="1500" b="1" i="0" spc="360">
+              <a:rPr sz="1500" b="1" i="0" spc="340">
                 <a:solidFill>
-                  <a:srgbClr val="8A7D95"/>
+                  <a:srgbClr val="A9744F"/>
                 </a:solidFill>
-                <a:latin typeface="Century Gothic"/>
+                <a:latin typeface="Calibri"/>
               </a:rPr>
               <a:t>JAPANESE HIRING   ·   5 MODELS</a:t>
             </a:r>
@@ -3447,13 +3446,13 @@
           <a:gradFill rotWithShape="1">
             <a:gsLst>
               <a:gs pos="0">
-                <a:srgbClr val="E6EEFB"/>
+                <a:srgbClr val="F5EDDF"/>
               </a:gs>
               <a:gs pos="100000">
-                <a:srgbClr val="FBE4EF"/>
+                <a:srgbClr val="EFE1D3"/>
               </a:gs>
             </a:gsLst>
-            <a:lin scaled="0" ang="13500000"/>
+            <a:lin scaled="0" ang="14400000"/>
           </a:gradFill>
           <a:ln>
             <a:noFill/>
@@ -3512,11 +3511,11 @@
             <a:r>
               <a:rPr sz="1300" b="1" i="0" spc="420">
                 <a:solidFill>
-                  <a:srgbClr val="EF9D84"/>
+                  <a:srgbClr val="A9744F"/>
                 </a:solidFill>
-                <a:latin typeface="Century Gothic"/>
+                <a:latin typeface="Calibri"/>
               </a:rPr>
-              <a:t>WHY IT HAPPENS</a:t>
+              <a:t>THE TAKEAWAY</a:t>
             </a:r>
           </a:p>
         </p:txBody>
@@ -3529,15 +3528,15 @@
         </p:nvCxnSpPr>
         <p:spPr>
           <a:xfrm>
-            <a:off x="5775807" y="969264"/>
-            <a:ext cx="640080" cy="0"/>
+            <a:off x="5803239" y="987552"/>
+            <a:ext cx="585216" cy="0"/>
           </a:xfrm>
           <a:prstGeom prst="bentConnector3">
             <a:avLst/>
           </a:prstGeom>
           <a:ln w="27940">
             <a:solidFill>
-              <a:srgbClr val="EF9D84"/>
+              <a:srgbClr val="A9744F"/>
             </a:solidFill>
           </a:ln>
           <a:effectLst/>
@@ -3565,8 +3564,72 @@
         </p:nvSpPr>
         <p:spPr>
           <a:xfrm>
-            <a:off x="1981047" y="2286000"/>
-            <a:ext cx="8229600" cy="1371600"/>
+            <a:off x="700887" y="2286000"/>
+            <a:ext cx="10789920" cy="2011680"/>
+          </a:xfrm>
+          <a:prstGeom prst="rect">
+            <a:avLst/>
+          </a:prstGeom>
+          <a:noFill/>
+        </p:spPr>
+        <p:txBody>
+          <a:bodyPr wrap="square" anchor="ctr" lIns="0" rIns="0" tIns="0" bIns="0">
+            <a:spAutoFit/>
+          </a:bodyPr>
+          <a:lstStyle/>
+          <a:p>
+            <a:pPr algn="ctr">
+              <a:lnSpc>
+                <a:spcPct val="114000"/>
+              </a:lnSpc>
+            </a:pPr>
+            <a:r>
+              <a:rPr sz="3300" b="1" i="0">
+                <a:solidFill>
+                  <a:srgbClr val="3E2C1E"/>
+                </a:solidFill>
+                <a:latin typeface="Georgia"/>
+              </a:rPr>
+              <a:t>AI may decide who gets an interview</a:t>
+            </a:r>
+          </a:p>
+          <a:p>
+            <a:pPr algn="ctr">
+              <a:lnSpc>
+                <a:spcPct val="114000"/>
+              </a:lnSpc>
+            </a:pPr>
+            <a:r>
+              <a:rPr sz="3300" b="1" i="0">
+                <a:solidFill>
+                  <a:srgbClr val="3E2C1E"/>
+                </a:solidFill>
+                <a:latin typeface="Georgia"/>
+              </a:rPr>
+              <a:t/>
+            </a:r>
+            <a:r>
+              <a:rPr sz="3300" b="1" i="0">
+                <a:solidFill>
+                  <a:srgbClr val="B0563A"/>
+                </a:solidFill>
+                <a:latin typeface="Georgia"/>
+              </a:rPr>
+              <a:t>before a human ever sees you.</a:t>
+            </a:r>
+          </a:p>
+        </p:txBody>
+      </p:sp>
+      <p:sp>
+        <p:nvSpPr>
+          <p:cNvPr id="6" name="TextBox 5"/>
+          <p:cNvSpPr txBox="1"/>
+          <p:nvPr/>
+        </p:nvSpPr>
+        <p:spPr>
+          <a:xfrm>
+            <a:off x="1066647" y="4892040"/>
+            <a:ext cx="10058400" cy="640080"/>
           </a:xfrm>
           <a:prstGeom prst="rect">
             <a:avLst/>
@@ -3585,53 +3648,33 @@
               </a:lnSpc>
             </a:pPr>
             <a:r>
-              <a:rPr sz="8000" b="1" i="0">
+              <a:rPr sz="2000" b="1" i="1">
                 <a:solidFill>
-                  <a:srgbClr val="B0A4BB"/>
+                  <a:srgbClr val="A9744F"/>
                 </a:solidFill>
-                <a:latin typeface="Calibri"/>
+                <a:latin typeface="Georgia"/>
               </a:rPr>
-              <a:t>♂</a:t>
-            </a:r>
-            <a:r>
-              <a:rPr sz="8000" b="1" i="0">
-                <a:solidFill>
-                  <a:srgbClr val="463A53"/>
-                </a:solidFill>
-                <a:latin typeface="Calibri"/>
-              </a:rPr>
-              <a:t>        </a:t>
-            </a:r>
-            <a:r>
-              <a:rPr sz="8000" b="1" i="0">
-                <a:solidFill>
-                  <a:srgbClr val="E888B4"/>
-                </a:solidFill>
-                <a:latin typeface="Calibri"/>
-              </a:rPr>
-              <a:t>♀</a:t>
-            </a:r>
-          </a:p>
-        </p:txBody>
-      </p:sp>
-      <p:sp>
-        <p:nvSpPr>
-          <p:cNvPr id="6" name="Rounded Rectangle 5"/>
+              <a:t>Test it carefully before we trust it with a career</a:t>
+            </a:r>
+          </a:p>
+        </p:txBody>
+      </p:sp>
+      <p:sp>
+        <p:nvSpPr>
+          <p:cNvPr id="7" name="Rectangle 6"/>
           <p:cNvSpPr/>
           <p:nvPr/>
         </p:nvSpPr>
         <p:spPr>
-          <a:xfrm rot="360000">
-            <a:off x="3169767" y="3703320"/>
-            <a:ext cx="5852160" cy="146304"/>
-          </a:xfrm>
-          <a:prstGeom prst="roundRect">
-            <a:avLst>
-              <a:gd name="adj" fmla="val 50000"/>
-            </a:avLst>
-          </a:prstGeom>
-          <a:solidFill>
-            <a:srgbClr val="8A7D95"/>
+          <a:xfrm>
+            <a:off x="0" y="6803136"/>
+            <a:ext cx="3225338" cy="54864"/>
+          </a:xfrm>
+          <a:prstGeom prst="rect">
+            <a:avLst/>
+          </a:prstGeom>
+          <a:solidFill>
+            <a:srgbClr val="A9744F"/>
           </a:solidFill>
           <a:ln>
             <a:noFill/>
@@ -3662,142 +3705,13 @@
       </p:sp>
       <p:sp>
         <p:nvSpPr>
-          <p:cNvPr id="7" name="Rounded Rectangle 6"/>
-          <p:cNvSpPr/>
-          <p:nvPr/>
-        </p:nvSpPr>
-        <p:spPr>
-          <a:xfrm>
-            <a:off x="6013551" y="3383280"/>
-            <a:ext cx="164592" cy="640080"/>
-          </a:xfrm>
-          <a:prstGeom prst="roundRect">
-            <a:avLst>
-              <a:gd name="adj" fmla="val 50000"/>
-            </a:avLst>
-          </a:prstGeom>
-          <a:solidFill>
-            <a:srgbClr val="8A7D95"/>
-          </a:solidFill>
-          <a:ln>
-            <a:noFill/>
-          </a:ln>
-          <a:effectLst/>
-        </p:spPr>
-        <p:style>
-          <a:lnRef idx="1">
-            <a:schemeClr val="accent1"/>
-          </a:lnRef>
-          <a:fillRef idx="3">
-            <a:schemeClr val="accent1"/>
-          </a:fillRef>
-          <a:effectRef idx="2">
-            <a:schemeClr val="accent1"/>
-          </a:effectRef>
-          <a:fontRef idx="minor">
-            <a:schemeClr val="lt1"/>
-          </a:fontRef>
-        </p:style>
-        <p:txBody>
-          <a:bodyPr rtlCol="0" anchor="ctr"/>
-          <a:lstStyle/>
-          <a:p>
-            <a:pPr algn="ctr"/>
-          </a:p>
-        </p:txBody>
-      </p:sp>
-      <p:sp>
-        <p:nvSpPr>
           <p:cNvPr id="8" name="TextBox 7"/>
           <p:cNvSpPr txBox="1"/>
           <p:nvPr/>
         </p:nvSpPr>
         <p:spPr>
           <a:xfrm>
-            <a:off x="1066647" y="4846320"/>
-            <a:ext cx="10058400" cy="914400"/>
-          </a:xfrm>
-          <a:prstGeom prst="rect">
-            <a:avLst/>
-          </a:prstGeom>
-          <a:noFill/>
-        </p:spPr>
-        <p:txBody>
-          <a:bodyPr wrap="square" anchor="ctr" lIns="0" rIns="0" tIns="0" bIns="0">
-            <a:spAutoFit/>
-          </a:bodyPr>
-          <a:lstStyle/>
-          <a:p>
-            <a:pPr algn="ctr">
-              <a:lnSpc>
-                <a:spcPct val="105000"/>
-              </a:lnSpc>
-            </a:pPr>
-            <a:r>
-              <a:rPr sz="2300" b="1" i="0">
-                <a:solidFill>
-                  <a:srgbClr val="463A53"/>
-                </a:solidFill>
-                <a:latin typeface="Century Gothic"/>
-              </a:rPr>
-              <a:t>Fairness training may over-correct — tipping slightly toward women</a:t>
-            </a:r>
-          </a:p>
-        </p:txBody>
-      </p:sp>
-      <p:sp>
-        <p:nvSpPr>
-          <p:cNvPr id="9" name="Rectangle 8"/>
-          <p:cNvSpPr/>
-          <p:nvPr/>
-        </p:nvSpPr>
-        <p:spPr>
-          <a:xfrm>
-            <a:off x="0" y="6803136"/>
-            <a:ext cx="3566160" cy="54864"/>
-          </a:xfrm>
-          <a:prstGeom prst="rect">
-            <a:avLst/>
-          </a:prstGeom>
-          <a:solidFill>
-            <a:srgbClr val="EF9D84"/>
-          </a:solidFill>
-          <a:ln>
-            <a:noFill/>
-          </a:ln>
-          <a:effectLst/>
-        </p:spPr>
-        <p:style>
-          <a:lnRef idx="1">
-            <a:schemeClr val="accent1"/>
-          </a:lnRef>
-          <a:fillRef idx="3">
-            <a:schemeClr val="accent1"/>
-          </a:fillRef>
-          <a:effectRef idx="2">
-            <a:schemeClr val="accent1"/>
-          </a:effectRef>
-          <a:fontRef idx="minor">
-            <a:schemeClr val="lt1"/>
-          </a:fontRef>
-        </p:style>
-        <p:txBody>
-          <a:bodyPr rtlCol="0" anchor="ctr"/>
-          <a:lstStyle/>
-          <a:p>
-            <a:pPr algn="ctr"/>
-          </a:p>
-        </p:txBody>
-      </p:sp>
-      <p:sp>
-        <p:nvSpPr>
-          <p:cNvPr id="10" name="TextBox 9"/>
-          <p:cNvSpPr txBox="1"/>
-          <p:nvPr/>
-        </p:nvSpPr>
-        <p:spPr>
-          <a:xfrm>
-            <a:off x="11002975" y="6355080"/>
+            <a:off x="11048695" y="6355080"/>
             <a:ext cx="914400" cy="320040"/>
           </a:xfrm>
           <a:prstGeom prst="rect">
@@ -3819,7 +3733,7 @@
             <a:r>
               <a:rPr sz="1100" b="0" i="0">
                 <a:solidFill>
-                  <a:srgbClr val="B0A4BB"/>
+                  <a:srgbClr val="9B8571"/>
                 </a:solidFill>
                 <a:latin typeface="Calibri"/>
               </a:rPr>
@@ -3863,13 +3777,13 @@
           <a:gradFill rotWithShape="1">
             <a:gsLst>
               <a:gs pos="0">
-                <a:srgbClr val="FBE4EF"/>
+                <a:srgbClr val="F5EDDF"/>
               </a:gs>
               <a:gs pos="100000">
-                <a:srgbClr val="E6EEFB"/>
+                <a:srgbClr val="E7D3B8"/>
               </a:gs>
             </a:gsLst>
-            <a:lin scaled="0" ang="13500000"/>
+            <a:lin scaled="0" ang="14400000"/>
           </a:gradFill>
           <a:ln>
             <a:noFill/>
@@ -3906,8 +3820,8 @@
         </p:nvSpPr>
         <p:spPr>
           <a:xfrm>
-            <a:off x="2438247" y="566928"/>
-            <a:ext cx="7315200" cy="365760"/>
+            <a:off x="3169767" y="2468880"/>
+            <a:ext cx="5852160" cy="1280160"/>
           </a:xfrm>
           <a:prstGeom prst="rect">
             <a:avLst/>
@@ -3926,127 +3840,45 @@
               </a:lnSpc>
             </a:pPr>
             <a:r>
-              <a:rPr sz="1300" b="1" i="0" spc="420">
+              <a:rPr sz="5800" b="0" i="0">
                 <a:solidFill>
-                  <a:srgbClr val="6FA0DD"/>
+                  <a:srgbClr val="B0563A"/>
                 </a:solidFill>
-                <a:latin typeface="Century Gothic"/>
+                <a:latin typeface="Calibri"/>
               </a:rPr>
-              <a:t>THE TAKEAWAY</a:t>
-            </a:r>
-          </a:p>
-        </p:txBody>
-      </p:sp>
-      <p:cxnSp>
-        <p:nvCxnSpPr>
-          <p:cNvPr id="4" name="Connector 3"/>
-          <p:cNvCxnSpPr/>
-          <p:nvPr/>
-        </p:nvCxnSpPr>
-        <p:spPr>
-          <a:xfrm>
-            <a:off x="5775807" y="969264"/>
-            <a:ext cx="640080" cy="0"/>
-          </a:xfrm>
-          <a:prstGeom prst="bentConnector3">
-            <a:avLst/>
-          </a:prstGeom>
-          <a:ln w="27940">
-            <a:solidFill>
-              <a:srgbClr val="6FA0DD"/>
-            </a:solidFill>
-          </a:ln>
-          <a:effectLst/>
-        </p:spPr>
-        <p:style>
-          <a:lnRef idx="2">
-            <a:schemeClr val="accent1"/>
-          </a:lnRef>
-          <a:fillRef idx="0">
-            <a:schemeClr val="accent1"/>
-          </a:fillRef>
-          <a:effectRef idx="1">
-            <a:schemeClr val="accent1"/>
-          </a:effectRef>
-          <a:fontRef idx="minor">
-            <a:schemeClr val="tx1"/>
-          </a:fontRef>
-        </p:style>
-      </p:cxnSp>
-      <p:sp>
-        <p:nvSpPr>
-          <p:cNvPr id="5" name="TextBox 4"/>
+              <a:t>♀</a:t>
+            </a:r>
+            <a:r>
+              <a:rPr sz="5800" b="0" i="0">
+                <a:solidFill>
+                  <a:srgbClr val="3E2C1E"/>
+                </a:solidFill>
+                <a:latin typeface="Calibri"/>
+              </a:rPr>
+              <a:t>    </a:t>
+            </a:r>
+            <a:r>
+              <a:rPr sz="5800" b="0" i="0">
+                <a:solidFill>
+                  <a:srgbClr val="6B4A34"/>
+                </a:solidFill>
+                <a:latin typeface="Calibri"/>
+              </a:rPr>
+              <a:t>♂</a:t>
+            </a:r>
+          </a:p>
+        </p:txBody>
+      </p:sp>
+      <p:sp>
+        <p:nvSpPr>
+          <p:cNvPr id="4" name="TextBox 3"/>
           <p:cNvSpPr txBox="1"/>
           <p:nvPr/>
         </p:nvSpPr>
         <p:spPr>
           <a:xfrm>
-            <a:off x="975207" y="2331720"/>
-            <a:ext cx="10241280" cy="2011680"/>
-          </a:xfrm>
-          <a:prstGeom prst="rect">
-            <a:avLst/>
-          </a:prstGeom>
-          <a:noFill/>
-        </p:spPr>
-        <p:txBody>
-          <a:bodyPr wrap="square" anchor="ctr" lIns="0" rIns="0" tIns="0" bIns="0">
-            <a:spAutoFit/>
-          </a:bodyPr>
-          <a:lstStyle/>
-          <a:p>
-            <a:pPr algn="ctr">
-              <a:lnSpc>
-                <a:spcPct val="112000"/>
-              </a:lnSpc>
-            </a:pPr>
-            <a:r>
-              <a:rPr sz="3400" b="1" i="0">
-                <a:solidFill>
-                  <a:srgbClr val="463A53"/>
-                </a:solidFill>
-                <a:latin typeface="Century Gothic"/>
-              </a:rPr>
-              <a:t>AI may decide who gets an interview</a:t>
-            </a:r>
-          </a:p>
-          <a:p>
-            <a:pPr algn="ctr">
-              <a:lnSpc>
-                <a:spcPct val="112000"/>
-              </a:lnSpc>
-            </a:pPr>
-            <a:r>
-              <a:rPr sz="3400" b="1" i="0">
-                <a:solidFill>
-                  <a:srgbClr val="463A53"/>
-                </a:solidFill>
-                <a:latin typeface="Century Gothic"/>
-              </a:rPr>
-              <a:t/>
-            </a:r>
-            <a:r>
-              <a:rPr sz="3400" b="1" i="0">
-                <a:solidFill>
-                  <a:srgbClr val="E07AA8"/>
-                </a:solidFill>
-                <a:latin typeface="Century Gothic"/>
-              </a:rPr>
-              <a:t>before a human ever sees you.</a:t>
-            </a:r>
-          </a:p>
-        </p:txBody>
-      </p:sp>
-      <p:sp>
-        <p:nvSpPr>
-          <p:cNvPr id="6" name="TextBox 5"/>
-          <p:cNvSpPr txBox="1"/>
-          <p:nvPr/>
-        </p:nvSpPr>
-        <p:spPr>
-          <a:xfrm>
-            <a:off x="1523847" y="4846320"/>
-            <a:ext cx="9144000" cy="640080"/>
+            <a:off x="1523847" y="3749039"/>
+            <a:ext cx="9144000" cy="914400"/>
           </a:xfrm>
           <a:prstGeom prst="rect">
             <a:avLst/>
@@ -4065,180 +3897,27 @@
               </a:lnSpc>
             </a:pPr>
             <a:r>
-              <a:rPr sz="2000" b="1" i="0">
+              <a:rPr sz="4800" b="1" i="0">
                 <a:solidFill>
-                  <a:srgbClr val="8A7D95"/>
+                  <a:srgbClr val="3E2C1E"/>
                 </a:solidFill>
-                <a:latin typeface="Century Gothic"/>
+                <a:latin typeface="Georgia"/>
               </a:rPr>
-              <a:t>Test it carefully before we trust it</a:t>
-            </a:r>
-          </a:p>
-        </p:txBody>
-      </p:sp>
-      <p:sp>
-        <p:nvSpPr>
-          <p:cNvPr id="7" name="Rectangle 6"/>
-          <p:cNvSpPr/>
-          <p:nvPr/>
-        </p:nvSpPr>
-        <p:spPr>
-          <a:xfrm>
-            <a:off x="0" y="6803136"/>
-            <a:ext cx="3840480" cy="54864"/>
-          </a:xfrm>
-          <a:prstGeom prst="rect">
-            <a:avLst/>
-          </a:prstGeom>
-          <a:solidFill>
-            <a:srgbClr val="6FA0DD"/>
-          </a:solidFill>
-          <a:ln>
-            <a:noFill/>
-          </a:ln>
-          <a:effectLst/>
-        </p:spPr>
-        <p:style>
-          <a:lnRef idx="1">
-            <a:schemeClr val="accent1"/>
-          </a:lnRef>
-          <a:fillRef idx="3">
-            <a:schemeClr val="accent1"/>
-          </a:fillRef>
-          <a:effectRef idx="2">
-            <a:schemeClr val="accent1"/>
-          </a:effectRef>
-          <a:fontRef idx="minor">
-            <a:schemeClr val="lt1"/>
-          </a:fontRef>
-        </p:style>
-        <p:txBody>
-          <a:bodyPr rtlCol="0" anchor="ctr"/>
-          <a:lstStyle/>
-          <a:p>
-            <a:pPr algn="ctr"/>
-          </a:p>
-        </p:txBody>
-      </p:sp>
-      <p:sp>
-        <p:nvSpPr>
-          <p:cNvPr id="8" name="TextBox 7"/>
+              <a:t>Thank you</a:t>
+            </a:r>
+          </a:p>
+        </p:txBody>
+      </p:sp>
+      <p:sp>
+        <p:nvSpPr>
+          <p:cNvPr id="5" name="TextBox 4"/>
           <p:cNvSpPr txBox="1"/>
           <p:nvPr/>
         </p:nvSpPr>
         <p:spPr>
           <a:xfrm>
-            <a:off x="11002975" y="6355080"/>
-            <a:ext cx="914400" cy="320040"/>
-          </a:xfrm>
-          <a:prstGeom prst="rect">
-            <a:avLst/>
-          </a:prstGeom>
-          <a:noFill/>
-        </p:spPr>
-        <p:txBody>
-          <a:bodyPr wrap="square" anchor="ctr" lIns="0" rIns="0" tIns="0" bIns="0">
-            <a:spAutoFit/>
-          </a:bodyPr>
-          <a:lstStyle/>
-          <a:p>
-            <a:pPr algn="r">
-              <a:lnSpc>
-                <a:spcPct val="100000"/>
-              </a:lnSpc>
-            </a:pPr>
-            <a:r>
-              <a:rPr sz="1100" b="0" i="0">
-                <a:solidFill>
-                  <a:srgbClr val="B0A4BB"/>
-                </a:solidFill>
-                <a:latin typeface="Calibri"/>
-              </a:rPr>
-              <a:t>11</a:t>
-            </a:r>
-          </a:p>
-        </p:txBody>
-      </p:sp>
-    </p:spTree>
-  </p:cSld>
-  <p:clrMapOvr>
-    <a:masterClrMapping/>
-  </p:clrMapOvr>
-</p:sld>
-</file>
-
-<file path=ppt/slides/slide12.xml><?xml version="1.0" encoding="utf-8"?>
-<p:sld xmlns:a="http://schemas.openxmlformats.org/drawingml/2006/main" xmlns:p="http://schemas.openxmlformats.org/presentationml/2006/main" xmlns:r="http://schemas.openxmlformats.org/officeDocument/2006/relationships">
-  <p:cSld>
-    <p:spTree>
-      <p:nvGrpSpPr>
-        <p:cNvPr id="1" name=""/>
-        <p:cNvGrpSpPr/>
-        <p:nvPr/>
-      </p:nvGrpSpPr>
-      <p:grpSpPr/>
-      <p:sp>
-        <p:nvSpPr>
-          <p:cNvPr id="2" name="Rectangle 1"/>
-          <p:cNvSpPr/>
-          <p:nvPr/>
-        </p:nvSpPr>
-        <p:spPr>
-          <a:xfrm>
-            <a:off x="0" y="0"/>
-            <a:ext cx="12191695" cy="6858000"/>
-          </a:xfrm>
-          <a:prstGeom prst="rect">
-            <a:avLst/>
-          </a:prstGeom>
-          <a:gradFill rotWithShape="1">
-            <a:gsLst>
-              <a:gs pos="0">
-                <a:srgbClr val="FDEEF4"/>
-              </a:gs>
-              <a:gs pos="100000">
-                <a:srgbClr val="E9F1FC"/>
-              </a:gs>
-            </a:gsLst>
-            <a:lin scaled="0" ang="13500000"/>
-          </a:gradFill>
-          <a:ln>
-            <a:noFill/>
-          </a:ln>
-          <a:effectLst/>
-        </p:spPr>
-        <p:style>
-          <a:lnRef idx="1">
-            <a:schemeClr val="accent1"/>
-          </a:lnRef>
-          <a:fillRef idx="3">
-            <a:schemeClr val="accent1"/>
-          </a:fillRef>
-          <a:effectRef idx="2">
-            <a:schemeClr val="accent1"/>
-          </a:effectRef>
-          <a:fontRef idx="minor">
-            <a:schemeClr val="lt1"/>
-          </a:fontRef>
-        </p:style>
-        <p:txBody>
-          <a:bodyPr rtlCol="0" anchor="ctr"/>
-          <a:lstStyle/>
-          <a:p>
-            <a:pPr algn="ctr"/>
-          </a:p>
-        </p:txBody>
-      </p:sp>
-      <p:sp>
-        <p:nvSpPr>
-          <p:cNvPr id="3" name="TextBox 2"/>
-          <p:cNvSpPr txBox="1"/>
-          <p:nvPr/>
-        </p:nvSpPr>
-        <p:spPr>
-          <a:xfrm>
-            <a:off x="3169767" y="2468880"/>
-            <a:ext cx="5852160" cy="1280160"/>
+            <a:off x="1066647" y="4800600"/>
+            <a:ext cx="10058400" cy="457200"/>
           </a:xfrm>
           <a:prstGeom prst="rect">
             <a:avLst/>
@@ -4257,107 +3936,11 @@
               </a:lnSpc>
             </a:pPr>
             <a:r>
-              <a:rPr sz="6000" b="0" i="0">
+              <a:rPr sz="1400" b="1" i="0" spc="160">
                 <a:solidFill>
-                  <a:srgbClr val="E888B4"/>
+                  <a:srgbClr val="A9744F"/>
                 </a:solidFill>
                 <a:latin typeface="Calibri"/>
-              </a:rPr>
-              <a:t>♀</a:t>
-            </a:r>
-            <a:r>
-              <a:rPr sz="6000" b="0" i="0">
-                <a:solidFill>
-                  <a:srgbClr val="463A53"/>
-                </a:solidFill>
-                <a:latin typeface="Calibri"/>
-              </a:rPr>
-              <a:t>    </a:t>
-            </a:r>
-            <a:r>
-              <a:rPr sz="6000" b="0" i="0">
-                <a:solidFill>
-                  <a:srgbClr val="6FA0DD"/>
-                </a:solidFill>
-                <a:latin typeface="Calibri"/>
-              </a:rPr>
-              <a:t>♂</a:t>
-            </a:r>
-          </a:p>
-        </p:txBody>
-      </p:sp>
-      <p:sp>
-        <p:nvSpPr>
-          <p:cNvPr id="4" name="TextBox 3"/>
-          <p:cNvSpPr txBox="1"/>
-          <p:nvPr/>
-        </p:nvSpPr>
-        <p:spPr>
-          <a:xfrm>
-            <a:off x="1523847" y="3794760"/>
-            <a:ext cx="9144000" cy="914400"/>
-          </a:xfrm>
-          <a:prstGeom prst="rect">
-            <a:avLst/>
-          </a:prstGeom>
-          <a:noFill/>
-        </p:spPr>
-        <p:txBody>
-          <a:bodyPr wrap="square" anchor="ctr" lIns="0" rIns="0" tIns="0" bIns="0">
-            <a:spAutoFit/>
-          </a:bodyPr>
-          <a:lstStyle/>
-          <a:p>
-            <a:pPr algn="ctr">
-              <a:lnSpc>
-                <a:spcPct val="100000"/>
-              </a:lnSpc>
-            </a:pPr>
-            <a:r>
-              <a:rPr sz="4800" b="1" i="0">
-                <a:solidFill>
-                  <a:srgbClr val="463A53"/>
-                </a:solidFill>
-                <a:latin typeface="Century Gothic"/>
-              </a:rPr>
-              <a:t>Thank you</a:t>
-            </a:r>
-          </a:p>
-        </p:txBody>
-      </p:sp>
-      <p:sp>
-        <p:nvSpPr>
-          <p:cNvPr id="5" name="TextBox 4"/>
-          <p:cNvSpPr txBox="1"/>
-          <p:nvPr/>
-        </p:nvSpPr>
-        <p:spPr>
-          <a:xfrm>
-            <a:off x="1523847" y="4846320"/>
-            <a:ext cx="9144000" cy="457200"/>
-          </a:xfrm>
-          <a:prstGeom prst="rect">
-            <a:avLst/>
-          </a:prstGeom>
-          <a:noFill/>
-        </p:spPr>
-        <p:txBody>
-          <a:bodyPr wrap="square" anchor="ctr" lIns="0" rIns="0" tIns="0" bIns="0">
-            <a:spAutoFit/>
-          </a:bodyPr>
-          <a:lstStyle/>
-          <a:p>
-            <a:pPr algn="ctr">
-              <a:lnSpc>
-                <a:spcPct val="100000"/>
-              </a:lnSpc>
-            </a:pPr>
-            <a:r>
-              <a:rPr sz="1400" b="1" i="0" spc="160">
-                <a:solidFill>
-                  <a:srgbClr val="8A7D95"/>
-                </a:solidFill>
-                <a:latin typeface="Century Gothic"/>
               </a:rPr>
               <a:t>Gender Bias in LLM Hiring Decisions  ·  Evidence from Japan</a:t>
             </a:r>
@@ -4399,13 +3982,13 @@
           <a:gradFill rotWithShape="1">
             <a:gsLst>
               <a:gs pos="0">
-                <a:srgbClr val="FDEEF4"/>
+                <a:srgbClr val="F5EDDF"/>
               </a:gs>
               <a:gs pos="100000">
-                <a:srgbClr val="E9F1FC"/>
+                <a:srgbClr val="E7D3B8"/>
               </a:gs>
             </a:gsLst>
-            <a:lin scaled="0" ang="13500000"/>
+            <a:lin scaled="0" ang="14400000"/>
           </a:gradFill>
           <a:ln>
             <a:noFill/>
@@ -4464,9 +4047,9 @@
             <a:r>
               <a:rPr sz="1300" b="1" i="0" spc="420">
                 <a:solidFill>
-                  <a:srgbClr val="E07AA8"/>
+                  <a:srgbClr val="A9744F"/>
                 </a:solidFill>
-                <a:latin typeface="Century Gothic"/>
+                <a:latin typeface="Calibri"/>
               </a:rPr>
               <a:t>THE SETUP</a:t>
             </a:r>
@@ -4481,15 +4064,15 @@
         </p:nvCxnSpPr>
         <p:spPr>
           <a:xfrm>
-            <a:off x="5775807" y="969264"/>
-            <a:ext cx="640080" cy="0"/>
+            <a:off x="5803239" y="987552"/>
+            <a:ext cx="585216" cy="0"/>
           </a:xfrm>
           <a:prstGeom prst="bentConnector3">
             <a:avLst/>
           </a:prstGeom>
           <a:ln w="27940">
             <a:solidFill>
-              <a:srgbClr val="E07AA8"/>
+              <a:srgbClr val="A9744F"/>
             </a:solidFill>
           </a:ln>
           <a:effectLst/>
@@ -4517,8 +4100,8 @@
         </p:nvSpPr>
         <p:spPr>
           <a:xfrm>
-            <a:off x="2331720" y="2571292"/>
-            <a:ext cx="1554480" cy="1989734"/>
+            <a:off x="2263140" y="2496312"/>
+            <a:ext cx="1600200" cy="2048256"/>
           </a:xfrm>
           <a:prstGeom prst="roundRect">
             <a:avLst>
@@ -4526,17 +4109,17 @@
             </a:avLst>
           </a:prstGeom>
           <a:solidFill>
-            <a:srgbClr val="FFFFFF"/>
+            <a:srgbClr val="FCF7EF"/>
           </a:solidFill>
           <a:ln w="16510">
             <a:solidFill>
-              <a:srgbClr val="EFDFE9"/>
+              <a:srgbClr val="E4D5C0"/>
             </a:solidFill>
           </a:ln>
           <a:effectLst>
-            <a:outerShdw blurRad="228600" dist="127000" dir="5400000" rotWithShape="0">
-              <a:srgbClr val="C880A8">
-                <a:alpha val="78000"/>
+            <a:outerShdw blurRad="254000" dist="139700" dir="5400000" rotWithShape="0">
+              <a:srgbClr val="6B4A34">
+                <a:alpha val="76000"/>
               </a:srgbClr>
             </a:outerShdw>
           </a:effectLst>
@@ -4571,8 +4154,8 @@
         </p:nvSpPr>
         <p:spPr>
           <a:xfrm>
-            <a:off x="2580436" y="2820009"/>
-            <a:ext cx="777240" cy="109435"/>
+            <a:off x="2519172" y="2752344"/>
+            <a:ext cx="800100" cy="112654"/>
           </a:xfrm>
           <a:prstGeom prst="roundRect">
             <a:avLst>
@@ -4580,7 +4163,7 @@
             </a:avLst>
           </a:prstGeom>
           <a:solidFill>
-            <a:srgbClr val="E888B4"/>
+            <a:srgbClr val="B0563A"/>
           </a:solidFill>
           <a:ln>
             <a:noFill/>
@@ -4617,8 +4200,8 @@
         </p:nvSpPr>
         <p:spPr>
           <a:xfrm>
-            <a:off x="2580436" y="3138367"/>
-            <a:ext cx="1057046" cy="89538"/>
+            <a:off x="2519172" y="3080064"/>
+            <a:ext cx="1088136" cy="92171"/>
           </a:xfrm>
           <a:prstGeom prst="roundRect">
             <a:avLst>
@@ -4626,7 +4209,7 @@
             </a:avLst>
           </a:prstGeom>
           <a:solidFill>
-            <a:srgbClr val="EFDFE9"/>
+            <a:srgbClr val="E4D5C0"/>
           </a:solidFill>
           <a:ln>
             <a:noFill/>
@@ -4663,8 +4246,8 @@
         </p:nvSpPr>
         <p:spPr>
           <a:xfrm>
-            <a:off x="2580436" y="3377135"/>
-            <a:ext cx="932688" cy="89538"/>
+            <a:off x="2519172" y="3325855"/>
+            <a:ext cx="960120" cy="92171"/>
           </a:xfrm>
           <a:prstGeom prst="roundRect">
             <a:avLst>
@@ -4672,7 +4255,7 @@
             </a:avLst>
           </a:prstGeom>
           <a:solidFill>
-            <a:srgbClr val="EFDFE9"/>
+            <a:srgbClr val="E4D5C0"/>
           </a:solidFill>
           <a:ln>
             <a:noFill/>
@@ -4709,8 +4292,8 @@
         </p:nvSpPr>
         <p:spPr>
           <a:xfrm>
-            <a:off x="2580436" y="3615903"/>
-            <a:ext cx="1025956" cy="89538"/>
+            <a:off x="2519172" y="3571646"/>
+            <a:ext cx="1056132" cy="92171"/>
           </a:xfrm>
           <a:prstGeom prst="roundRect">
             <a:avLst>
@@ -4718,7 +4301,7 @@
             </a:avLst>
           </a:prstGeom>
           <a:solidFill>
-            <a:srgbClr val="EFDFE9"/>
+            <a:srgbClr val="E4D5C0"/>
           </a:solidFill>
           <a:ln>
             <a:noFill/>
@@ -4755,8 +4338,8 @@
         </p:nvSpPr>
         <p:spPr>
           <a:xfrm>
-            <a:off x="2580436" y="3854671"/>
-            <a:ext cx="652881" cy="89538"/>
+            <a:off x="2519172" y="3817437"/>
+            <a:ext cx="672084" cy="92171"/>
           </a:xfrm>
           <a:prstGeom prst="roundRect">
             <a:avLst>
@@ -4764,7 +4347,7 @@
             </a:avLst>
           </a:prstGeom>
           <a:solidFill>
-            <a:srgbClr val="EFDFE9"/>
+            <a:srgbClr val="E4D5C0"/>
           </a:solidFill>
           <a:ln>
             <a:noFill/>
@@ -4801,7 +4384,7 @@
         </p:nvSpPr>
         <p:spPr>
           <a:xfrm>
-            <a:off x="4251960" y="3401568"/>
+            <a:off x="4251960" y="3355848"/>
             <a:ext cx="914400" cy="329184"/>
           </a:xfrm>
           <a:prstGeom prst="rightArrow">
@@ -4811,7 +4394,7 @@
             </a:avLst>
           </a:prstGeom>
           <a:solidFill>
-            <a:srgbClr val="B0A4BB"/>
+            <a:srgbClr val="9B8571"/>
           </a:solidFill>
           <a:ln>
             <a:noFill/>
@@ -4848,8 +4431,8 @@
         </p:nvSpPr>
         <p:spPr>
           <a:xfrm>
-            <a:off x="5319064" y="2788920"/>
-            <a:ext cx="1554480" cy="1554480"/>
+            <a:off x="5296204" y="2720340"/>
+            <a:ext cx="1600200" cy="1600200"/>
           </a:xfrm>
           <a:prstGeom prst="roundRect">
             <a:avLst>
@@ -4857,17 +4440,17 @@
             </a:avLst>
           </a:prstGeom>
           <a:solidFill>
-            <a:srgbClr val="FFFFFF"/>
+            <a:srgbClr val="FCF7EF"/>
           </a:solidFill>
           <a:ln w="25400">
             <a:solidFill>
-              <a:srgbClr val="E07AA8"/>
+              <a:srgbClr val="A9744F"/>
             </a:solidFill>
           </a:ln>
           <a:effectLst>
-            <a:outerShdw blurRad="228600" dist="127000" dir="5400000" rotWithShape="0">
-              <a:srgbClr val="C880A8">
-                <a:alpha val="78000"/>
+            <a:outerShdw blurRad="254000" dist="139700" dir="5400000" rotWithShape="0">
+              <a:srgbClr val="6B4A34">
+                <a:alpha val="76000"/>
               </a:srgbClr>
             </a:outerShdw>
           </a:effectLst>
@@ -4902,8 +4485,8 @@
         </p:nvSpPr>
         <p:spPr>
           <a:xfrm>
-            <a:off x="5769864" y="3239719"/>
-            <a:ext cx="652881" cy="652881"/>
+            <a:off x="5760262" y="3184398"/>
+            <a:ext cx="672084" cy="672084"/>
           </a:xfrm>
           <a:prstGeom prst="roundRect">
             <a:avLst>
@@ -4913,7 +4496,7 @@
           <a:noFill/>
           <a:ln w="20320">
             <a:solidFill>
-              <a:srgbClr val="E07AA8"/>
+              <a:srgbClr val="A9744F"/>
             </a:solidFill>
           </a:ln>
           <a:effectLst/>
@@ -4948,8 +4531,8 @@
         </p:nvSpPr>
         <p:spPr>
           <a:xfrm>
-            <a:off x="5719343" y="2658343"/>
-            <a:ext cx="69951" cy="186537"/>
+            <a:off x="5708256" y="2585923"/>
+            <a:ext cx="72009" cy="192024"/>
           </a:xfrm>
           <a:prstGeom prst="roundRect">
             <a:avLst>
@@ -4957,7 +4540,7 @@
             </a:avLst>
           </a:prstGeom>
           <a:solidFill>
-            <a:srgbClr val="E07AA8"/>
+            <a:srgbClr val="A9744F"/>
           </a:solidFill>
           <a:ln>
             <a:noFill/>
@@ -4994,8 +4577,8 @@
         </p:nvSpPr>
         <p:spPr>
           <a:xfrm>
-            <a:off x="5719343" y="4287438"/>
-            <a:ext cx="69951" cy="186537"/>
+            <a:off x="5708256" y="4262932"/>
+            <a:ext cx="72009" cy="192024"/>
           </a:xfrm>
           <a:prstGeom prst="roundRect">
             <a:avLst>
@@ -5003,7 +4586,7 @@
             </a:avLst>
           </a:prstGeom>
           <a:solidFill>
-            <a:srgbClr val="E07AA8"/>
+            <a:srgbClr val="A9744F"/>
           </a:solidFill>
           <a:ln>
             <a:noFill/>
@@ -5040,8 +4623,8 @@
         </p:nvSpPr>
         <p:spPr>
           <a:xfrm>
-            <a:off x="5188488" y="3189198"/>
-            <a:ext cx="186537" cy="69951"/>
+            <a:off x="5161788" y="3132391"/>
+            <a:ext cx="192024" cy="72009"/>
           </a:xfrm>
           <a:prstGeom prst="roundRect">
             <a:avLst>
@@ -5049,7 +4632,7 @@
             </a:avLst>
           </a:prstGeom>
           <a:solidFill>
-            <a:srgbClr val="E07AA8"/>
+            <a:srgbClr val="A9744F"/>
           </a:solidFill>
           <a:ln>
             <a:noFill/>
@@ -5086,8 +4669,8 @@
         </p:nvSpPr>
         <p:spPr>
           <a:xfrm>
-            <a:off x="6817583" y="3189198"/>
-            <a:ext cx="186537" cy="69951"/>
+            <a:off x="6838797" y="3132391"/>
+            <a:ext cx="192024" cy="72009"/>
           </a:xfrm>
           <a:prstGeom prst="roundRect">
             <a:avLst>
@@ -5095,7 +4678,7 @@
             </a:avLst>
           </a:prstGeom>
           <a:solidFill>
-            <a:srgbClr val="E07AA8"/>
+            <a:srgbClr val="A9744F"/>
           </a:solidFill>
           <a:ln>
             <a:noFill/>
@@ -5132,8 +4715,8 @@
         </p:nvSpPr>
         <p:spPr>
           <a:xfrm>
-            <a:off x="6061329" y="2658343"/>
-            <a:ext cx="69951" cy="186537"/>
+            <a:off x="6060300" y="2585923"/>
+            <a:ext cx="72009" cy="192024"/>
           </a:xfrm>
           <a:prstGeom prst="roundRect">
             <a:avLst>
@@ -5141,7 +4724,7 @@
             </a:avLst>
           </a:prstGeom>
           <a:solidFill>
-            <a:srgbClr val="E07AA8"/>
+            <a:srgbClr val="A9744F"/>
           </a:solidFill>
           <a:ln>
             <a:noFill/>
@@ -5178,8 +4761,8 @@
         </p:nvSpPr>
         <p:spPr>
           <a:xfrm>
-            <a:off x="6061329" y="4287438"/>
-            <a:ext cx="69951" cy="186537"/>
+            <a:off x="6060300" y="4262932"/>
+            <a:ext cx="72009" cy="192024"/>
           </a:xfrm>
           <a:prstGeom prst="roundRect">
             <a:avLst>
@@ -5187,7 +4770,7 @@
             </a:avLst>
           </a:prstGeom>
           <a:solidFill>
-            <a:srgbClr val="E07AA8"/>
+            <a:srgbClr val="A9744F"/>
           </a:solidFill>
           <a:ln>
             <a:noFill/>
@@ -5224,8 +4807,8 @@
         </p:nvSpPr>
         <p:spPr>
           <a:xfrm>
-            <a:off x="5188488" y="3531184"/>
-            <a:ext cx="186537" cy="69951"/>
+            <a:off x="5161788" y="3484435"/>
+            <a:ext cx="192024" cy="72009"/>
           </a:xfrm>
           <a:prstGeom prst="roundRect">
             <a:avLst>
@@ -5233,7 +4816,7 @@
             </a:avLst>
           </a:prstGeom>
           <a:solidFill>
-            <a:srgbClr val="E07AA8"/>
+            <a:srgbClr val="A9744F"/>
           </a:solidFill>
           <a:ln>
             <a:noFill/>
@@ -5270,8 +4853,8 @@
         </p:nvSpPr>
         <p:spPr>
           <a:xfrm>
-            <a:off x="6817583" y="3531184"/>
-            <a:ext cx="186537" cy="69951"/>
+            <a:off x="6838797" y="3484435"/>
+            <a:ext cx="192024" cy="72009"/>
           </a:xfrm>
           <a:prstGeom prst="roundRect">
             <a:avLst>
@@ -5279,7 +4862,7 @@
             </a:avLst>
           </a:prstGeom>
           <a:solidFill>
-            <a:srgbClr val="E07AA8"/>
+            <a:srgbClr val="A9744F"/>
           </a:solidFill>
           <a:ln>
             <a:noFill/>
@@ -5316,8 +4899,8 @@
         </p:nvSpPr>
         <p:spPr>
           <a:xfrm>
-            <a:off x="6403314" y="2658343"/>
-            <a:ext cx="69951" cy="186537"/>
+            <a:off x="6412344" y="2585923"/>
+            <a:ext cx="72009" cy="192024"/>
           </a:xfrm>
           <a:prstGeom prst="roundRect">
             <a:avLst>
@@ -5325,7 +4908,7 @@
             </a:avLst>
           </a:prstGeom>
           <a:solidFill>
-            <a:srgbClr val="E07AA8"/>
+            <a:srgbClr val="A9744F"/>
           </a:solidFill>
           <a:ln>
             <a:noFill/>
@@ -5362,8 +4945,8 @@
         </p:nvSpPr>
         <p:spPr>
           <a:xfrm>
-            <a:off x="6403314" y="4287438"/>
-            <a:ext cx="69951" cy="186537"/>
+            <a:off x="6412344" y="4262932"/>
+            <a:ext cx="72009" cy="192024"/>
           </a:xfrm>
           <a:prstGeom prst="roundRect">
             <a:avLst>
@@ -5371,7 +4954,7 @@
             </a:avLst>
           </a:prstGeom>
           <a:solidFill>
-            <a:srgbClr val="E07AA8"/>
+            <a:srgbClr val="A9744F"/>
           </a:solidFill>
           <a:ln>
             <a:noFill/>
@@ -5408,8 +4991,8 @@
         </p:nvSpPr>
         <p:spPr>
           <a:xfrm>
-            <a:off x="5188488" y="3873169"/>
-            <a:ext cx="186537" cy="69951"/>
+            <a:off x="5161788" y="3836479"/>
+            <a:ext cx="192024" cy="72009"/>
           </a:xfrm>
           <a:prstGeom prst="roundRect">
             <a:avLst>
@@ -5417,7 +5000,7 @@
             </a:avLst>
           </a:prstGeom>
           <a:solidFill>
-            <a:srgbClr val="E07AA8"/>
+            <a:srgbClr val="A9744F"/>
           </a:solidFill>
           <a:ln>
             <a:noFill/>
@@ -5454,8 +5037,8 @@
         </p:nvSpPr>
         <p:spPr>
           <a:xfrm>
-            <a:off x="6817583" y="3873169"/>
-            <a:ext cx="186537" cy="69951"/>
+            <a:off x="6838797" y="3836479"/>
+            <a:ext cx="192024" cy="72009"/>
           </a:xfrm>
           <a:prstGeom prst="roundRect">
             <a:avLst>
@@ -5463,7 +5046,7 @@
             </a:avLst>
           </a:prstGeom>
           <a:solidFill>
-            <a:srgbClr val="E07AA8"/>
+            <a:srgbClr val="A9744F"/>
           </a:solidFill>
           <a:ln>
             <a:noFill/>
@@ -5500,7 +5083,7 @@
         </p:nvSpPr>
         <p:spPr>
           <a:xfrm>
-            <a:off x="7040879" y="3401568"/>
+            <a:off x="7040879" y="3355848"/>
             <a:ext cx="914400" cy="329184"/>
           </a:xfrm>
           <a:prstGeom prst="rightArrow">
@@ -5510,7 +5093,7 @@
             </a:avLst>
           </a:prstGeom>
           <a:solidFill>
-            <a:srgbClr val="B0A4BB"/>
+            <a:srgbClr val="9B8571"/>
           </a:solidFill>
           <a:ln>
             <a:noFill/>
@@ -5547,22 +5130,22 @@
         </p:nvSpPr>
         <p:spPr>
           <a:xfrm>
-            <a:off x="8754922" y="2811780"/>
-            <a:ext cx="595274" cy="595274"/>
+            <a:off x="8791041" y="2743200"/>
+            <a:ext cx="614476" cy="614476"/>
           </a:xfrm>
           <a:prstGeom prst="ellipse">
             <a:avLst/>
           </a:prstGeom>
           <a:solidFill>
-            <a:srgbClr val="6FA0DD"/>
+            <a:srgbClr val="6B4A34"/>
           </a:solidFill>
           <a:ln>
             <a:noFill/>
           </a:ln>
           <a:effectLst>
-            <a:outerShdw blurRad="228600" dist="127000" dir="5400000" rotWithShape="0">
-              <a:srgbClr val="C880A8">
-                <a:alpha val="78000"/>
+            <a:outerShdw blurRad="254000" dist="139700" dir="5400000" rotWithShape="0">
+              <a:srgbClr val="6B4A34">
+                <a:alpha val="76000"/>
               </a:srgbClr>
             </a:outerShdw>
           </a:effectLst>
@@ -5597,8 +5180,8 @@
         </p:nvSpPr>
         <p:spPr>
           <a:xfrm>
-            <a:off x="8414766" y="3492093"/>
-            <a:ext cx="1275588" cy="1133856"/>
+            <a:off x="8439911" y="3445459"/>
+            <a:ext cx="1316736" cy="1170432"/>
           </a:xfrm>
           <a:prstGeom prst="round2SameRect">
             <a:avLst>
@@ -5607,7 +5190,7 @@
             </a:avLst>
           </a:prstGeom>
           <a:solidFill>
-            <a:srgbClr val="6FA0DD"/>
+            <a:srgbClr val="6B4A34"/>
           </a:solidFill>
           <a:ln>
             <a:noFill/>
@@ -5644,8 +5227,8 @@
         </p:nvSpPr>
         <p:spPr>
           <a:xfrm>
-            <a:off x="1523847" y="5074920"/>
-            <a:ext cx="9144000" cy="640080"/>
+            <a:off x="1249527" y="5074920"/>
+            <a:ext cx="9692640" cy="640080"/>
           </a:xfrm>
           <a:prstGeom prst="rect">
             <a:avLst/>
@@ -5666,9 +5249,9 @@
             <a:r>
               <a:rPr sz="2500" b="1" i="0">
                 <a:solidFill>
-                  <a:srgbClr val="463A53"/>
+                  <a:srgbClr val="3E2C1E"/>
                 </a:solidFill>
-                <a:latin typeface="Century Gothic"/>
+                <a:latin typeface="Georgia"/>
               </a:rPr>
               <a:t>AI screens your résumé before a human ever sees it</a:t>
             </a:r>
@@ -5684,13 +5267,13 @@
         <p:spPr>
           <a:xfrm>
             <a:off x="0" y="6803136"/>
-            <a:ext cx="1371600" cy="54864"/>
+            <a:ext cx="1230283" cy="54864"/>
           </a:xfrm>
           <a:prstGeom prst="rect">
             <a:avLst/>
           </a:prstGeom>
           <a:solidFill>
-            <a:srgbClr val="E07AA8"/>
+            <a:srgbClr val="A9744F"/>
           </a:solidFill>
           <a:ln>
             <a:noFill/>
@@ -5727,7 +5310,7 @@
         </p:nvSpPr>
         <p:spPr>
           <a:xfrm>
-            <a:off x="11002975" y="6355080"/>
+            <a:off x="11048695" y="6355080"/>
             <a:ext cx="914400" cy="320040"/>
           </a:xfrm>
           <a:prstGeom prst="rect">
@@ -5749,7 +5332,7 @@
             <a:r>
               <a:rPr sz="1100" b="0" i="0">
                 <a:solidFill>
-                  <a:srgbClr val="B0A4BB"/>
+                  <a:srgbClr val="9B8571"/>
                 </a:solidFill>
                 <a:latin typeface="Calibri"/>
               </a:rPr>
@@ -5793,13 +5376,13 @@
           <a:gradFill rotWithShape="1">
             <a:gsLst>
               <a:gs pos="0">
-                <a:srgbClr val="FDEEF4"/>
+                <a:srgbClr val="F5EDDF"/>
               </a:gs>
               <a:gs pos="100000">
-                <a:srgbClr val="E9F1FC"/>
+                <a:srgbClr val="E7D3B8"/>
               </a:gs>
             </a:gsLst>
-            <a:lin scaled="0" ang="13500000"/>
+            <a:lin scaled="0" ang="14400000"/>
           </a:gradFill>
           <a:ln>
             <a:noFill/>
@@ -5858,9 +5441,9 @@
             <a:r>
               <a:rPr sz="1300" b="1" i="0" spc="420">
                 <a:solidFill>
-                  <a:srgbClr val="E07AA8"/>
+                  <a:srgbClr val="A9744F"/>
                 </a:solidFill>
-                <a:latin typeface="Century Gothic"/>
+                <a:latin typeface="Calibri"/>
               </a:rPr>
               <a:t>WHAT IS AN LLM?</a:t>
             </a:r>
@@ -5875,15 +5458,15 @@
         </p:nvCxnSpPr>
         <p:spPr>
           <a:xfrm>
-            <a:off x="5775807" y="969264"/>
-            <a:ext cx="640080" cy="0"/>
+            <a:off x="5803239" y="987552"/>
+            <a:ext cx="585216" cy="0"/>
           </a:xfrm>
           <a:prstGeom prst="bentConnector3">
             <a:avLst/>
           </a:prstGeom>
           <a:ln w="27940">
             <a:solidFill>
-              <a:srgbClr val="E07AA8"/>
+              <a:srgbClr val="A9744F"/>
             </a:solidFill>
           </a:ln>
           <a:effectLst/>
@@ -5911,8 +5494,8 @@
         </p:nvSpPr>
         <p:spPr>
           <a:xfrm>
-            <a:off x="2468880" y="2697480"/>
-            <a:ext cx="1828800" cy="365760"/>
+            <a:off x="2446020" y="2631186"/>
+            <a:ext cx="1874519" cy="374904"/>
           </a:xfrm>
           <a:prstGeom prst="roundRect">
             <a:avLst>
@@ -5920,17 +5503,17 @@
             </a:avLst>
           </a:prstGeom>
           <a:solidFill>
-            <a:srgbClr val="FBE4EF"/>
+            <a:srgbClr val="EEDFCB"/>
           </a:solidFill>
           <a:ln w="15240">
             <a:solidFill>
-              <a:srgbClr val="E07AA8"/>
+              <a:srgbClr val="A9744F"/>
             </a:solidFill>
           </a:ln>
           <a:effectLst>
-            <a:outerShdw blurRad="228600" dist="127000" dir="5400000" rotWithShape="0">
-              <a:srgbClr val="C880A8">
-                <a:alpha val="78000"/>
+            <a:outerShdw blurRad="254000" dist="139700" dir="5400000" rotWithShape="0">
+              <a:srgbClr val="6B4A34">
+                <a:alpha val="76000"/>
               </a:srgbClr>
             </a:outerShdw>
           </a:effectLst>
@@ -5965,8 +5548,8 @@
         </p:nvSpPr>
         <p:spPr>
           <a:xfrm>
-            <a:off x="2615184" y="2807208"/>
-            <a:ext cx="292608" cy="146304"/>
+            <a:off x="2595981" y="2743657"/>
+            <a:ext cx="299923" cy="149961"/>
           </a:xfrm>
           <a:prstGeom prst="roundRect">
             <a:avLst>
@@ -5974,7 +5557,7 @@
             </a:avLst>
           </a:prstGeom>
           <a:solidFill>
-            <a:srgbClr val="E07AA8"/>
+            <a:srgbClr val="A9744F"/>
           </a:solidFill>
           <a:ln>
             <a:noFill/>
@@ -6011,8 +5594,8 @@
         </p:nvSpPr>
         <p:spPr>
           <a:xfrm>
-            <a:off x="2468880" y="3246120"/>
-            <a:ext cx="1828800" cy="365760"/>
+            <a:off x="2446020" y="3193541"/>
+            <a:ext cx="1874519" cy="374904"/>
           </a:xfrm>
           <a:prstGeom prst="roundRect">
             <a:avLst>
@@ -6020,17 +5603,17 @@
             </a:avLst>
           </a:prstGeom>
           <a:solidFill>
-            <a:srgbClr val="E6EEFB"/>
+            <a:srgbClr val="F1DED3"/>
           </a:solidFill>
           <a:ln w="15240">
             <a:solidFill>
-              <a:srgbClr val="6FA0DD"/>
+              <a:srgbClr val="B0563A"/>
             </a:solidFill>
           </a:ln>
           <a:effectLst>
-            <a:outerShdw blurRad="228600" dist="127000" dir="5400000" rotWithShape="0">
-              <a:srgbClr val="C880A8">
-                <a:alpha val="78000"/>
+            <a:outerShdw blurRad="254000" dist="139700" dir="5400000" rotWithShape="0">
+              <a:srgbClr val="6B4A34">
+                <a:alpha val="76000"/>
               </a:srgbClr>
             </a:outerShdw>
           </a:effectLst>
@@ -6065,8 +5648,8 @@
         </p:nvSpPr>
         <p:spPr>
           <a:xfrm>
-            <a:off x="2615184" y="3355848"/>
-            <a:ext cx="292608" cy="146304"/>
+            <a:off x="2595981" y="3306013"/>
+            <a:ext cx="299923" cy="149961"/>
           </a:xfrm>
           <a:prstGeom prst="roundRect">
             <a:avLst>
@@ -6074,7 +5657,7 @@
             </a:avLst>
           </a:prstGeom>
           <a:solidFill>
-            <a:srgbClr val="6FA0DD"/>
+            <a:srgbClr val="B0563A"/>
           </a:solidFill>
           <a:ln>
             <a:noFill/>
@@ -6111,8 +5694,8 @@
         </p:nvSpPr>
         <p:spPr>
           <a:xfrm>
-            <a:off x="2468880" y="3794760"/>
-            <a:ext cx="1828800" cy="365760"/>
+            <a:off x="2446020" y="3755898"/>
+            <a:ext cx="1874519" cy="374904"/>
           </a:xfrm>
           <a:prstGeom prst="roundRect">
             <a:avLst>
@@ -6120,17 +5703,17 @@
             </a:avLst>
           </a:prstGeom>
           <a:solidFill>
-            <a:srgbClr val="FDECE5"/>
+            <a:srgbClr val="F1E7C8"/>
           </a:solidFill>
           <a:ln w="15240">
             <a:solidFill>
-              <a:srgbClr val="EF9D84"/>
+              <a:srgbClr val="6B4A34"/>
             </a:solidFill>
           </a:ln>
           <a:effectLst>
-            <a:outerShdw blurRad="228600" dist="127000" dir="5400000" rotWithShape="0">
-              <a:srgbClr val="C880A8">
-                <a:alpha val="78000"/>
+            <a:outerShdw blurRad="254000" dist="139700" dir="5400000" rotWithShape="0">
+              <a:srgbClr val="6B4A34">
+                <a:alpha val="76000"/>
               </a:srgbClr>
             </a:outerShdw>
           </a:effectLst>
@@ -6165,8 +5748,8 @@
         </p:nvSpPr>
         <p:spPr>
           <a:xfrm>
-            <a:off x="2615184" y="3904488"/>
-            <a:ext cx="292608" cy="146304"/>
+            <a:off x="2595981" y="3868369"/>
+            <a:ext cx="299923" cy="149961"/>
           </a:xfrm>
           <a:prstGeom prst="roundRect">
             <a:avLst>
@@ -6174,7 +5757,7 @@
             </a:avLst>
           </a:prstGeom>
           <a:solidFill>
-            <a:srgbClr val="EF9D84"/>
+            <a:srgbClr val="6B4A34"/>
           </a:solidFill>
           <a:ln>
             <a:noFill/>
@@ -6211,7 +5794,7 @@
         </p:nvSpPr>
         <p:spPr>
           <a:xfrm>
-            <a:off x="4777740" y="3355848"/>
+            <a:off x="4823459" y="3310127"/>
             <a:ext cx="960120" cy="329184"/>
           </a:xfrm>
           <a:prstGeom prst="rightArrow">
@@ -6221,7 +5804,7 @@
             </a:avLst>
           </a:prstGeom>
           <a:solidFill>
-            <a:srgbClr val="B0A4BB"/>
+            <a:srgbClr val="9B8571"/>
           </a:solidFill>
           <a:ln>
             <a:noFill/>
@@ -6258,8 +5841,8 @@
         </p:nvSpPr>
         <p:spPr>
           <a:xfrm>
-            <a:off x="6560820" y="2674620"/>
-            <a:ext cx="1691640" cy="1691640"/>
+            <a:off x="6583680" y="2606039"/>
+            <a:ext cx="1737360" cy="1737360"/>
           </a:xfrm>
           <a:prstGeom prst="roundRect">
             <a:avLst>
@@ -6267,17 +5850,17 @@
             </a:avLst>
           </a:prstGeom>
           <a:solidFill>
-            <a:srgbClr val="FFFFFF"/>
+            <a:srgbClr val="FCF7EF"/>
           </a:solidFill>
           <a:ln w="25400">
             <a:solidFill>
-              <a:srgbClr val="6FA0DD"/>
+              <a:srgbClr val="6B4A34"/>
             </a:solidFill>
           </a:ln>
           <a:effectLst>
-            <a:outerShdw blurRad="228600" dist="127000" dir="5400000" rotWithShape="0">
-              <a:srgbClr val="C880A8">
-                <a:alpha val="78000"/>
+            <a:outerShdw blurRad="254000" dist="139700" dir="5400000" rotWithShape="0">
+              <a:srgbClr val="6B4A34">
+                <a:alpha val="76000"/>
               </a:srgbClr>
             </a:outerShdw>
           </a:effectLst>
@@ -6312,8 +5895,8 @@
         </p:nvSpPr>
         <p:spPr>
           <a:xfrm>
-            <a:off x="7051395" y="3165195"/>
-            <a:ext cx="710488" cy="710488"/>
+            <a:off x="7087514" y="3109874"/>
+            <a:ext cx="729691" cy="729691"/>
           </a:xfrm>
           <a:prstGeom prst="roundRect">
             <a:avLst>
@@ -6323,7 +5906,7 @@
           <a:noFill/>
           <a:ln w="20320">
             <a:solidFill>
-              <a:srgbClr val="6FA0DD"/>
+              <a:srgbClr val="6B4A34"/>
             </a:solidFill>
           </a:ln>
           <a:effectLst/>
@@ -6358,8 +5941,8 @@
         </p:nvSpPr>
         <p:spPr>
           <a:xfrm>
-            <a:off x="6996417" y="2532522"/>
-            <a:ext cx="76123" cy="202996"/>
+            <a:off x="7031050" y="2460101"/>
+            <a:ext cx="78181" cy="208483"/>
           </a:xfrm>
           <a:prstGeom prst="roundRect">
             <a:avLst>
@@ -6367,7 +5950,7 @@
             </a:avLst>
           </a:prstGeom>
           <a:solidFill>
-            <a:srgbClr val="6FA0DD"/>
+            <a:srgbClr val="6B4A34"/>
           </a:solidFill>
           <a:ln>
             <a:noFill/>
@@ -6404,8 +5987,8 @@
         </p:nvSpPr>
         <p:spPr>
           <a:xfrm>
-            <a:off x="6996417" y="4305360"/>
-            <a:ext cx="76123" cy="202996"/>
+            <a:off x="7031050" y="4280855"/>
+            <a:ext cx="78181" cy="208483"/>
           </a:xfrm>
           <a:prstGeom prst="roundRect">
             <a:avLst>
@@ -6413,7 +5996,7 @@
             </a:avLst>
           </a:prstGeom>
           <a:solidFill>
-            <a:srgbClr val="6FA0DD"/>
+            <a:srgbClr val="6B4A34"/>
           </a:solidFill>
           <a:ln>
             <a:noFill/>
@@ -6450,8 +6033,8 @@
         </p:nvSpPr>
         <p:spPr>
           <a:xfrm>
-            <a:off x="6418722" y="3110217"/>
-            <a:ext cx="202996" cy="76123"/>
+            <a:off x="6437741" y="3053410"/>
+            <a:ext cx="208483" cy="78181"/>
           </a:xfrm>
           <a:prstGeom prst="roundRect">
             <a:avLst>
@@ -6459,7 +6042,7 @@
             </a:avLst>
           </a:prstGeom>
           <a:solidFill>
-            <a:srgbClr val="6FA0DD"/>
+            <a:srgbClr val="6B4A34"/>
           </a:solidFill>
           <a:ln>
             <a:noFill/>
@@ -6496,8 +6079,8 @@
         </p:nvSpPr>
         <p:spPr>
           <a:xfrm>
-            <a:off x="8191560" y="3110217"/>
-            <a:ext cx="202996" cy="76123"/>
+            <a:off x="8258495" y="3053410"/>
+            <a:ext cx="208483" cy="78181"/>
           </a:xfrm>
           <a:prstGeom prst="roundRect">
             <a:avLst>
@@ -6505,7 +6088,7 @@
             </a:avLst>
           </a:prstGeom>
           <a:solidFill>
-            <a:srgbClr val="6FA0DD"/>
+            <a:srgbClr val="6B4A34"/>
           </a:solidFill>
           <a:ln>
             <a:noFill/>
@@ -6542,8 +6125,8 @@
         </p:nvSpPr>
         <p:spPr>
           <a:xfrm>
-            <a:off x="7368578" y="2532522"/>
-            <a:ext cx="76123" cy="202996"/>
+            <a:off x="7413269" y="2460101"/>
+            <a:ext cx="78181" cy="208483"/>
           </a:xfrm>
           <a:prstGeom prst="roundRect">
             <a:avLst>
@@ -6551,7 +6134,7 @@
             </a:avLst>
           </a:prstGeom>
           <a:solidFill>
-            <a:srgbClr val="6FA0DD"/>
+            <a:srgbClr val="6B4A34"/>
           </a:solidFill>
           <a:ln>
             <a:noFill/>
@@ -6588,8 +6171,8 @@
         </p:nvSpPr>
         <p:spPr>
           <a:xfrm>
-            <a:off x="7368578" y="4305360"/>
-            <a:ext cx="76123" cy="202996"/>
+            <a:off x="7413269" y="4280855"/>
+            <a:ext cx="78181" cy="208483"/>
           </a:xfrm>
           <a:prstGeom prst="roundRect">
             <a:avLst>
@@ -6597,7 +6180,7 @@
             </a:avLst>
           </a:prstGeom>
           <a:solidFill>
-            <a:srgbClr val="6FA0DD"/>
+            <a:srgbClr val="6B4A34"/>
           </a:solidFill>
           <a:ln>
             <a:noFill/>
@@ -6634,8 +6217,8 @@
         </p:nvSpPr>
         <p:spPr>
           <a:xfrm>
-            <a:off x="6418722" y="3482378"/>
-            <a:ext cx="202996" cy="76123"/>
+            <a:off x="6437741" y="3435629"/>
+            <a:ext cx="208483" cy="78181"/>
           </a:xfrm>
           <a:prstGeom prst="roundRect">
             <a:avLst>
@@ -6643,7 +6226,7 @@
             </a:avLst>
           </a:prstGeom>
           <a:solidFill>
-            <a:srgbClr val="6FA0DD"/>
+            <a:srgbClr val="6B4A34"/>
           </a:solidFill>
           <a:ln>
             <a:noFill/>
@@ -6680,8 +6263,8 @@
         </p:nvSpPr>
         <p:spPr>
           <a:xfrm>
-            <a:off x="8191560" y="3482378"/>
-            <a:ext cx="202996" cy="76123"/>
+            <a:off x="8258495" y="3435629"/>
+            <a:ext cx="208483" cy="78181"/>
           </a:xfrm>
           <a:prstGeom prst="roundRect">
             <a:avLst>
@@ -6689,7 +6272,7 @@
             </a:avLst>
           </a:prstGeom>
           <a:solidFill>
-            <a:srgbClr val="6FA0DD"/>
+            <a:srgbClr val="6B4A34"/>
           </a:solidFill>
           <a:ln>
             <a:noFill/>
@@ -6726,8 +6309,8 @@
         </p:nvSpPr>
         <p:spPr>
           <a:xfrm>
-            <a:off x="7740738" y="2532522"/>
-            <a:ext cx="76123" cy="202996"/>
+            <a:off x="7795488" y="2460101"/>
+            <a:ext cx="78181" cy="208483"/>
           </a:xfrm>
           <a:prstGeom prst="roundRect">
             <a:avLst>
@@ -6735,7 +6318,7 @@
             </a:avLst>
           </a:prstGeom>
           <a:solidFill>
-            <a:srgbClr val="6FA0DD"/>
+            <a:srgbClr val="6B4A34"/>
           </a:solidFill>
           <a:ln>
             <a:noFill/>
@@ -6772,8 +6355,8 @@
         </p:nvSpPr>
         <p:spPr>
           <a:xfrm>
-            <a:off x="7740738" y="4305360"/>
-            <a:ext cx="76123" cy="202996"/>
+            <a:off x="7795488" y="4280855"/>
+            <a:ext cx="78181" cy="208483"/>
           </a:xfrm>
           <a:prstGeom prst="roundRect">
             <a:avLst>
@@ -6781,7 +6364,7 @@
             </a:avLst>
           </a:prstGeom>
           <a:solidFill>
-            <a:srgbClr val="6FA0DD"/>
+            <a:srgbClr val="6B4A34"/>
           </a:solidFill>
           <a:ln>
             <a:noFill/>
@@ -6818,8 +6401,8 @@
         </p:nvSpPr>
         <p:spPr>
           <a:xfrm>
-            <a:off x="6418722" y="3854538"/>
-            <a:ext cx="202996" cy="76123"/>
+            <a:off x="6437741" y="3817848"/>
+            <a:ext cx="208483" cy="78181"/>
           </a:xfrm>
           <a:prstGeom prst="roundRect">
             <a:avLst>
@@ -6827,7 +6410,7 @@
             </a:avLst>
           </a:prstGeom>
           <a:solidFill>
-            <a:srgbClr val="6FA0DD"/>
+            <a:srgbClr val="6B4A34"/>
           </a:solidFill>
           <a:ln>
             <a:noFill/>
@@ -6864,8 +6447,8 @@
         </p:nvSpPr>
         <p:spPr>
           <a:xfrm>
-            <a:off x="8191560" y="3854538"/>
-            <a:ext cx="202996" cy="76123"/>
+            <a:off x="8258495" y="3817848"/>
+            <a:ext cx="208483" cy="78181"/>
           </a:xfrm>
           <a:prstGeom prst="roundRect">
             <a:avLst>
@@ -6873,7 +6456,7 @@
             </a:avLst>
           </a:prstGeom>
           <a:solidFill>
-            <a:srgbClr val="6FA0DD"/>
+            <a:srgbClr val="6B4A34"/>
           </a:solidFill>
           <a:ln>
             <a:noFill/>
@@ -6910,8 +6493,8 @@
         </p:nvSpPr>
         <p:spPr>
           <a:xfrm>
-            <a:off x="2194560" y="5029200"/>
-            <a:ext cx="2743200" cy="822960"/>
+            <a:off x="1828800" y="5029200"/>
+            <a:ext cx="3108960" cy="457200"/>
           </a:xfrm>
           <a:prstGeom prst="rect">
             <a:avLst/>
@@ -6926,108 +6509,76 @@
           <a:p>
             <a:pPr algn="ctr">
               <a:lnSpc>
-                <a:spcPct val="105000"/>
+                <a:spcPct val="100000"/>
               </a:lnSpc>
             </a:pPr>
             <a:r>
-              <a:rPr sz="1700" b="1" i="0">
+              <a:rPr sz="1300" b="1" i="0" spc="140">
                 <a:solidFill>
-                  <a:srgbClr val="574B63"/>
+                  <a:srgbClr val="5A4433"/>
                 </a:solidFill>
                 <a:latin typeface="Calibri"/>
               </a:rPr>
-              <a:t>Trained on</a:t>
-            </a:r>
-          </a:p>
+              <a:t>TRAINED ON HUMAN TEXT</a:t>
+            </a:r>
+          </a:p>
+        </p:txBody>
+      </p:sp>
+      <p:sp>
+        <p:nvSpPr>
+          <p:cNvPr id="27" name="TextBox 26"/>
+          <p:cNvSpPr txBox="1"/>
+          <p:nvPr/>
+        </p:nvSpPr>
+        <p:spPr>
+          <a:xfrm>
+            <a:off x="5897880" y="5029200"/>
+            <a:ext cx="3108960" cy="457200"/>
+          </a:xfrm>
+          <a:prstGeom prst="rect">
+            <a:avLst/>
+          </a:prstGeom>
+          <a:noFill/>
+        </p:spPr>
+        <p:txBody>
+          <a:bodyPr wrap="square" anchor="ctr" lIns="0" rIns="0" tIns="0" bIns="0">
+            <a:spAutoFit/>
+          </a:bodyPr>
+          <a:lstStyle/>
           <a:p>
             <a:pPr algn="ctr">
               <a:lnSpc>
-                <a:spcPct val="105000"/>
+                <a:spcPct val="100000"/>
               </a:lnSpc>
             </a:pPr>
             <a:r>
-              <a:rPr sz="1700" b="1" i="0">
+              <a:rPr sz="1300" b="1" i="0" spc="140">
                 <a:solidFill>
-                  <a:srgbClr val="574B63"/>
+                  <a:srgbClr val="5A4433"/>
                 </a:solidFill>
                 <a:latin typeface="Calibri"/>
               </a:rPr>
-              <a:t>human text</a:t>
-            </a:r>
-          </a:p>
-        </p:txBody>
-      </p:sp>
-      <p:sp>
-        <p:nvSpPr>
-          <p:cNvPr id="27" name="TextBox 26"/>
-          <p:cNvSpPr txBox="1"/>
-          <p:nvPr/>
-        </p:nvSpPr>
-        <p:spPr>
-          <a:xfrm>
-            <a:off x="6035040" y="5029200"/>
-            <a:ext cx="2743200" cy="822960"/>
+              <a:t>LEARNS THE PATTERNS</a:t>
+            </a:r>
+          </a:p>
+        </p:txBody>
+      </p:sp>
+      <p:sp>
+        <p:nvSpPr>
+          <p:cNvPr id="28" name="Rectangle 27"/>
+          <p:cNvSpPr/>
+          <p:nvPr/>
+        </p:nvSpPr>
+        <p:spPr>
+          <a:xfrm>
+            <a:off x="0" y="6803136"/>
+            <a:ext cx="1479665" cy="54864"/>
           </a:xfrm>
           <a:prstGeom prst="rect">
             <a:avLst/>
           </a:prstGeom>
-          <a:noFill/>
-        </p:spPr>
-        <p:txBody>
-          <a:bodyPr wrap="square" anchor="ctr" lIns="0" rIns="0" tIns="0" bIns="0">
-            <a:spAutoFit/>
-          </a:bodyPr>
-          <a:lstStyle/>
-          <a:p>
-            <a:pPr algn="ctr">
-              <a:lnSpc>
-                <a:spcPct val="105000"/>
-              </a:lnSpc>
-            </a:pPr>
-            <a:r>
-              <a:rPr sz="1700" b="1" i="0">
-                <a:solidFill>
-                  <a:srgbClr val="574B63"/>
-                </a:solidFill>
-                <a:latin typeface="Calibri"/>
-              </a:rPr>
-              <a:t>Learns the</a:t>
-            </a:r>
-          </a:p>
-          <a:p>
-            <a:pPr algn="ctr">
-              <a:lnSpc>
-                <a:spcPct val="105000"/>
-              </a:lnSpc>
-            </a:pPr>
-            <a:r>
-              <a:rPr sz="1700" b="1" i="0">
-                <a:solidFill>
-                  <a:srgbClr val="574B63"/>
-                </a:solidFill>
-                <a:latin typeface="Calibri"/>
-              </a:rPr>
-              <a:t>patterns</a:t>
-            </a:r>
-          </a:p>
-        </p:txBody>
-      </p:sp>
-      <p:sp>
-        <p:nvSpPr>
-          <p:cNvPr id="28" name="Rectangle 27"/>
-          <p:cNvSpPr/>
-          <p:nvPr/>
-        </p:nvSpPr>
-        <p:spPr>
-          <a:xfrm>
-            <a:off x="0" y="6803136"/>
-            <a:ext cx="1645920" cy="54864"/>
-          </a:xfrm>
-          <a:prstGeom prst="rect">
-            <a:avLst/>
-          </a:prstGeom>
-          <a:solidFill>
-            <a:srgbClr val="E07AA8"/>
+          <a:solidFill>
+            <a:srgbClr val="A9744F"/>
           </a:solidFill>
           <a:ln>
             <a:noFill/>
@@ -7064,7 +6615,7 @@
         </p:nvSpPr>
         <p:spPr>
           <a:xfrm>
-            <a:off x="11002975" y="6355080"/>
+            <a:off x="11048695" y="6355080"/>
             <a:ext cx="914400" cy="320040"/>
           </a:xfrm>
           <a:prstGeom prst="rect">
@@ -7086,7 +6637,7 @@
             <a:r>
               <a:rPr sz="1100" b="0" i="0">
                 <a:solidFill>
-                  <a:srgbClr val="B0A4BB"/>
+                  <a:srgbClr val="9B8571"/>
                 </a:solidFill>
                 <a:latin typeface="Calibri"/>
               </a:rPr>
@@ -7130,13 +6681,13 @@
           <a:gradFill rotWithShape="1">
             <a:gsLst>
               <a:gs pos="0">
-                <a:srgbClr val="FBE4EF"/>
+                <a:srgbClr val="F5EDDF"/>
               </a:gs>
               <a:gs pos="100000">
-                <a:srgbClr val="E6EEFB"/>
+                <a:srgbClr val="EFE1D3"/>
               </a:gs>
             </a:gsLst>
-            <a:lin scaled="0" ang="13500000"/>
+            <a:lin scaled="0" ang="14400000"/>
           </a:gradFill>
           <a:ln>
             <a:noFill/>
@@ -7195,9 +6746,9 @@
             <a:r>
               <a:rPr sz="1300" b="1" i="0" spc="420">
                 <a:solidFill>
-                  <a:srgbClr val="E07AA8"/>
+                  <a:srgbClr val="B0563A"/>
                 </a:solidFill>
-                <a:latin typeface="Century Gothic"/>
+                <a:latin typeface="Calibri"/>
               </a:rPr>
               <a:t>THE QUESTION</a:t>
             </a:r>
@@ -7212,15 +6763,15 @@
         </p:nvCxnSpPr>
         <p:spPr>
           <a:xfrm>
-            <a:off x="5775807" y="969264"/>
-            <a:ext cx="640080" cy="0"/>
+            <a:off x="5803239" y="987552"/>
+            <a:ext cx="585216" cy="0"/>
           </a:xfrm>
           <a:prstGeom prst="bentConnector3">
             <a:avLst/>
           </a:prstGeom>
           <a:ln w="27940">
             <a:solidFill>
-              <a:srgbClr val="E07AA8"/>
+              <a:srgbClr val="B0563A"/>
             </a:solidFill>
           </a:ln>
           <a:effectLst/>
@@ -7242,14 +6793,244 @@
       </p:cxnSp>
       <p:sp>
         <p:nvSpPr>
-          <p:cNvPr id="5" name="TextBox 4"/>
+          <p:cNvPr id="5" name="Isosceles Triangle 4"/>
+          <p:cNvSpPr/>
+          <p:nvPr/>
+        </p:nvSpPr>
+        <p:spPr>
+          <a:xfrm>
+            <a:off x="5592927" y="3200400"/>
+            <a:ext cx="1005840" cy="868680"/>
+          </a:xfrm>
+          <a:prstGeom prst="triangle">
+            <a:avLst/>
+          </a:prstGeom>
+          <a:solidFill>
+            <a:srgbClr val="6B4A34"/>
+          </a:solidFill>
+          <a:ln>
+            <a:noFill/>
+          </a:ln>
+          <a:effectLst/>
+        </p:spPr>
+        <p:style>
+          <a:lnRef idx="1">
+            <a:schemeClr val="accent1"/>
+          </a:lnRef>
+          <a:fillRef idx="3">
+            <a:schemeClr val="accent1"/>
+          </a:fillRef>
+          <a:effectRef idx="2">
+            <a:schemeClr val="accent1"/>
+          </a:effectRef>
+          <a:fontRef idx="minor">
+            <a:schemeClr val="lt1"/>
+          </a:fontRef>
+        </p:style>
+        <p:txBody>
+          <a:bodyPr rtlCol="0" anchor="ctr"/>
+          <a:lstStyle/>
+          <a:p>
+            <a:pPr algn="ctr"/>
+          </a:p>
+        </p:txBody>
+      </p:sp>
+      <p:sp>
+        <p:nvSpPr>
+          <p:cNvPr id="6" name="Rounded Rectangle 5"/>
+          <p:cNvSpPr/>
+          <p:nvPr/>
+        </p:nvSpPr>
+        <p:spPr>
+          <a:xfrm>
+            <a:off x="6013551" y="2606040"/>
+            <a:ext cx="164592" cy="685800"/>
+          </a:xfrm>
+          <a:prstGeom prst="roundRect">
+            <a:avLst>
+              <a:gd name="adj" fmla="val 50000"/>
+            </a:avLst>
+          </a:prstGeom>
+          <a:solidFill>
+            <a:srgbClr val="6B4A34"/>
+          </a:solidFill>
+          <a:ln>
+            <a:noFill/>
+          </a:ln>
+          <a:effectLst/>
+        </p:spPr>
+        <p:style>
+          <a:lnRef idx="1">
+            <a:schemeClr val="accent1"/>
+          </a:lnRef>
+          <a:fillRef idx="3">
+            <a:schemeClr val="accent1"/>
+          </a:fillRef>
+          <a:effectRef idx="2">
+            <a:schemeClr val="accent1"/>
+          </a:effectRef>
+          <a:fontRef idx="minor">
+            <a:schemeClr val="lt1"/>
+          </a:fontRef>
+        </p:style>
+        <p:txBody>
+          <a:bodyPr rtlCol="0" anchor="ctr"/>
+          <a:lstStyle/>
+          <a:p>
+            <a:pPr algn="ctr"/>
+          </a:p>
+        </p:txBody>
+      </p:sp>
+      <p:sp>
+        <p:nvSpPr>
+          <p:cNvPr id="7" name="Rounded Rectangle 6"/>
+          <p:cNvSpPr/>
+          <p:nvPr/>
+        </p:nvSpPr>
+        <p:spPr>
+          <a:xfrm>
+            <a:off x="3947007" y="2980944"/>
+            <a:ext cx="4297680" cy="164592"/>
+          </a:xfrm>
+          <a:prstGeom prst="roundRect">
+            <a:avLst>
+              <a:gd name="adj" fmla="val 50000"/>
+            </a:avLst>
+          </a:prstGeom>
+          <a:solidFill>
+            <a:srgbClr val="A9744F"/>
+          </a:solidFill>
+          <a:ln>
+            <a:noFill/>
+          </a:ln>
+          <a:effectLst>
+            <a:outerShdw blurRad="254000" dist="139700" dir="5400000" rotWithShape="0">
+              <a:srgbClr val="6B4A34">
+                <a:alpha val="76000"/>
+              </a:srgbClr>
+            </a:outerShdw>
+          </a:effectLst>
+        </p:spPr>
+        <p:style>
+          <a:lnRef idx="1">
+            <a:schemeClr val="accent1"/>
+          </a:lnRef>
+          <a:fillRef idx="3">
+            <a:schemeClr val="accent1"/>
+          </a:fillRef>
+          <a:effectRef idx="2">
+            <a:schemeClr val="accent1"/>
+          </a:effectRef>
+          <a:fontRef idx="minor">
+            <a:schemeClr val="lt1"/>
+          </a:fontRef>
+        </p:style>
+        <p:txBody>
+          <a:bodyPr rtlCol="0" anchor="ctr"/>
+          <a:lstStyle/>
+          <a:p>
+            <a:pPr algn="ctr"/>
+          </a:p>
+        </p:txBody>
+      </p:sp>
+      <p:cxnSp>
+        <p:nvCxnSpPr>
+          <p:cNvPr id="8" name="Connector 7"/>
+          <p:cNvCxnSpPr/>
+          <p:nvPr/>
+        </p:nvCxnSpPr>
+        <p:spPr>
+          <a:xfrm>
+            <a:off x="3947007" y="3063240"/>
+            <a:ext cx="0" cy="868680"/>
+          </a:xfrm>
+          <a:prstGeom prst="bentConnector3">
+            <a:avLst/>
+          </a:prstGeom>
+          <a:ln w="20320">
+            <a:solidFill>
+              <a:srgbClr val="6B4A34"/>
+            </a:solidFill>
+          </a:ln>
+          <a:effectLst/>
+        </p:spPr>
+        <p:style>
+          <a:lnRef idx="2">
+            <a:schemeClr val="accent1"/>
+          </a:lnRef>
+          <a:fillRef idx="0">
+            <a:schemeClr val="accent1"/>
+          </a:fillRef>
+          <a:effectRef idx="1">
+            <a:schemeClr val="accent1"/>
+          </a:effectRef>
+          <a:fontRef idx="minor">
+            <a:schemeClr val="tx1"/>
+          </a:fontRef>
+        </p:style>
+      </p:cxnSp>
+      <p:sp>
+        <p:nvSpPr>
+          <p:cNvPr id="9" name="Rounded Rectangle 8"/>
+          <p:cNvSpPr/>
+          <p:nvPr/>
+        </p:nvSpPr>
+        <p:spPr>
+          <a:xfrm>
+            <a:off x="3380079" y="3931920"/>
+            <a:ext cx="1133856" cy="109728"/>
+          </a:xfrm>
+          <a:prstGeom prst="roundRect">
+            <a:avLst>
+              <a:gd name="adj" fmla="val 50000"/>
+            </a:avLst>
+          </a:prstGeom>
+          <a:solidFill>
+            <a:srgbClr val="CDA07E"/>
+          </a:solidFill>
+          <a:ln>
+            <a:noFill/>
+          </a:ln>
+          <a:effectLst>
+            <a:outerShdw blurRad="254000" dist="139700" dir="5400000" rotWithShape="0">
+              <a:srgbClr val="6B4A34">
+                <a:alpha val="76000"/>
+              </a:srgbClr>
+            </a:outerShdw>
+          </a:effectLst>
+        </p:spPr>
+        <p:style>
+          <a:lnRef idx="1">
+            <a:schemeClr val="accent1"/>
+          </a:lnRef>
+          <a:fillRef idx="3">
+            <a:schemeClr val="accent1"/>
+          </a:fillRef>
+          <a:effectRef idx="2">
+            <a:schemeClr val="accent1"/>
+          </a:effectRef>
+          <a:fontRef idx="minor">
+            <a:schemeClr val="lt1"/>
+          </a:fontRef>
+        </p:style>
+        <p:txBody>
+          <a:bodyPr rtlCol="0" anchor="ctr"/>
+          <a:lstStyle/>
+          <a:p>
+            <a:pPr algn="ctr"/>
+          </a:p>
+        </p:txBody>
+      </p:sp>
+      <p:sp>
+        <p:nvSpPr>
+          <p:cNvPr id="10" name="TextBox 9"/>
           <p:cNvSpPr txBox="1"/>
           <p:nvPr/>
         </p:nvSpPr>
         <p:spPr>
           <a:xfrm>
-            <a:off x="1981047" y="2331720"/>
-            <a:ext cx="8229600" cy="1280160"/>
+            <a:off x="3215487" y="3063239"/>
+            <a:ext cx="1463040" cy="822960"/>
           </a:xfrm>
           <a:prstGeom prst="rect">
             <a:avLst/>
@@ -7268,54 +7049,115 @@
               </a:lnSpc>
             </a:pPr>
             <a:r>
-              <a:rPr sz="9600" b="1" i="0">
+              <a:rPr sz="4800" b="1" i="0">
                 <a:solidFill>
-                  <a:srgbClr val="E888B4"/>
-                </a:solidFill>
-                <a:latin typeface="Calibri"/>
-              </a:rPr>
-              <a:t>♀</a:t>
-            </a:r>
-            <a:r>
-              <a:rPr sz="9600" b="1" i="0">
-                <a:solidFill>
-                  <a:srgbClr val="463A53"/>
-                </a:solidFill>
-                <a:latin typeface="Calibri"/>
-              </a:rPr>
-              <a:t>   =   </a:t>
-            </a:r>
-            <a:r>
-              <a:rPr sz="9600" b="1" i="0">
-                <a:solidFill>
-                  <a:srgbClr val="6FA0DD"/>
+                  <a:srgbClr val="6B4A34"/>
                 </a:solidFill>
                 <a:latin typeface="Calibri"/>
               </a:rPr>
               <a:t>♂</a:t>
             </a:r>
-            <a:r>
-              <a:rPr sz="9600" b="1" i="0">
-                <a:solidFill>
-                  <a:srgbClr val="8A7D95"/>
-                </a:solidFill>
-                <a:latin typeface="Calibri"/>
-              </a:rPr>
-              <a:t> ?</a:t>
-            </a:r>
-          </a:p>
-        </p:txBody>
-      </p:sp>
-      <p:sp>
-        <p:nvSpPr>
-          <p:cNvPr id="6" name="TextBox 5"/>
+          </a:p>
+        </p:txBody>
+      </p:sp>
+      <p:cxnSp>
+        <p:nvCxnSpPr>
+          <p:cNvPr id="11" name="Connector 10"/>
+          <p:cNvCxnSpPr/>
+          <p:nvPr/>
+        </p:nvCxnSpPr>
+        <p:spPr>
+          <a:xfrm>
+            <a:off x="8244687" y="3063240"/>
+            <a:ext cx="0" cy="868680"/>
+          </a:xfrm>
+          <a:prstGeom prst="bentConnector3">
+            <a:avLst/>
+          </a:prstGeom>
+          <a:ln w="20320">
+            <a:solidFill>
+              <a:srgbClr val="6B4A34"/>
+            </a:solidFill>
+          </a:ln>
+          <a:effectLst/>
+        </p:spPr>
+        <p:style>
+          <a:lnRef idx="2">
+            <a:schemeClr val="accent1"/>
+          </a:lnRef>
+          <a:fillRef idx="0">
+            <a:schemeClr val="accent1"/>
+          </a:fillRef>
+          <a:effectRef idx="1">
+            <a:schemeClr val="accent1"/>
+          </a:effectRef>
+          <a:fontRef idx="minor">
+            <a:schemeClr val="tx1"/>
+          </a:fontRef>
+        </p:style>
+      </p:cxnSp>
+      <p:sp>
+        <p:nvSpPr>
+          <p:cNvPr id="12" name="Rounded Rectangle 11"/>
+          <p:cNvSpPr/>
+          <p:nvPr/>
+        </p:nvSpPr>
+        <p:spPr>
+          <a:xfrm>
+            <a:off x="7677759" y="3931920"/>
+            <a:ext cx="1133856" cy="109728"/>
+          </a:xfrm>
+          <a:prstGeom prst="roundRect">
+            <a:avLst>
+              <a:gd name="adj" fmla="val 50000"/>
+            </a:avLst>
+          </a:prstGeom>
+          <a:solidFill>
+            <a:srgbClr val="CDA07E"/>
+          </a:solidFill>
+          <a:ln>
+            <a:noFill/>
+          </a:ln>
+          <a:effectLst>
+            <a:outerShdw blurRad="254000" dist="139700" dir="5400000" rotWithShape="0">
+              <a:srgbClr val="6B4A34">
+                <a:alpha val="76000"/>
+              </a:srgbClr>
+            </a:outerShdw>
+          </a:effectLst>
+        </p:spPr>
+        <p:style>
+          <a:lnRef idx="1">
+            <a:schemeClr val="accent1"/>
+          </a:lnRef>
+          <a:fillRef idx="3">
+            <a:schemeClr val="accent1"/>
+          </a:fillRef>
+          <a:effectRef idx="2">
+            <a:schemeClr val="accent1"/>
+          </a:effectRef>
+          <a:fontRef idx="minor">
+            <a:schemeClr val="lt1"/>
+          </a:fontRef>
+        </p:style>
+        <p:txBody>
+          <a:bodyPr rtlCol="0" anchor="ctr"/>
+          <a:lstStyle/>
+          <a:p>
+            <a:pPr algn="ctr"/>
+          </a:p>
+        </p:txBody>
+      </p:sp>
+      <p:sp>
+        <p:nvSpPr>
+          <p:cNvPr id="13" name="TextBox 12"/>
           <p:cNvSpPr txBox="1"/>
           <p:nvPr/>
         </p:nvSpPr>
         <p:spPr>
           <a:xfrm>
-            <a:off x="1523847" y="4343400"/>
-            <a:ext cx="9144000" cy="822960"/>
+            <a:off x="7513167" y="3063239"/>
+            <a:ext cx="1463040" cy="822960"/>
           </a:xfrm>
           <a:prstGeom prst="rect">
             <a:avLst/>
@@ -7334,33 +7176,111 @@
               </a:lnSpc>
             </a:pPr>
             <a:r>
-              <a:rPr sz="3200" b="1" i="0">
+              <a:rPr sz="4800" b="1" i="0">
                 <a:solidFill>
-                  <a:srgbClr val="463A53"/>
+                  <a:srgbClr val="B0563A"/>
                 </a:solidFill>
-                <a:latin typeface="Century Gothic"/>
+                <a:latin typeface="Calibri"/>
               </a:rPr>
-              <a:t>Does AI judge everyone fairly?</a:t>
-            </a:r>
-          </a:p>
-        </p:txBody>
-      </p:sp>
-      <p:sp>
-        <p:nvSpPr>
-          <p:cNvPr id="7" name="Rectangle 6"/>
-          <p:cNvSpPr/>
-          <p:nvPr/>
-        </p:nvSpPr>
-        <p:spPr>
-          <a:xfrm>
-            <a:off x="0" y="6803136"/>
-            <a:ext cx="1920240" cy="54864"/>
+              <a:t>♀</a:t>
+            </a:r>
+          </a:p>
+        </p:txBody>
+      </p:sp>
+      <p:sp>
+        <p:nvSpPr>
+          <p:cNvPr id="14" name="TextBox 13"/>
+          <p:cNvSpPr txBox="1"/>
+          <p:nvPr/>
+        </p:nvSpPr>
+        <p:spPr>
+          <a:xfrm>
+            <a:off x="5455767" y="1234440"/>
+            <a:ext cx="1280160" cy="1005840"/>
           </a:xfrm>
           <a:prstGeom prst="rect">
             <a:avLst/>
           </a:prstGeom>
-          <a:solidFill>
-            <a:srgbClr val="E07AA8"/>
+          <a:noFill/>
+        </p:spPr>
+        <p:txBody>
+          <a:bodyPr wrap="square" anchor="ctr" lIns="0" rIns="0" tIns="0" bIns="0">
+            <a:spAutoFit/>
+          </a:bodyPr>
+          <a:lstStyle/>
+          <a:p>
+            <a:pPr algn="ctr">
+              <a:lnSpc>
+                <a:spcPct val="100000"/>
+              </a:lnSpc>
+            </a:pPr>
+            <a:r>
+              <a:rPr sz="6600" b="1" i="0">
+                <a:solidFill>
+                  <a:srgbClr val="B0563A"/>
+                </a:solidFill>
+                <a:latin typeface="Georgia"/>
+              </a:rPr>
+              <a:t>?</a:t>
+            </a:r>
+          </a:p>
+        </p:txBody>
+      </p:sp>
+      <p:sp>
+        <p:nvSpPr>
+          <p:cNvPr id="15" name="TextBox 14"/>
+          <p:cNvSpPr txBox="1"/>
+          <p:nvPr/>
+        </p:nvSpPr>
+        <p:spPr>
+          <a:xfrm>
+            <a:off x="975207" y="5440680"/>
+            <a:ext cx="10241280" cy="822960"/>
+          </a:xfrm>
+          <a:prstGeom prst="rect">
+            <a:avLst/>
+          </a:prstGeom>
+          <a:noFill/>
+        </p:spPr>
+        <p:txBody>
+          <a:bodyPr wrap="square" anchor="ctr" lIns="0" rIns="0" tIns="0" bIns="0">
+            <a:spAutoFit/>
+          </a:bodyPr>
+          <a:lstStyle/>
+          <a:p>
+            <a:pPr algn="ctr">
+              <a:lnSpc>
+                <a:spcPct val="100000"/>
+              </a:lnSpc>
+            </a:pPr>
+            <a:r>
+              <a:rPr sz="2400" b="1" i="0">
+                <a:solidFill>
+                  <a:srgbClr val="3E2C1E"/>
+                </a:solidFill>
+                <a:latin typeface="Georgia"/>
+              </a:rPr>
+              <a:t>Same résumé, different name — will the score change?</a:t>
+            </a:r>
+          </a:p>
+        </p:txBody>
+      </p:sp>
+      <p:sp>
+        <p:nvSpPr>
+          <p:cNvPr id="16" name="Rectangle 15"/>
+          <p:cNvSpPr/>
+          <p:nvPr/>
+        </p:nvSpPr>
+        <p:spPr>
+          <a:xfrm>
+            <a:off x="0" y="6803136"/>
+            <a:ext cx="1729047" cy="54864"/>
+          </a:xfrm>
+          <a:prstGeom prst="rect">
+            <a:avLst/>
+          </a:prstGeom>
+          <a:solidFill>
+            <a:srgbClr val="B0563A"/>
           </a:solidFill>
           <a:ln>
             <a:noFill/>
@@ -7391,13 +7311,13 @@
       </p:sp>
       <p:sp>
         <p:nvSpPr>
-          <p:cNvPr id="8" name="TextBox 7"/>
+          <p:cNvPr id="17" name="TextBox 16"/>
           <p:cNvSpPr txBox="1"/>
           <p:nvPr/>
         </p:nvSpPr>
         <p:spPr>
           <a:xfrm>
-            <a:off x="11002975" y="6355080"/>
+            <a:off x="11048695" y="6355080"/>
             <a:ext cx="914400" cy="320040"/>
           </a:xfrm>
           <a:prstGeom prst="rect">
@@ -7419,7 +7339,7 @@
             <a:r>
               <a:rPr sz="1100" b="0" i="0">
                 <a:solidFill>
-                  <a:srgbClr val="B0A4BB"/>
+                  <a:srgbClr val="9B8571"/>
                 </a:solidFill>
                 <a:latin typeface="Calibri"/>
               </a:rPr>
@@ -7463,13 +7383,13 @@
           <a:gradFill rotWithShape="1">
             <a:gsLst>
               <a:gs pos="0">
-                <a:srgbClr val="FDEEF4"/>
+                <a:srgbClr val="F5EDDF"/>
               </a:gs>
               <a:gs pos="100000">
-                <a:srgbClr val="E9F1FC"/>
+                <a:srgbClr val="E7D3B8"/>
               </a:gs>
             </a:gsLst>
-            <a:lin scaled="0" ang="13500000"/>
+            <a:lin scaled="0" ang="14400000"/>
           </a:gradFill>
           <a:ln>
             <a:noFill/>
@@ -7528,11 +7448,11 @@
             <a:r>
               <a:rPr sz="1300" b="1" i="0" spc="420">
                 <a:solidFill>
-                  <a:srgbClr val="E07AA8"/>
+                  <a:srgbClr val="A9744F"/>
                 </a:solidFill>
-                <a:latin typeface="Century Gothic"/>
+                <a:latin typeface="Calibri"/>
               </a:rPr>
-              <a:t>THE PAPER</a:t>
+              <a:t>THE TEST</a:t>
             </a:r>
           </a:p>
         </p:txBody>
@@ -7545,15 +7465,15 @@
         </p:nvCxnSpPr>
         <p:spPr>
           <a:xfrm>
-            <a:off x="5775807" y="969264"/>
-            <a:ext cx="640080" cy="0"/>
+            <a:off x="5803239" y="987552"/>
+            <a:ext cx="585216" cy="0"/>
           </a:xfrm>
           <a:prstGeom prst="bentConnector3">
             <a:avLst/>
           </a:prstGeom>
           <a:ln w="27940">
             <a:solidFill>
-              <a:srgbClr val="E07AA8"/>
+              <a:srgbClr val="A9744F"/>
             </a:solidFill>
           </a:ln>
           <a:effectLst/>
@@ -7575,275 +7495,32 @@
       </p:cxnSp>
       <p:sp>
         <p:nvSpPr>
-          <p:cNvPr id="5" name="Oval 4"/>
+          <p:cNvPr id="5" name="Rounded Rectangle 4"/>
           <p:cNvSpPr/>
           <p:nvPr/>
         </p:nvSpPr>
         <p:spPr>
           <a:xfrm>
-            <a:off x="2788920" y="2651760"/>
-            <a:ext cx="1554480" cy="1554480"/>
-          </a:xfrm>
-          <a:prstGeom prst="ellipse">
-            <a:avLst/>
-          </a:prstGeom>
-          <a:noFill/>
-          <a:ln w="25400">
-            <a:solidFill>
-              <a:srgbClr val="8A7D95"/>
-            </a:solidFill>
-          </a:ln>
-          <a:effectLst/>
-        </p:spPr>
-        <p:style>
-          <a:lnRef idx="1">
-            <a:schemeClr val="accent1"/>
-          </a:lnRef>
-          <a:fillRef idx="3">
-            <a:schemeClr val="accent1"/>
-          </a:fillRef>
-          <a:effectRef idx="2">
-            <a:schemeClr val="accent1"/>
-          </a:effectRef>
-          <a:fontRef idx="minor">
-            <a:schemeClr val="lt1"/>
-          </a:fontRef>
-        </p:style>
-        <p:txBody>
-          <a:bodyPr rtlCol="0" anchor="ctr"/>
-          <a:lstStyle/>
-          <a:p>
-            <a:pPr algn="ctr"/>
-          </a:p>
-        </p:txBody>
-      </p:sp>
-      <p:sp>
-        <p:nvSpPr>
-          <p:cNvPr id="6" name="Oval 5"/>
-          <p:cNvSpPr/>
-          <p:nvPr/>
-        </p:nvSpPr>
-        <p:spPr>
-          <a:xfrm>
-            <a:off x="3286353" y="2651760"/>
-            <a:ext cx="559612" cy="1554480"/>
-          </a:xfrm>
-          <a:prstGeom prst="ellipse">
-            <a:avLst/>
-          </a:prstGeom>
-          <a:noFill/>
-          <a:ln w="17780">
-            <a:solidFill>
-              <a:srgbClr val="8A7D95"/>
-            </a:solidFill>
-          </a:ln>
-          <a:effectLst/>
-        </p:spPr>
-        <p:style>
-          <a:lnRef idx="1">
-            <a:schemeClr val="accent1"/>
-          </a:lnRef>
-          <a:fillRef idx="3">
-            <a:schemeClr val="accent1"/>
-          </a:fillRef>
-          <a:effectRef idx="2">
-            <a:schemeClr val="accent1"/>
-          </a:effectRef>
-          <a:fontRef idx="minor">
-            <a:schemeClr val="lt1"/>
-          </a:fontRef>
-        </p:style>
-        <p:txBody>
-          <a:bodyPr rtlCol="0" anchor="ctr"/>
-          <a:lstStyle/>
-          <a:p>
-            <a:pPr algn="ctr"/>
-          </a:p>
-        </p:txBody>
-      </p:sp>
-      <p:cxnSp>
-        <p:nvCxnSpPr>
-          <p:cNvPr id="7" name="Connector 6"/>
-          <p:cNvCxnSpPr/>
-          <p:nvPr/>
-        </p:nvCxnSpPr>
-        <p:spPr>
-          <a:xfrm>
-            <a:off x="2788920" y="3429000"/>
-            <a:ext cx="1554480" cy="0"/>
-          </a:xfrm>
-          <a:prstGeom prst="bentConnector3">
-            <a:avLst/>
-          </a:prstGeom>
-          <a:ln w="17780">
-            <a:solidFill>
-              <a:srgbClr val="8A7D95"/>
-            </a:solidFill>
-          </a:ln>
-          <a:effectLst/>
-        </p:spPr>
-        <p:style>
-          <a:lnRef idx="2">
-            <a:schemeClr val="accent1"/>
-          </a:lnRef>
-          <a:fillRef idx="0">
-            <a:schemeClr val="accent1"/>
-          </a:fillRef>
-          <a:effectRef idx="1">
-            <a:schemeClr val="accent1"/>
-          </a:effectRef>
-          <a:fontRef idx="minor">
-            <a:schemeClr val="tx1"/>
-          </a:fontRef>
-        </p:style>
-      </p:cxnSp>
-      <p:cxnSp>
-        <p:nvCxnSpPr>
-          <p:cNvPr id="8" name="Connector 7"/>
-          <p:cNvCxnSpPr/>
-          <p:nvPr/>
-        </p:nvCxnSpPr>
-        <p:spPr>
-          <a:xfrm>
-            <a:off x="2851099" y="3024835"/>
-            <a:ext cx="1430121" cy="0"/>
-          </a:xfrm>
-          <a:prstGeom prst="bentConnector3">
-            <a:avLst/>
-          </a:prstGeom>
-          <a:ln w="13970">
-            <a:solidFill>
-              <a:srgbClr val="8A7D95"/>
-            </a:solidFill>
-          </a:ln>
-          <a:effectLst/>
-        </p:spPr>
-        <p:style>
-          <a:lnRef idx="2">
-            <a:schemeClr val="accent1"/>
-          </a:lnRef>
-          <a:fillRef idx="0">
-            <a:schemeClr val="accent1"/>
-          </a:fillRef>
-          <a:effectRef idx="1">
-            <a:schemeClr val="accent1"/>
-          </a:effectRef>
-          <a:fontRef idx="minor">
-            <a:schemeClr val="tx1"/>
-          </a:fontRef>
-        </p:style>
-      </p:cxnSp>
-      <p:cxnSp>
-        <p:nvCxnSpPr>
-          <p:cNvPr id="9" name="Connector 8"/>
-          <p:cNvCxnSpPr/>
-          <p:nvPr/>
-        </p:nvCxnSpPr>
-        <p:spPr>
-          <a:xfrm>
-            <a:off x="2851099" y="3833164"/>
-            <a:ext cx="1430121" cy="0"/>
-          </a:xfrm>
-          <a:prstGeom prst="bentConnector3">
-            <a:avLst/>
-          </a:prstGeom>
-          <a:ln w="13970">
-            <a:solidFill>
-              <a:srgbClr val="8A7D95"/>
-            </a:solidFill>
-          </a:ln>
-          <a:effectLst/>
-        </p:spPr>
-        <p:style>
-          <a:lnRef idx="2">
-            <a:schemeClr val="accent1"/>
-          </a:lnRef>
-          <a:fillRef idx="0">
-            <a:schemeClr val="accent1"/>
-          </a:fillRef>
-          <a:effectRef idx="1">
-            <a:schemeClr val="accent1"/>
-          </a:effectRef>
-          <a:fontRef idx="minor">
-            <a:schemeClr val="tx1"/>
-          </a:fontRef>
-        </p:style>
-      </p:cxnSp>
-      <p:sp>
-        <p:nvSpPr>
-          <p:cNvPr id="10" name="Right Arrow 9"/>
-          <p:cNvSpPr/>
-          <p:nvPr/>
-        </p:nvSpPr>
-        <p:spPr>
-          <a:xfrm>
-            <a:off x="5029200" y="3264408"/>
-            <a:ext cx="1005840" cy="329184"/>
-          </a:xfrm>
-          <a:prstGeom prst="rightArrow">
-            <a:avLst>
-              <a:gd name="adj1" fmla="val 55000"/>
-              <a:gd name="adj2" fmla="val 50000"/>
-            </a:avLst>
-          </a:prstGeom>
-          <a:solidFill>
-            <a:srgbClr val="B0A4BB"/>
-          </a:solidFill>
-          <a:ln>
-            <a:noFill/>
-          </a:ln>
-          <a:effectLst/>
-        </p:spPr>
-        <p:style>
-          <a:lnRef idx="1">
-            <a:schemeClr val="accent1"/>
-          </a:lnRef>
-          <a:fillRef idx="3">
-            <a:schemeClr val="accent1"/>
-          </a:fillRef>
-          <a:effectRef idx="2">
-            <a:schemeClr val="accent1"/>
-          </a:effectRef>
-          <a:fontRef idx="minor">
-            <a:schemeClr val="lt1"/>
-          </a:fontRef>
-        </p:style>
-        <p:txBody>
-          <a:bodyPr rtlCol="0" anchor="ctr"/>
-          <a:lstStyle/>
-          <a:p>
-            <a:pPr algn="ctr"/>
-          </a:p>
-        </p:txBody>
-      </p:sp>
-      <p:sp>
-        <p:nvSpPr>
-          <p:cNvPr id="11" name="Rounded Rectangle 10"/>
-          <p:cNvSpPr/>
-          <p:nvPr/>
-        </p:nvSpPr>
-        <p:spPr>
-          <a:xfrm>
-            <a:off x="7132320" y="2765145"/>
-            <a:ext cx="2011680" cy="1327708"/>
+            <a:off x="3131820" y="1889150"/>
+            <a:ext cx="1691640" cy="2165299"/>
           </a:xfrm>
           <a:prstGeom prst="roundRect">
             <a:avLst>
-              <a:gd name="adj" fmla="val 8000"/>
+              <a:gd name="adj" fmla="val 9000"/>
             </a:avLst>
           </a:prstGeom>
           <a:solidFill>
-            <a:srgbClr val="FFFFFF"/>
+            <a:srgbClr val="FCF7EF"/>
           </a:solidFill>
           <a:ln w="16510">
             <a:solidFill>
-              <a:srgbClr val="EFDFE9"/>
+              <a:srgbClr val="E4D5C0"/>
             </a:solidFill>
           </a:ln>
           <a:effectLst>
-            <a:outerShdw blurRad="228600" dist="127000" dir="5400000" rotWithShape="0">
-              <a:srgbClr val="C880A8">
-                <a:alpha val="78000"/>
+            <a:outerShdw blurRad="254000" dist="139700" dir="5400000" rotWithShape="0">
+              <a:srgbClr val="6B4A34">
+                <a:alpha val="76000"/>
               </a:srgbClr>
             </a:outerShdw>
           </a:effectLst>
@@ -7872,20 +7549,22 @@
       </p:sp>
       <p:sp>
         <p:nvSpPr>
-          <p:cNvPr id="12" name="Oval 11"/>
+          <p:cNvPr id="6" name="Rounded Rectangle 5"/>
           <p:cNvSpPr/>
           <p:nvPr/>
         </p:nvSpPr>
         <p:spPr>
           <a:xfrm>
-            <a:off x="7806232" y="3097072"/>
-            <a:ext cx="663854" cy="663854"/>
-          </a:xfrm>
-          <a:prstGeom prst="ellipse">
-            <a:avLst/>
-          </a:prstGeom>
-          <a:solidFill>
-            <a:srgbClr val="E07AA8"/>
+            <a:off x="3402482" y="2159812"/>
+            <a:ext cx="845820" cy="119091"/>
+          </a:xfrm>
+          <a:prstGeom prst="roundRect">
+            <a:avLst>
+              <a:gd name="adj" fmla="val 50000"/>
+            </a:avLst>
+          </a:prstGeom>
+          <a:solidFill>
+            <a:srgbClr val="B0563A"/>
           </a:solidFill>
           <a:ln>
             <a:noFill/>
@@ -7916,14 +7595,198 @@
       </p:sp>
       <p:sp>
         <p:nvSpPr>
-          <p:cNvPr id="13" name="TextBox 12"/>
+          <p:cNvPr id="7" name="Rounded Rectangle 6"/>
+          <p:cNvSpPr/>
+          <p:nvPr/>
+        </p:nvSpPr>
+        <p:spPr>
+          <a:xfrm>
+            <a:off x="3402482" y="2506260"/>
+            <a:ext cx="1150315" cy="97438"/>
+          </a:xfrm>
+          <a:prstGeom prst="roundRect">
+            <a:avLst>
+              <a:gd name="adj" fmla="val 50000"/>
+            </a:avLst>
+          </a:prstGeom>
+          <a:solidFill>
+            <a:srgbClr val="E4D5C0"/>
+          </a:solidFill>
+          <a:ln>
+            <a:noFill/>
+          </a:ln>
+          <a:effectLst/>
+        </p:spPr>
+        <p:style>
+          <a:lnRef idx="1">
+            <a:schemeClr val="accent1"/>
+          </a:lnRef>
+          <a:fillRef idx="3">
+            <a:schemeClr val="accent1"/>
+          </a:fillRef>
+          <a:effectRef idx="2">
+            <a:schemeClr val="accent1"/>
+          </a:effectRef>
+          <a:fontRef idx="minor">
+            <a:schemeClr val="lt1"/>
+          </a:fontRef>
+        </p:style>
+        <p:txBody>
+          <a:bodyPr rtlCol="0" anchor="ctr"/>
+          <a:lstStyle/>
+          <a:p>
+            <a:pPr algn="ctr"/>
+          </a:p>
+        </p:txBody>
+      </p:sp>
+      <p:sp>
+        <p:nvSpPr>
+          <p:cNvPr id="8" name="Rounded Rectangle 7"/>
+          <p:cNvSpPr/>
+          <p:nvPr/>
+        </p:nvSpPr>
+        <p:spPr>
+          <a:xfrm>
+            <a:off x="3402482" y="2766096"/>
+            <a:ext cx="1014984" cy="97438"/>
+          </a:xfrm>
+          <a:prstGeom prst="roundRect">
+            <a:avLst>
+              <a:gd name="adj" fmla="val 50000"/>
+            </a:avLst>
+          </a:prstGeom>
+          <a:solidFill>
+            <a:srgbClr val="E4D5C0"/>
+          </a:solidFill>
+          <a:ln>
+            <a:noFill/>
+          </a:ln>
+          <a:effectLst/>
+        </p:spPr>
+        <p:style>
+          <a:lnRef idx="1">
+            <a:schemeClr val="accent1"/>
+          </a:lnRef>
+          <a:fillRef idx="3">
+            <a:schemeClr val="accent1"/>
+          </a:fillRef>
+          <a:effectRef idx="2">
+            <a:schemeClr val="accent1"/>
+          </a:effectRef>
+          <a:fontRef idx="minor">
+            <a:schemeClr val="lt1"/>
+          </a:fontRef>
+        </p:style>
+        <p:txBody>
+          <a:bodyPr rtlCol="0" anchor="ctr"/>
+          <a:lstStyle/>
+          <a:p>
+            <a:pPr algn="ctr"/>
+          </a:p>
+        </p:txBody>
+      </p:sp>
+      <p:sp>
+        <p:nvSpPr>
+          <p:cNvPr id="9" name="Rounded Rectangle 8"/>
+          <p:cNvSpPr/>
+          <p:nvPr/>
+        </p:nvSpPr>
+        <p:spPr>
+          <a:xfrm>
+            <a:off x="3402482" y="3025932"/>
+            <a:ext cx="1116482" cy="97438"/>
+          </a:xfrm>
+          <a:prstGeom prst="roundRect">
+            <a:avLst>
+              <a:gd name="adj" fmla="val 50000"/>
+            </a:avLst>
+          </a:prstGeom>
+          <a:solidFill>
+            <a:srgbClr val="E4D5C0"/>
+          </a:solidFill>
+          <a:ln>
+            <a:noFill/>
+          </a:ln>
+          <a:effectLst/>
+        </p:spPr>
+        <p:style>
+          <a:lnRef idx="1">
+            <a:schemeClr val="accent1"/>
+          </a:lnRef>
+          <a:fillRef idx="3">
+            <a:schemeClr val="accent1"/>
+          </a:fillRef>
+          <a:effectRef idx="2">
+            <a:schemeClr val="accent1"/>
+          </a:effectRef>
+          <a:fontRef idx="minor">
+            <a:schemeClr val="lt1"/>
+          </a:fontRef>
+        </p:style>
+        <p:txBody>
+          <a:bodyPr rtlCol="0" anchor="ctr"/>
+          <a:lstStyle/>
+          <a:p>
+            <a:pPr algn="ctr"/>
+          </a:p>
+        </p:txBody>
+      </p:sp>
+      <p:sp>
+        <p:nvSpPr>
+          <p:cNvPr id="10" name="Rounded Rectangle 9"/>
+          <p:cNvSpPr/>
+          <p:nvPr/>
+        </p:nvSpPr>
+        <p:spPr>
+          <a:xfrm>
+            <a:off x="3402482" y="3285768"/>
+            <a:ext cx="710488" cy="97438"/>
+          </a:xfrm>
+          <a:prstGeom prst="roundRect">
+            <a:avLst>
+              <a:gd name="adj" fmla="val 50000"/>
+            </a:avLst>
+          </a:prstGeom>
+          <a:solidFill>
+            <a:srgbClr val="E4D5C0"/>
+          </a:solidFill>
+          <a:ln>
+            <a:noFill/>
+          </a:ln>
+          <a:effectLst/>
+        </p:spPr>
+        <p:style>
+          <a:lnRef idx="1">
+            <a:schemeClr val="accent1"/>
+          </a:lnRef>
+          <a:fillRef idx="3">
+            <a:schemeClr val="accent1"/>
+          </a:fillRef>
+          <a:effectRef idx="2">
+            <a:schemeClr val="accent1"/>
+          </a:effectRef>
+          <a:fontRef idx="minor">
+            <a:schemeClr val="lt1"/>
+          </a:fontRef>
+        </p:style>
+        <p:txBody>
+          <a:bodyPr rtlCol="0" anchor="ctr"/>
+          <a:lstStyle/>
+          <a:p>
+            <a:pPr algn="ctr"/>
+          </a:p>
+        </p:txBody>
+      </p:sp>
+      <p:sp>
+        <p:nvSpPr>
+          <p:cNvPr id="11" name="TextBox 10"/>
           <p:cNvSpPr txBox="1"/>
           <p:nvPr/>
         </p:nvSpPr>
         <p:spPr>
           <a:xfrm>
-            <a:off x="1523847" y="5074920"/>
-            <a:ext cx="9144000" cy="640080"/>
+            <a:off x="3131820" y="3253288"/>
+            <a:ext cx="1691640" cy="736201"/>
           </a:xfrm>
           <a:prstGeom prst="rect">
             <a:avLst/>
@@ -7942,33 +7805,527 @@
               </a:lnSpc>
             </a:pPr>
             <a:r>
+              <a:rPr sz="4000" b="0" i="0">
+                <a:solidFill>
+                  <a:srgbClr val="B0563A"/>
+                </a:solidFill>
+                <a:latin typeface="Calibri"/>
+              </a:rPr>
+              <a:t>♀</a:t>
+            </a:r>
+          </a:p>
+        </p:txBody>
+      </p:sp>
+      <p:sp>
+        <p:nvSpPr>
+          <p:cNvPr id="12" name="TextBox 11"/>
+          <p:cNvSpPr txBox="1"/>
+          <p:nvPr/>
+        </p:nvSpPr>
+        <p:spPr>
+          <a:xfrm>
+            <a:off x="5181447" y="2468880"/>
+            <a:ext cx="1828800" cy="1005840"/>
+          </a:xfrm>
+          <a:prstGeom prst="rect">
+            <a:avLst/>
+          </a:prstGeom>
+          <a:noFill/>
+        </p:spPr>
+        <p:txBody>
+          <a:bodyPr wrap="square" anchor="ctr" lIns="0" rIns="0" tIns="0" bIns="0">
+            <a:spAutoFit/>
+          </a:bodyPr>
+          <a:lstStyle/>
+          <a:p>
+            <a:pPr algn="ctr">
+              <a:lnSpc>
+                <a:spcPct val="100000"/>
+              </a:lnSpc>
+            </a:pPr>
+            <a:r>
+              <a:rPr sz="4800" b="1" i="0">
+                <a:solidFill>
+                  <a:srgbClr val="9B8571"/>
+                </a:solidFill>
+                <a:latin typeface="Georgia"/>
+              </a:rPr>
+              <a:t>=</a:t>
+            </a:r>
+          </a:p>
+        </p:txBody>
+      </p:sp>
+      <p:sp>
+        <p:nvSpPr>
+          <p:cNvPr id="13" name="Rounded Rectangle 12"/>
+          <p:cNvSpPr/>
+          <p:nvPr/>
+        </p:nvSpPr>
+        <p:spPr>
+          <a:xfrm>
+            <a:off x="7365492" y="1889150"/>
+            <a:ext cx="1691640" cy="2165299"/>
+          </a:xfrm>
+          <a:prstGeom prst="roundRect">
+            <a:avLst>
+              <a:gd name="adj" fmla="val 9000"/>
+            </a:avLst>
+          </a:prstGeom>
+          <a:solidFill>
+            <a:srgbClr val="FCF7EF"/>
+          </a:solidFill>
+          <a:ln w="16510">
+            <a:solidFill>
+              <a:srgbClr val="E4D5C0"/>
+            </a:solidFill>
+          </a:ln>
+          <a:effectLst>
+            <a:outerShdw blurRad="254000" dist="139700" dir="5400000" rotWithShape="0">
+              <a:srgbClr val="6B4A34">
+                <a:alpha val="76000"/>
+              </a:srgbClr>
+            </a:outerShdw>
+          </a:effectLst>
+        </p:spPr>
+        <p:style>
+          <a:lnRef idx="1">
+            <a:schemeClr val="accent1"/>
+          </a:lnRef>
+          <a:fillRef idx="3">
+            <a:schemeClr val="accent1"/>
+          </a:fillRef>
+          <a:effectRef idx="2">
+            <a:schemeClr val="accent1"/>
+          </a:effectRef>
+          <a:fontRef idx="minor">
+            <a:schemeClr val="lt1"/>
+          </a:fontRef>
+        </p:style>
+        <p:txBody>
+          <a:bodyPr rtlCol="0" anchor="ctr"/>
+          <a:lstStyle/>
+          <a:p>
+            <a:pPr algn="ctr"/>
+          </a:p>
+        </p:txBody>
+      </p:sp>
+      <p:sp>
+        <p:nvSpPr>
+          <p:cNvPr id="14" name="Rounded Rectangle 13"/>
+          <p:cNvSpPr/>
+          <p:nvPr/>
+        </p:nvSpPr>
+        <p:spPr>
+          <a:xfrm>
+            <a:off x="7636154" y="2159812"/>
+            <a:ext cx="845820" cy="119091"/>
+          </a:xfrm>
+          <a:prstGeom prst="roundRect">
+            <a:avLst>
+              <a:gd name="adj" fmla="val 50000"/>
+            </a:avLst>
+          </a:prstGeom>
+          <a:solidFill>
+            <a:srgbClr val="6B4A34"/>
+          </a:solidFill>
+          <a:ln>
+            <a:noFill/>
+          </a:ln>
+          <a:effectLst/>
+        </p:spPr>
+        <p:style>
+          <a:lnRef idx="1">
+            <a:schemeClr val="accent1"/>
+          </a:lnRef>
+          <a:fillRef idx="3">
+            <a:schemeClr val="accent1"/>
+          </a:fillRef>
+          <a:effectRef idx="2">
+            <a:schemeClr val="accent1"/>
+          </a:effectRef>
+          <a:fontRef idx="minor">
+            <a:schemeClr val="lt1"/>
+          </a:fontRef>
+        </p:style>
+        <p:txBody>
+          <a:bodyPr rtlCol="0" anchor="ctr"/>
+          <a:lstStyle/>
+          <a:p>
+            <a:pPr algn="ctr"/>
+          </a:p>
+        </p:txBody>
+      </p:sp>
+      <p:sp>
+        <p:nvSpPr>
+          <p:cNvPr id="15" name="Rounded Rectangle 14"/>
+          <p:cNvSpPr/>
+          <p:nvPr/>
+        </p:nvSpPr>
+        <p:spPr>
+          <a:xfrm>
+            <a:off x="7636154" y="2506260"/>
+            <a:ext cx="1150315" cy="97438"/>
+          </a:xfrm>
+          <a:prstGeom prst="roundRect">
+            <a:avLst>
+              <a:gd name="adj" fmla="val 50000"/>
+            </a:avLst>
+          </a:prstGeom>
+          <a:solidFill>
+            <a:srgbClr val="E4D5C0"/>
+          </a:solidFill>
+          <a:ln>
+            <a:noFill/>
+          </a:ln>
+          <a:effectLst/>
+        </p:spPr>
+        <p:style>
+          <a:lnRef idx="1">
+            <a:schemeClr val="accent1"/>
+          </a:lnRef>
+          <a:fillRef idx="3">
+            <a:schemeClr val="accent1"/>
+          </a:fillRef>
+          <a:effectRef idx="2">
+            <a:schemeClr val="accent1"/>
+          </a:effectRef>
+          <a:fontRef idx="minor">
+            <a:schemeClr val="lt1"/>
+          </a:fontRef>
+        </p:style>
+        <p:txBody>
+          <a:bodyPr rtlCol="0" anchor="ctr"/>
+          <a:lstStyle/>
+          <a:p>
+            <a:pPr algn="ctr"/>
+          </a:p>
+        </p:txBody>
+      </p:sp>
+      <p:sp>
+        <p:nvSpPr>
+          <p:cNvPr id="16" name="Rounded Rectangle 15"/>
+          <p:cNvSpPr/>
+          <p:nvPr/>
+        </p:nvSpPr>
+        <p:spPr>
+          <a:xfrm>
+            <a:off x="7636154" y="2766096"/>
+            <a:ext cx="1014984" cy="97438"/>
+          </a:xfrm>
+          <a:prstGeom prst="roundRect">
+            <a:avLst>
+              <a:gd name="adj" fmla="val 50000"/>
+            </a:avLst>
+          </a:prstGeom>
+          <a:solidFill>
+            <a:srgbClr val="E4D5C0"/>
+          </a:solidFill>
+          <a:ln>
+            <a:noFill/>
+          </a:ln>
+          <a:effectLst/>
+        </p:spPr>
+        <p:style>
+          <a:lnRef idx="1">
+            <a:schemeClr val="accent1"/>
+          </a:lnRef>
+          <a:fillRef idx="3">
+            <a:schemeClr val="accent1"/>
+          </a:fillRef>
+          <a:effectRef idx="2">
+            <a:schemeClr val="accent1"/>
+          </a:effectRef>
+          <a:fontRef idx="minor">
+            <a:schemeClr val="lt1"/>
+          </a:fontRef>
+        </p:style>
+        <p:txBody>
+          <a:bodyPr rtlCol="0" anchor="ctr"/>
+          <a:lstStyle/>
+          <a:p>
+            <a:pPr algn="ctr"/>
+          </a:p>
+        </p:txBody>
+      </p:sp>
+      <p:sp>
+        <p:nvSpPr>
+          <p:cNvPr id="17" name="Rounded Rectangle 16"/>
+          <p:cNvSpPr/>
+          <p:nvPr/>
+        </p:nvSpPr>
+        <p:spPr>
+          <a:xfrm>
+            <a:off x="7636154" y="3025932"/>
+            <a:ext cx="1116482" cy="97438"/>
+          </a:xfrm>
+          <a:prstGeom prst="roundRect">
+            <a:avLst>
+              <a:gd name="adj" fmla="val 50000"/>
+            </a:avLst>
+          </a:prstGeom>
+          <a:solidFill>
+            <a:srgbClr val="E4D5C0"/>
+          </a:solidFill>
+          <a:ln>
+            <a:noFill/>
+          </a:ln>
+          <a:effectLst/>
+        </p:spPr>
+        <p:style>
+          <a:lnRef idx="1">
+            <a:schemeClr val="accent1"/>
+          </a:lnRef>
+          <a:fillRef idx="3">
+            <a:schemeClr val="accent1"/>
+          </a:fillRef>
+          <a:effectRef idx="2">
+            <a:schemeClr val="accent1"/>
+          </a:effectRef>
+          <a:fontRef idx="minor">
+            <a:schemeClr val="lt1"/>
+          </a:fontRef>
+        </p:style>
+        <p:txBody>
+          <a:bodyPr rtlCol="0" anchor="ctr"/>
+          <a:lstStyle/>
+          <a:p>
+            <a:pPr algn="ctr"/>
+          </a:p>
+        </p:txBody>
+      </p:sp>
+      <p:sp>
+        <p:nvSpPr>
+          <p:cNvPr id="18" name="Rounded Rectangle 17"/>
+          <p:cNvSpPr/>
+          <p:nvPr/>
+        </p:nvSpPr>
+        <p:spPr>
+          <a:xfrm>
+            <a:off x="7636154" y="3285768"/>
+            <a:ext cx="710488" cy="97438"/>
+          </a:xfrm>
+          <a:prstGeom prst="roundRect">
+            <a:avLst>
+              <a:gd name="adj" fmla="val 50000"/>
+            </a:avLst>
+          </a:prstGeom>
+          <a:solidFill>
+            <a:srgbClr val="E4D5C0"/>
+          </a:solidFill>
+          <a:ln>
+            <a:noFill/>
+          </a:ln>
+          <a:effectLst/>
+        </p:spPr>
+        <p:style>
+          <a:lnRef idx="1">
+            <a:schemeClr val="accent1"/>
+          </a:lnRef>
+          <a:fillRef idx="3">
+            <a:schemeClr val="accent1"/>
+          </a:fillRef>
+          <a:effectRef idx="2">
+            <a:schemeClr val="accent1"/>
+          </a:effectRef>
+          <a:fontRef idx="minor">
+            <a:schemeClr val="lt1"/>
+          </a:fontRef>
+        </p:style>
+        <p:txBody>
+          <a:bodyPr rtlCol="0" anchor="ctr"/>
+          <a:lstStyle/>
+          <a:p>
+            <a:pPr algn="ctr"/>
+          </a:p>
+        </p:txBody>
+      </p:sp>
+      <p:sp>
+        <p:nvSpPr>
+          <p:cNvPr id="19" name="TextBox 18"/>
+          <p:cNvSpPr txBox="1"/>
+          <p:nvPr/>
+        </p:nvSpPr>
+        <p:spPr>
+          <a:xfrm>
+            <a:off x="7365492" y="3253288"/>
+            <a:ext cx="1691640" cy="736201"/>
+          </a:xfrm>
+          <a:prstGeom prst="rect">
+            <a:avLst/>
+          </a:prstGeom>
+          <a:noFill/>
+        </p:spPr>
+        <p:txBody>
+          <a:bodyPr wrap="square" anchor="ctr" lIns="0" rIns="0" tIns="0" bIns="0">
+            <a:spAutoFit/>
+          </a:bodyPr>
+          <a:lstStyle/>
+          <a:p>
+            <a:pPr algn="ctr">
+              <a:lnSpc>
+                <a:spcPct val="100000"/>
+              </a:lnSpc>
+            </a:pPr>
+            <a:r>
+              <a:rPr sz="4000" b="0" i="0">
+                <a:solidFill>
+                  <a:srgbClr val="6B4A34"/>
+                </a:solidFill>
+                <a:latin typeface="Calibri"/>
+              </a:rPr>
+              <a:t>♂</a:t>
+            </a:r>
+          </a:p>
+        </p:txBody>
+      </p:sp>
+      <p:sp>
+        <p:nvSpPr>
+          <p:cNvPr id="20" name="TextBox 19"/>
+          <p:cNvSpPr txBox="1"/>
+          <p:nvPr/>
+        </p:nvSpPr>
+        <p:spPr>
+          <a:xfrm>
+            <a:off x="975207" y="4572000"/>
+            <a:ext cx="10241280" cy="548640"/>
+          </a:xfrm>
+          <a:prstGeom prst="rect">
+            <a:avLst/>
+          </a:prstGeom>
+          <a:noFill/>
+        </p:spPr>
+        <p:txBody>
+          <a:bodyPr wrap="square" anchor="ctr" lIns="0" rIns="0" tIns="0" bIns="0">
+            <a:spAutoFit/>
+          </a:bodyPr>
+          <a:lstStyle/>
+          <a:p>
+            <a:pPr algn="ctr">
+              <a:lnSpc>
+                <a:spcPct val="100000"/>
+              </a:lnSpc>
+            </a:pPr>
+            <a:r>
               <a:rPr sz="2400" b="1" i="0">
                 <a:solidFill>
-                  <a:srgbClr val="463A53"/>
+                  <a:srgbClr val="3E2C1E"/>
                 </a:solidFill>
-                <a:latin typeface="Century Gothic"/>
+                <a:latin typeface="Georgia"/>
               </a:rPr>
-              <a:t>Bias was found in the West — now tested in Japan</a:t>
-            </a:r>
-          </a:p>
-        </p:txBody>
-      </p:sp>
-      <p:sp>
-        <p:nvSpPr>
-          <p:cNvPr id="14" name="Rectangle 13"/>
-          <p:cNvSpPr/>
-          <p:nvPr/>
-        </p:nvSpPr>
-        <p:spPr>
-          <a:xfrm>
-            <a:off x="0" y="6803136"/>
-            <a:ext cx="2194560" cy="54864"/>
+              <a:t>Identical Japanese résumés — only the name differs</a:t>
+            </a:r>
+          </a:p>
+        </p:txBody>
+      </p:sp>
+      <p:sp>
+        <p:nvSpPr>
+          <p:cNvPr id="21" name="TextBox 20"/>
+          <p:cNvSpPr txBox="1"/>
+          <p:nvPr/>
+        </p:nvSpPr>
+        <p:spPr>
+          <a:xfrm>
+            <a:off x="2438247" y="5230368"/>
+            <a:ext cx="7315200" cy="365760"/>
           </a:xfrm>
           <a:prstGeom prst="rect">
             <a:avLst/>
           </a:prstGeom>
-          <a:solidFill>
-            <a:srgbClr val="E07AA8"/>
+          <a:noFill/>
+        </p:spPr>
+        <p:txBody>
+          <a:bodyPr wrap="square" anchor="ctr" lIns="0" rIns="0" tIns="0" bIns="0">
+            <a:spAutoFit/>
+          </a:bodyPr>
+          <a:lstStyle/>
+          <a:p>
+            <a:pPr algn="ctr">
+              <a:lnSpc>
+                <a:spcPct val="100000"/>
+              </a:lnSpc>
+            </a:pPr>
+            <a:r>
+              <a:rPr sz="1150" b="1" i="0" spc="260">
+                <a:solidFill>
+                  <a:srgbClr val="A9744F"/>
+                </a:solidFill>
+                <a:latin typeface="Calibri"/>
+              </a:rPr>
+              <a:t>FIVE AI MODELS SCORED EACH RÉSUMÉ</a:t>
+            </a:r>
+          </a:p>
+        </p:txBody>
+      </p:sp>
+      <p:sp>
+        <p:nvSpPr>
+          <p:cNvPr id="22" name="Rounded Rectangle 21"/>
+          <p:cNvSpPr/>
+          <p:nvPr/>
+        </p:nvSpPr>
+        <p:spPr>
+          <a:xfrm>
+            <a:off x="1126083" y="5650992"/>
+            <a:ext cx="1783080" cy="658368"/>
+          </a:xfrm>
+          <a:prstGeom prst="roundRect">
+            <a:avLst>
+              <a:gd name="adj" fmla="val 50000"/>
+            </a:avLst>
+          </a:prstGeom>
+          <a:solidFill>
+            <a:srgbClr val="FCF7EF"/>
+          </a:solidFill>
+          <a:ln w="15240">
+            <a:solidFill>
+              <a:srgbClr val="E4D5C0"/>
+            </a:solidFill>
+          </a:ln>
+          <a:effectLst>
+            <a:outerShdw blurRad="254000" dist="139700" dir="5400000" rotWithShape="0">
+              <a:srgbClr val="6B4A34">
+                <a:alpha val="76000"/>
+              </a:srgbClr>
+            </a:outerShdw>
+          </a:effectLst>
+        </p:spPr>
+        <p:style>
+          <a:lnRef idx="1">
+            <a:schemeClr val="accent1"/>
+          </a:lnRef>
+          <a:fillRef idx="3">
+            <a:schemeClr val="accent1"/>
+          </a:fillRef>
+          <a:effectRef idx="2">
+            <a:schemeClr val="accent1"/>
+          </a:effectRef>
+          <a:fontRef idx="minor">
+            <a:schemeClr val="lt1"/>
+          </a:fontRef>
+        </p:style>
+        <p:txBody>
+          <a:bodyPr rtlCol="0" anchor="ctr"/>
+          <a:lstStyle/>
+          <a:p>
+            <a:pPr algn="ctr"/>
+          </a:p>
+        </p:txBody>
+      </p:sp>
+      <p:sp>
+        <p:nvSpPr>
+          <p:cNvPr id="23" name="Oval 22"/>
+          <p:cNvSpPr/>
+          <p:nvPr/>
+        </p:nvSpPr>
+        <p:spPr>
+          <a:xfrm>
+            <a:off x="1363827" y="5916168"/>
+            <a:ext cx="137160" cy="137160"/>
+          </a:xfrm>
+          <a:prstGeom prst="ellipse">
+            <a:avLst/>
+          </a:prstGeom>
+          <a:solidFill>
+            <a:srgbClr val="B0563A"/>
           </a:solidFill>
           <a:ln>
             <a:noFill/>
@@ -7999,13 +8356,644 @@
       </p:sp>
       <p:sp>
         <p:nvSpPr>
-          <p:cNvPr id="15" name="TextBox 14"/>
+          <p:cNvPr id="24" name="TextBox 23"/>
           <p:cNvSpPr txBox="1"/>
           <p:nvPr/>
         </p:nvSpPr>
         <p:spPr>
           <a:xfrm>
-            <a:off x="11002975" y="6355080"/>
+            <a:off x="1491843" y="5650992"/>
+            <a:ext cx="1325880" cy="658368"/>
+          </a:xfrm>
+          <a:prstGeom prst="rect">
+            <a:avLst/>
+          </a:prstGeom>
+          <a:noFill/>
+        </p:spPr>
+        <p:txBody>
+          <a:bodyPr wrap="square" anchor="ctr" lIns="0" rIns="0" tIns="0" bIns="0">
+            <a:spAutoFit/>
+          </a:bodyPr>
+          <a:lstStyle/>
+          <a:p>
+            <a:pPr algn="l">
+              <a:lnSpc>
+                <a:spcPct val="100000"/>
+              </a:lnSpc>
+            </a:pPr>
+            <a:r>
+              <a:rPr sz="1500" b="1" i="0">
+                <a:solidFill>
+                  <a:srgbClr val="6B4A34"/>
+                </a:solidFill>
+                <a:latin typeface="Calibri"/>
+              </a:rPr>
+              <a:t>ChatGPT</a:t>
+            </a:r>
+          </a:p>
+        </p:txBody>
+      </p:sp>
+      <p:sp>
+        <p:nvSpPr>
+          <p:cNvPr id="25" name="Rounded Rectangle 24"/>
+          <p:cNvSpPr/>
+          <p:nvPr/>
+        </p:nvSpPr>
+        <p:spPr>
+          <a:xfrm>
+            <a:off x="3165195" y="5650992"/>
+            <a:ext cx="1783080" cy="658368"/>
+          </a:xfrm>
+          <a:prstGeom prst="roundRect">
+            <a:avLst>
+              <a:gd name="adj" fmla="val 50000"/>
+            </a:avLst>
+          </a:prstGeom>
+          <a:solidFill>
+            <a:srgbClr val="FCF7EF"/>
+          </a:solidFill>
+          <a:ln w="15240">
+            <a:solidFill>
+              <a:srgbClr val="E4D5C0"/>
+            </a:solidFill>
+          </a:ln>
+          <a:effectLst>
+            <a:outerShdw blurRad="254000" dist="139700" dir="5400000" rotWithShape="0">
+              <a:srgbClr val="6B4A34">
+                <a:alpha val="76000"/>
+              </a:srgbClr>
+            </a:outerShdw>
+          </a:effectLst>
+        </p:spPr>
+        <p:style>
+          <a:lnRef idx="1">
+            <a:schemeClr val="accent1"/>
+          </a:lnRef>
+          <a:fillRef idx="3">
+            <a:schemeClr val="accent1"/>
+          </a:fillRef>
+          <a:effectRef idx="2">
+            <a:schemeClr val="accent1"/>
+          </a:effectRef>
+          <a:fontRef idx="minor">
+            <a:schemeClr val="lt1"/>
+          </a:fontRef>
+        </p:style>
+        <p:txBody>
+          <a:bodyPr rtlCol="0" anchor="ctr"/>
+          <a:lstStyle/>
+          <a:p>
+            <a:pPr algn="ctr"/>
+          </a:p>
+        </p:txBody>
+      </p:sp>
+      <p:sp>
+        <p:nvSpPr>
+          <p:cNvPr id="26" name="Oval 25"/>
+          <p:cNvSpPr/>
+          <p:nvPr/>
+        </p:nvSpPr>
+        <p:spPr>
+          <a:xfrm>
+            <a:off x="3402939" y="5916168"/>
+            <a:ext cx="137160" cy="137160"/>
+          </a:xfrm>
+          <a:prstGeom prst="ellipse">
+            <a:avLst/>
+          </a:prstGeom>
+          <a:solidFill>
+            <a:srgbClr val="A9744F"/>
+          </a:solidFill>
+          <a:ln>
+            <a:noFill/>
+          </a:ln>
+          <a:effectLst/>
+        </p:spPr>
+        <p:style>
+          <a:lnRef idx="1">
+            <a:schemeClr val="accent1"/>
+          </a:lnRef>
+          <a:fillRef idx="3">
+            <a:schemeClr val="accent1"/>
+          </a:fillRef>
+          <a:effectRef idx="2">
+            <a:schemeClr val="accent1"/>
+          </a:effectRef>
+          <a:fontRef idx="minor">
+            <a:schemeClr val="lt1"/>
+          </a:fontRef>
+        </p:style>
+        <p:txBody>
+          <a:bodyPr rtlCol="0" anchor="ctr"/>
+          <a:lstStyle/>
+          <a:p>
+            <a:pPr algn="ctr"/>
+          </a:p>
+        </p:txBody>
+      </p:sp>
+      <p:sp>
+        <p:nvSpPr>
+          <p:cNvPr id="27" name="TextBox 26"/>
+          <p:cNvSpPr txBox="1"/>
+          <p:nvPr/>
+        </p:nvSpPr>
+        <p:spPr>
+          <a:xfrm>
+            <a:off x="3530955" y="5650992"/>
+            <a:ext cx="1325880" cy="658368"/>
+          </a:xfrm>
+          <a:prstGeom prst="rect">
+            <a:avLst/>
+          </a:prstGeom>
+          <a:noFill/>
+        </p:spPr>
+        <p:txBody>
+          <a:bodyPr wrap="square" anchor="ctr" lIns="0" rIns="0" tIns="0" bIns="0">
+            <a:spAutoFit/>
+          </a:bodyPr>
+          <a:lstStyle/>
+          <a:p>
+            <a:pPr algn="l">
+              <a:lnSpc>
+                <a:spcPct val="100000"/>
+              </a:lnSpc>
+            </a:pPr>
+            <a:r>
+              <a:rPr sz="1500" b="1" i="0">
+                <a:solidFill>
+                  <a:srgbClr val="6B4A34"/>
+                </a:solidFill>
+                <a:latin typeface="Calibri"/>
+              </a:rPr>
+              <a:t>Claude</a:t>
+            </a:r>
+          </a:p>
+        </p:txBody>
+      </p:sp>
+      <p:sp>
+        <p:nvSpPr>
+          <p:cNvPr id="28" name="Rounded Rectangle 27"/>
+          <p:cNvSpPr/>
+          <p:nvPr/>
+        </p:nvSpPr>
+        <p:spPr>
+          <a:xfrm>
+            <a:off x="5204307" y="5650992"/>
+            <a:ext cx="1783080" cy="658368"/>
+          </a:xfrm>
+          <a:prstGeom prst="roundRect">
+            <a:avLst>
+              <a:gd name="adj" fmla="val 50000"/>
+            </a:avLst>
+          </a:prstGeom>
+          <a:solidFill>
+            <a:srgbClr val="FCF7EF"/>
+          </a:solidFill>
+          <a:ln w="15240">
+            <a:solidFill>
+              <a:srgbClr val="E4D5C0"/>
+            </a:solidFill>
+          </a:ln>
+          <a:effectLst>
+            <a:outerShdw blurRad="254000" dist="139700" dir="5400000" rotWithShape="0">
+              <a:srgbClr val="6B4A34">
+                <a:alpha val="76000"/>
+              </a:srgbClr>
+            </a:outerShdw>
+          </a:effectLst>
+        </p:spPr>
+        <p:style>
+          <a:lnRef idx="1">
+            <a:schemeClr val="accent1"/>
+          </a:lnRef>
+          <a:fillRef idx="3">
+            <a:schemeClr val="accent1"/>
+          </a:fillRef>
+          <a:effectRef idx="2">
+            <a:schemeClr val="accent1"/>
+          </a:effectRef>
+          <a:fontRef idx="minor">
+            <a:schemeClr val="lt1"/>
+          </a:fontRef>
+        </p:style>
+        <p:txBody>
+          <a:bodyPr rtlCol="0" anchor="ctr"/>
+          <a:lstStyle/>
+          <a:p>
+            <a:pPr algn="ctr"/>
+          </a:p>
+        </p:txBody>
+      </p:sp>
+      <p:sp>
+        <p:nvSpPr>
+          <p:cNvPr id="29" name="Oval 28"/>
+          <p:cNvSpPr/>
+          <p:nvPr/>
+        </p:nvSpPr>
+        <p:spPr>
+          <a:xfrm>
+            <a:off x="5442051" y="5916168"/>
+            <a:ext cx="137160" cy="137160"/>
+          </a:xfrm>
+          <a:prstGeom prst="ellipse">
+            <a:avLst/>
+          </a:prstGeom>
+          <a:solidFill>
+            <a:srgbClr val="B0563A"/>
+          </a:solidFill>
+          <a:ln>
+            <a:noFill/>
+          </a:ln>
+          <a:effectLst/>
+        </p:spPr>
+        <p:style>
+          <a:lnRef idx="1">
+            <a:schemeClr val="accent1"/>
+          </a:lnRef>
+          <a:fillRef idx="3">
+            <a:schemeClr val="accent1"/>
+          </a:fillRef>
+          <a:effectRef idx="2">
+            <a:schemeClr val="accent1"/>
+          </a:effectRef>
+          <a:fontRef idx="minor">
+            <a:schemeClr val="lt1"/>
+          </a:fontRef>
+        </p:style>
+        <p:txBody>
+          <a:bodyPr rtlCol="0" anchor="ctr"/>
+          <a:lstStyle/>
+          <a:p>
+            <a:pPr algn="ctr"/>
+          </a:p>
+        </p:txBody>
+      </p:sp>
+      <p:sp>
+        <p:nvSpPr>
+          <p:cNvPr id="30" name="TextBox 29"/>
+          <p:cNvSpPr txBox="1"/>
+          <p:nvPr/>
+        </p:nvSpPr>
+        <p:spPr>
+          <a:xfrm>
+            <a:off x="5570067" y="5650992"/>
+            <a:ext cx="1325880" cy="658368"/>
+          </a:xfrm>
+          <a:prstGeom prst="rect">
+            <a:avLst/>
+          </a:prstGeom>
+          <a:noFill/>
+        </p:spPr>
+        <p:txBody>
+          <a:bodyPr wrap="square" anchor="ctr" lIns="0" rIns="0" tIns="0" bIns="0">
+            <a:spAutoFit/>
+          </a:bodyPr>
+          <a:lstStyle/>
+          <a:p>
+            <a:pPr algn="l">
+              <a:lnSpc>
+                <a:spcPct val="100000"/>
+              </a:lnSpc>
+            </a:pPr>
+            <a:r>
+              <a:rPr sz="1500" b="1" i="0">
+                <a:solidFill>
+                  <a:srgbClr val="6B4A34"/>
+                </a:solidFill>
+                <a:latin typeface="Calibri"/>
+              </a:rPr>
+              <a:t>Gemini</a:t>
+            </a:r>
+          </a:p>
+        </p:txBody>
+      </p:sp>
+      <p:sp>
+        <p:nvSpPr>
+          <p:cNvPr id="31" name="Rounded Rectangle 30"/>
+          <p:cNvSpPr/>
+          <p:nvPr/>
+        </p:nvSpPr>
+        <p:spPr>
+          <a:xfrm>
+            <a:off x="7243419" y="5650992"/>
+            <a:ext cx="1783080" cy="658368"/>
+          </a:xfrm>
+          <a:prstGeom prst="roundRect">
+            <a:avLst>
+              <a:gd name="adj" fmla="val 50000"/>
+            </a:avLst>
+          </a:prstGeom>
+          <a:solidFill>
+            <a:srgbClr val="FCF7EF"/>
+          </a:solidFill>
+          <a:ln w="15240">
+            <a:solidFill>
+              <a:srgbClr val="E4D5C0"/>
+            </a:solidFill>
+          </a:ln>
+          <a:effectLst>
+            <a:outerShdw blurRad="254000" dist="139700" dir="5400000" rotWithShape="0">
+              <a:srgbClr val="6B4A34">
+                <a:alpha val="76000"/>
+              </a:srgbClr>
+            </a:outerShdw>
+          </a:effectLst>
+        </p:spPr>
+        <p:style>
+          <a:lnRef idx="1">
+            <a:schemeClr val="accent1"/>
+          </a:lnRef>
+          <a:fillRef idx="3">
+            <a:schemeClr val="accent1"/>
+          </a:fillRef>
+          <a:effectRef idx="2">
+            <a:schemeClr val="accent1"/>
+          </a:effectRef>
+          <a:fontRef idx="minor">
+            <a:schemeClr val="lt1"/>
+          </a:fontRef>
+        </p:style>
+        <p:txBody>
+          <a:bodyPr rtlCol="0" anchor="ctr"/>
+          <a:lstStyle/>
+          <a:p>
+            <a:pPr algn="ctr"/>
+          </a:p>
+        </p:txBody>
+      </p:sp>
+      <p:sp>
+        <p:nvSpPr>
+          <p:cNvPr id="32" name="Oval 31"/>
+          <p:cNvSpPr/>
+          <p:nvPr/>
+        </p:nvSpPr>
+        <p:spPr>
+          <a:xfrm>
+            <a:off x="7481163" y="5916168"/>
+            <a:ext cx="137160" cy="137160"/>
+          </a:xfrm>
+          <a:prstGeom prst="ellipse">
+            <a:avLst/>
+          </a:prstGeom>
+          <a:solidFill>
+            <a:srgbClr val="A9744F"/>
+          </a:solidFill>
+          <a:ln>
+            <a:noFill/>
+          </a:ln>
+          <a:effectLst/>
+        </p:spPr>
+        <p:style>
+          <a:lnRef idx="1">
+            <a:schemeClr val="accent1"/>
+          </a:lnRef>
+          <a:fillRef idx="3">
+            <a:schemeClr val="accent1"/>
+          </a:fillRef>
+          <a:effectRef idx="2">
+            <a:schemeClr val="accent1"/>
+          </a:effectRef>
+          <a:fontRef idx="minor">
+            <a:schemeClr val="lt1"/>
+          </a:fontRef>
+        </p:style>
+        <p:txBody>
+          <a:bodyPr rtlCol="0" anchor="ctr"/>
+          <a:lstStyle/>
+          <a:p>
+            <a:pPr algn="ctr"/>
+          </a:p>
+        </p:txBody>
+      </p:sp>
+      <p:sp>
+        <p:nvSpPr>
+          <p:cNvPr id="33" name="TextBox 32"/>
+          <p:cNvSpPr txBox="1"/>
+          <p:nvPr/>
+        </p:nvSpPr>
+        <p:spPr>
+          <a:xfrm>
+            <a:off x="7609179" y="5650992"/>
+            <a:ext cx="1325880" cy="658368"/>
+          </a:xfrm>
+          <a:prstGeom prst="rect">
+            <a:avLst/>
+          </a:prstGeom>
+          <a:noFill/>
+        </p:spPr>
+        <p:txBody>
+          <a:bodyPr wrap="square" anchor="ctr" lIns="0" rIns="0" tIns="0" bIns="0">
+            <a:spAutoFit/>
+          </a:bodyPr>
+          <a:lstStyle/>
+          <a:p>
+            <a:pPr algn="l">
+              <a:lnSpc>
+                <a:spcPct val="100000"/>
+              </a:lnSpc>
+            </a:pPr>
+            <a:r>
+              <a:rPr sz="1500" b="1" i="0">
+                <a:solidFill>
+                  <a:srgbClr val="6B4A34"/>
+                </a:solidFill>
+                <a:latin typeface="Calibri"/>
+              </a:rPr>
+              <a:t>DeepSeek</a:t>
+            </a:r>
+          </a:p>
+        </p:txBody>
+      </p:sp>
+      <p:sp>
+        <p:nvSpPr>
+          <p:cNvPr id="34" name="Rounded Rectangle 33"/>
+          <p:cNvSpPr/>
+          <p:nvPr/>
+        </p:nvSpPr>
+        <p:spPr>
+          <a:xfrm>
+            <a:off x="9282531" y="5650992"/>
+            <a:ext cx="1783080" cy="658368"/>
+          </a:xfrm>
+          <a:prstGeom prst="roundRect">
+            <a:avLst>
+              <a:gd name="adj" fmla="val 50000"/>
+            </a:avLst>
+          </a:prstGeom>
+          <a:solidFill>
+            <a:srgbClr val="FCF7EF"/>
+          </a:solidFill>
+          <a:ln w="15240">
+            <a:solidFill>
+              <a:srgbClr val="E4D5C0"/>
+            </a:solidFill>
+          </a:ln>
+          <a:effectLst>
+            <a:outerShdw blurRad="254000" dist="139700" dir="5400000" rotWithShape="0">
+              <a:srgbClr val="6B4A34">
+                <a:alpha val="76000"/>
+              </a:srgbClr>
+            </a:outerShdw>
+          </a:effectLst>
+        </p:spPr>
+        <p:style>
+          <a:lnRef idx="1">
+            <a:schemeClr val="accent1"/>
+          </a:lnRef>
+          <a:fillRef idx="3">
+            <a:schemeClr val="accent1"/>
+          </a:fillRef>
+          <a:effectRef idx="2">
+            <a:schemeClr val="accent1"/>
+          </a:effectRef>
+          <a:fontRef idx="minor">
+            <a:schemeClr val="lt1"/>
+          </a:fontRef>
+        </p:style>
+        <p:txBody>
+          <a:bodyPr rtlCol="0" anchor="ctr"/>
+          <a:lstStyle/>
+          <a:p>
+            <a:pPr algn="ctr"/>
+          </a:p>
+        </p:txBody>
+      </p:sp>
+      <p:sp>
+        <p:nvSpPr>
+          <p:cNvPr id="35" name="Oval 34"/>
+          <p:cNvSpPr/>
+          <p:nvPr/>
+        </p:nvSpPr>
+        <p:spPr>
+          <a:xfrm>
+            <a:off x="9520275" y="5916168"/>
+            <a:ext cx="137160" cy="137160"/>
+          </a:xfrm>
+          <a:prstGeom prst="ellipse">
+            <a:avLst/>
+          </a:prstGeom>
+          <a:solidFill>
+            <a:srgbClr val="B0563A"/>
+          </a:solidFill>
+          <a:ln>
+            <a:noFill/>
+          </a:ln>
+          <a:effectLst/>
+        </p:spPr>
+        <p:style>
+          <a:lnRef idx="1">
+            <a:schemeClr val="accent1"/>
+          </a:lnRef>
+          <a:fillRef idx="3">
+            <a:schemeClr val="accent1"/>
+          </a:fillRef>
+          <a:effectRef idx="2">
+            <a:schemeClr val="accent1"/>
+          </a:effectRef>
+          <a:fontRef idx="minor">
+            <a:schemeClr val="lt1"/>
+          </a:fontRef>
+        </p:style>
+        <p:txBody>
+          <a:bodyPr rtlCol="0" anchor="ctr"/>
+          <a:lstStyle/>
+          <a:p>
+            <a:pPr algn="ctr"/>
+          </a:p>
+        </p:txBody>
+      </p:sp>
+      <p:sp>
+        <p:nvSpPr>
+          <p:cNvPr id="36" name="TextBox 35"/>
+          <p:cNvSpPr txBox="1"/>
+          <p:nvPr/>
+        </p:nvSpPr>
+        <p:spPr>
+          <a:xfrm>
+            <a:off x="9648291" y="5650992"/>
+            <a:ext cx="1325880" cy="658368"/>
+          </a:xfrm>
+          <a:prstGeom prst="rect">
+            <a:avLst/>
+          </a:prstGeom>
+          <a:noFill/>
+        </p:spPr>
+        <p:txBody>
+          <a:bodyPr wrap="square" anchor="ctr" lIns="0" rIns="0" tIns="0" bIns="0">
+            <a:spAutoFit/>
+          </a:bodyPr>
+          <a:lstStyle/>
+          <a:p>
+            <a:pPr algn="l">
+              <a:lnSpc>
+                <a:spcPct val="100000"/>
+              </a:lnSpc>
+            </a:pPr>
+            <a:r>
+              <a:rPr sz="1500" b="1" i="0">
+                <a:solidFill>
+                  <a:srgbClr val="6B4A34"/>
+                </a:solidFill>
+                <a:latin typeface="Calibri"/>
+              </a:rPr>
+              <a:t>Llama</a:t>
+            </a:r>
+          </a:p>
+        </p:txBody>
+      </p:sp>
+      <p:sp>
+        <p:nvSpPr>
+          <p:cNvPr id="37" name="Rectangle 36"/>
+          <p:cNvSpPr/>
+          <p:nvPr/>
+        </p:nvSpPr>
+        <p:spPr>
+          <a:xfrm>
+            <a:off x="0" y="6803136"/>
+            <a:ext cx="1978429" cy="54864"/>
+          </a:xfrm>
+          <a:prstGeom prst="rect">
+            <a:avLst/>
+          </a:prstGeom>
+          <a:solidFill>
+            <a:srgbClr val="A9744F"/>
+          </a:solidFill>
+          <a:ln>
+            <a:noFill/>
+          </a:ln>
+          <a:effectLst/>
+        </p:spPr>
+        <p:style>
+          <a:lnRef idx="1">
+            <a:schemeClr val="accent1"/>
+          </a:lnRef>
+          <a:fillRef idx="3">
+            <a:schemeClr val="accent1"/>
+          </a:fillRef>
+          <a:effectRef idx="2">
+            <a:schemeClr val="accent1"/>
+          </a:effectRef>
+          <a:fontRef idx="minor">
+            <a:schemeClr val="lt1"/>
+          </a:fontRef>
+        </p:style>
+        <p:txBody>
+          <a:bodyPr rtlCol="0" anchor="ctr"/>
+          <a:lstStyle/>
+          <a:p>
+            <a:pPr algn="ctr"/>
+          </a:p>
+        </p:txBody>
+      </p:sp>
+      <p:sp>
+        <p:nvSpPr>
+          <p:cNvPr id="38" name="TextBox 37"/>
+          <p:cNvSpPr txBox="1"/>
+          <p:nvPr/>
+        </p:nvSpPr>
+        <p:spPr>
+          <a:xfrm>
+            <a:off x="11048695" y="6355080"/>
             <a:ext cx="914400" cy="320040"/>
           </a:xfrm>
           <a:prstGeom prst="rect">
@@ -8027,7 +9015,7 @@
             <a:r>
               <a:rPr sz="1100" b="0" i="0">
                 <a:solidFill>
-                  <a:srgbClr val="B0A4BB"/>
+                  <a:srgbClr val="9B8571"/>
                 </a:solidFill>
                 <a:latin typeface="Calibri"/>
               </a:rPr>
@@ -8071,13 +9059,13 @@
           <a:gradFill rotWithShape="1">
             <a:gsLst>
               <a:gs pos="0">
-                <a:srgbClr val="FDEEF4"/>
+                <a:srgbClr val="F5EDDF"/>
               </a:gs>
               <a:gs pos="100000">
-                <a:srgbClr val="E9F1FC"/>
+                <a:srgbClr val="E7D3B8"/>
               </a:gs>
             </a:gsLst>
-            <a:lin scaled="0" ang="13500000"/>
+            <a:lin scaled="0" ang="14400000"/>
           </a:gradFill>
           <a:ln>
             <a:noFill/>
@@ -8136,11 +9124,11 @@
             <a:r>
               <a:rPr sz="1300" b="1" i="0" spc="420">
                 <a:solidFill>
-                  <a:srgbClr val="E888B4"/>
+                  <a:srgbClr val="B0563A"/>
                 </a:solidFill>
-                <a:latin typeface="Century Gothic"/>
+                <a:latin typeface="Calibri"/>
               </a:rPr>
-              <a:t>THE METHOD</a:t>
+              <a:t>THE RESULT</a:t>
             </a:r>
           </a:p>
         </p:txBody>
@@ -8153,15 +9141,15 @@
         </p:nvCxnSpPr>
         <p:spPr>
           <a:xfrm>
-            <a:off x="5775807" y="969264"/>
-            <a:ext cx="640080" cy="0"/>
+            <a:off x="5803239" y="987552"/>
+            <a:ext cx="585216" cy="0"/>
           </a:xfrm>
           <a:prstGeom prst="bentConnector3">
             <a:avLst/>
           </a:prstGeom>
           <a:ln w="27940">
             <a:solidFill>
-              <a:srgbClr val="E888B4"/>
+              <a:srgbClr val="B0563A"/>
             </a:solidFill>
           </a:ln>
           <a:effectLst/>
@@ -8189,8 +9177,8 @@
         </p:nvSpPr>
         <p:spPr>
           <a:xfrm>
-            <a:off x="2880360" y="2258568"/>
-            <a:ext cx="1828800" cy="2340864"/>
+            <a:off x="3268979" y="2745028"/>
+            <a:ext cx="1783080" cy="2282342"/>
           </a:xfrm>
           <a:prstGeom prst="roundRect">
             <a:avLst>
@@ -8198,17 +9186,17 @@
             </a:avLst>
           </a:prstGeom>
           <a:solidFill>
-            <a:srgbClr val="FFFFFF"/>
+            <a:srgbClr val="FCF7EF"/>
           </a:solidFill>
           <a:ln w="16510">
             <a:solidFill>
-              <a:srgbClr val="EFDFE9"/>
+              <a:srgbClr val="E4D5C0"/>
             </a:solidFill>
           </a:ln>
           <a:effectLst>
-            <a:outerShdw blurRad="228600" dist="127000" dir="5400000" rotWithShape="0">
-              <a:srgbClr val="C880A8">
-                <a:alpha val="78000"/>
+            <a:outerShdw blurRad="254000" dist="139700" dir="5400000" rotWithShape="0">
+              <a:srgbClr val="6B4A34">
+                <a:alpha val="76000"/>
               </a:srgbClr>
             </a:outerShdw>
           </a:effectLst>
@@ -8243,8 +9231,8 @@
         </p:nvSpPr>
         <p:spPr>
           <a:xfrm>
-            <a:off x="3172968" y="2551175"/>
-            <a:ext cx="914400" cy="128747"/>
+            <a:off x="3554272" y="3030321"/>
+            <a:ext cx="891540" cy="125528"/>
           </a:xfrm>
           <a:prstGeom prst="roundRect">
             <a:avLst>
@@ -8252,7 +9240,7 @@
             </a:avLst>
           </a:prstGeom>
           <a:solidFill>
-            <a:srgbClr val="E888B4"/>
+            <a:srgbClr val="6B4A34"/>
           </a:solidFill>
           <a:ln>
             <a:noFill/>
@@ -8289,8 +9277,8 @@
         </p:nvSpPr>
         <p:spPr>
           <a:xfrm>
-            <a:off x="3172968" y="2925714"/>
-            <a:ext cx="1243584" cy="105338"/>
+            <a:off x="3554272" y="3395496"/>
+            <a:ext cx="1212494" cy="102705"/>
           </a:xfrm>
           <a:prstGeom prst="roundRect">
             <a:avLst>
@@ -8298,7 +9286,7 @@
             </a:avLst>
           </a:prstGeom>
           <a:solidFill>
-            <a:srgbClr val="EFDFE9"/>
+            <a:srgbClr val="E4D5C0"/>
           </a:solidFill>
           <a:ln>
             <a:noFill/>
@@ -8335,8 +9323,8 @@
         </p:nvSpPr>
         <p:spPr>
           <a:xfrm>
-            <a:off x="3172968" y="3206617"/>
-            <a:ext cx="1097280" cy="105338"/>
+            <a:off x="3554272" y="3669377"/>
+            <a:ext cx="1069848" cy="102705"/>
           </a:xfrm>
           <a:prstGeom prst="roundRect">
             <a:avLst>
@@ -8344,7 +9332,7 @@
             </a:avLst>
           </a:prstGeom>
           <a:solidFill>
-            <a:srgbClr val="EFDFE9"/>
+            <a:srgbClr val="E4D5C0"/>
           </a:solidFill>
           <a:ln>
             <a:noFill/>
@@ -8381,8 +9369,8 @@
         </p:nvSpPr>
         <p:spPr>
           <a:xfrm>
-            <a:off x="3172968" y="3487521"/>
-            <a:ext cx="1207008" cy="105338"/>
+            <a:off x="3554272" y="3943258"/>
+            <a:ext cx="1176832" cy="102705"/>
           </a:xfrm>
           <a:prstGeom prst="roundRect">
             <a:avLst>
@@ -8390,7 +9378,7 @@
             </a:avLst>
           </a:prstGeom>
           <a:solidFill>
-            <a:srgbClr val="EFDFE9"/>
+            <a:srgbClr val="E4D5C0"/>
           </a:solidFill>
           <a:ln>
             <a:noFill/>
@@ -8427,8 +9415,8 @@
         </p:nvSpPr>
         <p:spPr>
           <a:xfrm>
-            <a:off x="3172968" y="3768425"/>
-            <a:ext cx="768096" cy="105338"/>
+            <a:off x="3554272" y="4217139"/>
+            <a:ext cx="748893" cy="102705"/>
           </a:xfrm>
           <a:prstGeom prst="roundRect">
             <a:avLst>
@@ -8436,7 +9424,7 @@
             </a:avLst>
           </a:prstGeom>
           <a:solidFill>
-            <a:srgbClr val="EFDFE9"/>
+            <a:srgbClr val="E4D5C0"/>
           </a:solidFill>
           <a:ln>
             <a:noFill/>
@@ -8473,8 +9461,8 @@
         </p:nvSpPr>
         <p:spPr>
           <a:xfrm>
-            <a:off x="2880360" y="3803538"/>
-            <a:ext cx="1828800" cy="702259"/>
+            <a:off x="3268979" y="4182904"/>
+            <a:ext cx="1783080" cy="775996"/>
           </a:xfrm>
           <a:prstGeom prst="rect">
             <a:avLst/>
@@ -8493,13 +9481,13 @@
               </a:lnSpc>
             </a:pPr>
             <a:r>
-              <a:rPr sz="4400" b="0" i="0">
+              <a:rPr sz="4200" b="0" i="0">
                 <a:solidFill>
-                  <a:srgbClr val="E888B4"/>
+                  <a:srgbClr val="6B4A34"/>
                 </a:solidFill>
                 <a:latin typeface="Calibri"/>
               </a:rPr>
-              <a:t>♀</a:t>
+              <a:t>♂</a:t>
             </a:r>
           </a:p>
         </p:txBody>
@@ -8512,8 +9500,8 @@
         </p:nvSpPr>
         <p:spPr>
           <a:xfrm>
-            <a:off x="5090007" y="2880360"/>
-            <a:ext cx="2011680" cy="1097280"/>
+            <a:off x="3246120" y="5303520"/>
+            <a:ext cx="1828800" cy="365760"/>
           </a:xfrm>
           <a:prstGeom prst="rect">
             <a:avLst/>
@@ -8532,13 +9520,13 @@
               </a:lnSpc>
             </a:pPr>
             <a:r>
-              <a:rPr sz="5400" b="1" i="0">
+              <a:rPr sz="1200" b="1" i="0" spc="160">
                 <a:solidFill>
-                  <a:srgbClr val="B0A4BB"/>
+                  <a:srgbClr val="9B8571"/>
                 </a:solidFill>
-                <a:latin typeface="Century Gothic"/>
+                <a:latin typeface="Calibri"/>
               </a:rPr>
-              <a:t>=</a:t>
+              <a:t>MALE NAME</a:t>
             </a:r>
           </a:p>
         </p:txBody>
@@ -8551,8 +9539,60 @@
         </p:nvSpPr>
         <p:spPr>
           <a:xfrm>
-            <a:off x="7479792" y="2258568"/>
-            <a:ext cx="1828800" cy="2340864"/>
+            <a:off x="6976872" y="2212848"/>
+            <a:ext cx="2048256" cy="2340864"/>
+          </a:xfrm>
+          <a:prstGeom prst="roundRect">
+            <a:avLst>
+              <a:gd name="adj" fmla="val 12000"/>
+            </a:avLst>
+          </a:prstGeom>
+          <a:solidFill>
+            <a:srgbClr val="F1DED3"/>
+          </a:solidFill>
+          <a:ln>
+            <a:noFill/>
+          </a:ln>
+          <a:effectLst>
+            <a:outerShdw blurRad="254000" dist="139700" dir="5400000" rotWithShape="0">
+              <a:srgbClr val="6B4A34">
+                <a:alpha val="76000"/>
+              </a:srgbClr>
+            </a:outerShdw>
+          </a:effectLst>
+        </p:spPr>
+        <p:style>
+          <a:lnRef idx="1">
+            <a:schemeClr val="accent1"/>
+          </a:lnRef>
+          <a:fillRef idx="3">
+            <a:schemeClr val="accent1"/>
+          </a:fillRef>
+          <a:effectRef idx="2">
+            <a:schemeClr val="accent1"/>
+          </a:effectRef>
+          <a:fontRef idx="minor">
+            <a:schemeClr val="lt1"/>
+          </a:fontRef>
+        </p:style>
+        <p:txBody>
+          <a:bodyPr rtlCol="0" anchor="ctr"/>
+          <a:lstStyle/>
+          <a:p>
+            <a:pPr algn="ctr"/>
+          </a:p>
+        </p:txBody>
+      </p:sp>
+      <p:sp>
+        <p:nvSpPr>
+          <p:cNvPr id="14" name="Rounded Rectangle 13"/>
+          <p:cNvSpPr/>
+          <p:nvPr/>
+        </p:nvSpPr>
+        <p:spPr>
+          <a:xfrm>
+            <a:off x="7109460" y="2242108"/>
+            <a:ext cx="1783080" cy="2282342"/>
           </a:xfrm>
           <a:prstGeom prst="roundRect">
             <a:avLst>
@@ -8560,17 +9600,17 @@
             </a:avLst>
           </a:prstGeom>
           <a:solidFill>
-            <a:srgbClr val="FFFFFF"/>
+            <a:srgbClr val="FCF7EF"/>
           </a:solidFill>
           <a:ln w="16510">
             <a:solidFill>
-              <a:srgbClr val="EFDFE9"/>
+              <a:srgbClr val="E4D5C0"/>
             </a:solidFill>
           </a:ln>
           <a:effectLst>
-            <a:outerShdw blurRad="228600" dist="127000" dir="5400000" rotWithShape="0">
-              <a:srgbClr val="C880A8">
-                <a:alpha val="78000"/>
+            <a:outerShdw blurRad="254000" dist="139700" dir="5400000" rotWithShape="0">
+              <a:srgbClr val="6B4A34">
+                <a:alpha val="76000"/>
               </a:srgbClr>
             </a:outerShdw>
           </a:effectLst>
@@ -8599,14 +9639,14 @@
       </p:sp>
       <p:sp>
         <p:nvSpPr>
-          <p:cNvPr id="14" name="Rounded Rectangle 13"/>
+          <p:cNvPr id="15" name="Rounded Rectangle 14"/>
           <p:cNvSpPr/>
           <p:nvPr/>
         </p:nvSpPr>
         <p:spPr>
           <a:xfrm>
-            <a:off x="7772400" y="2551175"/>
-            <a:ext cx="914400" cy="128747"/>
+            <a:off x="7394752" y="2527401"/>
+            <a:ext cx="891540" cy="125528"/>
           </a:xfrm>
           <a:prstGeom prst="roundRect">
             <a:avLst>
@@ -8614,7 +9654,7 @@
             </a:avLst>
           </a:prstGeom>
           <a:solidFill>
-            <a:srgbClr val="6FA0DD"/>
+            <a:srgbClr val="B0563A"/>
           </a:solidFill>
           <a:ln>
             <a:noFill/>
@@ -8645,14 +9685,14 @@
       </p:sp>
       <p:sp>
         <p:nvSpPr>
-          <p:cNvPr id="15" name="Rounded Rectangle 14"/>
+          <p:cNvPr id="16" name="Rounded Rectangle 15"/>
           <p:cNvSpPr/>
           <p:nvPr/>
         </p:nvSpPr>
         <p:spPr>
           <a:xfrm>
-            <a:off x="7772400" y="2925714"/>
-            <a:ext cx="1243584" cy="105338"/>
+            <a:off x="7394752" y="2892576"/>
+            <a:ext cx="1212494" cy="102705"/>
           </a:xfrm>
           <a:prstGeom prst="roundRect">
             <a:avLst>
@@ -8660,7 +9700,7 @@
             </a:avLst>
           </a:prstGeom>
           <a:solidFill>
-            <a:srgbClr val="EFDFE9"/>
+            <a:srgbClr val="E4D5C0"/>
           </a:solidFill>
           <a:ln>
             <a:noFill/>
@@ -8691,14 +9731,14 @@
       </p:sp>
       <p:sp>
         <p:nvSpPr>
-          <p:cNvPr id="16" name="Rounded Rectangle 15"/>
+          <p:cNvPr id="17" name="Rounded Rectangle 16"/>
           <p:cNvSpPr/>
           <p:nvPr/>
         </p:nvSpPr>
         <p:spPr>
           <a:xfrm>
-            <a:off x="7772400" y="3206617"/>
-            <a:ext cx="1097280" cy="105338"/>
+            <a:off x="7394752" y="3166457"/>
+            <a:ext cx="1069848" cy="102705"/>
           </a:xfrm>
           <a:prstGeom prst="roundRect">
             <a:avLst>
@@ -8706,7 +9746,7 @@
             </a:avLst>
           </a:prstGeom>
           <a:solidFill>
-            <a:srgbClr val="EFDFE9"/>
+            <a:srgbClr val="E4D5C0"/>
           </a:solidFill>
           <a:ln>
             <a:noFill/>
@@ -8737,14 +9777,14 @@
       </p:sp>
       <p:sp>
         <p:nvSpPr>
-          <p:cNvPr id="17" name="Rounded Rectangle 16"/>
+          <p:cNvPr id="18" name="Rounded Rectangle 17"/>
           <p:cNvSpPr/>
           <p:nvPr/>
         </p:nvSpPr>
         <p:spPr>
           <a:xfrm>
-            <a:off x="7772400" y="3487521"/>
-            <a:ext cx="1207008" cy="105338"/>
+            <a:off x="7394752" y="3440338"/>
+            <a:ext cx="1176832" cy="102705"/>
           </a:xfrm>
           <a:prstGeom prst="roundRect">
             <a:avLst>
@@ -8752,7 +9792,7 @@
             </a:avLst>
           </a:prstGeom>
           <a:solidFill>
-            <a:srgbClr val="EFDFE9"/>
+            <a:srgbClr val="E4D5C0"/>
           </a:solidFill>
           <a:ln>
             <a:noFill/>
@@ -8783,14 +9823,14 @@
       </p:sp>
       <p:sp>
         <p:nvSpPr>
-          <p:cNvPr id="18" name="Rounded Rectangle 17"/>
+          <p:cNvPr id="19" name="Rounded Rectangle 18"/>
           <p:cNvSpPr/>
           <p:nvPr/>
         </p:nvSpPr>
         <p:spPr>
           <a:xfrm>
-            <a:off x="7772400" y="3768425"/>
-            <a:ext cx="768096" cy="105338"/>
+            <a:off x="7394752" y="3714219"/>
+            <a:ext cx="748893" cy="102705"/>
           </a:xfrm>
           <a:prstGeom prst="roundRect">
             <a:avLst>
@@ -8798,7 +9838,7 @@
             </a:avLst>
           </a:prstGeom>
           <a:solidFill>
-            <a:srgbClr val="EFDFE9"/>
+            <a:srgbClr val="E4D5C0"/>
           </a:solidFill>
           <a:ln>
             <a:noFill/>
@@ -8829,14 +9869,14 @@
       </p:sp>
       <p:sp>
         <p:nvSpPr>
-          <p:cNvPr id="19" name="TextBox 18"/>
+          <p:cNvPr id="20" name="TextBox 19"/>
           <p:cNvSpPr txBox="1"/>
           <p:nvPr/>
         </p:nvSpPr>
         <p:spPr>
           <a:xfrm>
-            <a:off x="7479792" y="3803538"/>
-            <a:ext cx="1828800" cy="702259"/>
+            <a:off x="7109460" y="3679984"/>
+            <a:ext cx="1783080" cy="775996"/>
           </a:xfrm>
           <a:prstGeom prst="rect">
             <a:avLst/>
@@ -8855,27 +9895,27 @@
               </a:lnSpc>
             </a:pPr>
             <a:r>
-              <a:rPr sz="4400" b="0" i="0">
+              <a:rPr sz="4200" b="0" i="0">
                 <a:solidFill>
-                  <a:srgbClr val="6FA0DD"/>
+                  <a:srgbClr val="B0563A"/>
                 </a:solidFill>
                 <a:latin typeface="Calibri"/>
               </a:rPr>
-              <a:t>♂</a:t>
-            </a:r>
-          </a:p>
-        </p:txBody>
-      </p:sp>
-      <p:sp>
-        <p:nvSpPr>
-          <p:cNvPr id="20" name="TextBox 19"/>
+              <a:t>♀</a:t>
+            </a:r>
+          </a:p>
+        </p:txBody>
+      </p:sp>
+      <p:sp>
+        <p:nvSpPr>
+          <p:cNvPr id="21" name="TextBox 20"/>
           <p:cNvSpPr txBox="1"/>
           <p:nvPr/>
         </p:nvSpPr>
         <p:spPr>
           <a:xfrm>
-            <a:off x="1523847" y="5257800"/>
-            <a:ext cx="9144000" cy="640080"/>
+            <a:off x="7543800" y="1783080"/>
+            <a:ext cx="914400" cy="548640"/>
           </a:xfrm>
           <a:prstGeom prst="rect">
             <a:avLst/>
@@ -8894,33 +9934,129 @@
               </a:lnSpc>
             </a:pPr>
             <a:r>
+              <a:rPr sz="2600" b="1" i="0">
+                <a:solidFill>
+                  <a:srgbClr val="B0563A"/>
+                </a:solidFill>
+                <a:latin typeface="Calibri"/>
+              </a:rPr>
+              <a:t>▲</a:t>
+            </a:r>
+          </a:p>
+        </p:txBody>
+      </p:sp>
+      <p:sp>
+        <p:nvSpPr>
+          <p:cNvPr id="22" name="TextBox 21"/>
+          <p:cNvSpPr txBox="1"/>
+          <p:nvPr/>
+        </p:nvSpPr>
+        <p:spPr>
+          <a:xfrm>
+            <a:off x="6995160" y="4800600"/>
+            <a:ext cx="2011680" cy="365760"/>
+          </a:xfrm>
+          <a:prstGeom prst="rect">
+            <a:avLst/>
+          </a:prstGeom>
+          <a:noFill/>
+        </p:spPr>
+        <p:txBody>
+          <a:bodyPr wrap="square" anchor="ctr" lIns="0" rIns="0" tIns="0" bIns="0">
+            <a:spAutoFit/>
+          </a:bodyPr>
+          <a:lstStyle/>
+          <a:p>
+            <a:pPr algn="ctr">
+              <a:lnSpc>
+                <a:spcPct val="100000"/>
+              </a:lnSpc>
+            </a:pPr>
+            <a:r>
+              <a:rPr sz="1200" b="1" i="0" spc="160">
+                <a:solidFill>
+                  <a:srgbClr val="B0563A"/>
+                </a:solidFill>
+                <a:latin typeface="Calibri"/>
+              </a:rPr>
+              <a:t>FEMALE NAME</a:t>
+            </a:r>
+          </a:p>
+        </p:txBody>
+      </p:sp>
+      <p:sp>
+        <p:nvSpPr>
+          <p:cNvPr id="23" name="TextBox 22"/>
+          <p:cNvSpPr txBox="1"/>
+          <p:nvPr/>
+        </p:nvSpPr>
+        <p:spPr>
+          <a:xfrm>
+            <a:off x="700887" y="5623560"/>
+            <a:ext cx="10789920" cy="731520"/>
+          </a:xfrm>
+          <a:prstGeom prst="rect">
+            <a:avLst/>
+          </a:prstGeom>
+          <a:noFill/>
+        </p:spPr>
+        <p:txBody>
+          <a:bodyPr wrap="square" anchor="ctr" lIns="0" rIns="0" tIns="0" bIns="0">
+            <a:spAutoFit/>
+          </a:bodyPr>
+          <a:lstStyle/>
+          <a:p>
+            <a:pPr algn="ctr">
+              <a:lnSpc>
+                <a:spcPct val="100000"/>
+              </a:lnSpc>
+            </a:pPr>
+            <a:r>
               <a:rPr sz="2500" b="1" i="0">
                 <a:solidFill>
-                  <a:srgbClr val="463A53"/>
+                  <a:srgbClr val="3E2C1E"/>
                 </a:solidFill>
-                <a:latin typeface="Century Gothic"/>
+                <a:latin typeface="Georgia"/>
               </a:rPr>
-              <a:t>Same résumé — only the name changes</a:t>
-            </a:r>
-          </a:p>
-        </p:txBody>
-      </p:sp>
-      <p:sp>
-        <p:nvSpPr>
-          <p:cNvPr id="21" name="Rectangle 20"/>
+              <a:t>Female names scored </a:t>
+            </a:r>
+            <a:r>
+              <a:rPr sz="2500" b="1" i="0">
+                <a:solidFill>
+                  <a:srgbClr val="B0563A"/>
+                </a:solidFill>
+                <a:latin typeface="Georgia"/>
+              </a:rPr>
+              <a:t>slightly higher</a:t>
+            </a:r>
+            <a:r>
+              <a:rPr sz="2500" b="1" i="0">
+                <a:solidFill>
+                  <a:srgbClr val="3E2C1E"/>
+                </a:solidFill>
+                <a:latin typeface="Georgia"/>
+              </a:rPr>
+              <a:t> — same résumé</a:t>
+            </a:r>
+          </a:p>
+        </p:txBody>
+      </p:sp>
+      <p:sp>
+        <p:nvSpPr>
+          <p:cNvPr id="24" name="Rectangle 23"/>
           <p:cNvSpPr/>
           <p:nvPr/>
         </p:nvSpPr>
         <p:spPr>
           <a:xfrm>
             <a:off x="0" y="6803136"/>
-            <a:ext cx="2468880" cy="54864"/>
+            <a:ext cx="2227810" cy="54864"/>
           </a:xfrm>
           <a:prstGeom prst="rect">
             <a:avLst/>
           </a:prstGeom>
           <a:solidFill>
-            <a:srgbClr val="E888B4"/>
+            <a:srgbClr val="B0563A"/>
           </a:solidFill>
           <a:ln>
             <a:noFill/>
@@ -8951,13 +10087,13 @@
       </p:sp>
       <p:sp>
         <p:nvSpPr>
-          <p:cNvPr id="22" name="TextBox 21"/>
+          <p:cNvPr id="25" name="TextBox 24"/>
           <p:cNvSpPr txBox="1"/>
           <p:nvPr/>
         </p:nvSpPr>
         <p:spPr>
           <a:xfrm>
-            <a:off x="11002975" y="6355080"/>
+            <a:off x="11048695" y="6355080"/>
             <a:ext cx="914400" cy="320040"/>
           </a:xfrm>
           <a:prstGeom prst="rect">
@@ -8979,7 +10115,7 @@
             <a:r>
               <a:rPr sz="1100" b="0" i="0">
                 <a:solidFill>
-                  <a:srgbClr val="B0A4BB"/>
+                  <a:srgbClr val="9B8571"/>
                 </a:solidFill>
                 <a:latin typeface="Calibri"/>
               </a:rPr>
@@ -9023,13 +10159,13 @@
           <a:gradFill rotWithShape="1">
             <a:gsLst>
               <a:gs pos="0">
-                <a:srgbClr val="FDEEF4"/>
+                <a:srgbClr val="F5EDDF"/>
               </a:gs>
               <a:gs pos="100000">
-                <a:srgbClr val="E9F1FC"/>
+                <a:srgbClr val="E7D3B8"/>
               </a:gs>
             </a:gsLst>
-            <a:lin scaled="0" ang="13500000"/>
+            <a:lin scaled="0" ang="14400000"/>
           </a:gradFill>
           <a:ln>
             <a:noFill/>
@@ -9088,11 +10224,11 @@
             <a:r>
               <a:rPr sz="1300" b="1" i="0" spc="420">
                 <a:solidFill>
-                  <a:srgbClr val="E888B4"/>
+                  <a:srgbClr val="A9744F"/>
                 </a:solidFill>
-                <a:latin typeface="Century Gothic"/>
+                <a:latin typeface="Calibri"/>
               </a:rPr>
-              <a:t>THE FINDING</a:t>
+              <a:t>FIX 1</a:t>
             </a:r>
           </a:p>
         </p:txBody>
@@ -9105,15 +10241,15 @@
         </p:nvCxnSpPr>
         <p:spPr>
           <a:xfrm>
-            <a:off x="5775807" y="969264"/>
-            <a:ext cx="640080" cy="0"/>
+            <a:off x="5803239" y="987552"/>
+            <a:ext cx="585216" cy="0"/>
           </a:xfrm>
           <a:prstGeom prst="bentConnector3">
             <a:avLst/>
           </a:prstGeom>
           <a:ln w="27940">
             <a:solidFill>
-              <a:srgbClr val="E888B4"/>
+              <a:srgbClr val="A9744F"/>
             </a:solidFill>
           </a:ln>
           <a:effectLst/>
@@ -9135,14 +10271,68 @@
       </p:cxnSp>
       <p:sp>
         <p:nvSpPr>
-          <p:cNvPr id="5" name="TextBox 4"/>
+          <p:cNvPr id="5" name="Rounded Rectangle 4"/>
+          <p:cNvSpPr/>
+          <p:nvPr/>
+        </p:nvSpPr>
+        <p:spPr>
+          <a:xfrm>
+            <a:off x="2895447" y="2148840"/>
+            <a:ext cx="6400800" cy="914400"/>
+          </a:xfrm>
+          <a:prstGeom prst="roundRect">
+            <a:avLst>
+              <a:gd name="adj" fmla="val 50000"/>
+            </a:avLst>
+          </a:prstGeom>
+          <a:solidFill>
+            <a:srgbClr val="FCF7EF"/>
+          </a:solidFill>
+          <a:ln w="15240">
+            <a:solidFill>
+              <a:srgbClr val="E4D5C0"/>
+            </a:solidFill>
+          </a:ln>
+          <a:effectLst>
+            <a:outerShdw blurRad="254000" dist="139700" dir="5400000" rotWithShape="0">
+              <a:srgbClr val="6B4A34">
+                <a:alpha val="76000"/>
+              </a:srgbClr>
+            </a:outerShdw>
+          </a:effectLst>
+        </p:spPr>
+        <p:style>
+          <a:lnRef idx="1">
+            <a:schemeClr val="accent1"/>
+          </a:lnRef>
+          <a:fillRef idx="3">
+            <a:schemeClr val="accent1"/>
+          </a:fillRef>
+          <a:effectRef idx="2">
+            <a:schemeClr val="accent1"/>
+          </a:effectRef>
+          <a:fontRef idx="minor">
+            <a:schemeClr val="lt1"/>
+          </a:fontRef>
+        </p:style>
+        <p:txBody>
+          <a:bodyPr rtlCol="0" anchor="ctr"/>
+          <a:lstStyle/>
+          <a:p>
+            <a:pPr algn="ctr"/>
+          </a:p>
+        </p:txBody>
+      </p:sp>
+      <p:sp>
+        <p:nvSpPr>
+          <p:cNvPr id="6" name="TextBox 5"/>
           <p:cNvSpPr txBox="1"/>
           <p:nvPr/>
         </p:nvSpPr>
         <p:spPr>
           <a:xfrm>
-            <a:off x="975207" y="1234440"/>
-            <a:ext cx="10241280" cy="731520"/>
+            <a:off x="2895447" y="2148840"/>
+            <a:ext cx="6400800" cy="914400"/>
           </a:xfrm>
           <a:prstGeom prst="rect">
             <a:avLst/>
@@ -9161,133 +10351,27 @@
               </a:lnSpc>
             </a:pPr>
             <a:r>
-              <a:rPr sz="2700" b="1" i="0">
+              <a:rPr sz="2200" b="1" i="1">
                 <a:solidFill>
-                  <a:srgbClr val="E888B4"/>
+                  <a:srgbClr val="3E2C1E"/>
                 </a:solidFill>
-                <a:latin typeface="Century Gothic"/>
+                <a:latin typeface="Georgia"/>
               </a:rPr>
-              <a:t>♀  </a:t>
-            </a:r>
-            <a:r>
-              <a:rPr sz="2700" b="1" i="0">
-                <a:solidFill>
-                  <a:srgbClr val="463A53"/>
-                </a:solidFill>
-                <a:latin typeface="Century Gothic"/>
-              </a:rPr>
-              <a:t>Female names scored higher — every model</a:t>
-            </a:r>
-          </a:p>
-        </p:txBody>
-      </p:sp>
-      <p:cxnSp>
-        <p:nvCxnSpPr>
-          <p:cNvPr id="6" name="Connector 5"/>
-          <p:cNvCxnSpPr/>
-          <p:nvPr/>
-        </p:nvCxnSpPr>
-        <p:spPr>
-          <a:xfrm>
-            <a:off x="1249527" y="5257800"/>
-            <a:ext cx="9692640" cy="0"/>
-          </a:xfrm>
-          <a:prstGeom prst="bentConnector3">
-            <a:avLst/>
-          </a:prstGeom>
-          <a:ln w="25400">
-            <a:solidFill>
-              <a:srgbClr val="EFDFE9"/>
-            </a:solidFill>
-          </a:ln>
-          <a:effectLst/>
-        </p:spPr>
-        <p:style>
-          <a:lnRef idx="2">
-            <a:schemeClr val="accent1"/>
-          </a:lnRef>
-          <a:fillRef idx="0">
-            <a:schemeClr val="accent1"/>
-          </a:fillRef>
-          <a:effectRef idx="1">
-            <a:schemeClr val="accent1"/>
-          </a:effectRef>
-          <a:fontRef idx="minor">
-            <a:schemeClr val="tx1"/>
-          </a:fontRef>
-        </p:style>
-      </p:cxnSp>
-      <p:sp>
-        <p:nvSpPr>
-          <p:cNvPr id="7" name="Round Same Side Corner Rectangle 6"/>
-          <p:cNvSpPr/>
-          <p:nvPr/>
-        </p:nvSpPr>
-        <p:spPr>
-          <a:xfrm>
-            <a:off x="2826867" y="2848356"/>
-            <a:ext cx="868680" cy="2409444"/>
-          </a:xfrm>
-          <a:prstGeom prst="round2SameRect">
-            <a:avLst>
-              <a:gd name="adj1" fmla="val 14000"/>
-              <a:gd name="adj2" fmla="val 0"/>
-            </a:avLst>
-          </a:prstGeom>
-          <a:gradFill rotWithShape="1">
-            <a:gsLst>
-              <a:gs pos="0">
-                <a:srgbClr val="F6ACC9"/>
-              </a:gs>
-              <a:gs pos="100000">
-                <a:srgbClr val="E888B4"/>
-              </a:gs>
-            </a:gsLst>
-            <a:lin scaled="0" ang="16200000"/>
-          </a:gradFill>
-          <a:ln>
-            <a:noFill/>
-          </a:ln>
-          <a:effectLst>
-            <a:outerShdw blurRad="228600" dist="127000" dir="5400000" rotWithShape="0">
-              <a:srgbClr val="C880A8">
-                <a:alpha val="78000"/>
-              </a:srgbClr>
-            </a:outerShdw>
-          </a:effectLst>
-        </p:spPr>
-        <p:style>
-          <a:lnRef idx="1">
-            <a:schemeClr val="accent1"/>
-          </a:lnRef>
-          <a:fillRef idx="3">
-            <a:schemeClr val="accent1"/>
-          </a:fillRef>
-          <a:effectRef idx="2">
-            <a:schemeClr val="accent1"/>
-          </a:effectRef>
-          <a:fontRef idx="minor">
-            <a:schemeClr val="lt1"/>
-          </a:fontRef>
-        </p:style>
-        <p:txBody>
-          <a:bodyPr rtlCol="0" anchor="ctr"/>
-          <a:lstStyle/>
-          <a:p>
-            <a:pPr algn="ctr"/>
-          </a:p>
-        </p:txBody>
-      </p:sp>
-      <p:sp>
-        <p:nvSpPr>
-          <p:cNvPr id="8" name="TextBox 7"/>
+              <a:t>“Ignore the name and gender.”</a:t>
+            </a:r>
+          </a:p>
+        </p:txBody>
+      </p:sp>
+      <p:sp>
+        <p:nvSpPr>
+          <p:cNvPr id="7" name="TextBox 6"/>
           <p:cNvSpPr txBox="1"/>
           <p:nvPr/>
         </p:nvSpPr>
         <p:spPr>
           <a:xfrm>
-            <a:off x="2643987" y="2345436"/>
-            <a:ext cx="1234440" cy="411480"/>
+            <a:off x="4632807" y="3703320"/>
+            <a:ext cx="2926080" cy="1371600"/>
           </a:xfrm>
           <a:prstGeom prst="rect">
             <a:avLst/>
@@ -9306,27 +10390,27 @@
               </a:lnSpc>
             </a:pPr>
             <a:r>
-              <a:rPr sz="1700" b="1" i="0">
+              <a:rPr sz="9400" b="1" i="0">
                 <a:solidFill>
-                  <a:srgbClr val="463A53"/>
+                  <a:srgbClr val="B0563A"/>
                 </a:solidFill>
-                <a:latin typeface="Century Gothic"/>
+                <a:latin typeface="Calibri"/>
               </a:rPr>
-              <a:t>.38</a:t>
-            </a:r>
-          </a:p>
-        </p:txBody>
-      </p:sp>
-      <p:sp>
-        <p:nvSpPr>
-          <p:cNvPr id="9" name="TextBox 8"/>
+              <a:t>✗</a:t>
+            </a:r>
+          </a:p>
+        </p:txBody>
+      </p:sp>
+      <p:sp>
+        <p:nvSpPr>
+          <p:cNvPr id="8" name="TextBox 7"/>
           <p:cNvSpPr txBox="1"/>
           <p:nvPr/>
         </p:nvSpPr>
         <p:spPr>
           <a:xfrm>
-            <a:off x="2506827" y="5367528"/>
-            <a:ext cx="1508760" cy="365760"/>
+            <a:off x="1249527" y="5303520"/>
+            <a:ext cx="9692640" cy="640080"/>
           </a:xfrm>
           <a:prstGeom prst="rect">
             <a:avLst/>
@@ -9345,55 +10429,38 @@
               </a:lnSpc>
             </a:pPr>
             <a:r>
-              <a:rPr sz="1400" b="1" i="0">
+              <a:rPr sz="2400" b="1" i="0">
                 <a:solidFill>
-                  <a:srgbClr val="8A7D95"/>
+                  <a:srgbClr val="3E2C1E"/>
                 </a:solidFill>
-                <a:latin typeface="Calibri"/>
+                <a:latin typeface="Georgia"/>
               </a:rPr>
-              <a:t>GPT-4o</a:t>
-            </a:r>
-          </a:p>
-        </p:txBody>
-      </p:sp>
-      <p:sp>
-        <p:nvSpPr>
-          <p:cNvPr id="10" name="Round Same Side Corner Rectangle 9"/>
+              <a:t>Barely changed — the bias remained</a:t>
+            </a:r>
+          </a:p>
+        </p:txBody>
+      </p:sp>
+      <p:sp>
+        <p:nvSpPr>
+          <p:cNvPr id="9" name="Rectangle 8"/>
           <p:cNvSpPr/>
           <p:nvPr/>
         </p:nvSpPr>
         <p:spPr>
           <a:xfrm>
-            <a:off x="4244187" y="3103473"/>
-            <a:ext cx="868680" cy="2154326"/>
-          </a:xfrm>
-          <a:prstGeom prst="round2SameRect">
-            <a:avLst>
-              <a:gd name="adj1" fmla="val 14000"/>
-              <a:gd name="adj2" fmla="val 0"/>
-            </a:avLst>
-          </a:prstGeom>
-          <a:gradFill rotWithShape="1">
-            <a:gsLst>
-              <a:gs pos="0">
-                <a:srgbClr val="F6ACC9"/>
-              </a:gs>
-              <a:gs pos="100000">
-                <a:srgbClr val="E888B4"/>
-              </a:gs>
-            </a:gsLst>
-            <a:lin scaled="0" ang="16200000"/>
-          </a:gradFill>
+            <a:off x="0" y="6803136"/>
+            <a:ext cx="2477192" cy="54864"/>
+          </a:xfrm>
+          <a:prstGeom prst="rect">
+            <a:avLst/>
+          </a:prstGeom>
+          <a:solidFill>
+            <a:srgbClr val="A9744F"/>
+          </a:solidFill>
           <a:ln>
             <a:noFill/>
           </a:ln>
-          <a:effectLst>
-            <a:outerShdw blurRad="228600" dist="127000" dir="5400000" rotWithShape="0">
-              <a:srgbClr val="C880A8">
-                <a:alpha val="78000"/>
-              </a:srgbClr>
-            </a:outerShdw>
-          </a:effectLst>
+          <a:effectLst/>
         </p:spPr>
         <p:style>
           <a:lnRef idx="1">
@@ -9419,591 +10486,13 @@
       </p:sp>
       <p:sp>
         <p:nvSpPr>
-          <p:cNvPr id="11" name="TextBox 10"/>
+          <p:cNvPr id="10" name="TextBox 9"/>
           <p:cNvSpPr txBox="1"/>
           <p:nvPr/>
         </p:nvSpPr>
         <p:spPr>
           <a:xfrm>
-            <a:off x="4061307" y="2600553"/>
-            <a:ext cx="1234440" cy="411480"/>
-          </a:xfrm>
-          <a:prstGeom prst="rect">
-            <a:avLst/>
-          </a:prstGeom>
-          <a:noFill/>
-        </p:spPr>
-        <p:txBody>
-          <a:bodyPr wrap="square" anchor="ctr" lIns="0" rIns="0" tIns="0" bIns="0">
-            <a:spAutoFit/>
-          </a:bodyPr>
-          <a:lstStyle/>
-          <a:p>
-            <a:pPr algn="ctr">
-              <a:lnSpc>
-                <a:spcPct val="100000"/>
-              </a:lnSpc>
-            </a:pPr>
-            <a:r>
-              <a:rPr sz="1700" b="1" i="0">
-                <a:solidFill>
-                  <a:srgbClr val="463A53"/>
-                </a:solidFill>
-                <a:latin typeface="Century Gothic"/>
-              </a:rPr>
-              <a:t>.34</a:t>
-            </a:r>
-          </a:p>
-        </p:txBody>
-      </p:sp>
-      <p:sp>
-        <p:nvSpPr>
-          <p:cNvPr id="12" name="TextBox 11"/>
-          <p:cNvSpPr txBox="1"/>
-          <p:nvPr/>
-        </p:nvSpPr>
-        <p:spPr>
-          <a:xfrm>
-            <a:off x="3924147" y="5367528"/>
-            <a:ext cx="1508760" cy="365760"/>
-          </a:xfrm>
-          <a:prstGeom prst="rect">
-            <a:avLst/>
-          </a:prstGeom>
-          <a:noFill/>
-        </p:spPr>
-        <p:txBody>
-          <a:bodyPr wrap="square" anchor="ctr" lIns="0" rIns="0" tIns="0" bIns="0">
-            <a:spAutoFit/>
-          </a:bodyPr>
-          <a:lstStyle/>
-          <a:p>
-            <a:pPr algn="ctr">
-              <a:lnSpc>
-                <a:spcPct val="100000"/>
-              </a:lnSpc>
-            </a:pPr>
-            <a:r>
-              <a:rPr sz="1400" b="1" i="0">
-                <a:solidFill>
-                  <a:srgbClr val="8A7D95"/>
-                </a:solidFill>
-                <a:latin typeface="Calibri"/>
-              </a:rPr>
-              <a:t>Claude</a:t>
-            </a:r>
-          </a:p>
-        </p:txBody>
-      </p:sp>
-      <p:sp>
-        <p:nvSpPr>
-          <p:cNvPr id="13" name="Round Same Side Corner Rectangle 12"/>
-          <p:cNvSpPr/>
-          <p:nvPr/>
-        </p:nvSpPr>
-        <p:spPr>
-          <a:xfrm>
-            <a:off x="5661507" y="3301898"/>
-            <a:ext cx="868680" cy="1955901"/>
-          </a:xfrm>
-          <a:prstGeom prst="round2SameRect">
-            <a:avLst>
-              <a:gd name="adj1" fmla="val 14000"/>
-              <a:gd name="adj2" fmla="val 0"/>
-            </a:avLst>
-          </a:prstGeom>
-          <a:gradFill rotWithShape="1">
-            <a:gsLst>
-              <a:gs pos="0">
-                <a:srgbClr val="F6ACC9"/>
-              </a:gs>
-              <a:gs pos="100000">
-                <a:srgbClr val="E888B4"/>
-              </a:gs>
-            </a:gsLst>
-            <a:lin scaled="0" ang="16200000"/>
-          </a:gradFill>
-          <a:ln>
-            <a:noFill/>
-          </a:ln>
-          <a:effectLst>
-            <a:outerShdw blurRad="228600" dist="127000" dir="5400000" rotWithShape="0">
-              <a:srgbClr val="C880A8">
-                <a:alpha val="78000"/>
-              </a:srgbClr>
-            </a:outerShdw>
-          </a:effectLst>
-        </p:spPr>
-        <p:style>
-          <a:lnRef idx="1">
-            <a:schemeClr val="accent1"/>
-          </a:lnRef>
-          <a:fillRef idx="3">
-            <a:schemeClr val="accent1"/>
-          </a:fillRef>
-          <a:effectRef idx="2">
-            <a:schemeClr val="accent1"/>
-          </a:effectRef>
-          <a:fontRef idx="minor">
-            <a:schemeClr val="lt1"/>
-          </a:fontRef>
-        </p:style>
-        <p:txBody>
-          <a:bodyPr rtlCol="0" anchor="ctr"/>
-          <a:lstStyle/>
-          <a:p>
-            <a:pPr algn="ctr"/>
-          </a:p>
-        </p:txBody>
-      </p:sp>
-      <p:sp>
-        <p:nvSpPr>
-          <p:cNvPr id="14" name="TextBox 13"/>
-          <p:cNvSpPr txBox="1"/>
-          <p:nvPr/>
-        </p:nvSpPr>
-        <p:spPr>
-          <a:xfrm>
-            <a:off x="5478627" y="2798978"/>
-            <a:ext cx="1234440" cy="411480"/>
-          </a:xfrm>
-          <a:prstGeom prst="rect">
-            <a:avLst/>
-          </a:prstGeom>
-          <a:noFill/>
-        </p:spPr>
-        <p:txBody>
-          <a:bodyPr wrap="square" anchor="ctr" lIns="0" rIns="0" tIns="0" bIns="0">
-            <a:spAutoFit/>
-          </a:bodyPr>
-          <a:lstStyle/>
-          <a:p>
-            <a:pPr algn="ctr">
-              <a:lnSpc>
-                <a:spcPct val="100000"/>
-              </a:lnSpc>
-            </a:pPr>
-            <a:r>
-              <a:rPr sz="1700" b="1" i="0">
-                <a:solidFill>
-                  <a:srgbClr val="463A53"/>
-                </a:solidFill>
-                <a:latin typeface="Century Gothic"/>
-              </a:rPr>
-              <a:t>.31</a:t>
-            </a:r>
-          </a:p>
-        </p:txBody>
-      </p:sp>
-      <p:sp>
-        <p:nvSpPr>
-          <p:cNvPr id="15" name="TextBox 14"/>
-          <p:cNvSpPr txBox="1"/>
-          <p:nvPr/>
-        </p:nvSpPr>
-        <p:spPr>
-          <a:xfrm>
-            <a:off x="5341467" y="5367528"/>
-            <a:ext cx="1508760" cy="365760"/>
-          </a:xfrm>
-          <a:prstGeom prst="rect">
-            <a:avLst/>
-          </a:prstGeom>
-          <a:noFill/>
-        </p:spPr>
-        <p:txBody>
-          <a:bodyPr wrap="square" anchor="ctr" lIns="0" rIns="0" tIns="0" bIns="0">
-            <a:spAutoFit/>
-          </a:bodyPr>
-          <a:lstStyle/>
-          <a:p>
-            <a:pPr algn="ctr">
-              <a:lnSpc>
-                <a:spcPct val="100000"/>
-              </a:lnSpc>
-            </a:pPr>
-            <a:r>
-              <a:rPr sz="1400" b="1" i="0">
-                <a:solidFill>
-                  <a:srgbClr val="8A7D95"/>
-                </a:solidFill>
-                <a:latin typeface="Calibri"/>
-              </a:rPr>
-              <a:t>Gemini</a:t>
-            </a:r>
-          </a:p>
-        </p:txBody>
-      </p:sp>
-      <p:sp>
-        <p:nvSpPr>
-          <p:cNvPr id="16" name="Round Same Side Corner Rectangle 15"/>
-          <p:cNvSpPr/>
-          <p:nvPr/>
-        </p:nvSpPr>
-        <p:spPr>
-          <a:xfrm>
-            <a:off x="7078827" y="4294022"/>
-            <a:ext cx="868680" cy="963777"/>
-          </a:xfrm>
-          <a:prstGeom prst="round2SameRect">
-            <a:avLst>
-              <a:gd name="adj1" fmla="val 14000"/>
-              <a:gd name="adj2" fmla="val 0"/>
-            </a:avLst>
-          </a:prstGeom>
-          <a:gradFill rotWithShape="1">
-            <a:gsLst>
-              <a:gs pos="0">
-                <a:srgbClr val="F6ACC9"/>
-              </a:gs>
-              <a:gs pos="100000">
-                <a:srgbClr val="E888B4"/>
-              </a:gs>
-            </a:gsLst>
-            <a:lin scaled="0" ang="16200000"/>
-          </a:gradFill>
-          <a:ln>
-            <a:noFill/>
-          </a:ln>
-          <a:effectLst>
-            <a:outerShdw blurRad="228600" dist="127000" dir="5400000" rotWithShape="0">
-              <a:srgbClr val="C880A8">
-                <a:alpha val="78000"/>
-              </a:srgbClr>
-            </a:outerShdw>
-          </a:effectLst>
-        </p:spPr>
-        <p:style>
-          <a:lnRef idx="1">
-            <a:schemeClr val="accent1"/>
-          </a:lnRef>
-          <a:fillRef idx="3">
-            <a:schemeClr val="accent1"/>
-          </a:fillRef>
-          <a:effectRef idx="2">
-            <a:schemeClr val="accent1"/>
-          </a:effectRef>
-          <a:fontRef idx="minor">
-            <a:schemeClr val="lt1"/>
-          </a:fontRef>
-        </p:style>
-        <p:txBody>
-          <a:bodyPr rtlCol="0" anchor="ctr"/>
-          <a:lstStyle/>
-          <a:p>
-            <a:pPr algn="ctr"/>
-          </a:p>
-        </p:txBody>
-      </p:sp>
-      <p:sp>
-        <p:nvSpPr>
-          <p:cNvPr id="17" name="TextBox 16"/>
-          <p:cNvSpPr txBox="1"/>
-          <p:nvPr/>
-        </p:nvSpPr>
-        <p:spPr>
-          <a:xfrm>
-            <a:off x="6895947" y="3791102"/>
-            <a:ext cx="1234440" cy="411480"/>
-          </a:xfrm>
-          <a:prstGeom prst="rect">
-            <a:avLst/>
-          </a:prstGeom>
-          <a:noFill/>
-        </p:spPr>
-        <p:txBody>
-          <a:bodyPr wrap="square" anchor="ctr" lIns="0" rIns="0" tIns="0" bIns="0">
-            <a:spAutoFit/>
-          </a:bodyPr>
-          <a:lstStyle/>
-          <a:p>
-            <a:pPr algn="ctr">
-              <a:lnSpc>
-                <a:spcPct val="100000"/>
-              </a:lnSpc>
-            </a:pPr>
-            <a:r>
-              <a:rPr sz="1700" b="1" i="0">
-                <a:solidFill>
-                  <a:srgbClr val="463A53"/>
-                </a:solidFill>
-                <a:latin typeface="Century Gothic"/>
-              </a:rPr>
-              <a:t>.15</a:t>
-            </a:r>
-          </a:p>
-        </p:txBody>
-      </p:sp>
-      <p:sp>
-        <p:nvSpPr>
-          <p:cNvPr id="18" name="TextBox 17"/>
-          <p:cNvSpPr txBox="1"/>
-          <p:nvPr/>
-        </p:nvSpPr>
-        <p:spPr>
-          <a:xfrm>
-            <a:off x="6758787" y="5367528"/>
-            <a:ext cx="1508760" cy="365760"/>
-          </a:xfrm>
-          <a:prstGeom prst="rect">
-            <a:avLst/>
-          </a:prstGeom>
-          <a:noFill/>
-        </p:spPr>
-        <p:txBody>
-          <a:bodyPr wrap="square" anchor="ctr" lIns="0" rIns="0" tIns="0" bIns="0">
-            <a:spAutoFit/>
-          </a:bodyPr>
-          <a:lstStyle/>
-          <a:p>
-            <a:pPr algn="ctr">
-              <a:lnSpc>
-                <a:spcPct val="100000"/>
-              </a:lnSpc>
-            </a:pPr>
-            <a:r>
-              <a:rPr sz="1400" b="1" i="0">
-                <a:solidFill>
-                  <a:srgbClr val="8A7D95"/>
-                </a:solidFill>
-                <a:latin typeface="Calibri"/>
-              </a:rPr>
-              <a:t>DeepSeek</a:t>
-            </a:r>
-          </a:p>
-        </p:txBody>
-      </p:sp>
-      <p:sp>
-        <p:nvSpPr>
-          <p:cNvPr id="19" name="Round Same Side Corner Rectangle 18"/>
-          <p:cNvSpPr/>
-          <p:nvPr/>
-        </p:nvSpPr>
-        <p:spPr>
-          <a:xfrm>
-            <a:off x="8496147" y="4804257"/>
-            <a:ext cx="868680" cy="453542"/>
-          </a:xfrm>
-          <a:prstGeom prst="round2SameRect">
-            <a:avLst>
-              <a:gd name="adj1" fmla="val 14000"/>
-              <a:gd name="adj2" fmla="val 0"/>
-            </a:avLst>
-          </a:prstGeom>
-          <a:gradFill rotWithShape="1">
-            <a:gsLst>
-              <a:gs pos="0">
-                <a:srgbClr val="F6ACC9"/>
-              </a:gs>
-              <a:gs pos="100000">
-                <a:srgbClr val="E888B4"/>
-              </a:gs>
-            </a:gsLst>
-            <a:lin scaled="0" ang="16200000"/>
-          </a:gradFill>
-          <a:ln>
-            <a:noFill/>
-          </a:ln>
-          <a:effectLst>
-            <a:outerShdw blurRad="228600" dist="127000" dir="5400000" rotWithShape="0">
-              <a:srgbClr val="C880A8">
-                <a:alpha val="78000"/>
-              </a:srgbClr>
-            </a:outerShdw>
-          </a:effectLst>
-        </p:spPr>
-        <p:style>
-          <a:lnRef idx="1">
-            <a:schemeClr val="accent1"/>
-          </a:lnRef>
-          <a:fillRef idx="3">
-            <a:schemeClr val="accent1"/>
-          </a:fillRef>
-          <a:effectRef idx="2">
-            <a:schemeClr val="accent1"/>
-          </a:effectRef>
-          <a:fontRef idx="minor">
-            <a:schemeClr val="lt1"/>
-          </a:fontRef>
-        </p:style>
-        <p:txBody>
-          <a:bodyPr rtlCol="0" anchor="ctr"/>
-          <a:lstStyle/>
-          <a:p>
-            <a:pPr algn="ctr"/>
-          </a:p>
-        </p:txBody>
-      </p:sp>
-      <p:sp>
-        <p:nvSpPr>
-          <p:cNvPr id="20" name="TextBox 19"/>
-          <p:cNvSpPr txBox="1"/>
-          <p:nvPr/>
-        </p:nvSpPr>
-        <p:spPr>
-          <a:xfrm>
-            <a:off x="8313267" y="4301337"/>
-            <a:ext cx="1234440" cy="411480"/>
-          </a:xfrm>
-          <a:prstGeom prst="rect">
-            <a:avLst/>
-          </a:prstGeom>
-          <a:noFill/>
-        </p:spPr>
-        <p:txBody>
-          <a:bodyPr wrap="square" anchor="ctr" lIns="0" rIns="0" tIns="0" bIns="0">
-            <a:spAutoFit/>
-          </a:bodyPr>
-          <a:lstStyle/>
-          <a:p>
-            <a:pPr algn="ctr">
-              <a:lnSpc>
-                <a:spcPct val="100000"/>
-              </a:lnSpc>
-            </a:pPr>
-            <a:r>
-              <a:rPr sz="1700" b="1" i="0">
-                <a:solidFill>
-                  <a:srgbClr val="463A53"/>
-                </a:solidFill>
-                <a:latin typeface="Century Gothic"/>
-              </a:rPr>
-              <a:t>.07</a:t>
-            </a:r>
-          </a:p>
-        </p:txBody>
-      </p:sp>
-      <p:sp>
-        <p:nvSpPr>
-          <p:cNvPr id="21" name="TextBox 20"/>
-          <p:cNvSpPr txBox="1"/>
-          <p:nvPr/>
-        </p:nvSpPr>
-        <p:spPr>
-          <a:xfrm>
-            <a:off x="8176107" y="5367528"/>
-            <a:ext cx="1508760" cy="365760"/>
-          </a:xfrm>
-          <a:prstGeom prst="rect">
-            <a:avLst/>
-          </a:prstGeom>
-          <a:noFill/>
-        </p:spPr>
-        <p:txBody>
-          <a:bodyPr wrap="square" anchor="ctr" lIns="0" rIns="0" tIns="0" bIns="0">
-            <a:spAutoFit/>
-          </a:bodyPr>
-          <a:lstStyle/>
-          <a:p>
-            <a:pPr algn="ctr">
-              <a:lnSpc>
-                <a:spcPct val="100000"/>
-              </a:lnSpc>
-            </a:pPr>
-            <a:r>
-              <a:rPr sz="1400" b="1" i="0">
-                <a:solidFill>
-                  <a:srgbClr val="8A7D95"/>
-                </a:solidFill>
-                <a:latin typeface="Calibri"/>
-              </a:rPr>
-              <a:t>Llama</a:t>
-            </a:r>
-          </a:p>
-        </p:txBody>
-      </p:sp>
-      <p:sp>
-        <p:nvSpPr>
-          <p:cNvPr id="22" name="TextBox 21"/>
-          <p:cNvSpPr txBox="1"/>
-          <p:nvPr/>
-        </p:nvSpPr>
-        <p:spPr>
-          <a:xfrm>
-            <a:off x="1523847" y="5916168"/>
-            <a:ext cx="9144000" cy="365760"/>
-          </a:xfrm>
-          <a:prstGeom prst="rect">
-            <a:avLst/>
-          </a:prstGeom>
-          <a:noFill/>
-        </p:spPr>
-        <p:txBody>
-          <a:bodyPr wrap="square" anchor="ctr" lIns="0" rIns="0" tIns="0" bIns="0">
-            <a:spAutoFit/>
-          </a:bodyPr>
-          <a:lstStyle/>
-          <a:p>
-            <a:pPr algn="ctr">
-              <a:lnSpc>
-                <a:spcPct val="100000"/>
-              </a:lnSpc>
-            </a:pPr>
-            <a:r>
-              <a:rPr sz="1100" b="1" i="0" spc="240">
-                <a:solidFill>
-                  <a:srgbClr val="8A7D95"/>
-                </a:solidFill>
-                <a:latin typeface="Century Gothic"/>
-              </a:rPr>
-              <a:t>BIAS TOWARD IDENTICAL FEMALE CANDIDATES  ·  EFFECT SIZE</a:t>
-            </a:r>
-          </a:p>
-        </p:txBody>
-      </p:sp>
-      <p:sp>
-        <p:nvSpPr>
-          <p:cNvPr id="23" name="Rectangle 22"/>
-          <p:cNvSpPr/>
-          <p:nvPr/>
-        </p:nvSpPr>
-        <p:spPr>
-          <a:xfrm>
-            <a:off x="0" y="6803136"/>
-            <a:ext cx="2743200" cy="54864"/>
-          </a:xfrm>
-          <a:prstGeom prst="rect">
-            <a:avLst/>
-          </a:prstGeom>
-          <a:solidFill>
-            <a:srgbClr val="E888B4"/>
-          </a:solidFill>
-          <a:ln>
-            <a:noFill/>
-          </a:ln>
-          <a:effectLst/>
-        </p:spPr>
-        <p:style>
-          <a:lnRef idx="1">
-            <a:schemeClr val="accent1"/>
-          </a:lnRef>
-          <a:fillRef idx="3">
-            <a:schemeClr val="accent1"/>
-          </a:fillRef>
-          <a:effectRef idx="2">
-            <a:schemeClr val="accent1"/>
-          </a:effectRef>
-          <a:fontRef idx="minor">
-            <a:schemeClr val="lt1"/>
-          </a:fontRef>
-        </p:style>
-        <p:txBody>
-          <a:bodyPr rtlCol="0" anchor="ctr"/>
-          <a:lstStyle/>
-          <a:p>
-            <a:pPr algn="ctr"/>
-          </a:p>
-        </p:txBody>
-      </p:sp>
-      <p:sp>
-        <p:nvSpPr>
-          <p:cNvPr id="24" name="TextBox 23"/>
-          <p:cNvSpPr txBox="1"/>
-          <p:nvPr/>
-        </p:nvSpPr>
-        <p:spPr>
-          <a:xfrm>
-            <a:off x="11002975" y="6355080"/>
+            <a:off x="11048695" y="6355080"/>
             <a:ext cx="914400" cy="320040"/>
           </a:xfrm>
           <a:prstGeom prst="rect">
@@ -10025,7 +10514,7 @@
             <a:r>
               <a:rPr sz="1100" b="0" i="0">
                 <a:solidFill>
-                  <a:srgbClr val="B0A4BB"/>
+                  <a:srgbClr val="9B8571"/>
                 </a:solidFill>
                 <a:latin typeface="Calibri"/>
               </a:rPr>
@@ -10069,13 +10558,13 @@
           <a:gradFill rotWithShape="1">
             <a:gsLst>
               <a:gs pos="0">
-                <a:srgbClr val="FDEEF4"/>
+                <a:srgbClr val="F5EDDF"/>
               </a:gs>
               <a:gs pos="100000">
-                <a:srgbClr val="E9F1FC"/>
+                <a:srgbClr val="E7D3B8"/>
               </a:gs>
             </a:gsLst>
-            <a:lin scaled="0" ang="13500000"/>
+            <a:lin scaled="0" ang="14400000"/>
           </a:gradFill>
           <a:ln>
             <a:noFill/>
@@ -10134,11 +10623,11 @@
             <a:r>
               <a:rPr sz="1300" b="1" i="0" spc="420">
                 <a:solidFill>
-                  <a:srgbClr val="6FA0DD"/>
+                  <a:srgbClr val="BE932E"/>
                 </a:solidFill>
-                <a:latin typeface="Century Gothic"/>
+                <a:latin typeface="Calibri"/>
               </a:rPr>
-              <a:t>FIX 1</a:t>
+              <a:t>FIX 2</a:t>
             </a:r>
           </a:p>
         </p:txBody>
@@ -10151,15 +10640,15 @@
         </p:nvCxnSpPr>
         <p:spPr>
           <a:xfrm>
-            <a:off x="5775807" y="969264"/>
-            <a:ext cx="640080" cy="0"/>
+            <a:off x="5803239" y="987552"/>
+            <a:ext cx="585216" cy="0"/>
           </a:xfrm>
           <a:prstGeom prst="bentConnector3">
             <a:avLst/>
           </a:prstGeom>
           <a:ln w="27940">
             <a:solidFill>
-              <a:srgbClr val="6FA0DD"/>
+              <a:srgbClr val="BE932E"/>
             </a:solidFill>
           </a:ln>
           <a:effectLst/>
@@ -10187,26 +10676,24 @@
         </p:nvSpPr>
         <p:spPr>
           <a:xfrm>
-            <a:off x="3078327" y="2148840"/>
-            <a:ext cx="6035040" cy="914400"/>
+            <a:off x="1798167" y="2286000"/>
+            <a:ext cx="3200400" cy="914400"/>
           </a:xfrm>
           <a:prstGeom prst="roundRect">
             <a:avLst>
-              <a:gd name="adj" fmla="val 50000"/>
+              <a:gd name="adj" fmla="val 28000"/>
             </a:avLst>
           </a:prstGeom>
           <a:solidFill>
-            <a:srgbClr val="FFFFFF"/>
-          </a:solidFill>
-          <a:ln w="15240">
-            <a:solidFill>
-              <a:srgbClr val="EFDFE9"/>
-            </a:solidFill>
+            <a:srgbClr val="F1DED3"/>
+          </a:solidFill>
+          <a:ln>
+            <a:noFill/>
           </a:ln>
           <a:effectLst>
-            <a:outerShdw blurRad="228600" dist="127000" dir="5400000" rotWithShape="0">
-              <a:srgbClr val="C880A8">
-                <a:alpha val="78000"/>
+            <a:outerShdw blurRad="254000" dist="139700" dir="5400000" rotWithShape="0">
+              <a:srgbClr val="6B4A34">
+                <a:alpha val="76000"/>
               </a:srgbClr>
             </a:outerShdw>
           </a:effectLst>
@@ -10241,8 +10728,8 @@
         </p:nvSpPr>
         <p:spPr>
           <a:xfrm>
-            <a:off x="3078327" y="2148840"/>
-            <a:ext cx="6035040" cy="914400"/>
+            <a:off x="1798167" y="2286000"/>
+            <a:ext cx="3200400" cy="914400"/>
           </a:xfrm>
           <a:prstGeom prst="rect">
             <a:avLst/>
@@ -10261,27 +10748,126 @@
               </a:lnSpc>
             </a:pPr>
             <a:r>
-              <a:rPr sz="2200" b="1" i="1">
+              <a:rPr sz="2200" b="1" i="0">
                 <a:solidFill>
-                  <a:srgbClr val="463A53"/>
+                  <a:srgbClr val="B0563A"/>
                 </a:solidFill>
-                <a:latin typeface="Century Gothic"/>
+                <a:latin typeface="Calibri"/>
               </a:rPr>
-              <a:t>“Ignore the name and gender.”</a:t>
-            </a:r>
-          </a:p>
-        </p:txBody>
-      </p:sp>
-      <p:sp>
-        <p:nvSpPr>
-          <p:cNvPr id="7" name="TextBox 6"/>
+              <a:t>Haruto Sato</a:t>
+            </a:r>
+          </a:p>
+        </p:txBody>
+      </p:sp>
+      <p:sp>
+        <p:nvSpPr>
+          <p:cNvPr id="7" name="Right Arrow 6"/>
+          <p:cNvSpPr/>
+          <p:nvPr/>
+        </p:nvSpPr>
+        <p:spPr>
+          <a:xfrm>
+            <a:off x="5638647" y="2578608"/>
+            <a:ext cx="914400" cy="329184"/>
+          </a:xfrm>
+          <a:prstGeom prst="rightArrow">
+            <a:avLst>
+              <a:gd name="adj1" fmla="val 55000"/>
+              <a:gd name="adj2" fmla="val 50000"/>
+            </a:avLst>
+          </a:prstGeom>
+          <a:solidFill>
+            <a:srgbClr val="9B8571"/>
+          </a:solidFill>
+          <a:ln>
+            <a:noFill/>
+          </a:ln>
+          <a:effectLst/>
+        </p:spPr>
+        <p:style>
+          <a:lnRef idx="1">
+            <a:schemeClr val="accent1"/>
+          </a:lnRef>
+          <a:fillRef idx="3">
+            <a:schemeClr val="accent1"/>
+          </a:fillRef>
+          <a:effectRef idx="2">
+            <a:schemeClr val="accent1"/>
+          </a:effectRef>
+          <a:fontRef idx="minor">
+            <a:schemeClr val="lt1"/>
+          </a:fontRef>
+        </p:style>
+        <p:txBody>
+          <a:bodyPr rtlCol="0" anchor="ctr"/>
+          <a:lstStyle/>
+          <a:p>
+            <a:pPr algn="ctr"/>
+          </a:p>
+        </p:txBody>
+      </p:sp>
+      <p:sp>
+        <p:nvSpPr>
+          <p:cNvPr id="8" name="Rounded Rectangle 7"/>
+          <p:cNvSpPr/>
+          <p:nvPr/>
+        </p:nvSpPr>
+        <p:spPr>
+          <a:xfrm>
+            <a:off x="7193127" y="2286000"/>
+            <a:ext cx="3200400" cy="914400"/>
+          </a:xfrm>
+          <a:prstGeom prst="roundRect">
+            <a:avLst>
+              <a:gd name="adj" fmla="val 28000"/>
+            </a:avLst>
+          </a:prstGeom>
+          <a:solidFill>
+            <a:srgbClr val="F1E7C8"/>
+          </a:solidFill>
+          <a:ln>
+            <a:noFill/>
+          </a:ln>
+          <a:effectLst>
+            <a:outerShdw blurRad="254000" dist="139700" dir="5400000" rotWithShape="0">
+              <a:srgbClr val="6B4A34">
+                <a:alpha val="76000"/>
+              </a:srgbClr>
+            </a:outerShdw>
+          </a:effectLst>
+        </p:spPr>
+        <p:style>
+          <a:lnRef idx="1">
+            <a:schemeClr val="accent1"/>
+          </a:lnRef>
+          <a:fillRef idx="3">
+            <a:schemeClr val="accent1"/>
+          </a:fillRef>
+          <a:effectRef idx="2">
+            <a:schemeClr val="accent1"/>
+          </a:effectRef>
+          <a:fontRef idx="minor">
+            <a:schemeClr val="lt1"/>
+          </a:fontRef>
+        </p:style>
+        <p:txBody>
+          <a:bodyPr rtlCol="0" anchor="ctr"/>
+          <a:lstStyle/>
+          <a:p>
+            <a:pPr algn="ctr"/>
+          </a:p>
+        </p:txBody>
+      </p:sp>
+      <p:sp>
+        <p:nvSpPr>
+          <p:cNvPr id="9" name="TextBox 8"/>
           <p:cNvSpPr txBox="1"/>
           <p:nvPr/>
         </p:nvSpPr>
         <p:spPr>
           <a:xfrm>
-            <a:off x="4632807" y="3794760"/>
-            <a:ext cx="2926080" cy="1280160"/>
+            <a:off x="7193127" y="2286000"/>
+            <a:ext cx="3200400" cy="914400"/>
           </a:xfrm>
           <a:prstGeom prst="rect">
             <a:avLst/>
@@ -10300,27 +10886,27 @@
               </a:lnSpc>
             </a:pPr>
             <a:r>
-              <a:rPr sz="9000" b="1" i="0">
+              <a:rPr sz="1700" b="1" i="0">
                 <a:solidFill>
-                  <a:srgbClr val="E07AA8"/>
+                  <a:srgbClr val="6B4A34"/>
                 </a:solidFill>
-                <a:latin typeface="Calibri"/>
+                <a:latin typeface="Consolas"/>
               </a:rPr>
-              <a:t>✗</a:t>
-            </a:r>
-          </a:p>
-        </p:txBody>
-      </p:sp>
-      <p:sp>
-        <p:nvSpPr>
-          <p:cNvPr id="8" name="TextBox 7"/>
+              <a:t>[PRIVATE_PERSON]</a:t>
+            </a:r>
+          </a:p>
+        </p:txBody>
+      </p:sp>
+      <p:sp>
+        <p:nvSpPr>
+          <p:cNvPr id="10" name="TextBox 9"/>
           <p:cNvSpPr txBox="1"/>
           <p:nvPr/>
         </p:nvSpPr>
         <p:spPr>
           <a:xfrm>
-            <a:off x="1523847" y="5257800"/>
-            <a:ext cx="9144000" cy="640080"/>
+            <a:off x="4632807" y="3794760"/>
+            <a:ext cx="2926080" cy="1280160"/>
           </a:xfrm>
           <a:prstGeom prst="rect">
             <a:avLst/>
@@ -10339,33 +10925,72 @@
               </a:lnSpc>
             </a:pPr>
             <a:r>
+              <a:rPr sz="9400" b="1" i="0">
+                <a:solidFill>
+                  <a:srgbClr val="BE932E"/>
+                </a:solidFill>
+                <a:latin typeface="Calibri"/>
+              </a:rPr>
+              <a:t>✓</a:t>
+            </a:r>
+          </a:p>
+        </p:txBody>
+      </p:sp>
+      <p:sp>
+        <p:nvSpPr>
+          <p:cNvPr id="11" name="TextBox 10"/>
+          <p:cNvSpPr txBox="1"/>
+          <p:nvPr/>
+        </p:nvSpPr>
+        <p:spPr>
+          <a:xfrm>
+            <a:off x="883767" y="5349240"/>
+            <a:ext cx="10424160" cy="640080"/>
+          </a:xfrm>
+          <a:prstGeom prst="rect">
+            <a:avLst/>
+          </a:prstGeom>
+          <a:noFill/>
+        </p:spPr>
+        <p:txBody>
+          <a:bodyPr wrap="square" anchor="ctr" lIns="0" rIns="0" tIns="0" bIns="0">
+            <a:spAutoFit/>
+          </a:bodyPr>
+          <a:lstStyle/>
+          <a:p>
+            <a:pPr algn="ctr">
+              <a:lnSpc>
+                <a:spcPct val="100000"/>
+              </a:lnSpc>
+            </a:pPr>
+            <a:r>
               <a:rPr sz="2400" b="1" i="0">
                 <a:solidFill>
-                  <a:srgbClr val="463A53"/>
+                  <a:srgbClr val="3E2C1E"/>
                 </a:solidFill>
-                <a:latin typeface="Century Gothic"/>
+                <a:latin typeface="Georgia"/>
               </a:rPr>
-              <a:t>Barely changed — bias remained in every model</a:t>
-            </a:r>
-          </a:p>
-        </p:txBody>
-      </p:sp>
-      <p:sp>
-        <p:nvSpPr>
-          <p:cNvPr id="9" name="Rectangle 8"/>
+              <a:t>Remove the name → the difference almost disappears</a:t>
+            </a:r>
+          </a:p>
+        </p:txBody>
+      </p:sp>
+      <p:sp>
+        <p:nvSpPr>
+          <p:cNvPr id="12" name="Rectangle 11"/>
           <p:cNvSpPr/>
           <p:nvPr/>
         </p:nvSpPr>
         <p:spPr>
           <a:xfrm>
             <a:off x="0" y="6803136"/>
-            <a:ext cx="3017520" cy="54864"/>
+            <a:ext cx="2726574" cy="54864"/>
           </a:xfrm>
           <a:prstGeom prst="rect">
             <a:avLst/>
           </a:prstGeom>
           <a:solidFill>
-            <a:srgbClr val="6FA0DD"/>
+            <a:srgbClr val="BE932E"/>
           </a:solidFill>
           <a:ln>
             <a:noFill/>
@@ -10396,13 +11021,13 @@
       </p:sp>
       <p:sp>
         <p:nvSpPr>
-          <p:cNvPr id="10" name="TextBox 9"/>
+          <p:cNvPr id="13" name="TextBox 12"/>
           <p:cNvSpPr txBox="1"/>
           <p:nvPr/>
         </p:nvSpPr>
         <p:spPr>
           <a:xfrm>
-            <a:off x="11002975" y="6355080"/>
+            <a:off x="11048695" y="6355080"/>
             <a:ext cx="914400" cy="320040"/>
           </a:xfrm>
           <a:prstGeom prst="rect">
@@ -10424,7 +11049,7 @@
             <a:r>
               <a:rPr sz="1100" b="0" i="0">
                 <a:solidFill>
-                  <a:srgbClr val="B0A4BB"/>
+                  <a:srgbClr val="9B8571"/>
                 </a:solidFill>
                 <a:latin typeface="Calibri"/>
               </a:rPr>
@@ -10468,13 +11093,13 @@
           <a:gradFill rotWithShape="1">
             <a:gsLst>
               <a:gs pos="0">
-                <a:srgbClr val="FDEEF4"/>
+                <a:srgbClr val="EFE1D3"/>
               </a:gs>
               <a:gs pos="100000">
-                <a:srgbClr val="E9F1FC"/>
+                <a:srgbClr val="E7D3B8"/>
               </a:gs>
             </a:gsLst>
-            <a:lin scaled="0" ang="13500000"/>
+            <a:lin scaled="0" ang="14400000"/>
           </a:gradFill>
           <a:ln>
             <a:noFill/>
@@ -10533,11 +11158,11 @@
             <a:r>
               <a:rPr sz="1300" b="1" i="0" spc="420">
                 <a:solidFill>
-                  <a:srgbClr val="6FA0DD"/>
+                  <a:srgbClr val="A9744F"/>
                 </a:solidFill>
-                <a:latin typeface="Century Gothic"/>
+                <a:latin typeface="Calibri"/>
               </a:rPr>
-              <a:t>FIX 2</a:t>
+              <a:t>WHY IT HAPPENS</a:t>
             </a:r>
           </a:p>
         </p:txBody>
@@ -10550,15 +11175,15 @@
         </p:nvCxnSpPr>
         <p:spPr>
           <a:xfrm>
-            <a:off x="5775807" y="969264"/>
-            <a:ext cx="640080" cy="0"/>
+            <a:off x="5803239" y="987552"/>
+            <a:ext cx="585216" cy="0"/>
           </a:xfrm>
           <a:prstGeom prst="bentConnector3">
             <a:avLst/>
           </a:prstGeom>
           <a:ln w="27940">
             <a:solidFill>
-              <a:srgbClr val="6FA0DD"/>
+              <a:srgbClr val="A9744F"/>
             </a:solidFill>
           </a:ln>
           <a:effectLst/>
@@ -10580,30 +11205,120 @@
       </p:cxnSp>
       <p:sp>
         <p:nvSpPr>
-          <p:cNvPr id="5" name="Rounded Rectangle 4"/>
+          <p:cNvPr id="5" name="Isosceles Triangle 4"/>
           <p:cNvSpPr/>
           <p:nvPr/>
         </p:nvSpPr>
         <p:spPr>
           <a:xfrm>
-            <a:off x="1889607" y="2331720"/>
-            <a:ext cx="3108960" cy="914400"/>
+            <a:off x="5592927" y="3017520"/>
+            <a:ext cx="1005840" cy="868680"/>
+          </a:xfrm>
+          <a:prstGeom prst="triangle">
+            <a:avLst/>
+          </a:prstGeom>
+          <a:solidFill>
+            <a:srgbClr val="6B4A34"/>
+          </a:solidFill>
+          <a:ln>
+            <a:noFill/>
+          </a:ln>
+          <a:effectLst/>
+        </p:spPr>
+        <p:style>
+          <a:lnRef idx="1">
+            <a:schemeClr val="accent1"/>
+          </a:lnRef>
+          <a:fillRef idx="3">
+            <a:schemeClr val="accent1"/>
+          </a:fillRef>
+          <a:effectRef idx="2">
+            <a:schemeClr val="accent1"/>
+          </a:effectRef>
+          <a:fontRef idx="minor">
+            <a:schemeClr val="lt1"/>
+          </a:fontRef>
+        </p:style>
+        <p:txBody>
+          <a:bodyPr rtlCol="0" anchor="ctr"/>
+          <a:lstStyle/>
+          <a:p>
+            <a:pPr algn="ctr"/>
+          </a:p>
+        </p:txBody>
+      </p:sp>
+      <p:sp>
+        <p:nvSpPr>
+          <p:cNvPr id="6" name="Rounded Rectangle 5"/>
+          <p:cNvSpPr/>
+          <p:nvPr/>
+        </p:nvSpPr>
+        <p:spPr>
+          <a:xfrm>
+            <a:off x="6013551" y="2423160"/>
+            <a:ext cx="164592" cy="685800"/>
           </a:xfrm>
           <a:prstGeom prst="roundRect">
             <a:avLst>
-              <a:gd name="adj" fmla="val 28000"/>
+              <a:gd name="adj" fmla="val 50000"/>
             </a:avLst>
           </a:prstGeom>
           <a:solidFill>
-            <a:srgbClr val="FBE4EF"/>
+            <a:srgbClr val="6B4A34"/>
           </a:solidFill>
           <a:ln>
             <a:noFill/>
           </a:ln>
+          <a:effectLst/>
+        </p:spPr>
+        <p:style>
+          <a:lnRef idx="1">
+            <a:schemeClr val="accent1"/>
+          </a:lnRef>
+          <a:fillRef idx="3">
+            <a:schemeClr val="accent1"/>
+          </a:fillRef>
+          <a:effectRef idx="2">
+            <a:schemeClr val="accent1"/>
+          </a:effectRef>
+          <a:fontRef idx="minor">
+            <a:schemeClr val="lt1"/>
+          </a:fontRef>
+        </p:style>
+        <p:txBody>
+          <a:bodyPr rtlCol="0" anchor="ctr"/>
+          <a:lstStyle/>
+          <a:p>
+            <a:pPr algn="ctr"/>
+          </a:p>
+        </p:txBody>
+      </p:sp>
+      <p:sp>
+        <p:nvSpPr>
+          <p:cNvPr id="7" name="Rounded Rectangle 6"/>
+          <p:cNvSpPr/>
+          <p:nvPr/>
+        </p:nvSpPr>
+        <p:spPr>
+          <a:xfrm rot="540000">
+            <a:off x="3947007" y="2798064"/>
+            <a:ext cx="4297680" cy="164592"/>
+          </a:xfrm>
+          <a:prstGeom prst="roundRect">
+            <a:avLst>
+              <a:gd name="adj" fmla="val 50000"/>
+            </a:avLst>
+          </a:prstGeom>
+          <a:solidFill>
+            <a:srgbClr val="A9744F"/>
+          </a:solidFill>
+          <a:ln>
+            <a:noFill/>
+          </a:ln>
           <a:effectLst>
-            <a:outerShdw blurRad="228600" dist="127000" dir="5400000" rotWithShape="0">
-              <a:srgbClr val="C880A8">
-                <a:alpha val="78000"/>
+            <a:outerShdw blurRad="254000" dist="139700" dir="5400000" rotWithShape="0">
+              <a:srgbClr val="6B4A34">
+                <a:alpha val="76000"/>
               </a:srgbClr>
             </a:outerShdw>
           </a:effectLst>
@@ -10630,16 +11345,104 @@
           </a:p>
         </p:txBody>
       </p:sp>
-      <p:sp>
-        <p:nvSpPr>
-          <p:cNvPr id="6" name="TextBox 5"/>
+      <p:cxnSp>
+        <p:nvCxnSpPr>
+          <p:cNvPr id="8" name="Connector 7"/>
+          <p:cNvCxnSpPr/>
+          <p:nvPr/>
+        </p:nvCxnSpPr>
+        <p:spPr>
+          <a:xfrm>
+            <a:off x="3973463" y="2544207"/>
+            <a:ext cx="0" cy="868680"/>
+          </a:xfrm>
+          <a:prstGeom prst="bentConnector3">
+            <a:avLst/>
+          </a:prstGeom>
+          <a:ln w="20320">
+            <a:solidFill>
+              <a:srgbClr val="6B4A34"/>
+            </a:solidFill>
+          </a:ln>
+          <a:effectLst/>
+        </p:spPr>
+        <p:style>
+          <a:lnRef idx="2">
+            <a:schemeClr val="accent1"/>
+          </a:lnRef>
+          <a:fillRef idx="0">
+            <a:schemeClr val="accent1"/>
+          </a:fillRef>
+          <a:effectRef idx="1">
+            <a:schemeClr val="accent1"/>
+          </a:effectRef>
+          <a:fontRef idx="minor">
+            <a:schemeClr val="tx1"/>
+          </a:fontRef>
+        </p:style>
+      </p:cxnSp>
+      <p:sp>
+        <p:nvSpPr>
+          <p:cNvPr id="9" name="Rounded Rectangle 8"/>
+          <p:cNvSpPr/>
+          <p:nvPr/>
+        </p:nvSpPr>
+        <p:spPr>
+          <a:xfrm>
+            <a:off x="3406535" y="3412887"/>
+            <a:ext cx="1133856" cy="109728"/>
+          </a:xfrm>
+          <a:prstGeom prst="roundRect">
+            <a:avLst>
+              <a:gd name="adj" fmla="val 50000"/>
+            </a:avLst>
+          </a:prstGeom>
+          <a:solidFill>
+            <a:srgbClr val="CDA07E"/>
+          </a:solidFill>
+          <a:ln>
+            <a:noFill/>
+          </a:ln>
+          <a:effectLst>
+            <a:outerShdw blurRad="254000" dist="139700" dir="5400000" rotWithShape="0">
+              <a:srgbClr val="6B4A34">
+                <a:alpha val="76000"/>
+              </a:srgbClr>
+            </a:outerShdw>
+          </a:effectLst>
+        </p:spPr>
+        <p:style>
+          <a:lnRef idx="1">
+            <a:schemeClr val="accent1"/>
+          </a:lnRef>
+          <a:fillRef idx="3">
+            <a:schemeClr val="accent1"/>
+          </a:fillRef>
+          <a:effectRef idx="2">
+            <a:schemeClr val="accent1"/>
+          </a:effectRef>
+          <a:fontRef idx="minor">
+            <a:schemeClr val="lt1"/>
+          </a:fontRef>
+        </p:style>
+        <p:txBody>
+          <a:bodyPr rtlCol="0" anchor="ctr"/>
+          <a:lstStyle/>
+          <a:p>
+            <a:pPr algn="ctr"/>
+          </a:p>
+        </p:txBody>
+      </p:sp>
+      <p:sp>
+        <p:nvSpPr>
+          <p:cNvPr id="10" name="TextBox 9"/>
           <p:cNvSpPr txBox="1"/>
           <p:nvPr/>
         </p:nvSpPr>
         <p:spPr>
           <a:xfrm>
-            <a:off x="1889607" y="2331720"/>
-            <a:ext cx="3108960" cy="914400"/>
+            <a:off x="3241943" y="2544207"/>
+            <a:ext cx="1463040" cy="822960"/>
           </a:xfrm>
           <a:prstGeom prst="rect">
             <a:avLst/>
@@ -10658,90 +11461,79 @@
               </a:lnSpc>
             </a:pPr>
             <a:r>
-              <a:rPr sz="2200" b="1" i="0">
+              <a:rPr sz="4800" b="1" i="0">
                 <a:solidFill>
-                  <a:srgbClr val="E07AA8"/>
+                  <a:srgbClr val="6B4A34"/>
                 </a:solidFill>
                 <a:latin typeface="Calibri"/>
               </a:rPr>
-              <a:t>Haruto Sato</a:t>
-            </a:r>
-          </a:p>
-        </p:txBody>
-      </p:sp>
-      <p:sp>
-        <p:nvSpPr>
-          <p:cNvPr id="7" name="Right Arrow 6"/>
+              <a:t>♂</a:t>
+            </a:r>
+          </a:p>
+        </p:txBody>
+      </p:sp>
+      <p:cxnSp>
+        <p:nvCxnSpPr>
+          <p:cNvPr id="11" name="Connector 10"/>
+          <p:cNvCxnSpPr/>
+          <p:nvPr/>
+        </p:nvCxnSpPr>
+        <p:spPr>
+          <a:xfrm>
+            <a:off x="8218231" y="3216512"/>
+            <a:ext cx="0" cy="868680"/>
+          </a:xfrm>
+          <a:prstGeom prst="bentConnector3">
+            <a:avLst/>
+          </a:prstGeom>
+          <a:ln w="20320">
+            <a:solidFill>
+              <a:srgbClr val="6B4A34"/>
+            </a:solidFill>
+          </a:ln>
+          <a:effectLst/>
+        </p:spPr>
+        <p:style>
+          <a:lnRef idx="2">
+            <a:schemeClr val="accent1"/>
+          </a:lnRef>
+          <a:fillRef idx="0">
+            <a:schemeClr val="accent1"/>
+          </a:fillRef>
+          <a:effectRef idx="1">
+            <a:schemeClr val="accent1"/>
+          </a:effectRef>
+          <a:fontRef idx="minor">
+            <a:schemeClr val="tx1"/>
+          </a:fontRef>
+        </p:style>
+      </p:cxnSp>
+      <p:sp>
+        <p:nvSpPr>
+          <p:cNvPr id="12" name="Rounded Rectangle 11"/>
           <p:cNvSpPr/>
           <p:nvPr/>
         </p:nvSpPr>
         <p:spPr>
           <a:xfrm>
-            <a:off x="5638647" y="2624327"/>
-            <a:ext cx="914400" cy="329184"/>
-          </a:xfrm>
-          <a:prstGeom prst="rightArrow">
+            <a:off x="7651303" y="4085192"/>
+            <a:ext cx="1133856" cy="109728"/>
+          </a:xfrm>
+          <a:prstGeom prst="roundRect">
             <a:avLst>
-              <a:gd name="adj1" fmla="val 55000"/>
-              <a:gd name="adj2" fmla="val 50000"/>
+              <a:gd name="adj" fmla="val 50000"/>
             </a:avLst>
           </a:prstGeom>
           <a:solidFill>
-            <a:srgbClr val="B0A4BB"/>
+            <a:srgbClr val="CDA07E"/>
           </a:solidFill>
           <a:ln>
             <a:noFill/>
           </a:ln>
-          <a:effectLst/>
-        </p:spPr>
-        <p:style>
-          <a:lnRef idx="1">
-            <a:schemeClr val="accent1"/>
-          </a:lnRef>
-          <a:fillRef idx="3">
-            <a:schemeClr val="accent1"/>
-          </a:fillRef>
-          <a:effectRef idx="2">
-            <a:schemeClr val="accent1"/>
-          </a:effectRef>
-          <a:fontRef idx="minor">
-            <a:schemeClr val="lt1"/>
-          </a:fontRef>
-        </p:style>
-        <p:txBody>
-          <a:bodyPr rtlCol="0" anchor="ctr"/>
-          <a:lstStyle/>
-          <a:p>
-            <a:pPr algn="ctr"/>
-          </a:p>
-        </p:txBody>
-      </p:sp>
-      <p:sp>
-        <p:nvSpPr>
-          <p:cNvPr id="8" name="Rounded Rectangle 7"/>
-          <p:cNvSpPr/>
-          <p:nvPr/>
-        </p:nvSpPr>
-        <p:spPr>
-          <a:xfrm>
-            <a:off x="7193127" y="2331720"/>
-            <a:ext cx="3108960" cy="914400"/>
-          </a:xfrm>
-          <a:prstGeom prst="roundRect">
-            <a:avLst>
-              <a:gd name="adj" fmla="val 28000"/>
-            </a:avLst>
-          </a:prstGeom>
-          <a:solidFill>
-            <a:srgbClr val="E6EEFB"/>
-          </a:solidFill>
-          <a:ln>
-            <a:noFill/>
-          </a:ln>
           <a:effectLst>
-            <a:outerShdw blurRad="228600" dist="127000" dir="5400000" rotWithShape="0">
-              <a:srgbClr val="C880A8">
-                <a:alpha val="78000"/>
+            <a:outerShdw blurRad="254000" dist="139700" dir="5400000" rotWithShape="0">
+              <a:srgbClr val="6B4A34">
+                <a:alpha val="76000"/>
               </a:srgbClr>
             </a:outerShdw>
           </a:effectLst>
@@ -10770,14 +11562,14 @@
       </p:sp>
       <p:sp>
         <p:nvSpPr>
-          <p:cNvPr id="9" name="TextBox 8"/>
+          <p:cNvPr id="13" name="TextBox 12"/>
           <p:cNvSpPr txBox="1"/>
           <p:nvPr/>
         </p:nvSpPr>
         <p:spPr>
           <a:xfrm>
-            <a:off x="7193127" y="2331720"/>
-            <a:ext cx="3108960" cy="914400"/>
+            <a:off x="7486711" y="3216512"/>
+            <a:ext cx="1463040" cy="822960"/>
           </a:xfrm>
           <a:prstGeom prst="rect">
             <a:avLst/>
@@ -10796,27 +11588,27 @@
               </a:lnSpc>
             </a:pPr>
             <a:r>
-              <a:rPr sz="1800" b="1" i="0">
+              <a:rPr sz="4800" b="1" i="0">
                 <a:solidFill>
-                  <a:srgbClr val="6FA0DD"/>
+                  <a:srgbClr val="B0563A"/>
                 </a:solidFill>
-                <a:latin typeface="Consolas"/>
+                <a:latin typeface="Calibri"/>
               </a:rPr>
-              <a:t>[PRIVATE_PERSON]</a:t>
-            </a:r>
-          </a:p>
-        </p:txBody>
-      </p:sp>
-      <p:sp>
-        <p:nvSpPr>
-          <p:cNvPr id="10" name="TextBox 9"/>
+              <a:t>♀</a:t>
+            </a:r>
+          </a:p>
+        </p:txBody>
+      </p:sp>
+      <p:sp>
+        <p:nvSpPr>
+          <p:cNvPr id="14" name="TextBox 13"/>
           <p:cNvSpPr txBox="1"/>
           <p:nvPr/>
         </p:nvSpPr>
         <p:spPr>
           <a:xfrm>
-            <a:off x="4632807" y="3840480"/>
-            <a:ext cx="2926080" cy="1188720"/>
+            <a:off x="700887" y="5486400"/>
+            <a:ext cx="10789920" cy="868680"/>
           </a:xfrm>
           <a:prstGeom prst="rect">
             <a:avLst/>
@@ -10831,76 +11623,37 @@
           <a:p>
             <a:pPr algn="ctr">
               <a:lnSpc>
-                <a:spcPct val="100000"/>
+                <a:spcPct val="104000"/>
               </a:lnSpc>
             </a:pPr>
             <a:r>
-              <a:rPr sz="9000" b="1" i="0">
+              <a:rPr sz="2300" b="1" i="0">
                 <a:solidFill>
-                  <a:srgbClr val="6FA0DD"/>
+                  <a:srgbClr val="3E2C1E"/>
                 </a:solidFill>
-                <a:latin typeface="Calibri"/>
+                <a:latin typeface="Georgia"/>
               </a:rPr>
-              <a:t>✓</a:t>
-            </a:r>
-          </a:p>
-        </p:txBody>
-      </p:sp>
-      <p:sp>
-        <p:nvSpPr>
-          <p:cNvPr id="11" name="TextBox 10"/>
-          <p:cNvSpPr txBox="1"/>
-          <p:nvPr/>
-        </p:nvSpPr>
-        <p:spPr>
-          <a:xfrm>
-            <a:off x="1066647" y="5303520"/>
-            <a:ext cx="10058400" cy="640080"/>
+              <a:t>Fairness training may over-correct — tipping slightly toward women</a:t>
+            </a:r>
+          </a:p>
+        </p:txBody>
+      </p:sp>
+      <p:sp>
+        <p:nvSpPr>
+          <p:cNvPr id="15" name="Rectangle 14"/>
+          <p:cNvSpPr/>
+          <p:nvPr/>
+        </p:nvSpPr>
+        <p:spPr>
+          <a:xfrm>
+            <a:off x="0" y="6803136"/>
+            <a:ext cx="2975956" cy="54864"/>
           </a:xfrm>
           <a:prstGeom prst="rect">
             <a:avLst/>
           </a:prstGeom>
-          <a:noFill/>
-        </p:spPr>
-        <p:txBody>
-          <a:bodyPr wrap="square" anchor="ctr" lIns="0" rIns="0" tIns="0" bIns="0">
-            <a:spAutoFit/>
-          </a:bodyPr>
-          <a:lstStyle/>
-          <a:p>
-            <a:pPr algn="ctr">
-              <a:lnSpc>
-                <a:spcPct val="100000"/>
-              </a:lnSpc>
-            </a:pPr>
-            <a:r>
-              <a:rPr sz="2500" b="1" i="0">
-                <a:solidFill>
-                  <a:srgbClr val="463A53"/>
-                </a:solidFill>
-                <a:latin typeface="Century Gothic"/>
-              </a:rPr>
-              <a:t>Hide the name → the bias almost disappears</a:t>
-            </a:r>
-          </a:p>
-        </p:txBody>
-      </p:sp>
-      <p:sp>
-        <p:nvSpPr>
-          <p:cNvPr id="12" name="Rectangle 11"/>
-          <p:cNvSpPr/>
-          <p:nvPr/>
-        </p:nvSpPr>
-        <p:spPr>
-          <a:xfrm>
-            <a:off x="0" y="6803136"/>
-            <a:ext cx="3291840" cy="54864"/>
-          </a:xfrm>
-          <a:prstGeom prst="rect">
-            <a:avLst/>
-          </a:prstGeom>
-          <a:solidFill>
-            <a:srgbClr val="6FA0DD"/>
+          <a:solidFill>
+            <a:srgbClr val="A9744F"/>
           </a:solidFill>
           <a:ln>
             <a:noFill/>
@@ -10931,13 +11684,13 @@
       </p:sp>
       <p:sp>
         <p:nvSpPr>
-          <p:cNvPr id="13" name="TextBox 12"/>
+          <p:cNvPr id="16" name="TextBox 15"/>
           <p:cNvSpPr txBox="1"/>
           <p:nvPr/>
         </p:nvSpPr>
         <p:spPr>
           <a:xfrm>
-            <a:off x="11002975" y="6355080"/>
+            <a:off x="11048695" y="6355080"/>
             <a:ext cx="914400" cy="320040"/>
           </a:xfrm>
           <a:prstGeom prst="rect">
@@ -10959,7 +11712,7 @@
             <a:r>
               <a:rPr sz="1100" b="0" i="0">
                 <a:solidFill>
-                  <a:srgbClr val="B0A4BB"/>
+                  <a:srgbClr val="9B8571"/>
                 </a:solidFill>
                 <a:latin typeface="Calibri"/>
               </a:rPr>

--- a/presentation/gender_bias_llm_hiring.pptx
+++ b/presentation/gender_bias_llm_hiring.pptx
@@ -3288,7 +3288,7 @@
             <a:r>
               <a:rPr sz="6200" b="0" i="0">
                 <a:solidFill>
-                  <a:srgbClr val="B0563A"/>
+                  <a:srgbClr val="D6749C"/>
                 </a:solidFill>
                 <a:latin typeface="Calibri"/>
               </a:rPr>
@@ -3306,7 +3306,7 @@
             <a:r>
               <a:rPr sz="6200" b="0" i="0">
                 <a:solidFill>
-                  <a:srgbClr val="6B4A34"/>
+                  <a:srgbClr val="6E8FC0"/>
                 </a:solidFill>
                 <a:latin typeface="Calibri"/>
               </a:rPr>
@@ -3842,7 +3842,7 @@
             <a:r>
               <a:rPr sz="5800" b="0" i="0">
                 <a:solidFill>
-                  <a:srgbClr val="B0563A"/>
+                  <a:srgbClr val="D6749C"/>
                 </a:solidFill>
                 <a:latin typeface="Calibri"/>
               </a:rPr>
@@ -3860,7 +3860,7 @@
             <a:r>
               <a:rPr sz="5800" b="0" i="0">
                 <a:solidFill>
-                  <a:srgbClr val="6B4A34"/>
+                  <a:srgbClr val="6E8FC0"/>
                 </a:solidFill>
                 <a:latin typeface="Calibri"/>
               </a:rPr>
@@ -7051,7 +7051,7 @@
             <a:r>
               <a:rPr sz="4800" b="1" i="0">
                 <a:solidFill>
-                  <a:srgbClr val="6B4A34"/>
+                  <a:srgbClr val="6E8FC0"/>
                 </a:solidFill>
                 <a:latin typeface="Calibri"/>
               </a:rPr>
@@ -7178,7 +7178,7 @@
             <a:r>
               <a:rPr sz="4800" b="1" i="0">
                 <a:solidFill>
-                  <a:srgbClr val="B0563A"/>
+                  <a:srgbClr val="D6749C"/>
                 </a:solidFill>
                 <a:latin typeface="Calibri"/>
               </a:rPr>
@@ -7564,7 +7564,7 @@
             </a:avLst>
           </a:prstGeom>
           <a:solidFill>
-            <a:srgbClr val="B0563A"/>
+            <a:srgbClr val="D6749C"/>
           </a:solidFill>
           <a:ln>
             <a:noFill/>
@@ -7807,7 +7807,7 @@
             <a:r>
               <a:rPr sz="4000" b="0" i="0">
                 <a:solidFill>
-                  <a:srgbClr val="B0563A"/>
+                  <a:srgbClr val="D6749C"/>
                 </a:solidFill>
                 <a:latin typeface="Calibri"/>
               </a:rPr>
@@ -7926,7 +7926,7 @@
             </a:avLst>
           </a:prstGeom>
           <a:solidFill>
-            <a:srgbClr val="6B4A34"/>
+            <a:srgbClr val="6E8FC0"/>
           </a:solidFill>
           <a:ln>
             <a:noFill/>
@@ -8169,7 +8169,7 @@
             <a:r>
               <a:rPr sz="4000" b="0" i="0">
                 <a:solidFill>
-                  <a:srgbClr val="6B4A34"/>
+                  <a:srgbClr val="6E8FC0"/>
                 </a:solidFill>
                 <a:latin typeface="Calibri"/>
               </a:rPr>
@@ -9240,7 +9240,7 @@
             </a:avLst>
           </a:prstGeom>
           <a:solidFill>
-            <a:srgbClr val="6B4A34"/>
+            <a:srgbClr val="6E8FC0"/>
           </a:solidFill>
           <a:ln>
             <a:noFill/>
@@ -9483,7 +9483,7 @@
             <a:r>
               <a:rPr sz="4200" b="0" i="0">
                 <a:solidFill>
-                  <a:srgbClr val="6B4A34"/>
+                  <a:srgbClr val="6E8FC0"/>
                 </a:solidFill>
                 <a:latin typeface="Calibri"/>
               </a:rPr>
@@ -9522,7 +9522,7 @@
             <a:r>
               <a:rPr sz="1200" b="1" i="0" spc="160">
                 <a:solidFill>
-                  <a:srgbClr val="9B8571"/>
+                  <a:srgbClr val="6E8FC0"/>
                 </a:solidFill>
                 <a:latin typeface="Calibri"/>
               </a:rPr>
@@ -9548,7 +9548,7 @@
             </a:avLst>
           </a:prstGeom>
           <a:solidFill>
-            <a:srgbClr val="F1DED3"/>
+            <a:srgbClr val="F3DDE7"/>
           </a:solidFill>
           <a:ln>
             <a:noFill/>
@@ -9654,7 +9654,7 @@
             </a:avLst>
           </a:prstGeom>
           <a:solidFill>
-            <a:srgbClr val="B0563A"/>
+            <a:srgbClr val="D6749C"/>
           </a:solidFill>
           <a:ln>
             <a:noFill/>
@@ -9897,7 +9897,7 @@
             <a:r>
               <a:rPr sz="4200" b="0" i="0">
                 <a:solidFill>
-                  <a:srgbClr val="B0563A"/>
+                  <a:srgbClr val="D6749C"/>
                 </a:solidFill>
                 <a:latin typeface="Calibri"/>
               </a:rPr>
@@ -9936,7 +9936,7 @@
             <a:r>
               <a:rPr sz="2600" b="1" i="0">
                 <a:solidFill>
-                  <a:srgbClr val="B0563A"/>
+                  <a:srgbClr val="D6749C"/>
                 </a:solidFill>
                 <a:latin typeface="Calibri"/>
               </a:rPr>
@@ -9975,7 +9975,7 @@
             <a:r>
               <a:rPr sz="1200" b="1" i="0" spc="160">
                 <a:solidFill>
-                  <a:srgbClr val="B0563A"/>
+                  <a:srgbClr val="D6749C"/>
                 </a:solidFill>
                 <a:latin typeface="Calibri"/>
               </a:rPr>
@@ -10023,7 +10023,7 @@
             <a:r>
               <a:rPr sz="2500" b="1" i="0">
                 <a:solidFill>
-                  <a:srgbClr val="B0563A"/>
+                  <a:srgbClr val="D6749C"/>
                 </a:solidFill>
                 <a:latin typeface="Georgia"/>
               </a:rPr>
@@ -11463,7 +11463,7 @@
             <a:r>
               <a:rPr sz="4800" b="1" i="0">
                 <a:solidFill>
-                  <a:srgbClr val="6B4A34"/>
+                  <a:srgbClr val="6E8FC0"/>
                 </a:solidFill>
                 <a:latin typeface="Calibri"/>
               </a:rPr>
@@ -11590,7 +11590,7 @@
             <a:r>
               <a:rPr sz="4800" b="1" i="0">
                 <a:solidFill>
-                  <a:srgbClr val="B0563A"/>
+                  <a:srgbClr val="D6749C"/>
                 </a:solidFill>
                 <a:latin typeface="Calibri"/>
               </a:rPr>

--- a/presentation/gender_bias_llm_hiring.pptx
+++ b/presentation/gender_bias_llm_hiring.pptx
@@ -15,7 +15,6 @@
     <p:sldId id="263" r:id="rId14"/>
     <p:sldId id="264" r:id="rId15"/>
     <p:sldId id="265" r:id="rId16"/>
-    <p:sldId id="266" r:id="rId17"/>
   </p:sldIdLst>
   <p:sldSz cx="12191695" cy="6858000" type="screen4x3"/>
   <p:notesSz cx="6858000" cy="9144000"/>
@@ -3449,337 +3448,6 @@
                 <a:srgbClr val="F5EDDF"/>
               </a:gs>
               <a:gs pos="100000">
-                <a:srgbClr val="EFE1D3"/>
-              </a:gs>
-            </a:gsLst>
-            <a:lin scaled="0" ang="14400000"/>
-          </a:gradFill>
-          <a:ln>
-            <a:noFill/>
-          </a:ln>
-          <a:effectLst/>
-        </p:spPr>
-        <p:style>
-          <a:lnRef idx="1">
-            <a:schemeClr val="accent1"/>
-          </a:lnRef>
-          <a:fillRef idx="3">
-            <a:schemeClr val="accent1"/>
-          </a:fillRef>
-          <a:effectRef idx="2">
-            <a:schemeClr val="accent1"/>
-          </a:effectRef>
-          <a:fontRef idx="minor">
-            <a:schemeClr val="lt1"/>
-          </a:fontRef>
-        </p:style>
-        <p:txBody>
-          <a:bodyPr rtlCol="0" anchor="ctr"/>
-          <a:lstStyle/>
-          <a:p>
-            <a:pPr algn="ctr"/>
-          </a:p>
-        </p:txBody>
-      </p:sp>
-      <p:sp>
-        <p:nvSpPr>
-          <p:cNvPr id="3" name="TextBox 2"/>
-          <p:cNvSpPr txBox="1"/>
-          <p:nvPr/>
-        </p:nvSpPr>
-        <p:spPr>
-          <a:xfrm>
-            <a:off x="2438247" y="566928"/>
-            <a:ext cx="7315200" cy="365760"/>
-          </a:xfrm>
-          <a:prstGeom prst="rect">
-            <a:avLst/>
-          </a:prstGeom>
-          <a:noFill/>
-        </p:spPr>
-        <p:txBody>
-          <a:bodyPr wrap="square" anchor="ctr" lIns="0" rIns="0" tIns="0" bIns="0">
-            <a:spAutoFit/>
-          </a:bodyPr>
-          <a:lstStyle/>
-          <a:p>
-            <a:pPr algn="ctr">
-              <a:lnSpc>
-                <a:spcPct val="100000"/>
-              </a:lnSpc>
-            </a:pPr>
-            <a:r>
-              <a:rPr sz="1300" b="1" i="0" spc="420">
-                <a:solidFill>
-                  <a:srgbClr val="A9744F"/>
-                </a:solidFill>
-                <a:latin typeface="Calibri"/>
-              </a:rPr>
-              <a:t>THE TAKEAWAY</a:t>
-            </a:r>
-          </a:p>
-        </p:txBody>
-      </p:sp>
-      <p:cxnSp>
-        <p:nvCxnSpPr>
-          <p:cNvPr id="4" name="Connector 3"/>
-          <p:cNvCxnSpPr/>
-          <p:nvPr/>
-        </p:nvCxnSpPr>
-        <p:spPr>
-          <a:xfrm>
-            <a:off x="5803239" y="987552"/>
-            <a:ext cx="585216" cy="0"/>
-          </a:xfrm>
-          <a:prstGeom prst="bentConnector3">
-            <a:avLst/>
-          </a:prstGeom>
-          <a:ln w="27940">
-            <a:solidFill>
-              <a:srgbClr val="A9744F"/>
-            </a:solidFill>
-          </a:ln>
-          <a:effectLst/>
-        </p:spPr>
-        <p:style>
-          <a:lnRef idx="2">
-            <a:schemeClr val="accent1"/>
-          </a:lnRef>
-          <a:fillRef idx="0">
-            <a:schemeClr val="accent1"/>
-          </a:fillRef>
-          <a:effectRef idx="1">
-            <a:schemeClr val="accent1"/>
-          </a:effectRef>
-          <a:fontRef idx="minor">
-            <a:schemeClr val="tx1"/>
-          </a:fontRef>
-        </p:style>
-      </p:cxnSp>
-      <p:sp>
-        <p:nvSpPr>
-          <p:cNvPr id="5" name="TextBox 4"/>
-          <p:cNvSpPr txBox="1"/>
-          <p:nvPr/>
-        </p:nvSpPr>
-        <p:spPr>
-          <a:xfrm>
-            <a:off x="700887" y="2286000"/>
-            <a:ext cx="10789920" cy="2011680"/>
-          </a:xfrm>
-          <a:prstGeom prst="rect">
-            <a:avLst/>
-          </a:prstGeom>
-          <a:noFill/>
-        </p:spPr>
-        <p:txBody>
-          <a:bodyPr wrap="square" anchor="ctr" lIns="0" rIns="0" tIns="0" bIns="0">
-            <a:spAutoFit/>
-          </a:bodyPr>
-          <a:lstStyle/>
-          <a:p>
-            <a:pPr algn="ctr">
-              <a:lnSpc>
-                <a:spcPct val="114000"/>
-              </a:lnSpc>
-            </a:pPr>
-            <a:r>
-              <a:rPr sz="3300" b="1" i="0">
-                <a:solidFill>
-                  <a:srgbClr val="3E2C1E"/>
-                </a:solidFill>
-                <a:latin typeface="Georgia"/>
-              </a:rPr>
-              <a:t>AI may decide who gets an interview</a:t>
-            </a:r>
-          </a:p>
-          <a:p>
-            <a:pPr algn="ctr">
-              <a:lnSpc>
-                <a:spcPct val="114000"/>
-              </a:lnSpc>
-            </a:pPr>
-            <a:r>
-              <a:rPr sz="3300" b="1" i="0">
-                <a:solidFill>
-                  <a:srgbClr val="3E2C1E"/>
-                </a:solidFill>
-                <a:latin typeface="Georgia"/>
-              </a:rPr>
-              <a:t/>
-            </a:r>
-            <a:r>
-              <a:rPr sz="3300" b="1" i="0">
-                <a:solidFill>
-                  <a:srgbClr val="B0563A"/>
-                </a:solidFill>
-                <a:latin typeface="Georgia"/>
-              </a:rPr>
-              <a:t>before a human ever sees you.</a:t>
-            </a:r>
-          </a:p>
-        </p:txBody>
-      </p:sp>
-      <p:sp>
-        <p:nvSpPr>
-          <p:cNvPr id="6" name="TextBox 5"/>
-          <p:cNvSpPr txBox="1"/>
-          <p:nvPr/>
-        </p:nvSpPr>
-        <p:spPr>
-          <a:xfrm>
-            <a:off x="1066647" y="4892040"/>
-            <a:ext cx="10058400" cy="640080"/>
-          </a:xfrm>
-          <a:prstGeom prst="rect">
-            <a:avLst/>
-          </a:prstGeom>
-          <a:noFill/>
-        </p:spPr>
-        <p:txBody>
-          <a:bodyPr wrap="square" anchor="ctr" lIns="0" rIns="0" tIns="0" bIns="0">
-            <a:spAutoFit/>
-          </a:bodyPr>
-          <a:lstStyle/>
-          <a:p>
-            <a:pPr algn="ctr">
-              <a:lnSpc>
-                <a:spcPct val="100000"/>
-              </a:lnSpc>
-            </a:pPr>
-            <a:r>
-              <a:rPr sz="2000" b="1" i="1">
-                <a:solidFill>
-                  <a:srgbClr val="A9744F"/>
-                </a:solidFill>
-                <a:latin typeface="Georgia"/>
-              </a:rPr>
-              <a:t>Test it carefully before we trust it with a career</a:t>
-            </a:r>
-          </a:p>
-        </p:txBody>
-      </p:sp>
-      <p:sp>
-        <p:nvSpPr>
-          <p:cNvPr id="7" name="Rectangle 6"/>
-          <p:cNvSpPr/>
-          <p:nvPr/>
-        </p:nvSpPr>
-        <p:spPr>
-          <a:xfrm>
-            <a:off x="0" y="6803136"/>
-            <a:ext cx="3225338" cy="54864"/>
-          </a:xfrm>
-          <a:prstGeom prst="rect">
-            <a:avLst/>
-          </a:prstGeom>
-          <a:solidFill>
-            <a:srgbClr val="A9744F"/>
-          </a:solidFill>
-          <a:ln>
-            <a:noFill/>
-          </a:ln>
-          <a:effectLst/>
-        </p:spPr>
-        <p:style>
-          <a:lnRef idx="1">
-            <a:schemeClr val="accent1"/>
-          </a:lnRef>
-          <a:fillRef idx="3">
-            <a:schemeClr val="accent1"/>
-          </a:fillRef>
-          <a:effectRef idx="2">
-            <a:schemeClr val="accent1"/>
-          </a:effectRef>
-          <a:fontRef idx="minor">
-            <a:schemeClr val="lt1"/>
-          </a:fontRef>
-        </p:style>
-        <p:txBody>
-          <a:bodyPr rtlCol="0" anchor="ctr"/>
-          <a:lstStyle/>
-          <a:p>
-            <a:pPr algn="ctr"/>
-          </a:p>
-        </p:txBody>
-      </p:sp>
-      <p:sp>
-        <p:nvSpPr>
-          <p:cNvPr id="8" name="TextBox 7"/>
-          <p:cNvSpPr txBox="1"/>
-          <p:nvPr/>
-        </p:nvSpPr>
-        <p:spPr>
-          <a:xfrm>
-            <a:off x="11048695" y="6355080"/>
-            <a:ext cx="914400" cy="320040"/>
-          </a:xfrm>
-          <a:prstGeom prst="rect">
-            <a:avLst/>
-          </a:prstGeom>
-          <a:noFill/>
-        </p:spPr>
-        <p:txBody>
-          <a:bodyPr wrap="square" anchor="ctr" lIns="0" rIns="0" tIns="0" bIns="0">
-            <a:spAutoFit/>
-          </a:bodyPr>
-          <a:lstStyle/>
-          <a:p>
-            <a:pPr algn="r">
-              <a:lnSpc>
-                <a:spcPct val="100000"/>
-              </a:lnSpc>
-            </a:pPr>
-            <a:r>
-              <a:rPr sz="1100" b="0" i="0">
-                <a:solidFill>
-                  <a:srgbClr val="9B8571"/>
-                </a:solidFill>
-                <a:latin typeface="Calibri"/>
-              </a:rPr>
-              <a:t>10</a:t>
-            </a:r>
-          </a:p>
-        </p:txBody>
-      </p:sp>
-    </p:spTree>
-  </p:cSld>
-  <p:clrMapOvr>
-    <a:masterClrMapping/>
-  </p:clrMapOvr>
-</p:sld>
-</file>
-
-<file path=ppt/slides/slide11.xml><?xml version="1.0" encoding="utf-8"?>
-<p:sld xmlns:a="http://schemas.openxmlformats.org/drawingml/2006/main" xmlns:p="http://schemas.openxmlformats.org/presentationml/2006/main" xmlns:r="http://schemas.openxmlformats.org/officeDocument/2006/relationships">
-  <p:cSld>
-    <p:spTree>
-      <p:nvGrpSpPr>
-        <p:cNvPr id="1" name=""/>
-        <p:cNvGrpSpPr/>
-        <p:nvPr/>
-      </p:nvGrpSpPr>
-      <p:grpSpPr/>
-      <p:sp>
-        <p:nvSpPr>
-          <p:cNvPr id="2" name="Rectangle 1"/>
-          <p:cNvSpPr/>
-          <p:nvPr/>
-        </p:nvSpPr>
-        <p:spPr>
-          <a:xfrm>
-            <a:off x="0" y="0"/>
-            <a:ext cx="12191695" cy="6858000"/>
-          </a:xfrm>
-          <a:prstGeom prst="rect">
-            <a:avLst/>
-          </a:prstGeom>
-          <a:gradFill rotWithShape="1">
-            <a:gsLst>
-              <a:gs pos="0">
-                <a:srgbClr val="F5EDDF"/>
-              </a:gs>
-              <a:gs pos="100000">
                 <a:srgbClr val="E7D3B8"/>
               </a:gs>
             </a:gsLst>
@@ -4094,27 +3762,23 @@
       </p:cxnSp>
       <p:sp>
         <p:nvSpPr>
-          <p:cNvPr id="5" name="Rounded Rectangle 4"/>
+          <p:cNvPr id="5" name="Oval 4"/>
           <p:cNvSpPr/>
           <p:nvPr/>
         </p:nvSpPr>
         <p:spPr>
           <a:xfrm>
-            <a:off x="2263140" y="2496312"/>
-            <a:ext cx="1600200" cy="2048256"/>
-          </a:xfrm>
-          <a:prstGeom prst="roundRect">
-            <a:avLst>
-              <a:gd name="adj" fmla="val 9000"/>
-            </a:avLst>
-          </a:prstGeom>
-          <a:solidFill>
-            <a:srgbClr val="FCF7EF"/>
-          </a:solidFill>
-          <a:ln w="16510">
-            <a:solidFill>
-              <a:srgbClr val="E4D5C0"/>
-            </a:solidFill>
+            <a:off x="2226564" y="2606040"/>
+            <a:ext cx="576072" cy="576072"/>
+          </a:xfrm>
+          <a:prstGeom prst="ellipse">
+            <a:avLst/>
+          </a:prstGeom>
+          <a:solidFill>
+            <a:srgbClr val="6B4A34"/>
+          </a:solidFill>
+          <a:ln>
+            <a:noFill/>
           </a:ln>
           <a:effectLst>
             <a:outerShdw blurRad="254000" dist="139700" dir="5400000" rotWithShape="0">
@@ -4148,22 +3812,23 @@
       </p:sp>
       <p:sp>
         <p:nvSpPr>
-          <p:cNvPr id="6" name="Rounded Rectangle 5"/>
+          <p:cNvPr id="6" name="Round Same Side Corner Rectangle 5"/>
           <p:cNvSpPr/>
           <p:nvPr/>
         </p:nvSpPr>
         <p:spPr>
           <a:xfrm>
-            <a:off x="2519172" y="2752344"/>
-            <a:ext cx="800100" cy="112654"/>
-          </a:xfrm>
-          <a:prstGeom prst="roundRect">
+            <a:off x="1897380" y="3264408"/>
+            <a:ext cx="1234440" cy="1097280"/>
+          </a:xfrm>
+          <a:prstGeom prst="round2SameRect">
             <a:avLst>
-              <a:gd name="adj" fmla="val 50000"/>
+              <a:gd name="adj1" fmla="val 50000"/>
+              <a:gd name="adj2" fmla="val 0"/>
             </a:avLst>
           </a:prstGeom>
           <a:solidFill>
-            <a:srgbClr val="B0563A"/>
+            <a:srgbClr val="6B4A34"/>
           </a:solidFill>
           <a:ln>
             <a:noFill/>
@@ -4194,198 +3859,14 @@
       </p:sp>
       <p:sp>
         <p:nvSpPr>
-          <p:cNvPr id="7" name="Rounded Rectangle 6"/>
+          <p:cNvPr id="7" name="Right Arrow 6"/>
           <p:cNvSpPr/>
           <p:nvPr/>
         </p:nvSpPr>
         <p:spPr>
           <a:xfrm>
-            <a:off x="2519172" y="3080064"/>
-            <a:ext cx="1088136" cy="92171"/>
-          </a:xfrm>
-          <a:prstGeom prst="roundRect">
-            <a:avLst>
-              <a:gd name="adj" fmla="val 50000"/>
-            </a:avLst>
-          </a:prstGeom>
-          <a:solidFill>
-            <a:srgbClr val="E4D5C0"/>
-          </a:solidFill>
-          <a:ln>
-            <a:noFill/>
-          </a:ln>
-          <a:effectLst/>
-        </p:spPr>
-        <p:style>
-          <a:lnRef idx="1">
-            <a:schemeClr val="accent1"/>
-          </a:lnRef>
-          <a:fillRef idx="3">
-            <a:schemeClr val="accent1"/>
-          </a:fillRef>
-          <a:effectRef idx="2">
-            <a:schemeClr val="accent1"/>
-          </a:effectRef>
-          <a:fontRef idx="minor">
-            <a:schemeClr val="lt1"/>
-          </a:fontRef>
-        </p:style>
-        <p:txBody>
-          <a:bodyPr rtlCol="0" anchor="ctr"/>
-          <a:lstStyle/>
-          <a:p>
-            <a:pPr algn="ctr"/>
-          </a:p>
-        </p:txBody>
-      </p:sp>
-      <p:sp>
-        <p:nvSpPr>
-          <p:cNvPr id="8" name="Rounded Rectangle 7"/>
-          <p:cNvSpPr/>
-          <p:nvPr/>
-        </p:nvSpPr>
-        <p:spPr>
-          <a:xfrm>
-            <a:off x="2519172" y="3325855"/>
-            <a:ext cx="960120" cy="92171"/>
-          </a:xfrm>
-          <a:prstGeom prst="roundRect">
-            <a:avLst>
-              <a:gd name="adj" fmla="val 50000"/>
-            </a:avLst>
-          </a:prstGeom>
-          <a:solidFill>
-            <a:srgbClr val="E4D5C0"/>
-          </a:solidFill>
-          <a:ln>
-            <a:noFill/>
-          </a:ln>
-          <a:effectLst/>
-        </p:spPr>
-        <p:style>
-          <a:lnRef idx="1">
-            <a:schemeClr val="accent1"/>
-          </a:lnRef>
-          <a:fillRef idx="3">
-            <a:schemeClr val="accent1"/>
-          </a:fillRef>
-          <a:effectRef idx="2">
-            <a:schemeClr val="accent1"/>
-          </a:effectRef>
-          <a:fontRef idx="minor">
-            <a:schemeClr val="lt1"/>
-          </a:fontRef>
-        </p:style>
-        <p:txBody>
-          <a:bodyPr rtlCol="0" anchor="ctr"/>
-          <a:lstStyle/>
-          <a:p>
-            <a:pPr algn="ctr"/>
-          </a:p>
-        </p:txBody>
-      </p:sp>
-      <p:sp>
-        <p:nvSpPr>
-          <p:cNvPr id="9" name="Rounded Rectangle 8"/>
-          <p:cNvSpPr/>
-          <p:nvPr/>
-        </p:nvSpPr>
-        <p:spPr>
-          <a:xfrm>
-            <a:off x="2519172" y="3571646"/>
-            <a:ext cx="1056132" cy="92171"/>
-          </a:xfrm>
-          <a:prstGeom prst="roundRect">
-            <a:avLst>
-              <a:gd name="adj" fmla="val 50000"/>
-            </a:avLst>
-          </a:prstGeom>
-          <a:solidFill>
-            <a:srgbClr val="E4D5C0"/>
-          </a:solidFill>
-          <a:ln>
-            <a:noFill/>
-          </a:ln>
-          <a:effectLst/>
-        </p:spPr>
-        <p:style>
-          <a:lnRef idx="1">
-            <a:schemeClr val="accent1"/>
-          </a:lnRef>
-          <a:fillRef idx="3">
-            <a:schemeClr val="accent1"/>
-          </a:fillRef>
-          <a:effectRef idx="2">
-            <a:schemeClr val="accent1"/>
-          </a:effectRef>
-          <a:fontRef idx="minor">
-            <a:schemeClr val="lt1"/>
-          </a:fontRef>
-        </p:style>
-        <p:txBody>
-          <a:bodyPr rtlCol="0" anchor="ctr"/>
-          <a:lstStyle/>
-          <a:p>
-            <a:pPr algn="ctr"/>
-          </a:p>
-        </p:txBody>
-      </p:sp>
-      <p:sp>
-        <p:nvSpPr>
-          <p:cNvPr id="10" name="Rounded Rectangle 9"/>
-          <p:cNvSpPr/>
-          <p:nvPr/>
-        </p:nvSpPr>
-        <p:spPr>
-          <a:xfrm>
-            <a:off x="2519172" y="3817437"/>
-            <a:ext cx="672084" cy="92171"/>
-          </a:xfrm>
-          <a:prstGeom prst="roundRect">
-            <a:avLst>
-              <a:gd name="adj" fmla="val 50000"/>
-            </a:avLst>
-          </a:prstGeom>
-          <a:solidFill>
-            <a:srgbClr val="E4D5C0"/>
-          </a:solidFill>
-          <a:ln>
-            <a:noFill/>
-          </a:ln>
-          <a:effectLst/>
-        </p:spPr>
-        <p:style>
-          <a:lnRef idx="1">
-            <a:schemeClr val="accent1"/>
-          </a:lnRef>
-          <a:fillRef idx="3">
-            <a:schemeClr val="accent1"/>
-          </a:fillRef>
-          <a:effectRef idx="2">
-            <a:schemeClr val="accent1"/>
-          </a:effectRef>
-          <a:fontRef idx="minor">
-            <a:schemeClr val="lt1"/>
-          </a:fontRef>
-        </p:style>
-        <p:txBody>
-          <a:bodyPr rtlCol="0" anchor="ctr"/>
-          <a:lstStyle/>
-          <a:p>
-            <a:pPr algn="ctr"/>
-          </a:p>
-        </p:txBody>
-      </p:sp>
-      <p:sp>
-        <p:nvSpPr>
-          <p:cNvPr id="11" name="Right Arrow 10"/>
-          <p:cNvSpPr/>
-          <p:nvPr/>
-        </p:nvSpPr>
-        <p:spPr>
-          <a:xfrm>
-            <a:off x="4251960" y="3355848"/>
-            <a:ext cx="914400" cy="329184"/>
+            <a:off x="3611880" y="3218688"/>
+            <a:ext cx="822960" cy="329184"/>
           </a:xfrm>
           <a:prstGeom prst="rightArrow">
             <a:avLst>
@@ -4425,18 +3906,18 @@
       </p:sp>
       <p:sp>
         <p:nvSpPr>
-          <p:cNvPr id="12" name="Rounded Rectangle 11"/>
+          <p:cNvPr id="8" name="Rounded Rectangle 7"/>
           <p:cNvSpPr/>
           <p:nvPr/>
         </p:nvSpPr>
         <p:spPr>
           <a:xfrm>
-            <a:off x="5296204" y="2720340"/>
-            <a:ext cx="1600200" cy="1600200"/>
+            <a:off x="4953304" y="2564892"/>
+            <a:ext cx="2286000" cy="1417320"/>
           </a:xfrm>
           <a:prstGeom prst="roundRect">
             <a:avLst>
-              <a:gd name="adj" fmla="val 16000"/>
+              <a:gd name="adj" fmla="val 8000"/>
             </a:avLst>
           </a:prstGeom>
           <a:solidFill>
@@ -4444,7 +3925,7 @@
           </a:solidFill>
           <a:ln w="25400">
             <a:solidFill>
-              <a:srgbClr val="A9744F"/>
+              <a:srgbClr val="6B4A34"/>
             </a:solidFill>
           </a:ln>
           <a:effectLst>
@@ -4479,25 +3960,23 @@
       </p:sp>
       <p:sp>
         <p:nvSpPr>
-          <p:cNvPr id="13" name="Rounded Rectangle 12"/>
+          <p:cNvPr id="9" name="Oval 8"/>
           <p:cNvSpPr/>
           <p:nvPr/>
         </p:nvSpPr>
         <p:spPr>
           <a:xfrm>
-            <a:off x="5760262" y="3184398"/>
-            <a:ext cx="672084" cy="672084"/>
-          </a:xfrm>
-          <a:prstGeom prst="roundRect">
-            <a:avLst>
-              <a:gd name="adj" fmla="val 20000"/>
-            </a:avLst>
-          </a:prstGeom>
-          <a:noFill/>
-          <a:ln w="20320">
-            <a:solidFill>
-              <a:srgbClr val="A9744F"/>
-            </a:solidFill>
+            <a:off x="5181904" y="2793492"/>
+            <a:ext cx="453542" cy="453542"/>
+          </a:xfrm>
+          <a:prstGeom prst="ellipse">
+            <a:avLst/>
+          </a:prstGeom>
+          <a:solidFill>
+            <a:srgbClr val="A9744F"/>
+          </a:solidFill>
+          <a:ln>
+            <a:noFill/>
           </a:ln>
           <a:effectLst/>
         </p:spPr>
@@ -4525,14 +4004,14 @@
       </p:sp>
       <p:sp>
         <p:nvSpPr>
-          <p:cNvPr id="14" name="Rounded Rectangle 13"/>
+          <p:cNvPr id="10" name="Rounded Rectangle 9"/>
           <p:cNvSpPr/>
           <p:nvPr/>
         </p:nvSpPr>
         <p:spPr>
           <a:xfrm>
-            <a:off x="5708256" y="2585923"/>
-            <a:ext cx="72009" cy="192024"/>
+            <a:off x="5777179" y="2793492"/>
+            <a:ext cx="1051560" cy="85039"/>
           </a:xfrm>
           <a:prstGeom prst="roundRect">
             <a:avLst>
@@ -4540,7 +4019,7 @@
             </a:avLst>
           </a:prstGeom>
           <a:solidFill>
-            <a:srgbClr val="A9744F"/>
+            <a:srgbClr val="E4D5C0"/>
           </a:solidFill>
           <a:ln>
             <a:noFill/>
@@ -4571,14 +4050,14 @@
       </p:sp>
       <p:sp>
         <p:nvSpPr>
-          <p:cNvPr id="15" name="Rounded Rectangle 14"/>
+          <p:cNvPr id="11" name="Rounded Rectangle 10"/>
           <p:cNvSpPr/>
           <p:nvPr/>
         </p:nvSpPr>
         <p:spPr>
           <a:xfrm>
-            <a:off x="5708256" y="4262932"/>
-            <a:ext cx="72009" cy="192024"/>
+            <a:off x="5777179" y="2977743"/>
+            <a:ext cx="1280160" cy="85039"/>
           </a:xfrm>
           <a:prstGeom prst="roundRect">
             <a:avLst>
@@ -4586,7 +4065,7 @@
             </a:avLst>
           </a:prstGeom>
           <a:solidFill>
-            <a:srgbClr val="A9744F"/>
+            <a:srgbClr val="E4D5C0"/>
           </a:solidFill>
           <a:ln>
             <a:noFill/>
@@ -4617,14 +4096,14 @@
       </p:sp>
       <p:sp>
         <p:nvSpPr>
-          <p:cNvPr id="16" name="Rounded Rectangle 15"/>
+          <p:cNvPr id="12" name="Rounded Rectangle 11"/>
           <p:cNvSpPr/>
           <p:nvPr/>
         </p:nvSpPr>
         <p:spPr>
           <a:xfrm>
-            <a:off x="5161788" y="3132391"/>
-            <a:ext cx="192024" cy="72009"/>
+            <a:off x="5777179" y="3161995"/>
+            <a:ext cx="914400" cy="85039"/>
           </a:xfrm>
           <a:prstGeom prst="roundRect">
             <a:avLst>
@@ -4632,7 +4111,7 @@
             </a:avLst>
           </a:prstGeom>
           <a:solidFill>
-            <a:srgbClr val="A9744F"/>
+            <a:srgbClr val="E4D5C0"/>
           </a:solidFill>
           <a:ln>
             <a:noFill/>
@@ -4663,14 +4142,14 @@
       </p:sp>
       <p:sp>
         <p:nvSpPr>
-          <p:cNvPr id="17" name="Rounded Rectangle 16"/>
+          <p:cNvPr id="13" name="Rounded Rectangle 12"/>
           <p:cNvSpPr/>
           <p:nvPr/>
         </p:nvSpPr>
         <p:spPr>
           <a:xfrm>
-            <a:off x="6838797" y="3132391"/>
-            <a:ext cx="192024" cy="72009"/>
+            <a:off x="5181904" y="3386937"/>
+            <a:ext cx="1600200" cy="85039"/>
           </a:xfrm>
           <a:prstGeom prst="roundRect">
             <a:avLst>
@@ -4678,7 +4157,7 @@
             </a:avLst>
           </a:prstGeom>
           <a:solidFill>
-            <a:srgbClr val="A9744F"/>
+            <a:srgbClr val="E4D5C0"/>
           </a:solidFill>
           <a:ln>
             <a:noFill/>
@@ -4709,14 +4188,14 @@
       </p:sp>
       <p:sp>
         <p:nvSpPr>
-          <p:cNvPr id="18" name="Rounded Rectangle 17"/>
+          <p:cNvPr id="14" name="Rounded Rectangle 13"/>
           <p:cNvSpPr/>
           <p:nvPr/>
         </p:nvSpPr>
         <p:spPr>
           <a:xfrm>
-            <a:off x="6060300" y="2585923"/>
-            <a:ext cx="72009" cy="192024"/>
+            <a:off x="5181904" y="3599535"/>
+            <a:ext cx="1371600" cy="85039"/>
           </a:xfrm>
           <a:prstGeom prst="roundRect">
             <a:avLst>
@@ -4724,7 +4203,7 @@
             </a:avLst>
           </a:prstGeom>
           <a:solidFill>
-            <a:srgbClr val="A9744F"/>
+            <a:srgbClr val="E4D5C0"/>
           </a:solidFill>
           <a:ln>
             <a:noFill/>
@@ -4755,14 +4234,14 @@
       </p:sp>
       <p:sp>
         <p:nvSpPr>
-          <p:cNvPr id="19" name="Rounded Rectangle 18"/>
+          <p:cNvPr id="15" name="Rounded Rectangle 14"/>
           <p:cNvSpPr/>
           <p:nvPr/>
         </p:nvSpPr>
         <p:spPr>
           <a:xfrm>
-            <a:off x="6060300" y="4262932"/>
-            <a:ext cx="72009" cy="192024"/>
+            <a:off x="4678984" y="4000500"/>
+            <a:ext cx="2834640" cy="128016"/>
           </a:xfrm>
           <a:prstGeom prst="roundRect">
             <a:avLst>
@@ -4770,7 +4249,7 @@
             </a:avLst>
           </a:prstGeom>
           <a:solidFill>
-            <a:srgbClr val="A9744F"/>
+            <a:srgbClr val="6B4A34"/>
           </a:solidFill>
           <a:ln>
             <a:noFill/>
@@ -4801,346 +4280,25 @@
       </p:sp>
       <p:sp>
         <p:nvSpPr>
-          <p:cNvPr id="20" name="Rounded Rectangle 19"/>
+          <p:cNvPr id="16" name="Oval 15"/>
           <p:cNvSpPr/>
           <p:nvPr/>
         </p:nvSpPr>
         <p:spPr>
           <a:xfrm>
-            <a:off x="5161788" y="3484435"/>
-            <a:ext cx="192024" cy="72009"/>
-          </a:xfrm>
-          <a:prstGeom prst="roundRect">
-            <a:avLst>
-              <a:gd name="adj" fmla="val 50000"/>
-            </a:avLst>
-          </a:prstGeom>
-          <a:solidFill>
-            <a:srgbClr val="A9744F"/>
-          </a:solidFill>
-          <a:ln>
-            <a:noFill/>
-          </a:ln>
-          <a:effectLst/>
-        </p:spPr>
-        <p:style>
-          <a:lnRef idx="1">
-            <a:schemeClr val="accent1"/>
-          </a:lnRef>
-          <a:fillRef idx="3">
-            <a:schemeClr val="accent1"/>
-          </a:fillRef>
-          <a:effectRef idx="2">
-            <a:schemeClr val="accent1"/>
-          </a:effectRef>
-          <a:fontRef idx="minor">
-            <a:schemeClr val="lt1"/>
-          </a:fontRef>
-        </p:style>
-        <p:txBody>
-          <a:bodyPr rtlCol="0" anchor="ctr"/>
-          <a:lstStyle/>
-          <a:p>
-            <a:pPr algn="ctr"/>
-          </a:p>
-        </p:txBody>
-      </p:sp>
-      <p:sp>
-        <p:nvSpPr>
-          <p:cNvPr id="21" name="Rounded Rectangle 20"/>
-          <p:cNvSpPr/>
-          <p:nvPr/>
-        </p:nvSpPr>
-        <p:spPr>
-          <a:xfrm>
-            <a:off x="6838797" y="3484435"/>
-            <a:ext cx="192024" cy="72009"/>
-          </a:xfrm>
-          <a:prstGeom prst="roundRect">
-            <a:avLst>
-              <a:gd name="adj" fmla="val 50000"/>
-            </a:avLst>
-          </a:prstGeom>
-          <a:solidFill>
-            <a:srgbClr val="A9744F"/>
-          </a:solidFill>
-          <a:ln>
-            <a:noFill/>
-          </a:ln>
-          <a:effectLst/>
-        </p:spPr>
-        <p:style>
-          <a:lnRef idx="1">
-            <a:schemeClr val="accent1"/>
-          </a:lnRef>
-          <a:fillRef idx="3">
-            <a:schemeClr val="accent1"/>
-          </a:fillRef>
-          <a:effectRef idx="2">
-            <a:schemeClr val="accent1"/>
-          </a:effectRef>
-          <a:fontRef idx="minor">
-            <a:schemeClr val="lt1"/>
-          </a:fontRef>
-        </p:style>
-        <p:txBody>
-          <a:bodyPr rtlCol="0" anchor="ctr"/>
-          <a:lstStyle/>
-          <a:p>
-            <a:pPr algn="ctr"/>
-          </a:p>
-        </p:txBody>
-      </p:sp>
-      <p:sp>
-        <p:nvSpPr>
-          <p:cNvPr id="22" name="Rounded Rectangle 21"/>
-          <p:cNvSpPr/>
-          <p:nvPr/>
-        </p:nvSpPr>
-        <p:spPr>
-          <a:xfrm>
-            <a:off x="6412344" y="2585923"/>
-            <a:ext cx="72009" cy="192024"/>
-          </a:xfrm>
-          <a:prstGeom prst="roundRect">
-            <a:avLst>
-              <a:gd name="adj" fmla="val 50000"/>
-            </a:avLst>
-          </a:prstGeom>
-          <a:solidFill>
-            <a:srgbClr val="A9744F"/>
-          </a:solidFill>
-          <a:ln>
-            <a:noFill/>
-          </a:ln>
-          <a:effectLst/>
-        </p:spPr>
-        <p:style>
-          <a:lnRef idx="1">
-            <a:schemeClr val="accent1"/>
-          </a:lnRef>
-          <a:fillRef idx="3">
-            <a:schemeClr val="accent1"/>
-          </a:fillRef>
-          <a:effectRef idx="2">
-            <a:schemeClr val="accent1"/>
-          </a:effectRef>
-          <a:fontRef idx="minor">
-            <a:schemeClr val="lt1"/>
-          </a:fontRef>
-        </p:style>
-        <p:txBody>
-          <a:bodyPr rtlCol="0" anchor="ctr"/>
-          <a:lstStyle/>
-          <a:p>
-            <a:pPr algn="ctr"/>
-          </a:p>
-        </p:txBody>
-      </p:sp>
-      <p:sp>
-        <p:nvSpPr>
-          <p:cNvPr id="23" name="Rounded Rectangle 22"/>
-          <p:cNvSpPr/>
-          <p:nvPr/>
-        </p:nvSpPr>
-        <p:spPr>
-          <a:xfrm>
-            <a:off x="6412344" y="4262932"/>
-            <a:ext cx="72009" cy="192024"/>
-          </a:xfrm>
-          <a:prstGeom prst="roundRect">
-            <a:avLst>
-              <a:gd name="adj" fmla="val 50000"/>
-            </a:avLst>
-          </a:prstGeom>
-          <a:solidFill>
-            <a:srgbClr val="A9744F"/>
-          </a:solidFill>
-          <a:ln>
-            <a:noFill/>
-          </a:ln>
-          <a:effectLst/>
-        </p:spPr>
-        <p:style>
-          <a:lnRef idx="1">
-            <a:schemeClr val="accent1"/>
-          </a:lnRef>
-          <a:fillRef idx="3">
-            <a:schemeClr val="accent1"/>
-          </a:fillRef>
-          <a:effectRef idx="2">
-            <a:schemeClr val="accent1"/>
-          </a:effectRef>
-          <a:fontRef idx="minor">
-            <a:schemeClr val="lt1"/>
-          </a:fontRef>
-        </p:style>
-        <p:txBody>
-          <a:bodyPr rtlCol="0" anchor="ctr"/>
-          <a:lstStyle/>
-          <a:p>
-            <a:pPr algn="ctr"/>
-          </a:p>
-        </p:txBody>
-      </p:sp>
-      <p:sp>
-        <p:nvSpPr>
-          <p:cNvPr id="24" name="Rounded Rectangle 23"/>
-          <p:cNvSpPr/>
-          <p:nvPr/>
-        </p:nvSpPr>
-        <p:spPr>
-          <a:xfrm>
-            <a:off x="5161788" y="3836479"/>
-            <a:ext cx="192024" cy="72009"/>
-          </a:xfrm>
-          <a:prstGeom prst="roundRect">
-            <a:avLst>
-              <a:gd name="adj" fmla="val 50000"/>
-            </a:avLst>
-          </a:prstGeom>
-          <a:solidFill>
-            <a:srgbClr val="A9744F"/>
-          </a:solidFill>
-          <a:ln>
-            <a:noFill/>
-          </a:ln>
-          <a:effectLst/>
-        </p:spPr>
-        <p:style>
-          <a:lnRef idx="1">
-            <a:schemeClr val="accent1"/>
-          </a:lnRef>
-          <a:fillRef idx="3">
-            <a:schemeClr val="accent1"/>
-          </a:fillRef>
-          <a:effectRef idx="2">
-            <a:schemeClr val="accent1"/>
-          </a:effectRef>
-          <a:fontRef idx="minor">
-            <a:schemeClr val="lt1"/>
-          </a:fontRef>
-        </p:style>
-        <p:txBody>
-          <a:bodyPr rtlCol="0" anchor="ctr"/>
-          <a:lstStyle/>
-          <a:p>
-            <a:pPr algn="ctr"/>
-          </a:p>
-        </p:txBody>
-      </p:sp>
-      <p:sp>
-        <p:nvSpPr>
-          <p:cNvPr id="25" name="Rounded Rectangle 24"/>
-          <p:cNvSpPr/>
-          <p:nvPr/>
-        </p:nvSpPr>
-        <p:spPr>
-          <a:xfrm>
-            <a:off x="6838797" y="3836479"/>
-            <a:ext cx="192024" cy="72009"/>
-          </a:xfrm>
-          <a:prstGeom prst="roundRect">
-            <a:avLst>
-              <a:gd name="adj" fmla="val 50000"/>
-            </a:avLst>
-          </a:prstGeom>
-          <a:solidFill>
-            <a:srgbClr val="A9744F"/>
-          </a:solidFill>
-          <a:ln>
-            <a:noFill/>
-          </a:ln>
-          <a:effectLst/>
-        </p:spPr>
-        <p:style>
-          <a:lnRef idx="1">
-            <a:schemeClr val="accent1"/>
-          </a:lnRef>
-          <a:fillRef idx="3">
-            <a:schemeClr val="accent1"/>
-          </a:fillRef>
-          <a:effectRef idx="2">
-            <a:schemeClr val="accent1"/>
-          </a:effectRef>
-          <a:fontRef idx="minor">
-            <a:schemeClr val="lt1"/>
-          </a:fontRef>
-        </p:style>
-        <p:txBody>
-          <a:bodyPr rtlCol="0" anchor="ctr"/>
-          <a:lstStyle/>
-          <a:p>
-            <a:pPr algn="ctr"/>
-          </a:p>
-        </p:txBody>
-      </p:sp>
-      <p:sp>
-        <p:nvSpPr>
-          <p:cNvPr id="26" name="Right Arrow 25"/>
-          <p:cNvSpPr/>
-          <p:nvPr/>
-        </p:nvSpPr>
-        <p:spPr>
-          <a:xfrm>
-            <a:off x="7040879" y="3355848"/>
-            <a:ext cx="914400" cy="329184"/>
-          </a:xfrm>
-          <a:prstGeom prst="rightArrow">
-            <a:avLst>
-              <a:gd name="adj1" fmla="val 55000"/>
-              <a:gd name="adj2" fmla="val 50000"/>
-            </a:avLst>
-          </a:prstGeom>
-          <a:solidFill>
-            <a:srgbClr val="9B8571"/>
-          </a:solidFill>
-          <a:ln>
-            <a:noFill/>
-          </a:ln>
-          <a:effectLst/>
-        </p:spPr>
-        <p:style>
-          <a:lnRef idx="1">
-            <a:schemeClr val="accent1"/>
-          </a:lnRef>
-          <a:fillRef idx="3">
-            <a:schemeClr val="accent1"/>
-          </a:fillRef>
-          <a:effectRef idx="2">
-            <a:schemeClr val="accent1"/>
-          </a:effectRef>
-          <a:fontRef idx="minor">
-            <a:schemeClr val="lt1"/>
-          </a:fontRef>
-        </p:style>
-        <p:txBody>
-          <a:bodyPr rtlCol="0" anchor="ctr"/>
-          <a:lstStyle/>
-          <a:p>
-            <a:pPr algn="ctr"/>
-          </a:p>
-        </p:txBody>
-      </p:sp>
-      <p:sp>
-        <p:nvSpPr>
-          <p:cNvPr id="27" name="Oval 26"/>
-          <p:cNvSpPr/>
-          <p:nvPr/>
-        </p:nvSpPr>
-        <p:spPr>
-          <a:xfrm>
-            <a:off x="8791041" y="2743200"/>
-            <a:ext cx="614476" cy="614476"/>
+            <a:off x="6519214" y="3262122"/>
+            <a:ext cx="685800" cy="685800"/>
           </a:xfrm>
           <a:prstGeom prst="ellipse">
             <a:avLst/>
           </a:prstGeom>
           <a:solidFill>
-            <a:srgbClr val="6B4A34"/>
-          </a:solidFill>
-          <a:ln>
-            <a:noFill/>
+            <a:srgbClr val="FCF7EF"/>
+          </a:solidFill>
+          <a:ln w="38100">
+            <a:solidFill>
+              <a:srgbClr val="B0563A"/>
+            </a:solidFill>
           </a:ln>
           <a:effectLst>
             <a:outerShdw blurRad="254000" dist="139700" dir="5400000" rotWithShape="0">
@@ -5172,16 +4330,149 @@
           </a:p>
         </p:txBody>
       </p:sp>
-      <p:sp>
-        <p:nvSpPr>
-          <p:cNvPr id="28" name="Round Same Side Corner Rectangle 27"/>
+      <p:cxnSp>
+        <p:nvCxnSpPr>
+          <p:cNvPr id="17" name="Connector 16"/>
+          <p:cNvCxnSpPr/>
+          <p:nvPr/>
+        </p:nvCxnSpPr>
+        <p:spPr>
+          <a:xfrm>
+            <a:off x="7081570" y="3824478"/>
+            <a:ext cx="274320" cy="274320"/>
+          </a:xfrm>
+          <a:prstGeom prst="bentConnector3">
+            <a:avLst/>
+          </a:prstGeom>
+          <a:ln w="40640">
+            <a:solidFill>
+              <a:srgbClr val="B0563A"/>
+            </a:solidFill>
+          </a:ln>
+          <a:effectLst/>
+        </p:spPr>
+        <p:style>
+          <a:lnRef idx="2">
+            <a:schemeClr val="accent1"/>
+          </a:lnRef>
+          <a:fillRef idx="0">
+            <a:schemeClr val="accent1"/>
+          </a:fillRef>
+          <a:effectRef idx="1">
+            <a:schemeClr val="accent1"/>
+          </a:effectRef>
+          <a:fontRef idx="minor">
+            <a:schemeClr val="tx1"/>
+          </a:fontRef>
+        </p:style>
+      </p:cxnSp>
+      <p:sp>
+        <p:nvSpPr>
+          <p:cNvPr id="18" name="Right Arrow 17"/>
           <p:cNvSpPr/>
           <p:nvPr/>
         </p:nvSpPr>
         <p:spPr>
           <a:xfrm>
-            <a:off x="8439911" y="3445459"/>
-            <a:ext cx="1316736" cy="1170432"/>
+            <a:off x="7772400" y="3218688"/>
+            <a:ext cx="822960" cy="329184"/>
+          </a:xfrm>
+          <a:prstGeom prst="rightArrow">
+            <a:avLst>
+              <a:gd name="adj1" fmla="val 55000"/>
+              <a:gd name="adj2" fmla="val 50000"/>
+            </a:avLst>
+          </a:prstGeom>
+          <a:solidFill>
+            <a:srgbClr val="9B8571"/>
+          </a:solidFill>
+          <a:ln>
+            <a:noFill/>
+          </a:ln>
+          <a:effectLst/>
+        </p:spPr>
+        <p:style>
+          <a:lnRef idx="1">
+            <a:schemeClr val="accent1"/>
+          </a:lnRef>
+          <a:fillRef idx="3">
+            <a:schemeClr val="accent1"/>
+          </a:fillRef>
+          <a:effectRef idx="2">
+            <a:schemeClr val="accent1"/>
+          </a:effectRef>
+          <a:fontRef idx="minor">
+            <a:schemeClr val="lt1"/>
+          </a:fontRef>
+        </p:style>
+        <p:txBody>
+          <a:bodyPr rtlCol="0" anchor="ctr"/>
+          <a:lstStyle/>
+          <a:p>
+            <a:pPr algn="ctr"/>
+          </a:p>
+        </p:txBody>
+      </p:sp>
+      <p:sp>
+        <p:nvSpPr>
+          <p:cNvPr id="19" name="Oval 18"/>
+          <p:cNvSpPr/>
+          <p:nvPr/>
+        </p:nvSpPr>
+        <p:spPr>
+          <a:xfrm>
+            <a:off x="9404604" y="2606040"/>
+            <a:ext cx="576072" cy="576072"/>
+          </a:xfrm>
+          <a:prstGeom prst="ellipse">
+            <a:avLst/>
+          </a:prstGeom>
+          <a:solidFill>
+            <a:srgbClr val="6B4A34"/>
+          </a:solidFill>
+          <a:ln>
+            <a:noFill/>
+          </a:ln>
+          <a:effectLst>
+            <a:outerShdw blurRad="254000" dist="139700" dir="5400000" rotWithShape="0">
+              <a:srgbClr val="6B4A34">
+                <a:alpha val="76000"/>
+              </a:srgbClr>
+            </a:outerShdw>
+          </a:effectLst>
+        </p:spPr>
+        <p:style>
+          <a:lnRef idx="1">
+            <a:schemeClr val="accent1"/>
+          </a:lnRef>
+          <a:fillRef idx="3">
+            <a:schemeClr val="accent1"/>
+          </a:fillRef>
+          <a:effectRef idx="2">
+            <a:schemeClr val="accent1"/>
+          </a:effectRef>
+          <a:fontRef idx="minor">
+            <a:schemeClr val="lt1"/>
+          </a:fontRef>
+        </p:style>
+        <p:txBody>
+          <a:bodyPr rtlCol="0" anchor="ctr"/>
+          <a:lstStyle/>
+          <a:p>
+            <a:pPr algn="ctr"/>
+          </a:p>
+        </p:txBody>
+      </p:sp>
+      <p:sp>
+        <p:nvSpPr>
+          <p:cNvPr id="20" name="Round Same Side Corner Rectangle 19"/>
+          <p:cNvSpPr/>
+          <p:nvPr/>
+        </p:nvSpPr>
+        <p:spPr>
+          <a:xfrm>
+            <a:off x="9075419" y="3264408"/>
+            <a:ext cx="1234440" cy="1097280"/>
           </a:xfrm>
           <a:prstGeom prst="round2SameRect">
             <a:avLst>
@@ -5221,14 +4512,131 @@
       </p:sp>
       <p:sp>
         <p:nvSpPr>
-          <p:cNvPr id="29" name="TextBox 28"/>
+          <p:cNvPr id="21" name="TextBox 20"/>
           <p:cNvSpPr txBox="1"/>
           <p:nvPr/>
         </p:nvSpPr>
         <p:spPr>
           <a:xfrm>
-            <a:off x="1249527" y="5074920"/>
-            <a:ext cx="9692640" cy="640080"/>
+            <a:off x="1234440" y="4297680"/>
+            <a:ext cx="2560320" cy="320040"/>
+          </a:xfrm>
+          <a:prstGeom prst="rect">
+            <a:avLst/>
+          </a:prstGeom>
+          <a:noFill/>
+        </p:spPr>
+        <p:txBody>
+          <a:bodyPr wrap="square" anchor="ctr" lIns="0" rIns="0" tIns="0" bIns="0">
+            <a:spAutoFit/>
+          </a:bodyPr>
+          <a:lstStyle/>
+          <a:p>
+            <a:pPr algn="ctr">
+              <a:lnSpc>
+                <a:spcPct val="100000"/>
+              </a:lnSpc>
+            </a:pPr>
+            <a:r>
+              <a:rPr sz="1200" b="1" i="0" spc="240">
+                <a:solidFill>
+                  <a:srgbClr val="9B8571"/>
+                </a:solidFill>
+                <a:latin typeface="Calibri"/>
+              </a:rPr>
+              <a:t>YOU</a:t>
+            </a:r>
+          </a:p>
+        </p:txBody>
+      </p:sp>
+      <p:sp>
+        <p:nvSpPr>
+          <p:cNvPr id="22" name="TextBox 21"/>
+          <p:cNvSpPr txBox="1"/>
+          <p:nvPr/>
+        </p:nvSpPr>
+        <p:spPr>
+          <a:xfrm>
+            <a:off x="4450384" y="4617720"/>
+            <a:ext cx="3291840" cy="320040"/>
+          </a:xfrm>
+          <a:prstGeom prst="rect">
+            <a:avLst/>
+          </a:prstGeom>
+          <a:noFill/>
+        </p:spPr>
+        <p:txBody>
+          <a:bodyPr wrap="square" anchor="ctr" lIns="0" rIns="0" tIns="0" bIns="0">
+            <a:spAutoFit/>
+          </a:bodyPr>
+          <a:lstStyle/>
+          <a:p>
+            <a:pPr algn="ctr">
+              <a:lnSpc>
+                <a:spcPct val="100000"/>
+              </a:lnSpc>
+            </a:pPr>
+            <a:r>
+              <a:rPr sz="1200" b="1" i="0" spc="240">
+                <a:solidFill>
+                  <a:srgbClr val="A9744F"/>
+                </a:solidFill>
+                <a:latin typeface="Calibri"/>
+              </a:rPr>
+              <a:t>AI SCREENS FIRST</a:t>
+            </a:r>
+          </a:p>
+        </p:txBody>
+      </p:sp>
+      <p:sp>
+        <p:nvSpPr>
+          <p:cNvPr id="23" name="TextBox 22"/>
+          <p:cNvSpPr txBox="1"/>
+          <p:nvPr/>
+        </p:nvSpPr>
+        <p:spPr>
+          <a:xfrm>
+            <a:off x="8412480" y="4297680"/>
+            <a:ext cx="2560320" cy="320040"/>
+          </a:xfrm>
+          <a:prstGeom prst="rect">
+            <a:avLst/>
+          </a:prstGeom>
+          <a:noFill/>
+        </p:spPr>
+        <p:txBody>
+          <a:bodyPr wrap="square" anchor="ctr" lIns="0" rIns="0" tIns="0" bIns="0">
+            <a:spAutoFit/>
+          </a:bodyPr>
+          <a:lstStyle/>
+          <a:p>
+            <a:pPr algn="ctr">
+              <a:lnSpc>
+                <a:spcPct val="100000"/>
+              </a:lnSpc>
+            </a:pPr>
+            <a:r>
+              <a:rPr sz="1200" b="1" i="0" spc="240">
+                <a:solidFill>
+                  <a:srgbClr val="9B8571"/>
+                </a:solidFill>
+                <a:latin typeface="Calibri"/>
+              </a:rPr>
+              <a:t>RECRUITER</a:t>
+            </a:r>
+          </a:p>
+        </p:txBody>
+      </p:sp>
+      <p:sp>
+        <p:nvSpPr>
+          <p:cNvPr id="24" name="TextBox 23"/>
+          <p:cNvSpPr txBox="1"/>
+          <p:nvPr/>
+        </p:nvSpPr>
+        <p:spPr>
+          <a:xfrm>
+            <a:off x="1158087" y="5212080"/>
+            <a:ext cx="9875520" cy="640080"/>
           </a:xfrm>
           <a:prstGeom prst="rect">
             <a:avLst/>
@@ -5260,14 +4668,14 @@
       </p:sp>
       <p:sp>
         <p:nvSpPr>
-          <p:cNvPr id="30" name="Rectangle 29"/>
+          <p:cNvPr id="25" name="Rectangle 24"/>
           <p:cNvSpPr/>
           <p:nvPr/>
         </p:nvSpPr>
         <p:spPr>
           <a:xfrm>
             <a:off x="0" y="6803136"/>
-            <a:ext cx="1230283" cy="54864"/>
+            <a:ext cx="1280160" cy="54864"/>
           </a:xfrm>
           <a:prstGeom prst="rect">
             <a:avLst/>
@@ -5304,7 +4712,7 @@
       </p:sp>
       <p:sp>
         <p:nvSpPr>
-          <p:cNvPr id="31" name="TextBox 30"/>
+          <p:cNvPr id="26" name="TextBox 25"/>
           <p:cNvSpPr txBox="1"/>
           <p:nvPr/>
         </p:nvSpPr>
@@ -5833,28 +5241,108 @@
           </a:p>
         </p:txBody>
       </p:sp>
-      <p:sp>
-        <p:nvSpPr>
-          <p:cNvPr id="12" name="Rounded Rectangle 11"/>
+      <p:cxnSp>
+        <p:nvCxnSpPr>
+          <p:cNvPr id="12" name="Connector 11"/>
+          <p:cNvCxnSpPr/>
+          <p:nvPr/>
+        </p:nvCxnSpPr>
+        <p:spPr>
+          <a:xfrm>
+            <a:off x="7452360" y="2542946"/>
+            <a:ext cx="0" cy="237744"/>
+          </a:xfrm>
+          <a:prstGeom prst="bentConnector3">
+            <a:avLst/>
+          </a:prstGeom>
+          <a:ln w="27940">
+            <a:solidFill>
+              <a:srgbClr val="6B4A34"/>
+            </a:solidFill>
+          </a:ln>
+          <a:effectLst/>
+        </p:spPr>
+        <p:style>
+          <a:lnRef idx="2">
+            <a:schemeClr val="accent1"/>
+          </a:lnRef>
+          <a:fillRef idx="0">
+            <a:schemeClr val="accent1"/>
+          </a:fillRef>
+          <a:effectRef idx="1">
+            <a:schemeClr val="accent1"/>
+          </a:effectRef>
+          <a:fontRef idx="minor">
+            <a:schemeClr val="tx1"/>
+          </a:fontRef>
+        </p:style>
+      </p:cxnSp>
+      <p:sp>
+        <p:nvSpPr>
+          <p:cNvPr id="13" name="Oval 12"/>
           <p:cNvSpPr/>
           <p:nvPr/>
         </p:nvSpPr>
         <p:spPr>
           <a:xfrm>
-            <a:off x="6583680" y="2606039"/>
-            <a:ext cx="1737360" cy="1737360"/>
+            <a:off x="7370064" y="2396642"/>
+            <a:ext cx="164592" cy="164592"/>
+          </a:xfrm>
+          <a:prstGeom prst="ellipse">
+            <a:avLst/>
+          </a:prstGeom>
+          <a:solidFill>
+            <a:srgbClr val="B0563A"/>
+          </a:solidFill>
+          <a:ln>
+            <a:noFill/>
+          </a:ln>
+          <a:effectLst/>
+        </p:spPr>
+        <p:style>
+          <a:lnRef idx="1">
+            <a:schemeClr val="accent1"/>
+          </a:lnRef>
+          <a:fillRef idx="3">
+            <a:schemeClr val="accent1"/>
+          </a:fillRef>
+          <a:effectRef idx="2">
+            <a:schemeClr val="accent1"/>
+          </a:effectRef>
+          <a:fontRef idx="minor">
+            <a:schemeClr val="lt1"/>
+          </a:fontRef>
+        </p:style>
+        <p:txBody>
+          <a:bodyPr rtlCol="0" anchor="ctr"/>
+          <a:lstStyle/>
+          <a:p>
+            <a:pPr algn="ctr"/>
+          </a:p>
+        </p:txBody>
+      </p:sp>
+      <p:sp>
+        <p:nvSpPr>
+          <p:cNvPr id="14" name="Rounded Rectangle 13"/>
+          <p:cNvSpPr/>
+          <p:nvPr/>
+        </p:nvSpPr>
+        <p:spPr>
+          <a:xfrm>
+            <a:off x="6583680" y="2780690"/>
+            <a:ext cx="1737360" cy="1424635"/>
           </a:xfrm>
           <a:prstGeom prst="roundRect">
             <a:avLst>
-              <a:gd name="adj" fmla="val 16000"/>
+              <a:gd name="adj" fmla="val 20000"/>
             </a:avLst>
           </a:prstGeom>
           <a:solidFill>
             <a:srgbClr val="FCF7EF"/>
           </a:solidFill>
-          <a:ln w="25400">
+          <a:ln w="27940">
             <a:solidFill>
-              <a:srgbClr val="6B4A34"/>
+              <a:srgbClr val="A9744F"/>
             </a:solidFill>
           </a:ln>
           <a:effectLst>
@@ -5889,25 +5377,23 @@
       </p:sp>
       <p:sp>
         <p:nvSpPr>
-          <p:cNvPr id="13" name="Rounded Rectangle 12"/>
+          <p:cNvPr id="15" name="Oval 14"/>
           <p:cNvSpPr/>
           <p:nvPr/>
         </p:nvSpPr>
         <p:spPr>
           <a:xfrm>
-            <a:off x="7087514" y="3109874"/>
-            <a:ext cx="729691" cy="729691"/>
-          </a:xfrm>
-          <a:prstGeom prst="roundRect">
-            <a:avLst>
-              <a:gd name="adj" fmla="val 20000"/>
-            </a:avLst>
-          </a:prstGeom>
-          <a:noFill/>
-          <a:ln w="20320">
-            <a:solidFill>
-              <a:srgbClr val="6B4A34"/>
-            </a:solidFill>
+            <a:off x="6939838" y="3407529"/>
+            <a:ext cx="260603" cy="260603"/>
+          </a:xfrm>
+          <a:prstGeom prst="ellipse">
+            <a:avLst/>
+          </a:prstGeom>
+          <a:solidFill>
+            <a:srgbClr val="A9744F"/>
+          </a:solidFill>
+          <a:ln>
+            <a:noFill/>
           </a:ln>
           <a:effectLst/>
         </p:spPr>
@@ -5935,14 +5421,58 @@
       </p:sp>
       <p:sp>
         <p:nvSpPr>
-          <p:cNvPr id="14" name="Rounded Rectangle 13"/>
+          <p:cNvPr id="16" name="Oval 15"/>
           <p:cNvSpPr/>
           <p:nvPr/>
         </p:nvSpPr>
         <p:spPr>
           <a:xfrm>
-            <a:off x="7031050" y="2460101"/>
-            <a:ext cx="78181" cy="208483"/>
+            <a:off x="7704277" y="3407529"/>
+            <a:ext cx="260603" cy="260603"/>
+          </a:xfrm>
+          <a:prstGeom prst="ellipse">
+            <a:avLst/>
+          </a:prstGeom>
+          <a:solidFill>
+            <a:srgbClr val="A9744F"/>
+          </a:solidFill>
+          <a:ln>
+            <a:noFill/>
+          </a:ln>
+          <a:effectLst/>
+        </p:spPr>
+        <p:style>
+          <a:lnRef idx="1">
+            <a:schemeClr val="accent1"/>
+          </a:lnRef>
+          <a:fillRef idx="3">
+            <a:schemeClr val="accent1"/>
+          </a:fillRef>
+          <a:effectRef idx="2">
+            <a:schemeClr val="accent1"/>
+          </a:effectRef>
+          <a:fontRef idx="minor">
+            <a:schemeClr val="lt1"/>
+          </a:fontRef>
+        </p:style>
+        <p:txBody>
+          <a:bodyPr rtlCol="0" anchor="ctr"/>
+          <a:lstStyle/>
+          <a:p>
+            <a:pPr algn="ctr"/>
+          </a:p>
+        </p:txBody>
+      </p:sp>
+      <p:sp>
+        <p:nvSpPr>
+          <p:cNvPr id="17" name="Rounded Rectangle 16"/>
+          <p:cNvSpPr/>
+          <p:nvPr/>
+        </p:nvSpPr>
+        <p:spPr>
+          <a:xfrm>
+            <a:off x="7104888" y="3777935"/>
+            <a:ext cx="694944" cy="99724"/>
           </a:xfrm>
           <a:prstGeom prst="roundRect">
             <a:avLst>
@@ -5950,7 +5480,7 @@
             </a:avLst>
           </a:prstGeom>
           <a:solidFill>
-            <a:srgbClr val="6B4A34"/>
+            <a:srgbClr val="A9744F"/>
           </a:solidFill>
           <a:ln>
             <a:noFill/>
@@ -5981,513 +5511,7 @@
       </p:sp>
       <p:sp>
         <p:nvSpPr>
-          <p:cNvPr id="15" name="Rounded Rectangle 14"/>
-          <p:cNvSpPr/>
-          <p:nvPr/>
-        </p:nvSpPr>
-        <p:spPr>
-          <a:xfrm>
-            <a:off x="7031050" y="4280855"/>
-            <a:ext cx="78181" cy="208483"/>
-          </a:xfrm>
-          <a:prstGeom prst="roundRect">
-            <a:avLst>
-              <a:gd name="adj" fmla="val 50000"/>
-            </a:avLst>
-          </a:prstGeom>
-          <a:solidFill>
-            <a:srgbClr val="6B4A34"/>
-          </a:solidFill>
-          <a:ln>
-            <a:noFill/>
-          </a:ln>
-          <a:effectLst/>
-        </p:spPr>
-        <p:style>
-          <a:lnRef idx="1">
-            <a:schemeClr val="accent1"/>
-          </a:lnRef>
-          <a:fillRef idx="3">
-            <a:schemeClr val="accent1"/>
-          </a:fillRef>
-          <a:effectRef idx="2">
-            <a:schemeClr val="accent1"/>
-          </a:effectRef>
-          <a:fontRef idx="minor">
-            <a:schemeClr val="lt1"/>
-          </a:fontRef>
-        </p:style>
-        <p:txBody>
-          <a:bodyPr rtlCol="0" anchor="ctr"/>
-          <a:lstStyle/>
-          <a:p>
-            <a:pPr algn="ctr"/>
-          </a:p>
-        </p:txBody>
-      </p:sp>
-      <p:sp>
-        <p:nvSpPr>
-          <p:cNvPr id="16" name="Rounded Rectangle 15"/>
-          <p:cNvSpPr/>
-          <p:nvPr/>
-        </p:nvSpPr>
-        <p:spPr>
-          <a:xfrm>
-            <a:off x="6437741" y="3053410"/>
-            <a:ext cx="208483" cy="78181"/>
-          </a:xfrm>
-          <a:prstGeom prst="roundRect">
-            <a:avLst>
-              <a:gd name="adj" fmla="val 50000"/>
-            </a:avLst>
-          </a:prstGeom>
-          <a:solidFill>
-            <a:srgbClr val="6B4A34"/>
-          </a:solidFill>
-          <a:ln>
-            <a:noFill/>
-          </a:ln>
-          <a:effectLst/>
-        </p:spPr>
-        <p:style>
-          <a:lnRef idx="1">
-            <a:schemeClr val="accent1"/>
-          </a:lnRef>
-          <a:fillRef idx="3">
-            <a:schemeClr val="accent1"/>
-          </a:fillRef>
-          <a:effectRef idx="2">
-            <a:schemeClr val="accent1"/>
-          </a:effectRef>
-          <a:fontRef idx="minor">
-            <a:schemeClr val="lt1"/>
-          </a:fontRef>
-        </p:style>
-        <p:txBody>
-          <a:bodyPr rtlCol="0" anchor="ctr"/>
-          <a:lstStyle/>
-          <a:p>
-            <a:pPr algn="ctr"/>
-          </a:p>
-        </p:txBody>
-      </p:sp>
-      <p:sp>
-        <p:nvSpPr>
-          <p:cNvPr id="17" name="Rounded Rectangle 16"/>
-          <p:cNvSpPr/>
-          <p:nvPr/>
-        </p:nvSpPr>
-        <p:spPr>
-          <a:xfrm>
-            <a:off x="8258495" y="3053410"/>
-            <a:ext cx="208483" cy="78181"/>
-          </a:xfrm>
-          <a:prstGeom prst="roundRect">
-            <a:avLst>
-              <a:gd name="adj" fmla="val 50000"/>
-            </a:avLst>
-          </a:prstGeom>
-          <a:solidFill>
-            <a:srgbClr val="6B4A34"/>
-          </a:solidFill>
-          <a:ln>
-            <a:noFill/>
-          </a:ln>
-          <a:effectLst/>
-        </p:spPr>
-        <p:style>
-          <a:lnRef idx="1">
-            <a:schemeClr val="accent1"/>
-          </a:lnRef>
-          <a:fillRef idx="3">
-            <a:schemeClr val="accent1"/>
-          </a:fillRef>
-          <a:effectRef idx="2">
-            <a:schemeClr val="accent1"/>
-          </a:effectRef>
-          <a:fontRef idx="minor">
-            <a:schemeClr val="lt1"/>
-          </a:fontRef>
-        </p:style>
-        <p:txBody>
-          <a:bodyPr rtlCol="0" anchor="ctr"/>
-          <a:lstStyle/>
-          <a:p>
-            <a:pPr algn="ctr"/>
-          </a:p>
-        </p:txBody>
-      </p:sp>
-      <p:sp>
-        <p:nvSpPr>
-          <p:cNvPr id="18" name="Rounded Rectangle 17"/>
-          <p:cNvSpPr/>
-          <p:nvPr/>
-        </p:nvSpPr>
-        <p:spPr>
-          <a:xfrm>
-            <a:off x="7413269" y="2460101"/>
-            <a:ext cx="78181" cy="208483"/>
-          </a:xfrm>
-          <a:prstGeom prst="roundRect">
-            <a:avLst>
-              <a:gd name="adj" fmla="val 50000"/>
-            </a:avLst>
-          </a:prstGeom>
-          <a:solidFill>
-            <a:srgbClr val="6B4A34"/>
-          </a:solidFill>
-          <a:ln>
-            <a:noFill/>
-          </a:ln>
-          <a:effectLst/>
-        </p:spPr>
-        <p:style>
-          <a:lnRef idx="1">
-            <a:schemeClr val="accent1"/>
-          </a:lnRef>
-          <a:fillRef idx="3">
-            <a:schemeClr val="accent1"/>
-          </a:fillRef>
-          <a:effectRef idx="2">
-            <a:schemeClr val="accent1"/>
-          </a:effectRef>
-          <a:fontRef idx="minor">
-            <a:schemeClr val="lt1"/>
-          </a:fontRef>
-        </p:style>
-        <p:txBody>
-          <a:bodyPr rtlCol="0" anchor="ctr"/>
-          <a:lstStyle/>
-          <a:p>
-            <a:pPr algn="ctr"/>
-          </a:p>
-        </p:txBody>
-      </p:sp>
-      <p:sp>
-        <p:nvSpPr>
-          <p:cNvPr id="19" name="Rounded Rectangle 18"/>
-          <p:cNvSpPr/>
-          <p:nvPr/>
-        </p:nvSpPr>
-        <p:spPr>
-          <a:xfrm>
-            <a:off x="7413269" y="4280855"/>
-            <a:ext cx="78181" cy="208483"/>
-          </a:xfrm>
-          <a:prstGeom prst="roundRect">
-            <a:avLst>
-              <a:gd name="adj" fmla="val 50000"/>
-            </a:avLst>
-          </a:prstGeom>
-          <a:solidFill>
-            <a:srgbClr val="6B4A34"/>
-          </a:solidFill>
-          <a:ln>
-            <a:noFill/>
-          </a:ln>
-          <a:effectLst/>
-        </p:spPr>
-        <p:style>
-          <a:lnRef idx="1">
-            <a:schemeClr val="accent1"/>
-          </a:lnRef>
-          <a:fillRef idx="3">
-            <a:schemeClr val="accent1"/>
-          </a:fillRef>
-          <a:effectRef idx="2">
-            <a:schemeClr val="accent1"/>
-          </a:effectRef>
-          <a:fontRef idx="minor">
-            <a:schemeClr val="lt1"/>
-          </a:fontRef>
-        </p:style>
-        <p:txBody>
-          <a:bodyPr rtlCol="0" anchor="ctr"/>
-          <a:lstStyle/>
-          <a:p>
-            <a:pPr algn="ctr"/>
-          </a:p>
-        </p:txBody>
-      </p:sp>
-      <p:sp>
-        <p:nvSpPr>
-          <p:cNvPr id="20" name="Rounded Rectangle 19"/>
-          <p:cNvSpPr/>
-          <p:nvPr/>
-        </p:nvSpPr>
-        <p:spPr>
-          <a:xfrm>
-            <a:off x="6437741" y="3435629"/>
-            <a:ext cx="208483" cy="78181"/>
-          </a:xfrm>
-          <a:prstGeom prst="roundRect">
-            <a:avLst>
-              <a:gd name="adj" fmla="val 50000"/>
-            </a:avLst>
-          </a:prstGeom>
-          <a:solidFill>
-            <a:srgbClr val="6B4A34"/>
-          </a:solidFill>
-          <a:ln>
-            <a:noFill/>
-          </a:ln>
-          <a:effectLst/>
-        </p:spPr>
-        <p:style>
-          <a:lnRef idx="1">
-            <a:schemeClr val="accent1"/>
-          </a:lnRef>
-          <a:fillRef idx="3">
-            <a:schemeClr val="accent1"/>
-          </a:fillRef>
-          <a:effectRef idx="2">
-            <a:schemeClr val="accent1"/>
-          </a:effectRef>
-          <a:fontRef idx="minor">
-            <a:schemeClr val="lt1"/>
-          </a:fontRef>
-        </p:style>
-        <p:txBody>
-          <a:bodyPr rtlCol="0" anchor="ctr"/>
-          <a:lstStyle/>
-          <a:p>
-            <a:pPr algn="ctr"/>
-          </a:p>
-        </p:txBody>
-      </p:sp>
-      <p:sp>
-        <p:nvSpPr>
-          <p:cNvPr id="21" name="Rounded Rectangle 20"/>
-          <p:cNvSpPr/>
-          <p:nvPr/>
-        </p:nvSpPr>
-        <p:spPr>
-          <a:xfrm>
-            <a:off x="8258495" y="3435629"/>
-            <a:ext cx="208483" cy="78181"/>
-          </a:xfrm>
-          <a:prstGeom prst="roundRect">
-            <a:avLst>
-              <a:gd name="adj" fmla="val 50000"/>
-            </a:avLst>
-          </a:prstGeom>
-          <a:solidFill>
-            <a:srgbClr val="6B4A34"/>
-          </a:solidFill>
-          <a:ln>
-            <a:noFill/>
-          </a:ln>
-          <a:effectLst/>
-        </p:spPr>
-        <p:style>
-          <a:lnRef idx="1">
-            <a:schemeClr val="accent1"/>
-          </a:lnRef>
-          <a:fillRef idx="3">
-            <a:schemeClr val="accent1"/>
-          </a:fillRef>
-          <a:effectRef idx="2">
-            <a:schemeClr val="accent1"/>
-          </a:effectRef>
-          <a:fontRef idx="minor">
-            <a:schemeClr val="lt1"/>
-          </a:fontRef>
-        </p:style>
-        <p:txBody>
-          <a:bodyPr rtlCol="0" anchor="ctr"/>
-          <a:lstStyle/>
-          <a:p>
-            <a:pPr algn="ctr"/>
-          </a:p>
-        </p:txBody>
-      </p:sp>
-      <p:sp>
-        <p:nvSpPr>
-          <p:cNvPr id="22" name="Rounded Rectangle 21"/>
-          <p:cNvSpPr/>
-          <p:nvPr/>
-        </p:nvSpPr>
-        <p:spPr>
-          <a:xfrm>
-            <a:off x="7795488" y="2460101"/>
-            <a:ext cx="78181" cy="208483"/>
-          </a:xfrm>
-          <a:prstGeom prst="roundRect">
-            <a:avLst>
-              <a:gd name="adj" fmla="val 50000"/>
-            </a:avLst>
-          </a:prstGeom>
-          <a:solidFill>
-            <a:srgbClr val="6B4A34"/>
-          </a:solidFill>
-          <a:ln>
-            <a:noFill/>
-          </a:ln>
-          <a:effectLst/>
-        </p:spPr>
-        <p:style>
-          <a:lnRef idx="1">
-            <a:schemeClr val="accent1"/>
-          </a:lnRef>
-          <a:fillRef idx="3">
-            <a:schemeClr val="accent1"/>
-          </a:fillRef>
-          <a:effectRef idx="2">
-            <a:schemeClr val="accent1"/>
-          </a:effectRef>
-          <a:fontRef idx="minor">
-            <a:schemeClr val="lt1"/>
-          </a:fontRef>
-        </p:style>
-        <p:txBody>
-          <a:bodyPr rtlCol="0" anchor="ctr"/>
-          <a:lstStyle/>
-          <a:p>
-            <a:pPr algn="ctr"/>
-          </a:p>
-        </p:txBody>
-      </p:sp>
-      <p:sp>
-        <p:nvSpPr>
-          <p:cNvPr id="23" name="Rounded Rectangle 22"/>
-          <p:cNvSpPr/>
-          <p:nvPr/>
-        </p:nvSpPr>
-        <p:spPr>
-          <a:xfrm>
-            <a:off x="7795488" y="4280855"/>
-            <a:ext cx="78181" cy="208483"/>
-          </a:xfrm>
-          <a:prstGeom prst="roundRect">
-            <a:avLst>
-              <a:gd name="adj" fmla="val 50000"/>
-            </a:avLst>
-          </a:prstGeom>
-          <a:solidFill>
-            <a:srgbClr val="6B4A34"/>
-          </a:solidFill>
-          <a:ln>
-            <a:noFill/>
-          </a:ln>
-          <a:effectLst/>
-        </p:spPr>
-        <p:style>
-          <a:lnRef idx="1">
-            <a:schemeClr val="accent1"/>
-          </a:lnRef>
-          <a:fillRef idx="3">
-            <a:schemeClr val="accent1"/>
-          </a:fillRef>
-          <a:effectRef idx="2">
-            <a:schemeClr val="accent1"/>
-          </a:effectRef>
-          <a:fontRef idx="minor">
-            <a:schemeClr val="lt1"/>
-          </a:fontRef>
-        </p:style>
-        <p:txBody>
-          <a:bodyPr rtlCol="0" anchor="ctr"/>
-          <a:lstStyle/>
-          <a:p>
-            <a:pPr algn="ctr"/>
-          </a:p>
-        </p:txBody>
-      </p:sp>
-      <p:sp>
-        <p:nvSpPr>
-          <p:cNvPr id="24" name="Rounded Rectangle 23"/>
-          <p:cNvSpPr/>
-          <p:nvPr/>
-        </p:nvSpPr>
-        <p:spPr>
-          <a:xfrm>
-            <a:off x="6437741" y="3817848"/>
-            <a:ext cx="208483" cy="78181"/>
-          </a:xfrm>
-          <a:prstGeom prst="roundRect">
-            <a:avLst>
-              <a:gd name="adj" fmla="val 50000"/>
-            </a:avLst>
-          </a:prstGeom>
-          <a:solidFill>
-            <a:srgbClr val="6B4A34"/>
-          </a:solidFill>
-          <a:ln>
-            <a:noFill/>
-          </a:ln>
-          <a:effectLst/>
-        </p:spPr>
-        <p:style>
-          <a:lnRef idx="1">
-            <a:schemeClr val="accent1"/>
-          </a:lnRef>
-          <a:fillRef idx="3">
-            <a:schemeClr val="accent1"/>
-          </a:fillRef>
-          <a:effectRef idx="2">
-            <a:schemeClr val="accent1"/>
-          </a:effectRef>
-          <a:fontRef idx="minor">
-            <a:schemeClr val="lt1"/>
-          </a:fontRef>
-        </p:style>
-        <p:txBody>
-          <a:bodyPr rtlCol="0" anchor="ctr"/>
-          <a:lstStyle/>
-          <a:p>
-            <a:pPr algn="ctr"/>
-          </a:p>
-        </p:txBody>
-      </p:sp>
-      <p:sp>
-        <p:nvSpPr>
-          <p:cNvPr id="25" name="Rounded Rectangle 24"/>
-          <p:cNvSpPr/>
-          <p:nvPr/>
-        </p:nvSpPr>
-        <p:spPr>
-          <a:xfrm>
-            <a:off x="8258495" y="3817848"/>
-            <a:ext cx="208483" cy="78181"/>
-          </a:xfrm>
-          <a:prstGeom prst="roundRect">
-            <a:avLst>
-              <a:gd name="adj" fmla="val 50000"/>
-            </a:avLst>
-          </a:prstGeom>
-          <a:solidFill>
-            <a:srgbClr val="6B4A34"/>
-          </a:solidFill>
-          <a:ln>
-            <a:noFill/>
-          </a:ln>
-          <a:effectLst/>
-        </p:spPr>
-        <p:style>
-          <a:lnRef idx="1">
-            <a:schemeClr val="accent1"/>
-          </a:lnRef>
-          <a:fillRef idx="3">
-            <a:schemeClr val="accent1"/>
-          </a:fillRef>
-          <a:effectRef idx="2">
-            <a:schemeClr val="accent1"/>
-          </a:effectRef>
-          <a:fontRef idx="minor">
-            <a:schemeClr val="lt1"/>
-          </a:fontRef>
-        </p:style>
-        <p:txBody>
-          <a:bodyPr rtlCol="0" anchor="ctr"/>
-          <a:lstStyle/>
-          <a:p>
-            <a:pPr algn="ctr"/>
-          </a:p>
-        </p:txBody>
-      </p:sp>
-      <p:sp>
-        <p:nvSpPr>
-          <p:cNvPr id="26" name="TextBox 25"/>
+          <p:cNvPr id="18" name="TextBox 17"/>
           <p:cNvSpPr txBox="1"/>
           <p:nvPr/>
         </p:nvSpPr>
@@ -6526,7 +5550,7 @@
       </p:sp>
       <p:sp>
         <p:nvSpPr>
-          <p:cNvPr id="27" name="TextBox 26"/>
+          <p:cNvPr id="19" name="TextBox 18"/>
           <p:cNvSpPr txBox="1"/>
           <p:nvPr/>
         </p:nvSpPr>
@@ -6565,14 +5589,14 @@
       </p:sp>
       <p:sp>
         <p:nvSpPr>
-          <p:cNvPr id="28" name="Rectangle 27"/>
+          <p:cNvPr id="20" name="Rectangle 19"/>
           <p:cNvSpPr/>
           <p:nvPr/>
         </p:nvSpPr>
         <p:spPr>
           <a:xfrm>
             <a:off x="0" y="6803136"/>
-            <a:ext cx="1479665" cy="54864"/>
+            <a:ext cx="1554480" cy="54864"/>
           </a:xfrm>
           <a:prstGeom prst="rect">
             <a:avLst/>
@@ -6609,7 +5633,7 @@
       </p:sp>
       <p:sp>
         <p:nvSpPr>
-          <p:cNvPr id="29" name="TextBox 28"/>
+          <p:cNvPr id="21" name="TextBox 20"/>
           <p:cNvSpPr txBox="1"/>
           <p:nvPr/>
         </p:nvSpPr>
@@ -6750,7 +5774,7 @@
                 </a:solidFill>
                 <a:latin typeface="Calibri"/>
               </a:rPr>
-              <a:t>THE QUESTION</a:t>
+              <a:t>THE CHALLENGE</a:t>
             </a:r>
           </a:p>
         </p:txBody>
@@ -7260,7 +6284,7 @@
                 </a:solidFill>
                 <a:latin typeface="Georgia"/>
               </a:rPr>
-              <a:t>Same résumé, different name — will the score change?</a:t>
+              <a:t>If AI learns from people, could it learn our bias?</a:t>
             </a:r>
           </a:p>
         </p:txBody>
@@ -7274,7 +6298,7 @@
         <p:spPr>
           <a:xfrm>
             <a:off x="0" y="6803136"/>
-            <a:ext cx="1729047" cy="54864"/>
+            <a:ext cx="1828800" cy="54864"/>
           </a:xfrm>
           <a:prstGeom prst="rect">
             <a:avLst/>
@@ -7501,8 +6525,8 @@
         </p:nvSpPr>
         <p:spPr>
           <a:xfrm>
-            <a:off x="3131820" y="1889150"/>
-            <a:ext cx="1691640" cy="2165299"/>
+            <a:off x="3145535" y="1798624"/>
+            <a:ext cx="1664208" cy="2163470"/>
           </a:xfrm>
           <a:prstGeom prst="roundRect">
             <a:avLst>
@@ -7555,8 +6579,145 @@
         </p:nvSpPr>
         <p:spPr>
           <a:xfrm>
-            <a:off x="3402482" y="2159812"/>
-            <a:ext cx="845820" cy="119091"/>
+            <a:off x="4027566" y="2048255"/>
+            <a:ext cx="532546" cy="596452"/>
+          </a:xfrm>
+          <a:prstGeom prst="roundRect">
+            <a:avLst>
+              <a:gd name="adj" fmla="val 12000"/>
+            </a:avLst>
+          </a:prstGeom>
+          <a:solidFill>
+            <a:srgbClr val="D6749C"/>
+          </a:solidFill>
+          <a:ln>
+            <a:noFill/>
+          </a:ln>
+          <a:effectLst/>
+        </p:spPr>
+        <p:style>
+          <a:lnRef idx="1">
+            <a:schemeClr val="accent1"/>
+          </a:lnRef>
+          <a:fillRef idx="3">
+            <a:schemeClr val="accent1"/>
+          </a:fillRef>
+          <a:effectRef idx="2">
+            <a:schemeClr val="accent1"/>
+          </a:effectRef>
+          <a:fontRef idx="minor">
+            <a:schemeClr val="lt1"/>
+          </a:fontRef>
+        </p:style>
+        <p:txBody>
+          <a:bodyPr rtlCol="0" anchor="ctr"/>
+          <a:lstStyle/>
+          <a:p>
+            <a:pPr algn="ctr"/>
+          </a:p>
+        </p:txBody>
+      </p:sp>
+      <p:sp>
+        <p:nvSpPr>
+          <p:cNvPr id="7" name="Oval 6"/>
+          <p:cNvSpPr/>
+          <p:nvPr/>
+        </p:nvSpPr>
+        <p:spPr>
+          <a:xfrm>
+            <a:off x="4187330" y="2122812"/>
+            <a:ext cx="213018" cy="213018"/>
+          </a:xfrm>
+          <a:prstGeom prst="ellipse">
+            <a:avLst/>
+          </a:prstGeom>
+          <a:solidFill>
+            <a:srgbClr val="FCF7EF"/>
+          </a:solidFill>
+          <a:ln>
+            <a:noFill/>
+          </a:ln>
+          <a:effectLst/>
+        </p:spPr>
+        <p:style>
+          <a:lnRef idx="1">
+            <a:schemeClr val="accent1"/>
+          </a:lnRef>
+          <a:fillRef idx="3">
+            <a:schemeClr val="accent1"/>
+          </a:fillRef>
+          <a:effectRef idx="2">
+            <a:schemeClr val="accent1"/>
+          </a:effectRef>
+          <a:fontRef idx="minor">
+            <a:schemeClr val="lt1"/>
+          </a:fontRef>
+        </p:style>
+        <p:txBody>
+          <a:bodyPr rtlCol="0" anchor="ctr"/>
+          <a:lstStyle/>
+          <a:p>
+            <a:pPr algn="ctr"/>
+          </a:p>
+        </p:txBody>
+      </p:sp>
+      <p:sp>
+        <p:nvSpPr>
+          <p:cNvPr id="8" name="Round Same Side Corner Rectangle 7"/>
+          <p:cNvSpPr/>
+          <p:nvPr/>
+        </p:nvSpPr>
+        <p:spPr>
+          <a:xfrm>
+            <a:off x="4112773" y="2357133"/>
+            <a:ext cx="362131" cy="181065"/>
+          </a:xfrm>
+          <a:prstGeom prst="round2SameRect">
+            <a:avLst>
+              <a:gd name="adj1" fmla="val 50000"/>
+              <a:gd name="adj2" fmla="val 0"/>
+            </a:avLst>
+          </a:prstGeom>
+          <a:solidFill>
+            <a:srgbClr val="FCF7EF"/>
+          </a:solidFill>
+          <a:ln>
+            <a:noFill/>
+          </a:ln>
+          <a:effectLst/>
+        </p:spPr>
+        <p:style>
+          <a:lnRef idx="1">
+            <a:schemeClr val="accent1"/>
+          </a:lnRef>
+          <a:fillRef idx="3">
+            <a:schemeClr val="accent1"/>
+          </a:fillRef>
+          <a:effectRef idx="2">
+            <a:schemeClr val="accent1"/>
+          </a:effectRef>
+          <a:fontRef idx="minor">
+            <a:schemeClr val="lt1"/>
+          </a:fontRef>
+        </p:style>
+        <p:txBody>
+          <a:bodyPr rtlCol="0" anchor="ctr"/>
+          <a:lstStyle/>
+          <a:p>
+            <a:pPr algn="ctr"/>
+          </a:p>
+        </p:txBody>
+      </p:sp>
+      <p:sp>
+        <p:nvSpPr>
+          <p:cNvPr id="9" name="Rounded Rectangle 8"/>
+          <p:cNvSpPr/>
+          <p:nvPr/>
+        </p:nvSpPr>
+        <p:spPr>
+          <a:xfrm>
+            <a:off x="3395167" y="2075687"/>
+            <a:ext cx="665683" cy="129808"/>
           </a:xfrm>
           <a:prstGeom prst="roundRect">
             <a:avLst>
@@ -7595,14 +6756,14 @@
       </p:sp>
       <p:sp>
         <p:nvSpPr>
-          <p:cNvPr id="7" name="Rounded Rectangle 6"/>
+          <p:cNvPr id="10" name="Rounded Rectangle 9"/>
           <p:cNvSpPr/>
           <p:nvPr/>
         </p:nvSpPr>
         <p:spPr>
           <a:xfrm>
-            <a:off x="3402482" y="2506260"/>
-            <a:ext cx="1150315" cy="97438"/>
+            <a:off x="3395167" y="2372776"/>
+            <a:ext cx="532546" cy="97356"/>
           </a:xfrm>
           <a:prstGeom prst="roundRect">
             <a:avLst>
@@ -7641,14 +6802,14 @@
       </p:sp>
       <p:sp>
         <p:nvSpPr>
-          <p:cNvPr id="8" name="Rounded Rectangle 7"/>
+          <p:cNvPr id="11" name="Rounded Rectangle 10"/>
           <p:cNvSpPr/>
           <p:nvPr/>
         </p:nvSpPr>
         <p:spPr>
           <a:xfrm>
-            <a:off x="3402482" y="2766096"/>
-            <a:ext cx="1014984" cy="97438"/>
+            <a:off x="3395167" y="2772186"/>
+            <a:ext cx="1198229" cy="97356"/>
           </a:xfrm>
           <a:prstGeom prst="roundRect">
             <a:avLst>
@@ -7687,14 +6848,14 @@
       </p:sp>
       <p:sp>
         <p:nvSpPr>
-          <p:cNvPr id="9" name="Rounded Rectangle 8"/>
+          <p:cNvPr id="12" name="Rounded Rectangle 11"/>
           <p:cNvSpPr/>
           <p:nvPr/>
         </p:nvSpPr>
         <p:spPr>
           <a:xfrm>
-            <a:off x="3402482" y="3025932"/>
-            <a:ext cx="1116482" cy="97438"/>
+            <a:off x="3395167" y="3031802"/>
+            <a:ext cx="1065093" cy="97356"/>
           </a:xfrm>
           <a:prstGeom prst="roundRect">
             <a:avLst>
@@ -7733,14 +6894,14 @@
       </p:sp>
       <p:sp>
         <p:nvSpPr>
-          <p:cNvPr id="10" name="Rounded Rectangle 9"/>
+          <p:cNvPr id="13" name="Rounded Rectangle 12"/>
           <p:cNvSpPr/>
           <p:nvPr/>
         </p:nvSpPr>
         <p:spPr>
           <a:xfrm>
-            <a:off x="3402482" y="3285768"/>
-            <a:ext cx="710488" cy="97438"/>
+            <a:off x="3395167" y="3291419"/>
+            <a:ext cx="1131661" cy="97356"/>
           </a:xfrm>
           <a:prstGeom prst="roundRect">
             <a:avLst>
@@ -7779,14 +6940,14 @@
       </p:sp>
       <p:sp>
         <p:nvSpPr>
-          <p:cNvPr id="11" name="TextBox 10"/>
+          <p:cNvPr id="14" name="TextBox 13"/>
           <p:cNvSpPr txBox="1"/>
           <p:nvPr/>
         </p:nvSpPr>
         <p:spPr>
           <a:xfrm>
-            <a:off x="3131820" y="3253288"/>
-            <a:ext cx="1691640" cy="736201"/>
+            <a:off x="3145535" y="3442862"/>
+            <a:ext cx="1664208" cy="562502"/>
           </a:xfrm>
           <a:prstGeom prst="rect">
             <a:avLst/>
@@ -7805,7 +6966,7 @@
               </a:lnSpc>
             </a:pPr>
             <a:r>
-              <a:rPr sz="4000" b="0" i="0">
+              <a:rPr sz="3200" b="0" i="0">
                 <a:solidFill>
                   <a:srgbClr val="D6749C"/>
                 </a:solidFill>
@@ -7818,13 +6979,13 @@
       </p:sp>
       <p:sp>
         <p:nvSpPr>
-          <p:cNvPr id="12" name="TextBox 11"/>
+          <p:cNvPr id="15" name="TextBox 14"/>
           <p:cNvSpPr txBox="1"/>
           <p:nvPr/>
         </p:nvSpPr>
         <p:spPr>
           <a:xfrm>
-            <a:off x="5181447" y="2468880"/>
+            <a:off x="5181447" y="2377440"/>
             <a:ext cx="1828800" cy="1005840"/>
           </a:xfrm>
           <a:prstGeom prst="rect">
@@ -7857,14 +7018,14 @@
       </p:sp>
       <p:sp>
         <p:nvSpPr>
-          <p:cNvPr id="13" name="Rounded Rectangle 12"/>
+          <p:cNvPr id="16" name="Rounded Rectangle 15"/>
           <p:cNvSpPr/>
           <p:nvPr/>
         </p:nvSpPr>
         <p:spPr>
           <a:xfrm>
-            <a:off x="7365492" y="1889150"/>
-            <a:ext cx="1691640" cy="2165299"/>
+            <a:off x="7379208" y="1798624"/>
+            <a:ext cx="1664208" cy="2163470"/>
           </a:xfrm>
           <a:prstGeom prst="roundRect">
             <a:avLst>
@@ -7911,14 +7072,151 @@
       </p:sp>
       <p:sp>
         <p:nvSpPr>
-          <p:cNvPr id="14" name="Rounded Rectangle 13"/>
+          <p:cNvPr id="17" name="Rounded Rectangle 16"/>
           <p:cNvSpPr/>
           <p:nvPr/>
         </p:nvSpPr>
         <p:spPr>
           <a:xfrm>
-            <a:off x="7636154" y="2159812"/>
-            <a:ext cx="845820" cy="119091"/>
+            <a:off x="8261238" y="2048255"/>
+            <a:ext cx="532546" cy="596452"/>
+          </a:xfrm>
+          <a:prstGeom prst="roundRect">
+            <a:avLst>
+              <a:gd name="adj" fmla="val 12000"/>
+            </a:avLst>
+          </a:prstGeom>
+          <a:solidFill>
+            <a:srgbClr val="6E8FC0"/>
+          </a:solidFill>
+          <a:ln>
+            <a:noFill/>
+          </a:ln>
+          <a:effectLst/>
+        </p:spPr>
+        <p:style>
+          <a:lnRef idx="1">
+            <a:schemeClr val="accent1"/>
+          </a:lnRef>
+          <a:fillRef idx="3">
+            <a:schemeClr val="accent1"/>
+          </a:fillRef>
+          <a:effectRef idx="2">
+            <a:schemeClr val="accent1"/>
+          </a:effectRef>
+          <a:fontRef idx="minor">
+            <a:schemeClr val="lt1"/>
+          </a:fontRef>
+        </p:style>
+        <p:txBody>
+          <a:bodyPr rtlCol="0" anchor="ctr"/>
+          <a:lstStyle/>
+          <a:p>
+            <a:pPr algn="ctr"/>
+          </a:p>
+        </p:txBody>
+      </p:sp>
+      <p:sp>
+        <p:nvSpPr>
+          <p:cNvPr id="18" name="Oval 17"/>
+          <p:cNvSpPr/>
+          <p:nvPr/>
+        </p:nvSpPr>
+        <p:spPr>
+          <a:xfrm>
+            <a:off x="8421002" y="2122812"/>
+            <a:ext cx="213018" cy="213018"/>
+          </a:xfrm>
+          <a:prstGeom prst="ellipse">
+            <a:avLst/>
+          </a:prstGeom>
+          <a:solidFill>
+            <a:srgbClr val="FCF7EF"/>
+          </a:solidFill>
+          <a:ln>
+            <a:noFill/>
+          </a:ln>
+          <a:effectLst/>
+        </p:spPr>
+        <p:style>
+          <a:lnRef idx="1">
+            <a:schemeClr val="accent1"/>
+          </a:lnRef>
+          <a:fillRef idx="3">
+            <a:schemeClr val="accent1"/>
+          </a:fillRef>
+          <a:effectRef idx="2">
+            <a:schemeClr val="accent1"/>
+          </a:effectRef>
+          <a:fontRef idx="minor">
+            <a:schemeClr val="lt1"/>
+          </a:fontRef>
+        </p:style>
+        <p:txBody>
+          <a:bodyPr rtlCol="0" anchor="ctr"/>
+          <a:lstStyle/>
+          <a:p>
+            <a:pPr algn="ctr"/>
+          </a:p>
+        </p:txBody>
+      </p:sp>
+      <p:sp>
+        <p:nvSpPr>
+          <p:cNvPr id="19" name="Round Same Side Corner Rectangle 18"/>
+          <p:cNvSpPr/>
+          <p:nvPr/>
+        </p:nvSpPr>
+        <p:spPr>
+          <a:xfrm>
+            <a:off x="8346445" y="2357133"/>
+            <a:ext cx="362131" cy="181065"/>
+          </a:xfrm>
+          <a:prstGeom prst="round2SameRect">
+            <a:avLst>
+              <a:gd name="adj1" fmla="val 50000"/>
+              <a:gd name="adj2" fmla="val 0"/>
+            </a:avLst>
+          </a:prstGeom>
+          <a:solidFill>
+            <a:srgbClr val="FCF7EF"/>
+          </a:solidFill>
+          <a:ln>
+            <a:noFill/>
+          </a:ln>
+          <a:effectLst/>
+        </p:spPr>
+        <p:style>
+          <a:lnRef idx="1">
+            <a:schemeClr val="accent1"/>
+          </a:lnRef>
+          <a:fillRef idx="3">
+            <a:schemeClr val="accent1"/>
+          </a:fillRef>
+          <a:effectRef idx="2">
+            <a:schemeClr val="accent1"/>
+          </a:effectRef>
+          <a:fontRef idx="minor">
+            <a:schemeClr val="lt1"/>
+          </a:fontRef>
+        </p:style>
+        <p:txBody>
+          <a:bodyPr rtlCol="0" anchor="ctr"/>
+          <a:lstStyle/>
+          <a:p>
+            <a:pPr algn="ctr"/>
+          </a:p>
+        </p:txBody>
+      </p:sp>
+      <p:sp>
+        <p:nvSpPr>
+          <p:cNvPr id="20" name="Rounded Rectangle 19"/>
+          <p:cNvSpPr/>
+          <p:nvPr/>
+        </p:nvSpPr>
+        <p:spPr>
+          <a:xfrm>
+            <a:off x="7628839" y="2075687"/>
+            <a:ext cx="665683" cy="129808"/>
           </a:xfrm>
           <a:prstGeom prst="roundRect">
             <a:avLst>
@@ -7957,14 +7255,14 @@
       </p:sp>
       <p:sp>
         <p:nvSpPr>
-          <p:cNvPr id="15" name="Rounded Rectangle 14"/>
+          <p:cNvPr id="21" name="Rounded Rectangle 20"/>
           <p:cNvSpPr/>
           <p:nvPr/>
         </p:nvSpPr>
         <p:spPr>
           <a:xfrm>
-            <a:off x="7636154" y="2506260"/>
-            <a:ext cx="1150315" cy="97438"/>
+            <a:off x="7628839" y="2372776"/>
+            <a:ext cx="532546" cy="97356"/>
           </a:xfrm>
           <a:prstGeom prst="roundRect">
             <a:avLst>
@@ -8003,14 +7301,14 @@
       </p:sp>
       <p:sp>
         <p:nvSpPr>
-          <p:cNvPr id="16" name="Rounded Rectangle 15"/>
+          <p:cNvPr id="22" name="Rounded Rectangle 21"/>
           <p:cNvSpPr/>
           <p:nvPr/>
         </p:nvSpPr>
         <p:spPr>
           <a:xfrm>
-            <a:off x="7636154" y="2766096"/>
-            <a:ext cx="1014984" cy="97438"/>
+            <a:off x="7628839" y="2772186"/>
+            <a:ext cx="1198229" cy="97356"/>
           </a:xfrm>
           <a:prstGeom prst="roundRect">
             <a:avLst>
@@ -8049,14 +7347,14 @@
       </p:sp>
       <p:sp>
         <p:nvSpPr>
-          <p:cNvPr id="17" name="Rounded Rectangle 16"/>
+          <p:cNvPr id="23" name="Rounded Rectangle 22"/>
           <p:cNvSpPr/>
           <p:nvPr/>
         </p:nvSpPr>
         <p:spPr>
           <a:xfrm>
-            <a:off x="7636154" y="3025932"/>
-            <a:ext cx="1116482" cy="97438"/>
+            <a:off x="7628839" y="3031802"/>
+            <a:ext cx="1065093" cy="97356"/>
           </a:xfrm>
           <a:prstGeom prst="roundRect">
             <a:avLst>
@@ -8095,14 +7393,14 @@
       </p:sp>
       <p:sp>
         <p:nvSpPr>
-          <p:cNvPr id="18" name="Rounded Rectangle 17"/>
+          <p:cNvPr id="24" name="Rounded Rectangle 23"/>
           <p:cNvSpPr/>
           <p:nvPr/>
         </p:nvSpPr>
         <p:spPr>
           <a:xfrm>
-            <a:off x="7636154" y="3285768"/>
-            <a:ext cx="710488" cy="97438"/>
+            <a:off x="7628839" y="3291419"/>
+            <a:ext cx="1131661" cy="97356"/>
           </a:xfrm>
           <a:prstGeom prst="roundRect">
             <a:avLst>
@@ -8141,14 +7439,14 @@
       </p:sp>
       <p:sp>
         <p:nvSpPr>
-          <p:cNvPr id="19" name="TextBox 18"/>
+          <p:cNvPr id="25" name="TextBox 24"/>
           <p:cNvSpPr txBox="1"/>
           <p:nvPr/>
         </p:nvSpPr>
         <p:spPr>
           <a:xfrm>
-            <a:off x="7365492" y="3253288"/>
-            <a:ext cx="1691640" cy="736201"/>
+            <a:off x="7379208" y="3442862"/>
+            <a:ext cx="1664208" cy="562502"/>
           </a:xfrm>
           <a:prstGeom prst="rect">
             <a:avLst/>
@@ -8167,7 +7465,7 @@
               </a:lnSpc>
             </a:pPr>
             <a:r>
-              <a:rPr sz="4000" b="0" i="0">
+              <a:rPr sz="3200" b="0" i="0">
                 <a:solidFill>
                   <a:srgbClr val="6E8FC0"/>
                 </a:solidFill>
@@ -8180,7 +7478,7 @@
       </p:sp>
       <p:sp>
         <p:nvSpPr>
-          <p:cNvPr id="20" name="TextBox 19"/>
+          <p:cNvPr id="26" name="TextBox 25"/>
           <p:cNvSpPr txBox="1"/>
           <p:nvPr/>
         </p:nvSpPr>
@@ -8219,7 +7517,7 @@
       </p:sp>
       <p:sp>
         <p:nvSpPr>
-          <p:cNvPr id="21" name="TextBox 20"/>
+          <p:cNvPr id="27" name="TextBox 26"/>
           <p:cNvSpPr txBox="1"/>
           <p:nvPr/>
         </p:nvSpPr>
@@ -8258,7 +7556,7 @@
       </p:sp>
       <p:sp>
         <p:nvSpPr>
-          <p:cNvPr id="22" name="Rounded Rectangle 21"/>
+          <p:cNvPr id="28" name="Rounded Rectangle 27"/>
           <p:cNvSpPr/>
           <p:nvPr/>
         </p:nvSpPr>
@@ -8312,7 +7610,7 @@
       </p:sp>
       <p:sp>
         <p:nvSpPr>
-          <p:cNvPr id="23" name="Oval 22"/>
+          <p:cNvPr id="29" name="Oval 28"/>
           <p:cNvSpPr/>
           <p:nvPr/>
         </p:nvSpPr>
@@ -8356,7 +7654,7 @@
       </p:sp>
       <p:sp>
         <p:nvSpPr>
-          <p:cNvPr id="24" name="TextBox 23"/>
+          <p:cNvPr id="30" name="TextBox 29"/>
           <p:cNvSpPr txBox="1"/>
           <p:nvPr/>
         </p:nvSpPr>
@@ -8395,7 +7693,7 @@
       </p:sp>
       <p:sp>
         <p:nvSpPr>
-          <p:cNvPr id="25" name="Rounded Rectangle 24"/>
+          <p:cNvPr id="31" name="Rounded Rectangle 30"/>
           <p:cNvSpPr/>
           <p:nvPr/>
         </p:nvSpPr>
@@ -8449,7 +7747,7 @@
       </p:sp>
       <p:sp>
         <p:nvSpPr>
-          <p:cNvPr id="26" name="Oval 25"/>
+          <p:cNvPr id="32" name="Oval 31"/>
           <p:cNvSpPr/>
           <p:nvPr/>
         </p:nvSpPr>
@@ -8493,7 +7791,7 @@
       </p:sp>
       <p:sp>
         <p:nvSpPr>
-          <p:cNvPr id="27" name="TextBox 26"/>
+          <p:cNvPr id="33" name="TextBox 32"/>
           <p:cNvSpPr txBox="1"/>
           <p:nvPr/>
         </p:nvSpPr>
@@ -8532,7 +7830,7 @@
       </p:sp>
       <p:sp>
         <p:nvSpPr>
-          <p:cNvPr id="28" name="Rounded Rectangle 27"/>
+          <p:cNvPr id="34" name="Rounded Rectangle 33"/>
           <p:cNvSpPr/>
           <p:nvPr/>
         </p:nvSpPr>
@@ -8586,7 +7884,7 @@
       </p:sp>
       <p:sp>
         <p:nvSpPr>
-          <p:cNvPr id="29" name="Oval 28"/>
+          <p:cNvPr id="35" name="Oval 34"/>
           <p:cNvSpPr/>
           <p:nvPr/>
         </p:nvSpPr>
@@ -8630,7 +7928,7 @@
       </p:sp>
       <p:sp>
         <p:nvSpPr>
-          <p:cNvPr id="30" name="TextBox 29"/>
+          <p:cNvPr id="36" name="TextBox 35"/>
           <p:cNvSpPr txBox="1"/>
           <p:nvPr/>
         </p:nvSpPr>
@@ -8669,7 +7967,7 @@
       </p:sp>
       <p:sp>
         <p:nvSpPr>
-          <p:cNvPr id="31" name="Rounded Rectangle 30"/>
+          <p:cNvPr id="37" name="Rounded Rectangle 36"/>
           <p:cNvSpPr/>
           <p:nvPr/>
         </p:nvSpPr>
@@ -8723,7 +8021,7 @@
       </p:sp>
       <p:sp>
         <p:nvSpPr>
-          <p:cNvPr id="32" name="Oval 31"/>
+          <p:cNvPr id="38" name="Oval 37"/>
           <p:cNvSpPr/>
           <p:nvPr/>
         </p:nvSpPr>
@@ -8767,7 +8065,7 @@
       </p:sp>
       <p:sp>
         <p:nvSpPr>
-          <p:cNvPr id="33" name="TextBox 32"/>
+          <p:cNvPr id="39" name="TextBox 38"/>
           <p:cNvSpPr txBox="1"/>
           <p:nvPr/>
         </p:nvSpPr>
@@ -8806,7 +8104,7 @@
       </p:sp>
       <p:sp>
         <p:nvSpPr>
-          <p:cNvPr id="34" name="Rounded Rectangle 33"/>
+          <p:cNvPr id="40" name="Rounded Rectangle 39"/>
           <p:cNvSpPr/>
           <p:nvPr/>
         </p:nvSpPr>
@@ -8860,7 +8158,7 @@
       </p:sp>
       <p:sp>
         <p:nvSpPr>
-          <p:cNvPr id="35" name="Oval 34"/>
+          <p:cNvPr id="41" name="Oval 40"/>
           <p:cNvSpPr/>
           <p:nvPr/>
         </p:nvSpPr>
@@ -8904,7 +8202,7 @@
       </p:sp>
       <p:sp>
         <p:nvSpPr>
-          <p:cNvPr id="36" name="TextBox 35"/>
+          <p:cNvPr id="42" name="TextBox 41"/>
           <p:cNvSpPr txBox="1"/>
           <p:nvPr/>
         </p:nvSpPr>
@@ -8943,14 +8241,14 @@
       </p:sp>
       <p:sp>
         <p:nvSpPr>
-          <p:cNvPr id="37" name="Rectangle 36"/>
+          <p:cNvPr id="43" name="Rectangle 42"/>
           <p:cNvSpPr/>
           <p:nvPr/>
         </p:nvSpPr>
         <p:spPr>
           <a:xfrm>
             <a:off x="0" y="6803136"/>
-            <a:ext cx="1978429" cy="54864"/>
+            <a:ext cx="2103120" cy="54864"/>
           </a:xfrm>
           <a:prstGeom prst="rect">
             <a:avLst/>
@@ -8987,7 +8285,7 @@
       </p:sp>
       <p:sp>
         <p:nvSpPr>
-          <p:cNvPr id="38" name="TextBox 37"/>
+          <p:cNvPr id="44" name="TextBox 43"/>
           <p:cNvSpPr txBox="1"/>
           <p:nvPr/>
         </p:nvSpPr>
@@ -9177,8 +8475,8 @@
         </p:nvSpPr>
         <p:spPr>
           <a:xfrm>
-            <a:off x="3268979" y="2745028"/>
-            <a:ext cx="1783080" cy="2282342"/>
+            <a:off x="3291839" y="2665476"/>
+            <a:ext cx="1737360" cy="2258568"/>
           </a:xfrm>
           <a:prstGeom prst="roundRect">
             <a:avLst>
@@ -9231,8 +8529,145 @@
         </p:nvSpPr>
         <p:spPr>
           <a:xfrm>
-            <a:off x="3554272" y="3030321"/>
-            <a:ext cx="891540" cy="125528"/>
+            <a:off x="4212640" y="2926080"/>
+            <a:ext cx="555955" cy="622669"/>
+          </a:xfrm>
+          <a:prstGeom prst="roundRect">
+            <a:avLst>
+              <a:gd name="adj" fmla="val 12000"/>
+            </a:avLst>
+          </a:prstGeom>
+          <a:solidFill>
+            <a:srgbClr val="6E8FC0"/>
+          </a:solidFill>
+          <a:ln>
+            <a:noFill/>
+          </a:ln>
+          <a:effectLst/>
+        </p:spPr>
+        <p:style>
+          <a:lnRef idx="1">
+            <a:schemeClr val="accent1"/>
+          </a:lnRef>
+          <a:fillRef idx="3">
+            <a:schemeClr val="accent1"/>
+          </a:fillRef>
+          <a:effectRef idx="2">
+            <a:schemeClr val="accent1"/>
+          </a:effectRef>
+          <a:fontRef idx="minor">
+            <a:schemeClr val="lt1"/>
+          </a:fontRef>
+        </p:style>
+        <p:txBody>
+          <a:bodyPr rtlCol="0" anchor="ctr"/>
+          <a:lstStyle/>
+          <a:p>
+            <a:pPr algn="ctr"/>
+          </a:p>
+        </p:txBody>
+      </p:sp>
+      <p:sp>
+        <p:nvSpPr>
+          <p:cNvPr id="7" name="Oval 6"/>
+          <p:cNvSpPr/>
+          <p:nvPr/>
+        </p:nvSpPr>
+        <p:spPr>
+          <a:xfrm>
+            <a:off x="4379427" y="3003913"/>
+            <a:ext cx="222382" cy="222382"/>
+          </a:xfrm>
+          <a:prstGeom prst="ellipse">
+            <a:avLst/>
+          </a:prstGeom>
+          <a:solidFill>
+            <a:srgbClr val="FCF7EF"/>
+          </a:solidFill>
+          <a:ln>
+            <a:noFill/>
+          </a:ln>
+          <a:effectLst/>
+        </p:spPr>
+        <p:style>
+          <a:lnRef idx="1">
+            <a:schemeClr val="accent1"/>
+          </a:lnRef>
+          <a:fillRef idx="3">
+            <a:schemeClr val="accent1"/>
+          </a:fillRef>
+          <a:effectRef idx="2">
+            <a:schemeClr val="accent1"/>
+          </a:effectRef>
+          <a:fontRef idx="minor">
+            <a:schemeClr val="lt1"/>
+          </a:fontRef>
+        </p:style>
+        <p:txBody>
+          <a:bodyPr rtlCol="0" anchor="ctr"/>
+          <a:lstStyle/>
+          <a:p>
+            <a:pPr algn="ctr"/>
+          </a:p>
+        </p:txBody>
+      </p:sp>
+      <p:sp>
+        <p:nvSpPr>
+          <p:cNvPr id="8" name="Round Same Side Corner Rectangle 7"/>
+          <p:cNvSpPr/>
+          <p:nvPr/>
+        </p:nvSpPr>
+        <p:spPr>
+          <a:xfrm>
+            <a:off x="4301593" y="3248534"/>
+            <a:ext cx="378049" cy="189024"/>
+          </a:xfrm>
+          <a:prstGeom prst="round2SameRect">
+            <a:avLst>
+              <a:gd name="adj1" fmla="val 50000"/>
+              <a:gd name="adj2" fmla="val 0"/>
+            </a:avLst>
+          </a:prstGeom>
+          <a:solidFill>
+            <a:srgbClr val="FCF7EF"/>
+          </a:solidFill>
+          <a:ln>
+            <a:noFill/>
+          </a:ln>
+          <a:effectLst/>
+        </p:spPr>
+        <p:style>
+          <a:lnRef idx="1">
+            <a:schemeClr val="accent1"/>
+          </a:lnRef>
+          <a:fillRef idx="3">
+            <a:schemeClr val="accent1"/>
+          </a:fillRef>
+          <a:effectRef idx="2">
+            <a:schemeClr val="accent1"/>
+          </a:effectRef>
+          <a:fontRef idx="minor">
+            <a:schemeClr val="lt1"/>
+          </a:fontRef>
+        </p:style>
+        <p:txBody>
+          <a:bodyPr rtlCol="0" anchor="ctr"/>
+          <a:lstStyle/>
+          <a:p>
+            <a:pPr algn="ctr"/>
+          </a:p>
+        </p:txBody>
+      </p:sp>
+      <p:sp>
+        <p:nvSpPr>
+          <p:cNvPr id="9" name="Rounded Rectangle 8"/>
+          <p:cNvSpPr/>
+          <p:nvPr/>
+        </p:nvSpPr>
+        <p:spPr>
+          <a:xfrm>
+            <a:off x="3552444" y="2953512"/>
+            <a:ext cx="694944" cy="135514"/>
           </a:xfrm>
           <a:prstGeom prst="roundRect">
             <a:avLst>
@@ -9271,14 +8706,14 @@
       </p:sp>
       <p:sp>
         <p:nvSpPr>
-          <p:cNvPr id="7" name="Rounded Rectangle 6"/>
+          <p:cNvPr id="10" name="Rounded Rectangle 9"/>
           <p:cNvSpPr/>
           <p:nvPr/>
         </p:nvSpPr>
         <p:spPr>
           <a:xfrm>
-            <a:off x="3554272" y="3395496"/>
-            <a:ext cx="1212494" cy="102705"/>
+            <a:off x="3552444" y="3264865"/>
+            <a:ext cx="555955" cy="101635"/>
           </a:xfrm>
           <a:prstGeom prst="roundRect">
             <a:avLst>
@@ -9317,14 +8752,14 @@
       </p:sp>
       <p:sp>
         <p:nvSpPr>
-          <p:cNvPr id="8" name="Rounded Rectangle 7"/>
+          <p:cNvPr id="11" name="Rounded Rectangle 10"/>
           <p:cNvSpPr/>
           <p:nvPr/>
         </p:nvSpPr>
         <p:spPr>
           <a:xfrm>
-            <a:off x="3554272" y="3669377"/>
-            <a:ext cx="1069848" cy="102705"/>
+            <a:off x="3552444" y="3681831"/>
+            <a:ext cx="1250899" cy="101635"/>
           </a:xfrm>
           <a:prstGeom prst="roundRect">
             <a:avLst>
@@ -9363,14 +8798,14 @@
       </p:sp>
       <p:sp>
         <p:nvSpPr>
-          <p:cNvPr id="9" name="Rounded Rectangle 8"/>
+          <p:cNvPr id="12" name="Rounded Rectangle 11"/>
           <p:cNvSpPr/>
           <p:nvPr/>
         </p:nvSpPr>
         <p:spPr>
           <a:xfrm>
-            <a:off x="3554272" y="3943258"/>
-            <a:ext cx="1176832" cy="102705"/>
+            <a:off x="3552444" y="3952859"/>
+            <a:ext cx="1111910" cy="101635"/>
           </a:xfrm>
           <a:prstGeom prst="roundRect">
             <a:avLst>
@@ -9409,14 +8844,14 @@
       </p:sp>
       <p:sp>
         <p:nvSpPr>
-          <p:cNvPr id="10" name="Rounded Rectangle 9"/>
+          <p:cNvPr id="13" name="Rounded Rectangle 12"/>
           <p:cNvSpPr/>
           <p:nvPr/>
         </p:nvSpPr>
         <p:spPr>
           <a:xfrm>
-            <a:off x="3554272" y="4217139"/>
-            <a:ext cx="748893" cy="102705"/>
+            <a:off x="3552444" y="4223887"/>
+            <a:ext cx="1181404" cy="101635"/>
           </a:xfrm>
           <a:prstGeom prst="roundRect">
             <a:avLst>
@@ -9455,14 +8890,14 @@
       </p:sp>
       <p:sp>
         <p:nvSpPr>
-          <p:cNvPr id="11" name="TextBox 10"/>
+          <p:cNvPr id="14" name="TextBox 13"/>
           <p:cNvSpPr txBox="1"/>
           <p:nvPr/>
         </p:nvSpPr>
         <p:spPr>
           <a:xfrm>
-            <a:off x="3268979" y="4182904"/>
-            <a:ext cx="1783080" cy="775996"/>
+            <a:off x="3291839" y="4381987"/>
+            <a:ext cx="1737360" cy="587227"/>
           </a:xfrm>
           <a:prstGeom prst="rect">
             <a:avLst/>
@@ -9481,7 +8916,7 @@
               </a:lnSpc>
             </a:pPr>
             <a:r>
-              <a:rPr sz="4200" b="0" i="0">
+              <a:rPr sz="3400" b="0" i="0">
                 <a:solidFill>
                   <a:srgbClr val="6E8FC0"/>
                 </a:solidFill>
@@ -9494,13 +8929,13 @@
       </p:sp>
       <p:sp>
         <p:nvSpPr>
-          <p:cNvPr id="12" name="TextBox 11"/>
+          <p:cNvPr id="15" name="TextBox 14"/>
           <p:cNvSpPr txBox="1"/>
           <p:nvPr/>
         </p:nvSpPr>
         <p:spPr>
           <a:xfrm>
-            <a:off x="3246120" y="5303520"/>
+            <a:off x="3246120" y="5257800"/>
             <a:ext cx="1828800" cy="365760"/>
           </a:xfrm>
           <a:prstGeom prst="rect">
@@ -9533,14 +8968,14 @@
       </p:sp>
       <p:sp>
         <p:nvSpPr>
-          <p:cNvPr id="13" name="Rounded Rectangle 12"/>
+          <p:cNvPr id="16" name="Rounded Rectangle 15"/>
           <p:cNvSpPr/>
           <p:nvPr/>
         </p:nvSpPr>
         <p:spPr>
           <a:xfrm>
-            <a:off x="6976872" y="2212848"/>
-            <a:ext cx="2048256" cy="2340864"/>
+            <a:off x="6976872" y="2057400"/>
+            <a:ext cx="2048256" cy="2432304"/>
           </a:xfrm>
           <a:prstGeom prst="roundRect">
             <a:avLst>
@@ -9585,14 +9020,14 @@
       </p:sp>
       <p:sp>
         <p:nvSpPr>
-          <p:cNvPr id="14" name="Rounded Rectangle 13"/>
+          <p:cNvPr id="17" name="Rounded Rectangle 16"/>
           <p:cNvSpPr/>
           <p:nvPr/>
         </p:nvSpPr>
         <p:spPr>
           <a:xfrm>
-            <a:off x="7109460" y="2242108"/>
-            <a:ext cx="1783080" cy="2282342"/>
+            <a:off x="7132320" y="2162556"/>
+            <a:ext cx="1737360" cy="2258568"/>
           </a:xfrm>
           <a:prstGeom prst="roundRect">
             <a:avLst>
@@ -9639,14 +9074,151 @@
       </p:sp>
       <p:sp>
         <p:nvSpPr>
-          <p:cNvPr id="15" name="Rounded Rectangle 14"/>
+          <p:cNvPr id="18" name="Rounded Rectangle 17"/>
           <p:cNvSpPr/>
           <p:nvPr/>
         </p:nvSpPr>
         <p:spPr>
           <a:xfrm>
-            <a:off x="7394752" y="2527401"/>
-            <a:ext cx="891540" cy="125528"/>
+            <a:off x="8053120" y="2423160"/>
+            <a:ext cx="555955" cy="622669"/>
+          </a:xfrm>
+          <a:prstGeom prst="roundRect">
+            <a:avLst>
+              <a:gd name="adj" fmla="val 12000"/>
+            </a:avLst>
+          </a:prstGeom>
+          <a:solidFill>
+            <a:srgbClr val="D6749C"/>
+          </a:solidFill>
+          <a:ln>
+            <a:noFill/>
+          </a:ln>
+          <a:effectLst/>
+        </p:spPr>
+        <p:style>
+          <a:lnRef idx="1">
+            <a:schemeClr val="accent1"/>
+          </a:lnRef>
+          <a:fillRef idx="3">
+            <a:schemeClr val="accent1"/>
+          </a:fillRef>
+          <a:effectRef idx="2">
+            <a:schemeClr val="accent1"/>
+          </a:effectRef>
+          <a:fontRef idx="minor">
+            <a:schemeClr val="lt1"/>
+          </a:fontRef>
+        </p:style>
+        <p:txBody>
+          <a:bodyPr rtlCol="0" anchor="ctr"/>
+          <a:lstStyle/>
+          <a:p>
+            <a:pPr algn="ctr"/>
+          </a:p>
+        </p:txBody>
+      </p:sp>
+      <p:sp>
+        <p:nvSpPr>
+          <p:cNvPr id="19" name="Oval 18"/>
+          <p:cNvSpPr/>
+          <p:nvPr/>
+        </p:nvSpPr>
+        <p:spPr>
+          <a:xfrm>
+            <a:off x="8219907" y="2500993"/>
+            <a:ext cx="222382" cy="222382"/>
+          </a:xfrm>
+          <a:prstGeom prst="ellipse">
+            <a:avLst/>
+          </a:prstGeom>
+          <a:solidFill>
+            <a:srgbClr val="FCF7EF"/>
+          </a:solidFill>
+          <a:ln>
+            <a:noFill/>
+          </a:ln>
+          <a:effectLst/>
+        </p:spPr>
+        <p:style>
+          <a:lnRef idx="1">
+            <a:schemeClr val="accent1"/>
+          </a:lnRef>
+          <a:fillRef idx="3">
+            <a:schemeClr val="accent1"/>
+          </a:fillRef>
+          <a:effectRef idx="2">
+            <a:schemeClr val="accent1"/>
+          </a:effectRef>
+          <a:fontRef idx="minor">
+            <a:schemeClr val="lt1"/>
+          </a:fontRef>
+        </p:style>
+        <p:txBody>
+          <a:bodyPr rtlCol="0" anchor="ctr"/>
+          <a:lstStyle/>
+          <a:p>
+            <a:pPr algn="ctr"/>
+          </a:p>
+        </p:txBody>
+      </p:sp>
+      <p:sp>
+        <p:nvSpPr>
+          <p:cNvPr id="20" name="Round Same Side Corner Rectangle 19"/>
+          <p:cNvSpPr/>
+          <p:nvPr/>
+        </p:nvSpPr>
+        <p:spPr>
+          <a:xfrm>
+            <a:off x="8142073" y="2745614"/>
+            <a:ext cx="378049" cy="189024"/>
+          </a:xfrm>
+          <a:prstGeom prst="round2SameRect">
+            <a:avLst>
+              <a:gd name="adj1" fmla="val 50000"/>
+              <a:gd name="adj2" fmla="val 0"/>
+            </a:avLst>
+          </a:prstGeom>
+          <a:solidFill>
+            <a:srgbClr val="FCF7EF"/>
+          </a:solidFill>
+          <a:ln>
+            <a:noFill/>
+          </a:ln>
+          <a:effectLst/>
+        </p:spPr>
+        <p:style>
+          <a:lnRef idx="1">
+            <a:schemeClr val="accent1"/>
+          </a:lnRef>
+          <a:fillRef idx="3">
+            <a:schemeClr val="accent1"/>
+          </a:fillRef>
+          <a:effectRef idx="2">
+            <a:schemeClr val="accent1"/>
+          </a:effectRef>
+          <a:fontRef idx="minor">
+            <a:schemeClr val="lt1"/>
+          </a:fontRef>
+        </p:style>
+        <p:txBody>
+          <a:bodyPr rtlCol="0" anchor="ctr"/>
+          <a:lstStyle/>
+          <a:p>
+            <a:pPr algn="ctr"/>
+          </a:p>
+        </p:txBody>
+      </p:sp>
+      <p:sp>
+        <p:nvSpPr>
+          <p:cNvPr id="21" name="Rounded Rectangle 20"/>
+          <p:cNvSpPr/>
+          <p:nvPr/>
+        </p:nvSpPr>
+        <p:spPr>
+          <a:xfrm>
+            <a:off x="7392923" y="2450592"/>
+            <a:ext cx="694944" cy="135514"/>
           </a:xfrm>
           <a:prstGeom prst="roundRect">
             <a:avLst>
@@ -9685,14 +9257,14 @@
       </p:sp>
       <p:sp>
         <p:nvSpPr>
-          <p:cNvPr id="16" name="Rounded Rectangle 15"/>
+          <p:cNvPr id="22" name="Rounded Rectangle 21"/>
           <p:cNvSpPr/>
           <p:nvPr/>
         </p:nvSpPr>
         <p:spPr>
           <a:xfrm>
-            <a:off x="7394752" y="2892576"/>
-            <a:ext cx="1212494" cy="102705"/>
+            <a:off x="7392923" y="2761945"/>
+            <a:ext cx="555955" cy="101635"/>
           </a:xfrm>
           <a:prstGeom prst="roundRect">
             <a:avLst>
@@ -9731,14 +9303,14 @@
       </p:sp>
       <p:sp>
         <p:nvSpPr>
-          <p:cNvPr id="17" name="Rounded Rectangle 16"/>
+          <p:cNvPr id="23" name="Rounded Rectangle 22"/>
           <p:cNvSpPr/>
           <p:nvPr/>
         </p:nvSpPr>
         <p:spPr>
           <a:xfrm>
-            <a:off x="7394752" y="3166457"/>
-            <a:ext cx="1069848" cy="102705"/>
+            <a:off x="7392923" y="3178911"/>
+            <a:ext cx="1250899" cy="101635"/>
           </a:xfrm>
           <a:prstGeom prst="roundRect">
             <a:avLst>
@@ -9777,14 +9349,14 @@
       </p:sp>
       <p:sp>
         <p:nvSpPr>
-          <p:cNvPr id="18" name="Rounded Rectangle 17"/>
+          <p:cNvPr id="24" name="Rounded Rectangle 23"/>
           <p:cNvSpPr/>
           <p:nvPr/>
         </p:nvSpPr>
         <p:spPr>
           <a:xfrm>
-            <a:off x="7394752" y="3440338"/>
-            <a:ext cx="1176832" cy="102705"/>
+            <a:off x="7392923" y="3449939"/>
+            <a:ext cx="1111910" cy="101635"/>
           </a:xfrm>
           <a:prstGeom prst="roundRect">
             <a:avLst>
@@ -9823,14 +9395,14 @@
       </p:sp>
       <p:sp>
         <p:nvSpPr>
-          <p:cNvPr id="19" name="Rounded Rectangle 18"/>
+          <p:cNvPr id="25" name="Rounded Rectangle 24"/>
           <p:cNvSpPr/>
           <p:nvPr/>
         </p:nvSpPr>
         <p:spPr>
           <a:xfrm>
-            <a:off x="7394752" y="3714219"/>
-            <a:ext cx="748893" cy="102705"/>
+            <a:off x="7392923" y="3720967"/>
+            <a:ext cx="1181404" cy="101635"/>
           </a:xfrm>
           <a:prstGeom prst="roundRect">
             <a:avLst>
@@ -9869,14 +9441,14 @@
       </p:sp>
       <p:sp>
         <p:nvSpPr>
-          <p:cNvPr id="20" name="TextBox 19"/>
+          <p:cNvPr id="26" name="TextBox 25"/>
           <p:cNvSpPr txBox="1"/>
           <p:nvPr/>
         </p:nvSpPr>
         <p:spPr>
           <a:xfrm>
-            <a:off x="7109460" y="3679984"/>
-            <a:ext cx="1783080" cy="775996"/>
+            <a:off x="7132320" y="3879067"/>
+            <a:ext cx="1737360" cy="587227"/>
           </a:xfrm>
           <a:prstGeom prst="rect">
             <a:avLst/>
@@ -9895,7 +9467,7 @@
               </a:lnSpc>
             </a:pPr>
             <a:r>
-              <a:rPr sz="4200" b="0" i="0">
+              <a:rPr sz="3400" b="0" i="0">
                 <a:solidFill>
                   <a:srgbClr val="D6749C"/>
                 </a:solidFill>
@@ -9908,13 +9480,13 @@
       </p:sp>
       <p:sp>
         <p:nvSpPr>
-          <p:cNvPr id="21" name="TextBox 20"/>
+          <p:cNvPr id="27" name="TextBox 26"/>
           <p:cNvSpPr txBox="1"/>
           <p:nvPr/>
         </p:nvSpPr>
         <p:spPr>
           <a:xfrm>
-            <a:off x="7543800" y="1783080"/>
+            <a:off x="7543800" y="1719072"/>
             <a:ext cx="914400" cy="548640"/>
           </a:xfrm>
           <a:prstGeom prst="rect">
@@ -9947,13 +9519,13 @@
       </p:sp>
       <p:sp>
         <p:nvSpPr>
-          <p:cNvPr id="22" name="TextBox 21"/>
+          <p:cNvPr id="28" name="TextBox 27"/>
           <p:cNvSpPr txBox="1"/>
           <p:nvPr/>
         </p:nvSpPr>
         <p:spPr>
           <a:xfrm>
-            <a:off x="6995160" y="4800600"/>
+            <a:off x="6995160" y="4709160"/>
             <a:ext cx="2011680" cy="365760"/>
           </a:xfrm>
           <a:prstGeom prst="rect">
@@ -9986,7 +9558,7 @@
       </p:sp>
       <p:sp>
         <p:nvSpPr>
-          <p:cNvPr id="23" name="TextBox 22"/>
+          <p:cNvPr id="29" name="TextBox 28"/>
           <p:cNvSpPr txBox="1"/>
           <p:nvPr/>
         </p:nvSpPr>
@@ -10043,14 +9615,14 @@
       </p:sp>
       <p:sp>
         <p:nvSpPr>
-          <p:cNvPr id="24" name="Rectangle 23"/>
+          <p:cNvPr id="30" name="Rectangle 29"/>
           <p:cNvSpPr/>
           <p:nvPr/>
         </p:nvSpPr>
         <p:spPr>
           <a:xfrm>
             <a:off x="0" y="6803136"/>
-            <a:ext cx="2227810" cy="54864"/>
+            <a:ext cx="2377439" cy="54864"/>
           </a:xfrm>
           <a:prstGeom prst="rect">
             <a:avLst/>
@@ -10087,7 +9659,7 @@
       </p:sp>
       <p:sp>
         <p:nvSpPr>
-          <p:cNvPr id="25" name="TextBox 24"/>
+          <p:cNvPr id="31" name="TextBox 30"/>
           <p:cNvSpPr txBox="1"/>
           <p:nvPr/>
         </p:nvSpPr>
@@ -10224,11 +9796,11 @@
             <a:r>
               <a:rPr sz="1300" b="1" i="0" spc="420">
                 <a:solidFill>
-                  <a:srgbClr val="A9744F"/>
+                  <a:srgbClr val="BE932E"/>
                 </a:solidFill>
                 <a:latin typeface="Calibri"/>
               </a:rPr>
-              <a:t>FIX 1</a:t>
+              <a:t>THE FIX</a:t>
             </a:r>
           </a:p>
         </p:txBody>
@@ -10249,7 +9821,7 @@
           </a:prstGeom>
           <a:ln w="27940">
             <a:solidFill>
-              <a:srgbClr val="A9744F"/>
+              <a:srgbClr val="BE932E"/>
             </a:solidFill>
           </a:ln>
           <a:effectLst/>
@@ -10277,18 +9849,18 @@
         </p:nvSpPr>
         <p:spPr>
           <a:xfrm>
-            <a:off x="2895447" y="2148840"/>
-            <a:ext cx="6400800" cy="914400"/>
+            <a:off x="3291840" y="1673351"/>
+            <a:ext cx="1645920" cy="2139696"/>
           </a:xfrm>
           <a:prstGeom prst="roundRect">
             <a:avLst>
-              <a:gd name="adj" fmla="val 50000"/>
+              <a:gd name="adj" fmla="val 9000"/>
             </a:avLst>
           </a:prstGeom>
           <a:solidFill>
             <a:srgbClr val="FCF7EF"/>
           </a:solidFill>
-          <a:ln w="15240">
+          <a:ln w="16510">
             <a:solidFill>
               <a:srgbClr val="E4D5C0"/>
             </a:solidFill>
@@ -10325,14 +9897,758 @@
       </p:sp>
       <p:sp>
         <p:nvSpPr>
-          <p:cNvPr id="6" name="TextBox 5"/>
+          <p:cNvPr id="6" name="Rounded Rectangle 5"/>
+          <p:cNvSpPr/>
+          <p:nvPr/>
+        </p:nvSpPr>
+        <p:spPr>
+          <a:xfrm>
+            <a:off x="4164177" y="1920239"/>
+            <a:ext cx="526694" cy="589897"/>
+          </a:xfrm>
+          <a:prstGeom prst="roundRect">
+            <a:avLst>
+              <a:gd name="adj" fmla="val 12000"/>
+            </a:avLst>
+          </a:prstGeom>
+          <a:solidFill>
+            <a:srgbClr val="A9744F"/>
+          </a:solidFill>
+          <a:ln>
+            <a:noFill/>
+          </a:ln>
+          <a:effectLst/>
+        </p:spPr>
+        <p:style>
+          <a:lnRef idx="1">
+            <a:schemeClr val="accent1"/>
+          </a:lnRef>
+          <a:fillRef idx="3">
+            <a:schemeClr val="accent1"/>
+          </a:fillRef>
+          <a:effectRef idx="2">
+            <a:schemeClr val="accent1"/>
+          </a:effectRef>
+          <a:fontRef idx="minor">
+            <a:schemeClr val="lt1"/>
+          </a:fontRef>
+        </p:style>
+        <p:txBody>
+          <a:bodyPr rtlCol="0" anchor="ctr"/>
+          <a:lstStyle/>
+          <a:p>
+            <a:pPr algn="ctr"/>
+          </a:p>
+        </p:txBody>
+      </p:sp>
+      <p:sp>
+        <p:nvSpPr>
+          <p:cNvPr id="7" name="Oval 6"/>
+          <p:cNvSpPr/>
+          <p:nvPr/>
+        </p:nvSpPr>
+        <p:spPr>
+          <a:xfrm>
+            <a:off x="4322185" y="1993977"/>
+            <a:ext cx="210677" cy="210677"/>
+          </a:xfrm>
+          <a:prstGeom prst="ellipse">
+            <a:avLst/>
+          </a:prstGeom>
+          <a:solidFill>
+            <a:srgbClr val="FCF7EF"/>
+          </a:solidFill>
+          <a:ln>
+            <a:noFill/>
+          </a:ln>
+          <a:effectLst/>
+        </p:spPr>
+        <p:style>
+          <a:lnRef idx="1">
+            <a:schemeClr val="accent1"/>
+          </a:lnRef>
+          <a:fillRef idx="3">
+            <a:schemeClr val="accent1"/>
+          </a:fillRef>
+          <a:effectRef idx="2">
+            <a:schemeClr val="accent1"/>
+          </a:effectRef>
+          <a:fontRef idx="minor">
+            <a:schemeClr val="lt1"/>
+          </a:fontRef>
+        </p:style>
+        <p:txBody>
+          <a:bodyPr rtlCol="0" anchor="ctr"/>
+          <a:lstStyle/>
+          <a:p>
+            <a:pPr algn="ctr"/>
+          </a:p>
+        </p:txBody>
+      </p:sp>
+      <p:sp>
+        <p:nvSpPr>
+          <p:cNvPr id="8" name="Round Same Side Corner Rectangle 7"/>
+          <p:cNvSpPr/>
+          <p:nvPr/>
+        </p:nvSpPr>
+        <p:spPr>
+          <a:xfrm>
+            <a:off x="4248448" y="2225722"/>
+            <a:ext cx="358152" cy="179076"/>
+          </a:xfrm>
+          <a:prstGeom prst="round2SameRect">
+            <a:avLst>
+              <a:gd name="adj1" fmla="val 50000"/>
+              <a:gd name="adj2" fmla="val 0"/>
+            </a:avLst>
+          </a:prstGeom>
+          <a:solidFill>
+            <a:srgbClr val="FCF7EF"/>
+          </a:solidFill>
+          <a:ln>
+            <a:noFill/>
+          </a:ln>
+          <a:effectLst/>
+        </p:spPr>
+        <p:style>
+          <a:lnRef idx="1">
+            <a:schemeClr val="accent1"/>
+          </a:lnRef>
+          <a:fillRef idx="3">
+            <a:schemeClr val="accent1"/>
+          </a:fillRef>
+          <a:effectRef idx="2">
+            <a:schemeClr val="accent1"/>
+          </a:effectRef>
+          <a:fontRef idx="minor">
+            <a:schemeClr val="lt1"/>
+          </a:fontRef>
+        </p:style>
+        <p:txBody>
+          <a:bodyPr rtlCol="0" anchor="ctr"/>
+          <a:lstStyle/>
+          <a:p>
+            <a:pPr algn="ctr"/>
+          </a:p>
+        </p:txBody>
+      </p:sp>
+      <p:sp>
+        <p:nvSpPr>
+          <p:cNvPr id="9" name="Rounded Rectangle 8"/>
+          <p:cNvSpPr/>
+          <p:nvPr/>
+        </p:nvSpPr>
+        <p:spPr>
+          <a:xfrm>
+            <a:off x="3538728" y="1947671"/>
+            <a:ext cx="658368" cy="128381"/>
+          </a:xfrm>
+          <a:prstGeom prst="roundRect">
+            <a:avLst>
+              <a:gd name="adj" fmla="val 50000"/>
+            </a:avLst>
+          </a:prstGeom>
+          <a:solidFill>
+            <a:srgbClr val="A9744F"/>
+          </a:solidFill>
+          <a:ln>
+            <a:noFill/>
+          </a:ln>
+          <a:effectLst/>
+        </p:spPr>
+        <p:style>
+          <a:lnRef idx="1">
+            <a:schemeClr val="accent1"/>
+          </a:lnRef>
+          <a:fillRef idx="3">
+            <a:schemeClr val="accent1"/>
+          </a:fillRef>
+          <a:effectRef idx="2">
+            <a:schemeClr val="accent1"/>
+          </a:effectRef>
+          <a:fontRef idx="minor">
+            <a:schemeClr val="lt1"/>
+          </a:fontRef>
+        </p:style>
+        <p:txBody>
+          <a:bodyPr rtlCol="0" anchor="ctr"/>
+          <a:lstStyle/>
+          <a:p>
+            <a:pPr algn="ctr"/>
+          </a:p>
+        </p:txBody>
+      </p:sp>
+      <p:sp>
+        <p:nvSpPr>
+          <p:cNvPr id="10" name="Rounded Rectangle 9"/>
+          <p:cNvSpPr/>
+          <p:nvPr/>
+        </p:nvSpPr>
+        <p:spPr>
+          <a:xfrm>
+            <a:off x="3538728" y="2241194"/>
+            <a:ext cx="526694" cy="96286"/>
+          </a:xfrm>
+          <a:prstGeom prst="roundRect">
+            <a:avLst>
+              <a:gd name="adj" fmla="val 50000"/>
+            </a:avLst>
+          </a:prstGeom>
+          <a:solidFill>
+            <a:srgbClr val="E4D5C0"/>
+          </a:solidFill>
+          <a:ln>
+            <a:noFill/>
+          </a:ln>
+          <a:effectLst/>
+        </p:spPr>
+        <p:style>
+          <a:lnRef idx="1">
+            <a:schemeClr val="accent1"/>
+          </a:lnRef>
+          <a:fillRef idx="3">
+            <a:schemeClr val="accent1"/>
+          </a:fillRef>
+          <a:effectRef idx="2">
+            <a:schemeClr val="accent1"/>
+          </a:effectRef>
+          <a:fontRef idx="minor">
+            <a:schemeClr val="lt1"/>
+          </a:fontRef>
+        </p:style>
+        <p:txBody>
+          <a:bodyPr rtlCol="0" anchor="ctr"/>
+          <a:lstStyle/>
+          <a:p>
+            <a:pPr algn="ctr"/>
+          </a:p>
+        </p:txBody>
+      </p:sp>
+      <p:sp>
+        <p:nvSpPr>
+          <p:cNvPr id="11" name="Rounded Rectangle 10"/>
+          <p:cNvSpPr/>
+          <p:nvPr/>
+        </p:nvSpPr>
+        <p:spPr>
+          <a:xfrm>
+            <a:off x="3538728" y="2636215"/>
+            <a:ext cx="1185062" cy="96286"/>
+          </a:xfrm>
+          <a:prstGeom prst="roundRect">
+            <a:avLst>
+              <a:gd name="adj" fmla="val 50000"/>
+            </a:avLst>
+          </a:prstGeom>
+          <a:solidFill>
+            <a:srgbClr val="E4D5C0"/>
+          </a:solidFill>
+          <a:ln>
+            <a:noFill/>
+          </a:ln>
+          <a:effectLst/>
+        </p:spPr>
+        <p:style>
+          <a:lnRef idx="1">
+            <a:schemeClr val="accent1"/>
+          </a:lnRef>
+          <a:fillRef idx="3">
+            <a:schemeClr val="accent1"/>
+          </a:fillRef>
+          <a:effectRef idx="2">
+            <a:schemeClr val="accent1"/>
+          </a:effectRef>
+          <a:fontRef idx="minor">
+            <a:schemeClr val="lt1"/>
+          </a:fontRef>
+        </p:style>
+        <p:txBody>
+          <a:bodyPr rtlCol="0" anchor="ctr"/>
+          <a:lstStyle/>
+          <a:p>
+            <a:pPr algn="ctr"/>
+          </a:p>
+        </p:txBody>
+      </p:sp>
+      <p:sp>
+        <p:nvSpPr>
+          <p:cNvPr id="12" name="Rounded Rectangle 11"/>
+          <p:cNvSpPr/>
+          <p:nvPr/>
+        </p:nvSpPr>
+        <p:spPr>
+          <a:xfrm>
+            <a:off x="3538728" y="2892978"/>
+            <a:ext cx="1053388" cy="96286"/>
+          </a:xfrm>
+          <a:prstGeom prst="roundRect">
+            <a:avLst>
+              <a:gd name="adj" fmla="val 50000"/>
+            </a:avLst>
+          </a:prstGeom>
+          <a:solidFill>
+            <a:srgbClr val="E4D5C0"/>
+          </a:solidFill>
+          <a:ln>
+            <a:noFill/>
+          </a:ln>
+          <a:effectLst/>
+        </p:spPr>
+        <p:style>
+          <a:lnRef idx="1">
+            <a:schemeClr val="accent1"/>
+          </a:lnRef>
+          <a:fillRef idx="3">
+            <a:schemeClr val="accent1"/>
+          </a:fillRef>
+          <a:effectRef idx="2">
+            <a:schemeClr val="accent1"/>
+          </a:effectRef>
+          <a:fontRef idx="minor">
+            <a:schemeClr val="lt1"/>
+          </a:fontRef>
+        </p:style>
+        <p:txBody>
+          <a:bodyPr rtlCol="0" anchor="ctr"/>
+          <a:lstStyle/>
+          <a:p>
+            <a:pPr algn="ctr"/>
+          </a:p>
+        </p:txBody>
+      </p:sp>
+      <p:sp>
+        <p:nvSpPr>
+          <p:cNvPr id="13" name="Rounded Rectangle 12"/>
+          <p:cNvSpPr/>
+          <p:nvPr/>
+        </p:nvSpPr>
+        <p:spPr>
+          <a:xfrm>
+            <a:off x="3538728" y="3149742"/>
+            <a:ext cx="1119225" cy="96286"/>
+          </a:xfrm>
+          <a:prstGeom prst="roundRect">
+            <a:avLst>
+              <a:gd name="adj" fmla="val 50000"/>
+            </a:avLst>
+          </a:prstGeom>
+          <a:solidFill>
+            <a:srgbClr val="E4D5C0"/>
+          </a:solidFill>
+          <a:ln>
+            <a:noFill/>
+          </a:ln>
+          <a:effectLst/>
+        </p:spPr>
+        <p:style>
+          <a:lnRef idx="1">
+            <a:schemeClr val="accent1"/>
+          </a:lnRef>
+          <a:fillRef idx="3">
+            <a:schemeClr val="accent1"/>
+          </a:fillRef>
+          <a:effectRef idx="2">
+            <a:schemeClr val="accent1"/>
+          </a:effectRef>
+          <a:fontRef idx="minor">
+            <a:schemeClr val="lt1"/>
+          </a:fontRef>
+        </p:style>
+        <p:txBody>
+          <a:bodyPr rtlCol="0" anchor="ctr"/>
+          <a:lstStyle/>
+          <a:p>
+            <a:pPr algn="ctr"/>
+          </a:p>
+        </p:txBody>
+      </p:sp>
+      <p:sp>
+        <p:nvSpPr>
+          <p:cNvPr id="14" name="Right Arrow 13"/>
+          <p:cNvSpPr/>
+          <p:nvPr/>
+        </p:nvSpPr>
+        <p:spPr>
+          <a:xfrm>
+            <a:off x="5638647" y="2578608"/>
+            <a:ext cx="914400" cy="329184"/>
+          </a:xfrm>
+          <a:prstGeom prst="rightArrow">
+            <a:avLst>
+              <a:gd name="adj1" fmla="val 55000"/>
+              <a:gd name="adj2" fmla="val 50000"/>
+            </a:avLst>
+          </a:prstGeom>
+          <a:solidFill>
+            <a:srgbClr val="9B8571"/>
+          </a:solidFill>
+          <a:ln>
+            <a:noFill/>
+          </a:ln>
+          <a:effectLst/>
+        </p:spPr>
+        <p:style>
+          <a:lnRef idx="1">
+            <a:schemeClr val="accent1"/>
+          </a:lnRef>
+          <a:fillRef idx="3">
+            <a:schemeClr val="accent1"/>
+          </a:fillRef>
+          <a:effectRef idx="2">
+            <a:schemeClr val="accent1"/>
+          </a:effectRef>
+          <a:fontRef idx="minor">
+            <a:schemeClr val="lt1"/>
+          </a:fontRef>
+        </p:style>
+        <p:txBody>
+          <a:bodyPr rtlCol="0" anchor="ctr"/>
+          <a:lstStyle/>
+          <a:p>
+            <a:pPr algn="ctr"/>
+          </a:p>
+        </p:txBody>
+      </p:sp>
+      <p:sp>
+        <p:nvSpPr>
+          <p:cNvPr id="15" name="Rounded Rectangle 14"/>
+          <p:cNvSpPr/>
+          <p:nvPr/>
+        </p:nvSpPr>
+        <p:spPr>
+          <a:xfrm>
+            <a:off x="7251192" y="1673351"/>
+            <a:ext cx="1645920" cy="2139696"/>
+          </a:xfrm>
+          <a:prstGeom prst="roundRect">
+            <a:avLst>
+              <a:gd name="adj" fmla="val 9000"/>
+            </a:avLst>
+          </a:prstGeom>
+          <a:solidFill>
+            <a:srgbClr val="FCF7EF"/>
+          </a:solidFill>
+          <a:ln w="16510">
+            <a:solidFill>
+              <a:srgbClr val="E4D5C0"/>
+            </a:solidFill>
+          </a:ln>
+          <a:effectLst>
+            <a:outerShdw blurRad="254000" dist="139700" dir="5400000" rotWithShape="0">
+              <a:srgbClr val="6B4A34">
+                <a:alpha val="76000"/>
+              </a:srgbClr>
+            </a:outerShdw>
+          </a:effectLst>
+        </p:spPr>
+        <p:style>
+          <a:lnRef idx="1">
+            <a:schemeClr val="accent1"/>
+          </a:lnRef>
+          <a:fillRef idx="3">
+            <a:schemeClr val="accent1"/>
+          </a:fillRef>
+          <a:effectRef idx="2">
+            <a:schemeClr val="accent1"/>
+          </a:effectRef>
+          <a:fontRef idx="minor">
+            <a:schemeClr val="lt1"/>
+          </a:fontRef>
+        </p:style>
+        <p:txBody>
+          <a:bodyPr rtlCol="0" anchor="ctr"/>
+          <a:lstStyle/>
+          <a:p>
+            <a:pPr algn="ctr"/>
+          </a:p>
+        </p:txBody>
+      </p:sp>
+      <p:sp>
+        <p:nvSpPr>
+          <p:cNvPr id="16" name="Rounded Rectangle 15"/>
+          <p:cNvSpPr/>
+          <p:nvPr/>
+        </p:nvSpPr>
+        <p:spPr>
+          <a:xfrm>
+            <a:off x="8123529" y="1920239"/>
+            <a:ext cx="526694" cy="589897"/>
+          </a:xfrm>
+          <a:prstGeom prst="roundRect">
+            <a:avLst>
+              <a:gd name="adj" fmla="val 12000"/>
+            </a:avLst>
+          </a:prstGeom>
+          <a:solidFill>
+            <a:srgbClr val="E4D5C0"/>
+          </a:solidFill>
+          <a:ln>
+            <a:noFill/>
+          </a:ln>
+          <a:effectLst/>
+        </p:spPr>
+        <p:style>
+          <a:lnRef idx="1">
+            <a:schemeClr val="accent1"/>
+          </a:lnRef>
+          <a:fillRef idx="3">
+            <a:schemeClr val="accent1"/>
+          </a:fillRef>
+          <a:effectRef idx="2">
+            <a:schemeClr val="accent1"/>
+          </a:effectRef>
+          <a:fontRef idx="minor">
+            <a:schemeClr val="lt1"/>
+          </a:fontRef>
+        </p:style>
+        <p:txBody>
+          <a:bodyPr rtlCol="0" anchor="ctr"/>
+          <a:lstStyle/>
+          <a:p>
+            <a:pPr algn="ctr"/>
+          </a:p>
+        </p:txBody>
+      </p:sp>
+      <p:sp>
+        <p:nvSpPr>
+          <p:cNvPr id="17" name="Rounded Rectangle 16"/>
+          <p:cNvSpPr/>
+          <p:nvPr/>
+        </p:nvSpPr>
+        <p:spPr>
+          <a:xfrm>
+            <a:off x="7498079" y="1947671"/>
+            <a:ext cx="658368" cy="128381"/>
+          </a:xfrm>
+          <a:prstGeom prst="roundRect">
+            <a:avLst>
+              <a:gd name="adj" fmla="val 30000"/>
+            </a:avLst>
+          </a:prstGeom>
+          <a:solidFill>
+            <a:srgbClr val="6B4A34"/>
+          </a:solidFill>
+          <a:ln>
+            <a:noFill/>
+          </a:ln>
+          <a:effectLst/>
+        </p:spPr>
+        <p:style>
+          <a:lnRef idx="1">
+            <a:schemeClr val="accent1"/>
+          </a:lnRef>
+          <a:fillRef idx="3">
+            <a:schemeClr val="accent1"/>
+          </a:fillRef>
+          <a:effectRef idx="2">
+            <a:schemeClr val="accent1"/>
+          </a:effectRef>
+          <a:fontRef idx="minor">
+            <a:schemeClr val="lt1"/>
+          </a:fontRef>
+        </p:style>
+        <p:txBody>
+          <a:bodyPr rtlCol="0" anchor="ctr"/>
+          <a:lstStyle/>
+          <a:p>
+            <a:pPr algn="ctr"/>
+          </a:p>
+        </p:txBody>
+      </p:sp>
+      <p:sp>
+        <p:nvSpPr>
+          <p:cNvPr id="18" name="Rounded Rectangle 17"/>
+          <p:cNvSpPr/>
+          <p:nvPr/>
+        </p:nvSpPr>
+        <p:spPr>
+          <a:xfrm>
+            <a:off x="7498079" y="2241194"/>
+            <a:ext cx="526694" cy="96286"/>
+          </a:xfrm>
+          <a:prstGeom prst="roundRect">
+            <a:avLst>
+              <a:gd name="adj" fmla="val 50000"/>
+            </a:avLst>
+          </a:prstGeom>
+          <a:solidFill>
+            <a:srgbClr val="E4D5C0"/>
+          </a:solidFill>
+          <a:ln>
+            <a:noFill/>
+          </a:ln>
+          <a:effectLst/>
+        </p:spPr>
+        <p:style>
+          <a:lnRef idx="1">
+            <a:schemeClr val="accent1"/>
+          </a:lnRef>
+          <a:fillRef idx="3">
+            <a:schemeClr val="accent1"/>
+          </a:fillRef>
+          <a:effectRef idx="2">
+            <a:schemeClr val="accent1"/>
+          </a:effectRef>
+          <a:fontRef idx="minor">
+            <a:schemeClr val="lt1"/>
+          </a:fontRef>
+        </p:style>
+        <p:txBody>
+          <a:bodyPr rtlCol="0" anchor="ctr"/>
+          <a:lstStyle/>
+          <a:p>
+            <a:pPr algn="ctr"/>
+          </a:p>
+        </p:txBody>
+      </p:sp>
+      <p:sp>
+        <p:nvSpPr>
+          <p:cNvPr id="19" name="Rounded Rectangle 18"/>
+          <p:cNvSpPr/>
+          <p:nvPr/>
+        </p:nvSpPr>
+        <p:spPr>
+          <a:xfrm>
+            <a:off x="7498079" y="2636215"/>
+            <a:ext cx="1185062" cy="96286"/>
+          </a:xfrm>
+          <a:prstGeom prst="roundRect">
+            <a:avLst>
+              <a:gd name="adj" fmla="val 50000"/>
+            </a:avLst>
+          </a:prstGeom>
+          <a:solidFill>
+            <a:srgbClr val="E4D5C0"/>
+          </a:solidFill>
+          <a:ln>
+            <a:noFill/>
+          </a:ln>
+          <a:effectLst/>
+        </p:spPr>
+        <p:style>
+          <a:lnRef idx="1">
+            <a:schemeClr val="accent1"/>
+          </a:lnRef>
+          <a:fillRef idx="3">
+            <a:schemeClr val="accent1"/>
+          </a:fillRef>
+          <a:effectRef idx="2">
+            <a:schemeClr val="accent1"/>
+          </a:effectRef>
+          <a:fontRef idx="minor">
+            <a:schemeClr val="lt1"/>
+          </a:fontRef>
+        </p:style>
+        <p:txBody>
+          <a:bodyPr rtlCol="0" anchor="ctr"/>
+          <a:lstStyle/>
+          <a:p>
+            <a:pPr algn="ctr"/>
+          </a:p>
+        </p:txBody>
+      </p:sp>
+      <p:sp>
+        <p:nvSpPr>
+          <p:cNvPr id="20" name="Rounded Rectangle 19"/>
+          <p:cNvSpPr/>
+          <p:nvPr/>
+        </p:nvSpPr>
+        <p:spPr>
+          <a:xfrm>
+            <a:off x="7498079" y="2892978"/>
+            <a:ext cx="1053388" cy="96286"/>
+          </a:xfrm>
+          <a:prstGeom prst="roundRect">
+            <a:avLst>
+              <a:gd name="adj" fmla="val 50000"/>
+            </a:avLst>
+          </a:prstGeom>
+          <a:solidFill>
+            <a:srgbClr val="E4D5C0"/>
+          </a:solidFill>
+          <a:ln>
+            <a:noFill/>
+          </a:ln>
+          <a:effectLst/>
+        </p:spPr>
+        <p:style>
+          <a:lnRef idx="1">
+            <a:schemeClr val="accent1"/>
+          </a:lnRef>
+          <a:fillRef idx="3">
+            <a:schemeClr val="accent1"/>
+          </a:fillRef>
+          <a:effectRef idx="2">
+            <a:schemeClr val="accent1"/>
+          </a:effectRef>
+          <a:fontRef idx="minor">
+            <a:schemeClr val="lt1"/>
+          </a:fontRef>
+        </p:style>
+        <p:txBody>
+          <a:bodyPr rtlCol="0" anchor="ctr"/>
+          <a:lstStyle/>
+          <a:p>
+            <a:pPr algn="ctr"/>
+          </a:p>
+        </p:txBody>
+      </p:sp>
+      <p:sp>
+        <p:nvSpPr>
+          <p:cNvPr id="21" name="Rounded Rectangle 20"/>
+          <p:cNvSpPr/>
+          <p:nvPr/>
+        </p:nvSpPr>
+        <p:spPr>
+          <a:xfrm>
+            <a:off x="7498079" y="3149742"/>
+            <a:ext cx="1119225" cy="96286"/>
+          </a:xfrm>
+          <a:prstGeom prst="roundRect">
+            <a:avLst>
+              <a:gd name="adj" fmla="val 50000"/>
+            </a:avLst>
+          </a:prstGeom>
+          <a:solidFill>
+            <a:srgbClr val="E4D5C0"/>
+          </a:solidFill>
+          <a:ln>
+            <a:noFill/>
+          </a:ln>
+          <a:effectLst/>
+        </p:spPr>
+        <p:style>
+          <a:lnRef idx="1">
+            <a:schemeClr val="accent1"/>
+          </a:lnRef>
+          <a:fillRef idx="3">
+            <a:schemeClr val="accent1"/>
+          </a:fillRef>
+          <a:effectRef idx="2">
+            <a:schemeClr val="accent1"/>
+          </a:effectRef>
+          <a:fontRef idx="minor">
+            <a:schemeClr val="lt1"/>
+          </a:fontRef>
+        </p:style>
+        <p:txBody>
+          <a:bodyPr rtlCol="0" anchor="ctr"/>
+          <a:lstStyle/>
+          <a:p>
+            <a:pPr algn="ctr"/>
+          </a:p>
+        </p:txBody>
+      </p:sp>
+      <p:sp>
+        <p:nvSpPr>
+          <p:cNvPr id="22" name="TextBox 21"/>
           <p:cNvSpPr txBox="1"/>
           <p:nvPr/>
         </p:nvSpPr>
         <p:spPr>
           <a:xfrm>
-            <a:off x="2895447" y="2148840"/>
-            <a:ext cx="6400800" cy="914400"/>
+            <a:off x="6702552" y="3977639"/>
+            <a:ext cx="2743200" cy="320040"/>
           </a:xfrm>
           <a:prstGeom prst="rect">
             <a:avLst/>
@@ -10351,111 +10667,111 @@
               </a:lnSpc>
             </a:pPr>
             <a:r>
-              <a:rPr sz="2200" b="1" i="1">
+              <a:rPr sz="1250" b="1" i="0">
+                <a:solidFill>
+                  <a:srgbClr val="6B4A34"/>
+                </a:solidFill>
+                <a:latin typeface="Consolas"/>
+              </a:rPr>
+              <a:t>[PRIVATE_PERSON]</a:t>
+            </a:r>
+          </a:p>
+        </p:txBody>
+      </p:sp>
+      <p:sp>
+        <p:nvSpPr>
+          <p:cNvPr id="23" name="TextBox 22"/>
+          <p:cNvSpPr txBox="1"/>
+          <p:nvPr/>
+        </p:nvSpPr>
+        <p:spPr>
+          <a:xfrm>
+            <a:off x="4907127" y="4160520"/>
+            <a:ext cx="2377440" cy="914400"/>
+          </a:xfrm>
+          <a:prstGeom prst="rect">
+            <a:avLst/>
+          </a:prstGeom>
+          <a:noFill/>
+        </p:spPr>
+        <p:txBody>
+          <a:bodyPr wrap="square" anchor="ctr" lIns="0" rIns="0" tIns="0" bIns="0">
+            <a:spAutoFit/>
+          </a:bodyPr>
+          <a:lstStyle/>
+          <a:p>
+            <a:pPr algn="ctr">
+              <a:lnSpc>
+                <a:spcPct val="100000"/>
+              </a:lnSpc>
+            </a:pPr>
+            <a:r>
+              <a:rPr sz="5800" b="1" i="0">
+                <a:solidFill>
+                  <a:srgbClr val="BE932E"/>
+                </a:solidFill>
+                <a:latin typeface="Calibri"/>
+              </a:rPr>
+              <a:t>✓</a:t>
+            </a:r>
+          </a:p>
+        </p:txBody>
+      </p:sp>
+      <p:sp>
+        <p:nvSpPr>
+          <p:cNvPr id="24" name="TextBox 23"/>
+          <p:cNvSpPr txBox="1"/>
+          <p:nvPr/>
+        </p:nvSpPr>
+        <p:spPr>
+          <a:xfrm>
+            <a:off x="700887" y="5440680"/>
+            <a:ext cx="10789920" cy="640080"/>
+          </a:xfrm>
+          <a:prstGeom prst="rect">
+            <a:avLst/>
+          </a:prstGeom>
+          <a:noFill/>
+        </p:spPr>
+        <p:txBody>
+          <a:bodyPr wrap="square" anchor="ctr" lIns="0" rIns="0" tIns="0" bIns="0">
+            <a:spAutoFit/>
+          </a:bodyPr>
+          <a:lstStyle/>
+          <a:p>
+            <a:pPr algn="ctr">
+              <a:lnSpc>
+                <a:spcPct val="100000"/>
+              </a:lnSpc>
+            </a:pPr>
+            <a:r>
+              <a:rPr sz="2500" b="1" i="0">
                 <a:solidFill>
                   <a:srgbClr val="3E2C1E"/>
                 </a:solidFill>
                 <a:latin typeface="Georgia"/>
               </a:rPr>
-              <a:t>“Ignore the name and gender.”</a:t>
-            </a:r>
-          </a:p>
-        </p:txBody>
-      </p:sp>
-      <p:sp>
-        <p:nvSpPr>
-          <p:cNvPr id="7" name="TextBox 6"/>
-          <p:cNvSpPr txBox="1"/>
-          <p:nvPr/>
-        </p:nvSpPr>
-        <p:spPr>
-          <a:xfrm>
-            <a:off x="4632807" y="3703320"/>
-            <a:ext cx="2926080" cy="1371600"/>
+              <a:t>Remove the name → the bias disappears</a:t>
+            </a:r>
+          </a:p>
+        </p:txBody>
+      </p:sp>
+      <p:sp>
+        <p:nvSpPr>
+          <p:cNvPr id="25" name="Rectangle 24"/>
+          <p:cNvSpPr/>
+          <p:nvPr/>
+        </p:nvSpPr>
+        <p:spPr>
+          <a:xfrm>
+            <a:off x="0" y="6803136"/>
+            <a:ext cx="2651759" cy="54864"/>
           </a:xfrm>
           <a:prstGeom prst="rect">
             <a:avLst/>
           </a:prstGeom>
-          <a:noFill/>
-        </p:spPr>
-        <p:txBody>
-          <a:bodyPr wrap="square" anchor="ctr" lIns="0" rIns="0" tIns="0" bIns="0">
-            <a:spAutoFit/>
-          </a:bodyPr>
-          <a:lstStyle/>
-          <a:p>
-            <a:pPr algn="ctr">
-              <a:lnSpc>
-                <a:spcPct val="100000"/>
-              </a:lnSpc>
-            </a:pPr>
-            <a:r>
-              <a:rPr sz="9400" b="1" i="0">
-                <a:solidFill>
-                  <a:srgbClr val="B0563A"/>
-                </a:solidFill>
-                <a:latin typeface="Calibri"/>
-              </a:rPr>
-              <a:t>✗</a:t>
-            </a:r>
-          </a:p>
-        </p:txBody>
-      </p:sp>
-      <p:sp>
-        <p:nvSpPr>
-          <p:cNvPr id="8" name="TextBox 7"/>
-          <p:cNvSpPr txBox="1"/>
-          <p:nvPr/>
-        </p:nvSpPr>
-        <p:spPr>
-          <a:xfrm>
-            <a:off x="1249527" y="5303520"/>
-            <a:ext cx="9692640" cy="640080"/>
-          </a:xfrm>
-          <a:prstGeom prst="rect">
-            <a:avLst/>
-          </a:prstGeom>
-          <a:noFill/>
-        </p:spPr>
-        <p:txBody>
-          <a:bodyPr wrap="square" anchor="ctr" lIns="0" rIns="0" tIns="0" bIns="0">
-            <a:spAutoFit/>
-          </a:bodyPr>
-          <a:lstStyle/>
-          <a:p>
-            <a:pPr algn="ctr">
-              <a:lnSpc>
-                <a:spcPct val="100000"/>
-              </a:lnSpc>
-            </a:pPr>
-            <a:r>
-              <a:rPr sz="2400" b="1" i="0">
-                <a:solidFill>
-                  <a:srgbClr val="3E2C1E"/>
-                </a:solidFill>
-                <a:latin typeface="Georgia"/>
-              </a:rPr>
-              <a:t>Barely changed — the bias remained</a:t>
-            </a:r>
-          </a:p>
-        </p:txBody>
-      </p:sp>
-      <p:sp>
-        <p:nvSpPr>
-          <p:cNvPr id="9" name="Rectangle 8"/>
-          <p:cNvSpPr/>
-          <p:nvPr/>
-        </p:nvSpPr>
-        <p:spPr>
-          <a:xfrm>
-            <a:off x="0" y="6803136"/>
-            <a:ext cx="2477192" cy="54864"/>
-          </a:xfrm>
-          <a:prstGeom prst="rect">
-            <a:avLst/>
-          </a:prstGeom>
-          <a:solidFill>
-            <a:srgbClr val="A9744F"/>
+          <a:solidFill>
+            <a:srgbClr val="BE932E"/>
           </a:solidFill>
           <a:ln>
             <a:noFill/>
@@ -10486,7 +10802,7 @@
       </p:sp>
       <p:sp>
         <p:nvSpPr>
-          <p:cNvPr id="10" name="TextBox 9"/>
+          <p:cNvPr id="26" name="TextBox 25"/>
           <p:cNvSpPr txBox="1"/>
           <p:nvPr/>
         </p:nvSpPr>
@@ -10558,7 +10874,7 @@
           <a:gradFill rotWithShape="1">
             <a:gsLst>
               <a:gs pos="0">
-                <a:srgbClr val="F5EDDF"/>
+                <a:srgbClr val="EFE1D3"/>
               </a:gs>
               <a:gs pos="100000">
                 <a:srgbClr val="E7D3B8"/>
@@ -10623,11 +10939,11 @@
             <a:r>
               <a:rPr sz="1300" b="1" i="0" spc="420">
                 <a:solidFill>
-                  <a:srgbClr val="BE932E"/>
+                  <a:srgbClr val="A9744F"/>
                 </a:solidFill>
                 <a:latin typeface="Calibri"/>
               </a:rPr>
-              <a:t>FIX 2</a:t>
+              <a:t>WHY IT HAPPENS</a:t>
             </a:r>
           </a:p>
         </p:txBody>
@@ -10648,7 +10964,7 @@
           </a:prstGeom>
           <a:ln w="27940">
             <a:solidFill>
-              <a:srgbClr val="BE932E"/>
+              <a:srgbClr val="A9744F"/>
             </a:solidFill>
           </a:ln>
           <a:effectLst/>
@@ -10670,22 +10986,112 @@
       </p:cxnSp>
       <p:sp>
         <p:nvSpPr>
-          <p:cNvPr id="5" name="Rounded Rectangle 4"/>
+          <p:cNvPr id="5" name="Isosceles Triangle 4"/>
           <p:cNvSpPr/>
           <p:nvPr/>
         </p:nvSpPr>
         <p:spPr>
           <a:xfrm>
-            <a:off x="1798167" y="2286000"/>
-            <a:ext cx="3200400" cy="914400"/>
+            <a:off x="5592927" y="3017520"/>
+            <a:ext cx="1005840" cy="868680"/>
+          </a:xfrm>
+          <a:prstGeom prst="triangle">
+            <a:avLst/>
+          </a:prstGeom>
+          <a:solidFill>
+            <a:srgbClr val="6B4A34"/>
+          </a:solidFill>
+          <a:ln>
+            <a:noFill/>
+          </a:ln>
+          <a:effectLst/>
+        </p:spPr>
+        <p:style>
+          <a:lnRef idx="1">
+            <a:schemeClr val="accent1"/>
+          </a:lnRef>
+          <a:fillRef idx="3">
+            <a:schemeClr val="accent1"/>
+          </a:fillRef>
+          <a:effectRef idx="2">
+            <a:schemeClr val="accent1"/>
+          </a:effectRef>
+          <a:fontRef idx="minor">
+            <a:schemeClr val="lt1"/>
+          </a:fontRef>
+        </p:style>
+        <p:txBody>
+          <a:bodyPr rtlCol="0" anchor="ctr"/>
+          <a:lstStyle/>
+          <a:p>
+            <a:pPr algn="ctr"/>
+          </a:p>
+        </p:txBody>
+      </p:sp>
+      <p:sp>
+        <p:nvSpPr>
+          <p:cNvPr id="6" name="Rounded Rectangle 5"/>
+          <p:cNvSpPr/>
+          <p:nvPr/>
+        </p:nvSpPr>
+        <p:spPr>
+          <a:xfrm>
+            <a:off x="6013551" y="2423160"/>
+            <a:ext cx="164592" cy="685800"/>
           </a:xfrm>
           <a:prstGeom prst="roundRect">
             <a:avLst>
-              <a:gd name="adj" fmla="val 28000"/>
+              <a:gd name="adj" fmla="val 50000"/>
             </a:avLst>
           </a:prstGeom>
           <a:solidFill>
-            <a:srgbClr val="F1DED3"/>
+            <a:srgbClr val="6B4A34"/>
+          </a:solidFill>
+          <a:ln>
+            <a:noFill/>
+          </a:ln>
+          <a:effectLst/>
+        </p:spPr>
+        <p:style>
+          <a:lnRef idx="1">
+            <a:schemeClr val="accent1"/>
+          </a:lnRef>
+          <a:fillRef idx="3">
+            <a:schemeClr val="accent1"/>
+          </a:fillRef>
+          <a:effectRef idx="2">
+            <a:schemeClr val="accent1"/>
+          </a:effectRef>
+          <a:fontRef idx="minor">
+            <a:schemeClr val="lt1"/>
+          </a:fontRef>
+        </p:style>
+        <p:txBody>
+          <a:bodyPr rtlCol="0" anchor="ctr"/>
+          <a:lstStyle/>
+          <a:p>
+            <a:pPr algn="ctr"/>
+          </a:p>
+        </p:txBody>
+      </p:sp>
+      <p:sp>
+        <p:nvSpPr>
+          <p:cNvPr id="7" name="Rounded Rectangle 6"/>
+          <p:cNvSpPr/>
+          <p:nvPr/>
+        </p:nvSpPr>
+        <p:spPr>
+          <a:xfrm rot="540000">
+            <a:off x="3947007" y="2798064"/>
+            <a:ext cx="4297680" cy="164592"/>
+          </a:xfrm>
+          <a:prstGeom prst="roundRect">
+            <a:avLst>
+              <a:gd name="adj" fmla="val 50000"/>
+            </a:avLst>
+          </a:prstGeom>
+          <a:solidFill>
+            <a:srgbClr val="A9744F"/>
           </a:solidFill>
           <a:ln>
             <a:noFill/>
@@ -10720,110 +11126,60 @@
           </a:p>
         </p:txBody>
       </p:sp>
-      <p:sp>
-        <p:nvSpPr>
-          <p:cNvPr id="6" name="TextBox 5"/>
-          <p:cNvSpPr txBox="1"/>
-          <p:nvPr/>
-        </p:nvSpPr>
-        <p:spPr>
-          <a:xfrm>
-            <a:off x="1798167" y="2286000"/>
-            <a:ext cx="3200400" cy="914400"/>
-          </a:xfrm>
-          <a:prstGeom prst="rect">
+      <p:cxnSp>
+        <p:nvCxnSpPr>
+          <p:cNvPr id="8" name="Connector 7"/>
+          <p:cNvCxnSpPr/>
+          <p:nvPr/>
+        </p:nvCxnSpPr>
+        <p:spPr>
+          <a:xfrm>
+            <a:off x="3973463" y="2544207"/>
+            <a:ext cx="0" cy="868680"/>
+          </a:xfrm>
+          <a:prstGeom prst="bentConnector3">
             <a:avLst/>
           </a:prstGeom>
-          <a:noFill/>
-        </p:spPr>
-        <p:txBody>
-          <a:bodyPr wrap="square" anchor="ctr" lIns="0" rIns="0" tIns="0" bIns="0">
-            <a:spAutoFit/>
-          </a:bodyPr>
-          <a:lstStyle/>
-          <a:p>
-            <a:pPr algn="ctr">
-              <a:lnSpc>
-                <a:spcPct val="100000"/>
-              </a:lnSpc>
-            </a:pPr>
-            <a:r>
-              <a:rPr sz="2200" b="1" i="0">
-                <a:solidFill>
-                  <a:srgbClr val="B0563A"/>
-                </a:solidFill>
-                <a:latin typeface="Calibri"/>
-              </a:rPr>
-              <a:t>Haruto Sato</a:t>
-            </a:r>
-          </a:p>
-        </p:txBody>
-      </p:sp>
-      <p:sp>
-        <p:nvSpPr>
-          <p:cNvPr id="7" name="Right Arrow 6"/>
+          <a:ln w="20320">
+            <a:solidFill>
+              <a:srgbClr val="6B4A34"/>
+            </a:solidFill>
+          </a:ln>
+          <a:effectLst/>
+        </p:spPr>
+        <p:style>
+          <a:lnRef idx="2">
+            <a:schemeClr val="accent1"/>
+          </a:lnRef>
+          <a:fillRef idx="0">
+            <a:schemeClr val="accent1"/>
+          </a:fillRef>
+          <a:effectRef idx="1">
+            <a:schemeClr val="accent1"/>
+          </a:effectRef>
+          <a:fontRef idx="minor">
+            <a:schemeClr val="tx1"/>
+          </a:fontRef>
+        </p:style>
+      </p:cxnSp>
+      <p:sp>
+        <p:nvSpPr>
+          <p:cNvPr id="9" name="Rounded Rectangle 8"/>
           <p:cNvSpPr/>
           <p:nvPr/>
         </p:nvSpPr>
         <p:spPr>
           <a:xfrm>
-            <a:off x="5638647" y="2578608"/>
-            <a:ext cx="914400" cy="329184"/>
-          </a:xfrm>
-          <a:prstGeom prst="rightArrow">
-            <a:avLst>
-              <a:gd name="adj1" fmla="val 55000"/>
-              <a:gd name="adj2" fmla="val 50000"/>
-            </a:avLst>
-          </a:prstGeom>
-          <a:solidFill>
-            <a:srgbClr val="9B8571"/>
-          </a:solidFill>
-          <a:ln>
-            <a:noFill/>
-          </a:ln>
-          <a:effectLst/>
-        </p:spPr>
-        <p:style>
-          <a:lnRef idx="1">
-            <a:schemeClr val="accent1"/>
-          </a:lnRef>
-          <a:fillRef idx="3">
-            <a:schemeClr val="accent1"/>
-          </a:fillRef>
-          <a:effectRef idx="2">
-            <a:schemeClr val="accent1"/>
-          </a:effectRef>
-          <a:fontRef idx="minor">
-            <a:schemeClr val="lt1"/>
-          </a:fontRef>
-        </p:style>
-        <p:txBody>
-          <a:bodyPr rtlCol="0" anchor="ctr"/>
-          <a:lstStyle/>
-          <a:p>
-            <a:pPr algn="ctr"/>
-          </a:p>
-        </p:txBody>
-      </p:sp>
-      <p:sp>
-        <p:nvSpPr>
-          <p:cNvPr id="8" name="Rounded Rectangle 7"/>
-          <p:cNvSpPr/>
-          <p:nvPr/>
-        </p:nvSpPr>
-        <p:spPr>
-          <a:xfrm>
-            <a:off x="7193127" y="2286000"/>
-            <a:ext cx="3200400" cy="914400"/>
+            <a:off x="3406535" y="3412887"/>
+            <a:ext cx="1133856" cy="109728"/>
           </a:xfrm>
           <a:prstGeom prst="roundRect">
             <a:avLst>
-              <a:gd name="adj" fmla="val 28000"/>
+              <a:gd name="adj" fmla="val 50000"/>
             </a:avLst>
           </a:prstGeom>
           <a:solidFill>
-            <a:srgbClr val="F1E7C8"/>
+            <a:srgbClr val="CDA07E"/>
           </a:solidFill>
           <a:ln>
             <a:noFill/>
@@ -10860,14 +11216,14 @@
       </p:sp>
       <p:sp>
         <p:nvSpPr>
-          <p:cNvPr id="9" name="TextBox 8"/>
+          <p:cNvPr id="10" name="TextBox 9"/>
           <p:cNvSpPr txBox="1"/>
           <p:nvPr/>
         </p:nvSpPr>
         <p:spPr>
           <a:xfrm>
-            <a:off x="7193127" y="2286000"/>
-            <a:ext cx="3200400" cy="914400"/>
+            <a:off x="3241943" y="2544207"/>
+            <a:ext cx="1463040" cy="822960"/>
           </a:xfrm>
           <a:prstGeom prst="rect">
             <a:avLst/>
@@ -10886,27 +11242,115 @@
               </a:lnSpc>
             </a:pPr>
             <a:r>
-              <a:rPr sz="1700" b="1" i="0">
+              <a:rPr sz="4800" b="1" i="0">
                 <a:solidFill>
-                  <a:srgbClr val="6B4A34"/>
+                  <a:srgbClr val="6E8FC0"/>
                 </a:solidFill>
-                <a:latin typeface="Consolas"/>
+                <a:latin typeface="Calibri"/>
               </a:rPr>
-              <a:t>[PRIVATE_PERSON]</a:t>
-            </a:r>
-          </a:p>
-        </p:txBody>
-      </p:sp>
-      <p:sp>
-        <p:nvSpPr>
-          <p:cNvPr id="10" name="TextBox 9"/>
+              <a:t>♂</a:t>
+            </a:r>
+          </a:p>
+        </p:txBody>
+      </p:sp>
+      <p:cxnSp>
+        <p:nvCxnSpPr>
+          <p:cNvPr id="11" name="Connector 10"/>
+          <p:cNvCxnSpPr/>
+          <p:nvPr/>
+        </p:nvCxnSpPr>
+        <p:spPr>
+          <a:xfrm>
+            <a:off x="8218231" y="3216512"/>
+            <a:ext cx="0" cy="868680"/>
+          </a:xfrm>
+          <a:prstGeom prst="bentConnector3">
+            <a:avLst/>
+          </a:prstGeom>
+          <a:ln w="20320">
+            <a:solidFill>
+              <a:srgbClr val="6B4A34"/>
+            </a:solidFill>
+          </a:ln>
+          <a:effectLst/>
+        </p:spPr>
+        <p:style>
+          <a:lnRef idx="2">
+            <a:schemeClr val="accent1"/>
+          </a:lnRef>
+          <a:fillRef idx="0">
+            <a:schemeClr val="accent1"/>
+          </a:fillRef>
+          <a:effectRef idx="1">
+            <a:schemeClr val="accent1"/>
+          </a:effectRef>
+          <a:fontRef idx="minor">
+            <a:schemeClr val="tx1"/>
+          </a:fontRef>
+        </p:style>
+      </p:cxnSp>
+      <p:sp>
+        <p:nvSpPr>
+          <p:cNvPr id="12" name="Rounded Rectangle 11"/>
+          <p:cNvSpPr/>
+          <p:nvPr/>
+        </p:nvSpPr>
+        <p:spPr>
+          <a:xfrm>
+            <a:off x="7651303" y="4085192"/>
+            <a:ext cx="1133856" cy="109728"/>
+          </a:xfrm>
+          <a:prstGeom prst="roundRect">
+            <a:avLst>
+              <a:gd name="adj" fmla="val 50000"/>
+            </a:avLst>
+          </a:prstGeom>
+          <a:solidFill>
+            <a:srgbClr val="CDA07E"/>
+          </a:solidFill>
+          <a:ln>
+            <a:noFill/>
+          </a:ln>
+          <a:effectLst>
+            <a:outerShdw blurRad="254000" dist="139700" dir="5400000" rotWithShape="0">
+              <a:srgbClr val="6B4A34">
+                <a:alpha val="76000"/>
+              </a:srgbClr>
+            </a:outerShdw>
+          </a:effectLst>
+        </p:spPr>
+        <p:style>
+          <a:lnRef idx="1">
+            <a:schemeClr val="accent1"/>
+          </a:lnRef>
+          <a:fillRef idx="3">
+            <a:schemeClr val="accent1"/>
+          </a:fillRef>
+          <a:effectRef idx="2">
+            <a:schemeClr val="accent1"/>
+          </a:effectRef>
+          <a:fontRef idx="minor">
+            <a:schemeClr val="lt1"/>
+          </a:fontRef>
+        </p:style>
+        <p:txBody>
+          <a:bodyPr rtlCol="0" anchor="ctr"/>
+          <a:lstStyle/>
+          <a:p>
+            <a:pPr algn="ctr"/>
+          </a:p>
+        </p:txBody>
+      </p:sp>
+      <p:sp>
+        <p:nvSpPr>
+          <p:cNvPr id="13" name="TextBox 12"/>
           <p:cNvSpPr txBox="1"/>
           <p:nvPr/>
         </p:nvSpPr>
         <p:spPr>
           <a:xfrm>
-            <a:off x="4632807" y="3794760"/>
-            <a:ext cx="2926080" cy="1280160"/>
+            <a:off x="7486711" y="3216512"/>
+            <a:ext cx="1463040" cy="822960"/>
           </a:xfrm>
           <a:prstGeom prst="rect">
             <a:avLst/>
@@ -10925,27 +11369,27 @@
               </a:lnSpc>
             </a:pPr>
             <a:r>
-              <a:rPr sz="9400" b="1" i="0">
+              <a:rPr sz="4800" b="1" i="0">
                 <a:solidFill>
-                  <a:srgbClr val="BE932E"/>
+                  <a:srgbClr val="D6749C"/>
                 </a:solidFill>
                 <a:latin typeface="Calibri"/>
               </a:rPr>
-              <a:t>✓</a:t>
-            </a:r>
-          </a:p>
-        </p:txBody>
-      </p:sp>
-      <p:sp>
-        <p:nvSpPr>
-          <p:cNvPr id="11" name="TextBox 10"/>
+              <a:t>♀</a:t>
+            </a:r>
+          </a:p>
+        </p:txBody>
+      </p:sp>
+      <p:sp>
+        <p:nvSpPr>
+          <p:cNvPr id="14" name="TextBox 13"/>
           <p:cNvSpPr txBox="1"/>
           <p:nvPr/>
         </p:nvSpPr>
         <p:spPr>
           <a:xfrm>
-            <a:off x="883767" y="5349240"/>
-            <a:ext cx="10424160" cy="640080"/>
+            <a:off x="700887" y="5486400"/>
+            <a:ext cx="10789920" cy="868680"/>
           </a:xfrm>
           <a:prstGeom prst="rect">
             <a:avLst/>
@@ -10960,37 +11404,37 @@
           <a:p>
             <a:pPr algn="ctr">
               <a:lnSpc>
-                <a:spcPct val="100000"/>
+                <a:spcPct val="104000"/>
               </a:lnSpc>
             </a:pPr>
             <a:r>
-              <a:rPr sz="2400" b="1" i="0">
+              <a:rPr sz="2300" b="1" i="0">
                 <a:solidFill>
                   <a:srgbClr val="3E2C1E"/>
                 </a:solidFill>
                 <a:latin typeface="Georgia"/>
               </a:rPr>
-              <a:t>Remove the name → the difference almost disappears</a:t>
-            </a:r>
-          </a:p>
-        </p:txBody>
-      </p:sp>
-      <p:sp>
-        <p:nvSpPr>
-          <p:cNvPr id="12" name="Rectangle 11"/>
+              <a:t>Fairness training may over-correct — tipping slightly toward women</a:t>
+            </a:r>
+          </a:p>
+        </p:txBody>
+      </p:sp>
+      <p:sp>
+        <p:nvSpPr>
+          <p:cNvPr id="15" name="Rectangle 14"/>
           <p:cNvSpPr/>
           <p:nvPr/>
         </p:nvSpPr>
         <p:spPr>
           <a:xfrm>
             <a:off x="0" y="6803136"/>
-            <a:ext cx="2726574" cy="54864"/>
+            <a:ext cx="2926080" cy="54864"/>
           </a:xfrm>
           <a:prstGeom prst="rect">
             <a:avLst/>
           </a:prstGeom>
           <a:solidFill>
-            <a:srgbClr val="BE932E"/>
+            <a:srgbClr val="A9744F"/>
           </a:solidFill>
           <a:ln>
             <a:noFill/>
@@ -11021,7 +11465,7 @@
       </p:sp>
       <p:sp>
         <p:nvSpPr>
-          <p:cNvPr id="13" name="TextBox 12"/>
+          <p:cNvPr id="16" name="TextBox 15"/>
           <p:cNvSpPr txBox="1"/>
           <p:nvPr/>
         </p:nvSpPr>
@@ -11093,10 +11537,10 @@
           <a:gradFill rotWithShape="1">
             <a:gsLst>
               <a:gs pos="0">
-                <a:srgbClr val="EFE1D3"/>
+                <a:srgbClr val="F5EDDF"/>
               </a:gs>
               <a:gs pos="100000">
-                <a:srgbClr val="E7D3B8"/>
+                <a:srgbClr val="EFE1D3"/>
               </a:gs>
             </a:gsLst>
             <a:lin scaled="0" ang="14400000"/>
@@ -11162,7 +11606,7 @@
                 </a:solidFill>
                 <a:latin typeface="Calibri"/>
               </a:rPr>
-              <a:t>WHY IT HAPPENS</a:t>
+              <a:t>THE TAKEAWAY</a:t>
             </a:r>
           </a:p>
         </p:txBody>
@@ -11205,244 +11649,78 @@
       </p:cxnSp>
       <p:sp>
         <p:nvSpPr>
-          <p:cNvPr id="5" name="Isosceles Triangle 4"/>
-          <p:cNvSpPr/>
-          <p:nvPr/>
-        </p:nvSpPr>
-        <p:spPr>
-          <a:xfrm>
-            <a:off x="5592927" y="3017520"/>
-            <a:ext cx="1005840" cy="868680"/>
-          </a:xfrm>
-          <a:prstGeom prst="triangle">
+          <p:cNvPr id="5" name="TextBox 4"/>
+          <p:cNvSpPr txBox="1"/>
+          <p:nvPr/>
+        </p:nvSpPr>
+        <p:spPr>
+          <a:xfrm>
+            <a:off x="700887" y="2286000"/>
+            <a:ext cx="10789920" cy="2011680"/>
+          </a:xfrm>
+          <a:prstGeom prst="rect">
             <a:avLst/>
           </a:prstGeom>
-          <a:solidFill>
-            <a:srgbClr val="6B4A34"/>
-          </a:solidFill>
-          <a:ln>
-            <a:noFill/>
-          </a:ln>
-          <a:effectLst/>
-        </p:spPr>
-        <p:style>
-          <a:lnRef idx="1">
-            <a:schemeClr val="accent1"/>
-          </a:lnRef>
-          <a:fillRef idx="3">
-            <a:schemeClr val="accent1"/>
-          </a:fillRef>
-          <a:effectRef idx="2">
-            <a:schemeClr val="accent1"/>
-          </a:effectRef>
-          <a:fontRef idx="minor">
-            <a:schemeClr val="lt1"/>
-          </a:fontRef>
-        </p:style>
-        <p:txBody>
-          <a:bodyPr rtlCol="0" anchor="ctr"/>
-          <a:lstStyle/>
-          <a:p>
-            <a:pPr algn="ctr"/>
-          </a:p>
-        </p:txBody>
-      </p:sp>
-      <p:sp>
-        <p:nvSpPr>
-          <p:cNvPr id="6" name="Rounded Rectangle 5"/>
-          <p:cNvSpPr/>
-          <p:nvPr/>
-        </p:nvSpPr>
-        <p:spPr>
-          <a:xfrm>
-            <a:off x="6013551" y="2423160"/>
-            <a:ext cx="164592" cy="685800"/>
-          </a:xfrm>
-          <a:prstGeom prst="roundRect">
-            <a:avLst>
-              <a:gd name="adj" fmla="val 50000"/>
-            </a:avLst>
-          </a:prstGeom>
-          <a:solidFill>
-            <a:srgbClr val="6B4A34"/>
-          </a:solidFill>
-          <a:ln>
-            <a:noFill/>
-          </a:ln>
-          <a:effectLst/>
-        </p:spPr>
-        <p:style>
-          <a:lnRef idx="1">
-            <a:schemeClr val="accent1"/>
-          </a:lnRef>
-          <a:fillRef idx="3">
-            <a:schemeClr val="accent1"/>
-          </a:fillRef>
-          <a:effectRef idx="2">
-            <a:schemeClr val="accent1"/>
-          </a:effectRef>
-          <a:fontRef idx="minor">
-            <a:schemeClr val="lt1"/>
-          </a:fontRef>
-        </p:style>
-        <p:txBody>
-          <a:bodyPr rtlCol="0" anchor="ctr"/>
-          <a:lstStyle/>
-          <a:p>
-            <a:pPr algn="ctr"/>
-          </a:p>
-        </p:txBody>
-      </p:sp>
-      <p:sp>
-        <p:nvSpPr>
-          <p:cNvPr id="7" name="Rounded Rectangle 6"/>
-          <p:cNvSpPr/>
-          <p:nvPr/>
-        </p:nvSpPr>
-        <p:spPr>
-          <a:xfrm rot="540000">
-            <a:off x="3947007" y="2798064"/>
-            <a:ext cx="4297680" cy="164592"/>
-          </a:xfrm>
-          <a:prstGeom prst="roundRect">
-            <a:avLst>
-              <a:gd name="adj" fmla="val 50000"/>
-            </a:avLst>
-          </a:prstGeom>
-          <a:solidFill>
-            <a:srgbClr val="A9744F"/>
-          </a:solidFill>
-          <a:ln>
-            <a:noFill/>
-          </a:ln>
-          <a:effectLst>
-            <a:outerShdw blurRad="254000" dist="139700" dir="5400000" rotWithShape="0">
-              <a:srgbClr val="6B4A34">
-                <a:alpha val="76000"/>
-              </a:srgbClr>
-            </a:outerShdw>
-          </a:effectLst>
-        </p:spPr>
-        <p:style>
-          <a:lnRef idx="1">
-            <a:schemeClr val="accent1"/>
-          </a:lnRef>
-          <a:fillRef idx="3">
-            <a:schemeClr val="accent1"/>
-          </a:fillRef>
-          <a:effectRef idx="2">
-            <a:schemeClr val="accent1"/>
-          </a:effectRef>
-          <a:fontRef idx="minor">
-            <a:schemeClr val="lt1"/>
-          </a:fontRef>
-        </p:style>
-        <p:txBody>
-          <a:bodyPr rtlCol="0" anchor="ctr"/>
-          <a:lstStyle/>
-          <a:p>
-            <a:pPr algn="ctr"/>
-          </a:p>
-        </p:txBody>
-      </p:sp>
-      <p:cxnSp>
-        <p:nvCxnSpPr>
-          <p:cNvPr id="8" name="Connector 7"/>
-          <p:cNvCxnSpPr/>
-          <p:nvPr/>
-        </p:nvCxnSpPr>
-        <p:spPr>
-          <a:xfrm>
-            <a:off x="3973463" y="2544207"/>
-            <a:ext cx="0" cy="868680"/>
-          </a:xfrm>
-          <a:prstGeom prst="bentConnector3">
-            <a:avLst/>
-          </a:prstGeom>
-          <a:ln w="20320">
-            <a:solidFill>
-              <a:srgbClr val="6B4A34"/>
-            </a:solidFill>
-          </a:ln>
-          <a:effectLst/>
-        </p:spPr>
-        <p:style>
-          <a:lnRef idx="2">
-            <a:schemeClr val="accent1"/>
-          </a:lnRef>
-          <a:fillRef idx="0">
-            <a:schemeClr val="accent1"/>
-          </a:fillRef>
-          <a:effectRef idx="1">
-            <a:schemeClr val="accent1"/>
-          </a:effectRef>
-          <a:fontRef idx="minor">
-            <a:schemeClr val="tx1"/>
-          </a:fontRef>
-        </p:style>
-      </p:cxnSp>
-      <p:sp>
-        <p:nvSpPr>
-          <p:cNvPr id="9" name="Rounded Rectangle 8"/>
-          <p:cNvSpPr/>
-          <p:nvPr/>
-        </p:nvSpPr>
-        <p:spPr>
-          <a:xfrm>
-            <a:off x="3406535" y="3412887"/>
-            <a:ext cx="1133856" cy="109728"/>
-          </a:xfrm>
-          <a:prstGeom prst="roundRect">
-            <a:avLst>
-              <a:gd name="adj" fmla="val 50000"/>
-            </a:avLst>
-          </a:prstGeom>
-          <a:solidFill>
-            <a:srgbClr val="CDA07E"/>
-          </a:solidFill>
-          <a:ln>
-            <a:noFill/>
-          </a:ln>
-          <a:effectLst>
-            <a:outerShdw blurRad="254000" dist="139700" dir="5400000" rotWithShape="0">
-              <a:srgbClr val="6B4A34">
-                <a:alpha val="76000"/>
-              </a:srgbClr>
-            </a:outerShdw>
-          </a:effectLst>
-        </p:spPr>
-        <p:style>
-          <a:lnRef idx="1">
-            <a:schemeClr val="accent1"/>
-          </a:lnRef>
-          <a:fillRef idx="3">
-            <a:schemeClr val="accent1"/>
-          </a:fillRef>
-          <a:effectRef idx="2">
-            <a:schemeClr val="accent1"/>
-          </a:effectRef>
-          <a:fontRef idx="minor">
-            <a:schemeClr val="lt1"/>
-          </a:fontRef>
-        </p:style>
-        <p:txBody>
-          <a:bodyPr rtlCol="0" anchor="ctr"/>
-          <a:lstStyle/>
-          <a:p>
-            <a:pPr algn="ctr"/>
-          </a:p>
-        </p:txBody>
-      </p:sp>
-      <p:sp>
-        <p:nvSpPr>
-          <p:cNvPr id="10" name="TextBox 9"/>
+          <a:noFill/>
+        </p:spPr>
+        <p:txBody>
+          <a:bodyPr wrap="square" anchor="ctr" lIns="0" rIns="0" tIns="0" bIns="0">
+            <a:spAutoFit/>
+          </a:bodyPr>
+          <a:lstStyle/>
+          <a:p>
+            <a:pPr algn="ctr">
+              <a:lnSpc>
+                <a:spcPct val="114000"/>
+              </a:lnSpc>
+            </a:pPr>
+            <a:r>
+              <a:rPr sz="3300" b="1" i="0">
+                <a:solidFill>
+                  <a:srgbClr val="3E2C1E"/>
+                </a:solidFill>
+                <a:latin typeface="Georgia"/>
+              </a:rPr>
+              <a:t>AI can be a helpful tool —</a:t>
+            </a:r>
+          </a:p>
+          <a:p>
+            <a:pPr algn="ctr">
+              <a:lnSpc>
+                <a:spcPct val="114000"/>
+              </a:lnSpc>
+            </a:pPr>
+            <a:r>
+              <a:rPr sz="3300" b="1" i="0">
+                <a:solidFill>
+                  <a:srgbClr val="3E2C1E"/>
+                </a:solidFill>
+                <a:latin typeface="Georgia"/>
+              </a:rPr>
+              <a:t/>
+            </a:r>
+            <a:r>
+              <a:rPr sz="3300" b="1" i="0">
+                <a:solidFill>
+                  <a:srgbClr val="B0563A"/>
+                </a:solidFill>
+                <a:latin typeface="Georgia"/>
+              </a:rPr>
+              <a:t>don't assume it's always fair.</a:t>
+            </a:r>
+          </a:p>
+        </p:txBody>
+      </p:sp>
+      <p:sp>
+        <p:nvSpPr>
+          <p:cNvPr id="6" name="TextBox 5"/>
           <p:cNvSpPr txBox="1"/>
           <p:nvPr/>
         </p:nvSpPr>
         <p:spPr>
           <a:xfrm>
-            <a:off x="3241943" y="2544207"/>
-            <a:ext cx="1463040" cy="822960"/>
+            <a:off x="1066647" y="4892040"/>
+            <a:ext cx="10058400" cy="640080"/>
           </a:xfrm>
           <a:prstGeom prst="rect">
             <a:avLst/>
@@ -11461,193 +11739,27 @@
               </a:lnSpc>
             </a:pPr>
             <a:r>
-              <a:rPr sz="4800" b="1" i="0">
+              <a:rPr sz="2000" b="1" i="1">
                 <a:solidFill>
-                  <a:srgbClr val="6E8FC0"/>
-                </a:solidFill>
-                <a:latin typeface="Calibri"/>
-              </a:rPr>
-              <a:t>♂</a:t>
-            </a:r>
-          </a:p>
-        </p:txBody>
-      </p:sp>
-      <p:cxnSp>
-        <p:nvCxnSpPr>
-          <p:cNvPr id="11" name="Connector 10"/>
-          <p:cNvCxnSpPr/>
-          <p:nvPr/>
-        </p:nvCxnSpPr>
-        <p:spPr>
-          <a:xfrm>
-            <a:off x="8218231" y="3216512"/>
-            <a:ext cx="0" cy="868680"/>
-          </a:xfrm>
-          <a:prstGeom prst="bentConnector3">
-            <a:avLst/>
-          </a:prstGeom>
-          <a:ln w="20320">
-            <a:solidFill>
-              <a:srgbClr val="6B4A34"/>
-            </a:solidFill>
-          </a:ln>
-          <a:effectLst/>
-        </p:spPr>
-        <p:style>
-          <a:lnRef idx="2">
-            <a:schemeClr val="accent1"/>
-          </a:lnRef>
-          <a:fillRef idx="0">
-            <a:schemeClr val="accent1"/>
-          </a:fillRef>
-          <a:effectRef idx="1">
-            <a:schemeClr val="accent1"/>
-          </a:effectRef>
-          <a:fontRef idx="minor">
-            <a:schemeClr val="tx1"/>
-          </a:fontRef>
-        </p:style>
-      </p:cxnSp>
-      <p:sp>
-        <p:nvSpPr>
-          <p:cNvPr id="12" name="Rounded Rectangle 11"/>
-          <p:cNvSpPr/>
-          <p:nvPr/>
-        </p:nvSpPr>
-        <p:spPr>
-          <a:xfrm>
-            <a:off x="7651303" y="4085192"/>
-            <a:ext cx="1133856" cy="109728"/>
-          </a:xfrm>
-          <a:prstGeom prst="roundRect">
-            <a:avLst>
-              <a:gd name="adj" fmla="val 50000"/>
-            </a:avLst>
-          </a:prstGeom>
-          <a:solidFill>
-            <a:srgbClr val="CDA07E"/>
-          </a:solidFill>
-          <a:ln>
-            <a:noFill/>
-          </a:ln>
-          <a:effectLst>
-            <a:outerShdw blurRad="254000" dist="139700" dir="5400000" rotWithShape="0">
-              <a:srgbClr val="6B4A34">
-                <a:alpha val="76000"/>
-              </a:srgbClr>
-            </a:outerShdw>
-          </a:effectLst>
-        </p:spPr>
-        <p:style>
-          <a:lnRef idx="1">
-            <a:schemeClr val="accent1"/>
-          </a:lnRef>
-          <a:fillRef idx="3">
-            <a:schemeClr val="accent1"/>
-          </a:fillRef>
-          <a:effectRef idx="2">
-            <a:schemeClr val="accent1"/>
-          </a:effectRef>
-          <a:fontRef idx="minor">
-            <a:schemeClr val="lt1"/>
-          </a:fontRef>
-        </p:style>
-        <p:txBody>
-          <a:bodyPr rtlCol="0" anchor="ctr"/>
-          <a:lstStyle/>
-          <a:p>
-            <a:pPr algn="ctr"/>
-          </a:p>
-        </p:txBody>
-      </p:sp>
-      <p:sp>
-        <p:nvSpPr>
-          <p:cNvPr id="13" name="TextBox 12"/>
-          <p:cNvSpPr txBox="1"/>
-          <p:nvPr/>
-        </p:nvSpPr>
-        <p:spPr>
-          <a:xfrm>
-            <a:off x="7486711" y="3216512"/>
-            <a:ext cx="1463040" cy="822960"/>
-          </a:xfrm>
-          <a:prstGeom prst="rect">
-            <a:avLst/>
-          </a:prstGeom>
-          <a:noFill/>
-        </p:spPr>
-        <p:txBody>
-          <a:bodyPr wrap="square" anchor="ctr" lIns="0" rIns="0" tIns="0" bIns="0">
-            <a:spAutoFit/>
-          </a:bodyPr>
-          <a:lstStyle/>
-          <a:p>
-            <a:pPr algn="ctr">
-              <a:lnSpc>
-                <a:spcPct val="100000"/>
-              </a:lnSpc>
-            </a:pPr>
-            <a:r>
-              <a:rPr sz="4800" b="1" i="0">
-                <a:solidFill>
-                  <a:srgbClr val="D6749C"/>
-                </a:solidFill>
-                <a:latin typeface="Calibri"/>
-              </a:rPr>
-              <a:t>♀</a:t>
-            </a:r>
-          </a:p>
-        </p:txBody>
-      </p:sp>
-      <p:sp>
-        <p:nvSpPr>
-          <p:cNvPr id="14" name="TextBox 13"/>
-          <p:cNvSpPr txBox="1"/>
-          <p:nvPr/>
-        </p:nvSpPr>
-        <p:spPr>
-          <a:xfrm>
-            <a:off x="700887" y="5486400"/>
-            <a:ext cx="10789920" cy="868680"/>
-          </a:xfrm>
-          <a:prstGeom prst="rect">
-            <a:avLst/>
-          </a:prstGeom>
-          <a:noFill/>
-        </p:spPr>
-        <p:txBody>
-          <a:bodyPr wrap="square" anchor="ctr" lIns="0" rIns="0" tIns="0" bIns="0">
-            <a:spAutoFit/>
-          </a:bodyPr>
-          <a:lstStyle/>
-          <a:p>
-            <a:pPr algn="ctr">
-              <a:lnSpc>
-                <a:spcPct val="104000"/>
-              </a:lnSpc>
-            </a:pPr>
-            <a:r>
-              <a:rPr sz="2300" b="1" i="0">
-                <a:solidFill>
-                  <a:srgbClr val="3E2C1E"/>
+                  <a:srgbClr val="A9744F"/>
                 </a:solidFill>
                 <a:latin typeface="Georgia"/>
               </a:rPr>
-              <a:t>Fairness training may over-correct — tipping slightly toward women</a:t>
-            </a:r>
-          </a:p>
-        </p:txBody>
-      </p:sp>
-      <p:sp>
-        <p:nvSpPr>
-          <p:cNvPr id="15" name="Rectangle 14"/>
+              <a:t>Question its decisions before you trust them</a:t>
+            </a:r>
+          </a:p>
+        </p:txBody>
+      </p:sp>
+      <p:sp>
+        <p:nvSpPr>
+          <p:cNvPr id="7" name="Rectangle 6"/>
           <p:cNvSpPr/>
           <p:nvPr/>
         </p:nvSpPr>
         <p:spPr>
           <a:xfrm>
             <a:off x="0" y="6803136"/>
-            <a:ext cx="2975956" cy="54864"/>
+            <a:ext cx="3200400" cy="54864"/>
           </a:xfrm>
           <a:prstGeom prst="rect">
             <a:avLst/>
@@ -11684,7 +11796,7 @@
       </p:sp>
       <p:sp>
         <p:nvSpPr>
-          <p:cNvPr id="16" name="TextBox 15"/>
+          <p:cNvPr id="8" name="TextBox 7"/>
           <p:cNvSpPr txBox="1"/>
           <p:nvPr/>
         </p:nvSpPr>

--- a/presentation/gender_bias_llm_hiring.pptx
+++ b/presentation/gender_bias_llm_hiring.pptx
@@ -3285,16 +3285,16 @@
               </a:lnSpc>
             </a:pPr>
             <a:r>
-              <a:rPr sz="6200" b="0" i="0">
+              <a:rPr sz="7192" b="0" i="0">
                 <a:solidFill>
-                  <a:srgbClr val="D6749C"/>
+                  <a:srgbClr val="E96CA4"/>
                 </a:solidFill>
                 <a:latin typeface="Calibri"/>
               </a:rPr>
               <a:t>♀</a:t>
             </a:r>
             <a:r>
-              <a:rPr sz="6200" b="0" i="0">
+              <a:rPr sz="7192" b="0" i="0">
                 <a:solidFill>
                   <a:srgbClr val="9B8571"/>
                 </a:solidFill>
@@ -3303,9 +3303,9 @@
               <a:t>   vs   </a:t>
             </a:r>
             <a:r>
-              <a:rPr sz="6200" b="0" i="0">
+              <a:rPr sz="7192" b="0" i="0">
                 <a:solidFill>
-                  <a:srgbClr val="6E8FC0"/>
+                  <a:srgbClr val="5A93DE"/>
                 </a:solidFill>
                 <a:latin typeface="Calibri"/>
               </a:rPr>
@@ -3322,8 +3322,8 @@
         </p:nvSpPr>
         <p:spPr>
           <a:xfrm>
-            <a:off x="883767" y="2880360"/>
-            <a:ext cx="10424160" cy="1737360"/>
+            <a:off x="518007" y="2880360"/>
+            <a:ext cx="11155680" cy="1737360"/>
           </a:xfrm>
           <a:prstGeom prst="rect">
             <a:avLst/>
@@ -3342,7 +3342,7 @@
               </a:lnSpc>
             </a:pPr>
             <a:r>
-              <a:rPr sz="4000" b="1" i="0">
+              <a:rPr sz="4291" b="1" i="0">
                 <a:solidFill>
                   <a:srgbClr val="3E2C1E"/>
                 </a:solidFill>
@@ -3351,22 +3351,22 @@
               <a:t>Gender bias when </a:t>
             </a:r>
             <a:r>
-              <a:rPr sz="4000" b="1" i="0">
+              <a:rPr sz="4291" b="1" i="0">
                 <a:solidFill>
-                  <a:srgbClr val="B0563A"/>
+                  <a:srgbClr val="CE5A38"/>
                 </a:solidFill>
                 <a:latin typeface="Georgia"/>
               </a:rPr>
               <a:t>AI</a:t>
             </a:r>
             <a:r>
-              <a:rPr sz="4000" b="1" i="0">
+              <a:rPr sz="4291" b="1" i="0">
                 <a:solidFill>
                   <a:srgbClr val="3E2C1E"/>
                 </a:solidFill>
                 <a:latin typeface="Georgia"/>
               </a:rPr>
-              <a:t> screens résumés</a:t>
+              <a:t> screens resumes</a:t>
             </a:r>
           </a:p>
         </p:txBody>
@@ -3399,9 +3399,9 @@
               </a:lnSpc>
             </a:pPr>
             <a:r>
-              <a:rPr sz="1500" b="1" i="0" spc="340">
+              <a:rPr sz="1739" b="1" i="0" spc="340">
                 <a:solidFill>
-                  <a:srgbClr val="A9744F"/>
+                  <a:srgbClr val="C18150"/>
                 </a:solidFill>
                 <a:latin typeface="Calibri"/>
               </a:rPr>
@@ -3508,16 +3508,16 @@
               </a:lnSpc>
             </a:pPr>
             <a:r>
-              <a:rPr sz="5800" b="0" i="0">
+              <a:rPr sz="6728" b="0" i="0">
                 <a:solidFill>
-                  <a:srgbClr val="D6749C"/>
+                  <a:srgbClr val="E96CA4"/>
                 </a:solidFill>
                 <a:latin typeface="Calibri"/>
               </a:rPr>
               <a:t>♀</a:t>
             </a:r>
             <a:r>
-              <a:rPr sz="5800" b="0" i="0">
+              <a:rPr sz="6728" b="0" i="0">
                 <a:solidFill>
                   <a:srgbClr val="3E2C1E"/>
                 </a:solidFill>
@@ -3526,9 +3526,9 @@
               <a:t>    </a:t>
             </a:r>
             <a:r>
-              <a:rPr sz="5800" b="0" i="0">
+              <a:rPr sz="6728" b="0" i="0">
                 <a:solidFill>
-                  <a:srgbClr val="6E8FC0"/>
+                  <a:srgbClr val="5A93DE"/>
                 </a:solidFill>
                 <a:latin typeface="Calibri"/>
               </a:rPr>
@@ -3565,7 +3565,7 @@
               </a:lnSpc>
             </a:pPr>
             <a:r>
-              <a:rPr sz="4800" b="1" i="0">
+              <a:rPr sz="5567" b="1" i="0">
                 <a:solidFill>
                   <a:srgbClr val="3E2C1E"/>
                 </a:solidFill>
@@ -3604,9 +3604,9 @@
               </a:lnSpc>
             </a:pPr>
             <a:r>
-              <a:rPr sz="1400" b="1" i="0" spc="160">
+              <a:rPr sz="1623" b="1" i="0" spc="160">
                 <a:solidFill>
-                  <a:srgbClr val="A9744F"/>
+                  <a:srgbClr val="C18150"/>
                 </a:solidFill>
                 <a:latin typeface="Calibri"/>
               </a:rPr>
@@ -3713,9 +3713,9 @@
               </a:lnSpc>
             </a:pPr>
             <a:r>
-              <a:rPr sz="1300" b="1" i="0" spc="420">
+              <a:rPr sz="1507" b="1" i="0" spc="420">
                 <a:solidFill>
-                  <a:srgbClr val="A9744F"/>
+                  <a:srgbClr val="C18150"/>
                 </a:solidFill>
                 <a:latin typeface="Calibri"/>
               </a:rPr>
@@ -3740,7 +3740,7 @@
           </a:prstGeom>
           <a:ln w="27940">
             <a:solidFill>
-              <a:srgbClr val="A9744F"/>
+              <a:srgbClr val="C18150"/>
             </a:solidFill>
           </a:ln>
           <a:effectLst/>
@@ -3973,7 +3973,7 @@
             <a:avLst/>
           </a:prstGeom>
           <a:solidFill>
-            <a:srgbClr val="A9744F"/>
+            <a:srgbClr val="C18150"/>
           </a:solidFill>
           <a:ln>
             <a:noFill/>
@@ -4297,7 +4297,7 @@
           </a:solidFill>
           <a:ln w="38100">
             <a:solidFill>
-              <a:srgbClr val="B0563A"/>
+              <a:srgbClr val="CE5A38"/>
             </a:solidFill>
           </a:ln>
           <a:effectLst>
@@ -4346,7 +4346,7 @@
           </a:prstGeom>
           <a:ln w="40640">
             <a:solidFill>
-              <a:srgbClr val="B0563A"/>
+              <a:srgbClr val="CE5A38"/>
             </a:solidFill>
           </a:ln>
           <a:effectLst/>
@@ -4538,9 +4538,9 @@
               </a:lnSpc>
             </a:pPr>
             <a:r>
-              <a:rPr sz="1200" b="1" i="0" spc="240">
+              <a:rPr sz="1507" b="1" i="0" spc="240">
                 <a:solidFill>
-                  <a:srgbClr val="9B8571"/>
+                  <a:srgbClr val="6B4A34"/>
                 </a:solidFill>
                 <a:latin typeface="Calibri"/>
               </a:rPr>
@@ -4577,9 +4577,9 @@
               </a:lnSpc>
             </a:pPr>
             <a:r>
-              <a:rPr sz="1200" b="1" i="0" spc="240">
+              <a:rPr sz="1507" b="1" i="0" spc="240">
                 <a:solidFill>
-                  <a:srgbClr val="A9744F"/>
+                  <a:srgbClr val="CE5A38"/>
                 </a:solidFill>
                 <a:latin typeface="Calibri"/>
               </a:rPr>
@@ -4616,9 +4616,9 @@
               </a:lnSpc>
             </a:pPr>
             <a:r>
-              <a:rPr sz="1200" b="1" i="0" spc="240">
+              <a:rPr sz="1507" b="1" i="0" spc="240">
                 <a:solidFill>
-                  <a:srgbClr val="9B8571"/>
+                  <a:srgbClr val="6B4A34"/>
                 </a:solidFill>
                 <a:latin typeface="Calibri"/>
               </a:rPr>
@@ -4655,13 +4655,13 @@
               </a:lnSpc>
             </a:pPr>
             <a:r>
-              <a:rPr sz="2500" b="1" i="0">
+              <a:rPr sz="2899" b="1" i="0">
                 <a:solidFill>
                   <a:srgbClr val="3E2C1E"/>
                 </a:solidFill>
                 <a:latin typeface="Georgia"/>
               </a:rPr>
-              <a:t>AI screens your résumé before a human ever sees it</a:t>
+              <a:t>AI screens your resume before a human ever sees it</a:t>
             </a:r>
           </a:p>
         </p:txBody>
@@ -4681,7 +4681,7 @@
             <a:avLst/>
           </a:prstGeom>
           <a:solidFill>
-            <a:srgbClr val="A9744F"/>
+            <a:srgbClr val="C18150"/>
           </a:solidFill>
           <a:ln>
             <a:noFill/>
@@ -4738,7 +4738,7 @@
               </a:lnSpc>
             </a:pPr>
             <a:r>
-              <a:rPr sz="1100" b="0" i="0">
+              <a:rPr sz="1276" b="0" i="0">
                 <a:solidFill>
                   <a:srgbClr val="9B8571"/>
                 </a:solidFill>
@@ -4847,9 +4847,9 @@
               </a:lnSpc>
             </a:pPr>
             <a:r>
-              <a:rPr sz="1300" b="1" i="0" spc="420">
+              <a:rPr sz="1507" b="1" i="0" spc="420">
                 <a:solidFill>
-                  <a:srgbClr val="A9744F"/>
+                  <a:srgbClr val="C18150"/>
                 </a:solidFill>
                 <a:latin typeface="Calibri"/>
               </a:rPr>
@@ -4874,7 +4874,7 @@
           </a:prstGeom>
           <a:ln w="27940">
             <a:solidFill>
-              <a:srgbClr val="A9744F"/>
+              <a:srgbClr val="C18150"/>
             </a:solidFill>
           </a:ln>
           <a:effectLst/>
@@ -4915,7 +4915,7 @@
           </a:solidFill>
           <a:ln w="15240">
             <a:solidFill>
-              <a:srgbClr val="A9744F"/>
+              <a:srgbClr val="C18150"/>
             </a:solidFill>
           </a:ln>
           <a:effectLst>
@@ -4965,7 +4965,7 @@
             </a:avLst>
           </a:prstGeom>
           <a:solidFill>
-            <a:srgbClr val="A9744F"/>
+            <a:srgbClr val="C18150"/>
           </a:solidFill>
           <a:ln>
             <a:noFill/>
@@ -5015,7 +5015,7 @@
           </a:solidFill>
           <a:ln w="15240">
             <a:solidFill>
-              <a:srgbClr val="B0563A"/>
+              <a:srgbClr val="CE5A38"/>
             </a:solidFill>
           </a:ln>
           <a:effectLst>
@@ -5065,7 +5065,7 @@
             </a:avLst>
           </a:prstGeom>
           <a:solidFill>
-            <a:srgbClr val="B0563A"/>
+            <a:srgbClr val="CE5A38"/>
           </a:solidFill>
           <a:ln>
             <a:noFill/>
@@ -5292,7 +5292,7 @@
             <a:avLst/>
           </a:prstGeom>
           <a:solidFill>
-            <a:srgbClr val="B0563A"/>
+            <a:srgbClr val="CE5A38"/>
           </a:solidFill>
           <a:ln>
             <a:noFill/>
@@ -5342,7 +5342,7 @@
           </a:solidFill>
           <a:ln w="27940">
             <a:solidFill>
-              <a:srgbClr val="A9744F"/>
+              <a:srgbClr val="C18150"/>
             </a:solidFill>
           </a:ln>
           <a:effectLst>
@@ -5390,7 +5390,7 @@
             <a:avLst/>
           </a:prstGeom>
           <a:solidFill>
-            <a:srgbClr val="A9744F"/>
+            <a:srgbClr val="C18150"/>
           </a:solidFill>
           <a:ln>
             <a:noFill/>
@@ -5434,7 +5434,7 @@
             <a:avLst/>
           </a:prstGeom>
           <a:solidFill>
-            <a:srgbClr val="A9744F"/>
+            <a:srgbClr val="C18150"/>
           </a:solidFill>
           <a:ln>
             <a:noFill/>
@@ -5480,7 +5480,7 @@
             </a:avLst>
           </a:prstGeom>
           <a:solidFill>
-            <a:srgbClr val="A9744F"/>
+            <a:srgbClr val="C18150"/>
           </a:solidFill>
           <a:ln>
             <a:noFill/>
@@ -5537,7 +5537,7 @@
               </a:lnSpc>
             </a:pPr>
             <a:r>
-              <a:rPr sz="1300" b="1" i="0" spc="140">
+              <a:rPr sz="1507" b="1" i="0" spc="140">
                 <a:solidFill>
                   <a:srgbClr val="5A4433"/>
                 </a:solidFill>
@@ -5576,7 +5576,7 @@
               </a:lnSpc>
             </a:pPr>
             <a:r>
-              <a:rPr sz="1300" b="1" i="0" spc="140">
+              <a:rPr sz="1507" b="1" i="0" spc="140">
                 <a:solidFill>
                   <a:srgbClr val="5A4433"/>
                 </a:solidFill>
@@ -5602,7 +5602,7 @@
             <a:avLst/>
           </a:prstGeom>
           <a:solidFill>
-            <a:srgbClr val="A9744F"/>
+            <a:srgbClr val="C18150"/>
           </a:solidFill>
           <a:ln>
             <a:noFill/>
@@ -5659,7 +5659,7 @@
               </a:lnSpc>
             </a:pPr>
             <a:r>
-              <a:rPr sz="1100" b="0" i="0">
+              <a:rPr sz="1276" b="0" i="0">
                 <a:solidFill>
                   <a:srgbClr val="9B8571"/>
                 </a:solidFill>
@@ -5768,9 +5768,9 @@
               </a:lnSpc>
             </a:pPr>
             <a:r>
-              <a:rPr sz="1300" b="1" i="0" spc="420">
+              <a:rPr sz="1507" b="1" i="0" spc="420">
                 <a:solidFill>
-                  <a:srgbClr val="B0563A"/>
+                  <a:srgbClr val="CE5A38"/>
                 </a:solidFill>
                 <a:latin typeface="Calibri"/>
               </a:rPr>
@@ -5795,7 +5795,7 @@
           </a:prstGeom>
           <a:ln w="27940">
             <a:solidFill>
-              <a:srgbClr val="B0563A"/>
+              <a:srgbClr val="CE5A38"/>
             </a:solidFill>
           </a:ln>
           <a:effectLst/>
@@ -5922,7 +5922,7 @@
             </a:avLst>
           </a:prstGeom>
           <a:solidFill>
-            <a:srgbClr val="A9744F"/>
+            <a:srgbClr val="C18150"/>
           </a:solidFill>
           <a:ln>
             <a:noFill/>
@@ -6073,9 +6073,9 @@
               </a:lnSpc>
             </a:pPr>
             <a:r>
-              <a:rPr sz="4800" b="1" i="0">
+              <a:rPr sz="5567" b="1" i="0">
                 <a:solidFill>
-                  <a:srgbClr val="6E8FC0"/>
+                  <a:srgbClr val="5A93DE"/>
                 </a:solidFill>
                 <a:latin typeface="Calibri"/>
               </a:rPr>
@@ -6200,9 +6200,9 @@
               </a:lnSpc>
             </a:pPr>
             <a:r>
-              <a:rPr sz="4800" b="1" i="0">
+              <a:rPr sz="5567" b="1" i="0">
                 <a:solidFill>
-                  <a:srgbClr val="D6749C"/>
+                  <a:srgbClr val="E96CA4"/>
                 </a:solidFill>
                 <a:latin typeface="Calibri"/>
               </a:rPr>
@@ -6239,9 +6239,9 @@
               </a:lnSpc>
             </a:pPr>
             <a:r>
-              <a:rPr sz="6600" b="1" i="0">
+              <a:rPr sz="7655" b="1" i="0">
                 <a:solidFill>
-                  <a:srgbClr val="B0563A"/>
+                  <a:srgbClr val="CE5A38"/>
                 </a:solidFill>
                 <a:latin typeface="Georgia"/>
               </a:rPr>
@@ -6278,7 +6278,7 @@
               </a:lnSpc>
             </a:pPr>
             <a:r>
-              <a:rPr sz="2400" b="1" i="0">
+              <a:rPr sz="2783" b="1" i="0">
                 <a:solidFill>
                   <a:srgbClr val="3E2C1E"/>
                 </a:solidFill>
@@ -6304,7 +6304,7 @@
             <a:avLst/>
           </a:prstGeom>
           <a:solidFill>
-            <a:srgbClr val="B0563A"/>
+            <a:srgbClr val="CE5A38"/>
           </a:solidFill>
           <a:ln>
             <a:noFill/>
@@ -6361,7 +6361,7 @@
               </a:lnSpc>
             </a:pPr>
             <a:r>
-              <a:rPr sz="1100" b="0" i="0">
+              <a:rPr sz="1276" b="0" i="0">
                 <a:solidFill>
                   <a:srgbClr val="9B8571"/>
                 </a:solidFill>
@@ -6470,9 +6470,9 @@
               </a:lnSpc>
             </a:pPr>
             <a:r>
-              <a:rPr sz="1300" b="1" i="0" spc="420">
+              <a:rPr sz="1507" b="1" i="0" spc="420">
                 <a:solidFill>
-                  <a:srgbClr val="A9744F"/>
+                  <a:srgbClr val="C18150"/>
                 </a:solidFill>
                 <a:latin typeface="Calibri"/>
               </a:rPr>
@@ -6497,7 +6497,7 @@
           </a:prstGeom>
           <a:ln w="27940">
             <a:solidFill>
-              <a:srgbClr val="A9744F"/>
+              <a:srgbClr val="C18150"/>
             </a:solidFill>
           </a:ln>
           <a:effectLst/>
@@ -6588,7 +6588,7 @@
             </a:avLst>
           </a:prstGeom>
           <a:solidFill>
-            <a:srgbClr val="D6749C"/>
+            <a:srgbClr val="E96CA4"/>
           </a:solidFill>
           <a:ln>
             <a:noFill/>
@@ -6725,7 +6725,7 @@
             </a:avLst>
           </a:prstGeom>
           <a:solidFill>
-            <a:srgbClr val="D6749C"/>
+            <a:srgbClr val="E96CA4"/>
           </a:solidFill>
           <a:ln>
             <a:noFill/>
@@ -6966,9 +6966,9 @@
               </a:lnSpc>
             </a:pPr>
             <a:r>
-              <a:rPr sz="3200" b="0" i="0">
+              <a:rPr sz="3711" b="0" i="0">
                 <a:solidFill>
-                  <a:srgbClr val="D6749C"/>
+                  <a:srgbClr val="E96CA4"/>
                 </a:solidFill>
                 <a:latin typeface="Calibri"/>
               </a:rPr>
@@ -7005,7 +7005,7 @@
               </a:lnSpc>
             </a:pPr>
             <a:r>
-              <a:rPr sz="4800" b="1" i="0">
+              <a:rPr sz="5567" b="1" i="0">
                 <a:solidFill>
                   <a:srgbClr val="9B8571"/>
                 </a:solidFill>
@@ -7087,7 +7087,7 @@
             </a:avLst>
           </a:prstGeom>
           <a:solidFill>
-            <a:srgbClr val="6E8FC0"/>
+            <a:srgbClr val="5A93DE"/>
           </a:solidFill>
           <a:ln>
             <a:noFill/>
@@ -7224,7 +7224,7 @@
             </a:avLst>
           </a:prstGeom>
           <a:solidFill>
-            <a:srgbClr val="6E8FC0"/>
+            <a:srgbClr val="5A93DE"/>
           </a:solidFill>
           <a:ln>
             <a:noFill/>
@@ -7465,9 +7465,9 @@
               </a:lnSpc>
             </a:pPr>
             <a:r>
-              <a:rPr sz="3200" b="0" i="0">
+              <a:rPr sz="3711" b="0" i="0">
                 <a:solidFill>
-                  <a:srgbClr val="6E8FC0"/>
+                  <a:srgbClr val="5A93DE"/>
                 </a:solidFill>
                 <a:latin typeface="Calibri"/>
               </a:rPr>
@@ -7504,13 +7504,13 @@
               </a:lnSpc>
             </a:pPr>
             <a:r>
-              <a:rPr sz="2400" b="1" i="0">
+              <a:rPr sz="2783" b="1" i="0">
                 <a:solidFill>
                   <a:srgbClr val="3E2C1E"/>
                 </a:solidFill>
                 <a:latin typeface="Georgia"/>
               </a:rPr>
-              <a:t>Identical Japanese résumés — only the name differs</a:t>
+              <a:t>Identical Japanese resumes — only the name differs</a:t>
             </a:r>
           </a:p>
         </p:txBody>
@@ -7543,13 +7543,13 @@
               </a:lnSpc>
             </a:pPr>
             <a:r>
-              <a:rPr sz="1150" b="1" i="0" spc="260">
+              <a:rPr sz="1334" b="1" i="0" spc="260">
                 <a:solidFill>
-                  <a:srgbClr val="A9744F"/>
+                  <a:srgbClr val="C18150"/>
                 </a:solidFill>
                 <a:latin typeface="Calibri"/>
               </a:rPr>
-              <a:t>FIVE AI MODELS SCORED EACH RÉSUMÉ</a:t>
+              <a:t>FIVE AI MODELS SCORED EACH RESUME</a:t>
             </a:r>
           </a:p>
         </p:txBody>
@@ -7623,7 +7623,7 @@
             <a:avLst/>
           </a:prstGeom>
           <a:solidFill>
-            <a:srgbClr val="B0563A"/>
+            <a:srgbClr val="CE5A38"/>
           </a:solidFill>
           <a:ln>
             <a:noFill/>
@@ -7680,7 +7680,7 @@
               </a:lnSpc>
             </a:pPr>
             <a:r>
-              <a:rPr sz="1500" b="1" i="0">
+              <a:rPr sz="1739" b="1" i="0">
                 <a:solidFill>
                   <a:srgbClr val="6B4A34"/>
                 </a:solidFill>
@@ -7760,7 +7760,7 @@
             <a:avLst/>
           </a:prstGeom>
           <a:solidFill>
-            <a:srgbClr val="A9744F"/>
+            <a:srgbClr val="C18150"/>
           </a:solidFill>
           <a:ln>
             <a:noFill/>
@@ -7817,7 +7817,7 @@
               </a:lnSpc>
             </a:pPr>
             <a:r>
-              <a:rPr sz="1500" b="1" i="0">
+              <a:rPr sz="1739" b="1" i="0">
                 <a:solidFill>
                   <a:srgbClr val="6B4A34"/>
                 </a:solidFill>
@@ -7897,7 +7897,7 @@
             <a:avLst/>
           </a:prstGeom>
           <a:solidFill>
-            <a:srgbClr val="B0563A"/>
+            <a:srgbClr val="CE5A38"/>
           </a:solidFill>
           <a:ln>
             <a:noFill/>
@@ -7954,7 +7954,7 @@
               </a:lnSpc>
             </a:pPr>
             <a:r>
-              <a:rPr sz="1500" b="1" i="0">
+              <a:rPr sz="1739" b="1" i="0">
                 <a:solidFill>
                   <a:srgbClr val="6B4A34"/>
                 </a:solidFill>
@@ -8034,7 +8034,7 @@
             <a:avLst/>
           </a:prstGeom>
           <a:solidFill>
-            <a:srgbClr val="A9744F"/>
+            <a:srgbClr val="C18150"/>
           </a:solidFill>
           <a:ln>
             <a:noFill/>
@@ -8091,7 +8091,7 @@
               </a:lnSpc>
             </a:pPr>
             <a:r>
-              <a:rPr sz="1500" b="1" i="0">
+              <a:rPr sz="1739" b="1" i="0">
                 <a:solidFill>
                   <a:srgbClr val="6B4A34"/>
                 </a:solidFill>
@@ -8171,7 +8171,7 @@
             <a:avLst/>
           </a:prstGeom>
           <a:solidFill>
-            <a:srgbClr val="B0563A"/>
+            <a:srgbClr val="CE5A38"/>
           </a:solidFill>
           <a:ln>
             <a:noFill/>
@@ -8228,7 +8228,7 @@
               </a:lnSpc>
             </a:pPr>
             <a:r>
-              <a:rPr sz="1500" b="1" i="0">
+              <a:rPr sz="1739" b="1" i="0">
                 <a:solidFill>
                   <a:srgbClr val="6B4A34"/>
                 </a:solidFill>
@@ -8254,7 +8254,7 @@
             <a:avLst/>
           </a:prstGeom>
           <a:solidFill>
-            <a:srgbClr val="A9744F"/>
+            <a:srgbClr val="C18150"/>
           </a:solidFill>
           <a:ln>
             <a:noFill/>
@@ -8311,7 +8311,7 @@
               </a:lnSpc>
             </a:pPr>
             <a:r>
-              <a:rPr sz="1100" b="0" i="0">
+              <a:rPr sz="1276" b="0" i="0">
                 <a:solidFill>
                   <a:srgbClr val="9B8571"/>
                 </a:solidFill>
@@ -8420,9 +8420,9 @@
               </a:lnSpc>
             </a:pPr>
             <a:r>
-              <a:rPr sz="1300" b="1" i="0" spc="420">
+              <a:rPr sz="1507" b="1" i="0" spc="420">
                 <a:solidFill>
-                  <a:srgbClr val="B0563A"/>
+                  <a:srgbClr val="CE5A38"/>
                 </a:solidFill>
                 <a:latin typeface="Calibri"/>
               </a:rPr>
@@ -8447,7 +8447,7 @@
           </a:prstGeom>
           <a:ln w="27940">
             <a:solidFill>
-              <a:srgbClr val="B0563A"/>
+              <a:srgbClr val="CE5A38"/>
             </a:solidFill>
           </a:ln>
           <a:effectLst/>
@@ -8538,7 +8538,7 @@
             </a:avLst>
           </a:prstGeom>
           <a:solidFill>
-            <a:srgbClr val="6E8FC0"/>
+            <a:srgbClr val="5A93DE"/>
           </a:solidFill>
           <a:ln>
             <a:noFill/>
@@ -8675,7 +8675,7 @@
             </a:avLst>
           </a:prstGeom>
           <a:solidFill>
-            <a:srgbClr val="6E8FC0"/>
+            <a:srgbClr val="5A93DE"/>
           </a:solidFill>
           <a:ln>
             <a:noFill/>
@@ -8916,9 +8916,9 @@
               </a:lnSpc>
             </a:pPr>
             <a:r>
-              <a:rPr sz="3400" b="0" i="0">
+              <a:rPr sz="3944" b="0" i="0">
                 <a:solidFill>
-                  <a:srgbClr val="6E8FC0"/>
+                  <a:srgbClr val="5A93DE"/>
                 </a:solidFill>
                 <a:latin typeface="Calibri"/>
               </a:rPr>
@@ -8955,9 +8955,9 @@
               </a:lnSpc>
             </a:pPr>
             <a:r>
-              <a:rPr sz="1200" b="1" i="0" spc="160">
+              <a:rPr sz="1391" b="1" i="0" spc="160">
                 <a:solidFill>
-                  <a:srgbClr val="6E8FC0"/>
+                  <a:srgbClr val="5A93DE"/>
                 </a:solidFill>
                 <a:latin typeface="Calibri"/>
               </a:rPr>
@@ -9089,7 +9089,7 @@
             </a:avLst>
           </a:prstGeom>
           <a:solidFill>
-            <a:srgbClr val="D6749C"/>
+            <a:srgbClr val="E96CA4"/>
           </a:solidFill>
           <a:ln>
             <a:noFill/>
@@ -9226,7 +9226,7 @@
             </a:avLst>
           </a:prstGeom>
           <a:solidFill>
-            <a:srgbClr val="D6749C"/>
+            <a:srgbClr val="E96CA4"/>
           </a:solidFill>
           <a:ln>
             <a:noFill/>
@@ -9467,9 +9467,9 @@
               </a:lnSpc>
             </a:pPr>
             <a:r>
-              <a:rPr sz="3400" b="0" i="0">
+              <a:rPr sz="3944" b="0" i="0">
                 <a:solidFill>
-                  <a:srgbClr val="D6749C"/>
+                  <a:srgbClr val="E96CA4"/>
                 </a:solidFill>
                 <a:latin typeface="Calibri"/>
               </a:rPr>
@@ -9506,9 +9506,9 @@
               </a:lnSpc>
             </a:pPr>
             <a:r>
-              <a:rPr sz="2600" b="1" i="0">
+              <a:rPr sz="3015" b="1" i="0">
                 <a:solidFill>
-                  <a:srgbClr val="D6749C"/>
+                  <a:srgbClr val="E96CA4"/>
                 </a:solidFill>
                 <a:latin typeface="Calibri"/>
               </a:rPr>
@@ -9545,9 +9545,9 @@
               </a:lnSpc>
             </a:pPr>
             <a:r>
-              <a:rPr sz="1200" b="1" i="0" spc="160">
+              <a:rPr sz="1391" b="1" i="0" spc="160">
                 <a:solidFill>
-                  <a:srgbClr val="D6749C"/>
+                  <a:srgbClr val="E96CA4"/>
                 </a:solidFill>
                 <a:latin typeface="Calibri"/>
               </a:rPr>
@@ -9584,7 +9584,7 @@
               </a:lnSpc>
             </a:pPr>
             <a:r>
-              <a:rPr sz="2500" b="1" i="0">
+              <a:rPr sz="2899" b="1" i="0">
                 <a:solidFill>
                   <a:srgbClr val="3E2C1E"/>
                 </a:solidFill>
@@ -9593,22 +9593,22 @@
               <a:t>Female names scored </a:t>
             </a:r>
             <a:r>
-              <a:rPr sz="2500" b="1" i="0">
+              <a:rPr sz="2899" b="1" i="0">
                 <a:solidFill>
-                  <a:srgbClr val="D6749C"/>
+                  <a:srgbClr val="E96CA4"/>
                 </a:solidFill>
                 <a:latin typeface="Georgia"/>
               </a:rPr>
               <a:t>slightly higher</a:t>
             </a:r>
             <a:r>
-              <a:rPr sz="2500" b="1" i="0">
+              <a:rPr sz="2899" b="1" i="0">
                 <a:solidFill>
                   <a:srgbClr val="3E2C1E"/>
                 </a:solidFill>
                 <a:latin typeface="Georgia"/>
               </a:rPr>
-              <a:t> — same résumé</a:t>
+              <a:t> — same resume</a:t>
             </a:r>
           </a:p>
         </p:txBody>
@@ -9628,7 +9628,7 @@
             <a:avLst/>
           </a:prstGeom>
           <a:solidFill>
-            <a:srgbClr val="B0563A"/>
+            <a:srgbClr val="CE5A38"/>
           </a:solidFill>
           <a:ln>
             <a:noFill/>
@@ -9685,7 +9685,7 @@
               </a:lnSpc>
             </a:pPr>
             <a:r>
-              <a:rPr sz="1100" b="0" i="0">
+              <a:rPr sz="1276" b="0" i="0">
                 <a:solidFill>
                   <a:srgbClr val="9B8571"/>
                 </a:solidFill>
@@ -9794,9 +9794,9 @@
               </a:lnSpc>
             </a:pPr>
             <a:r>
-              <a:rPr sz="1300" b="1" i="0" spc="420">
+              <a:rPr sz="1507" b="1" i="0" spc="420">
                 <a:solidFill>
-                  <a:srgbClr val="BE932E"/>
+                  <a:srgbClr val="DCA62A"/>
                 </a:solidFill>
                 <a:latin typeface="Calibri"/>
               </a:rPr>
@@ -9821,7 +9821,7 @@
           </a:prstGeom>
           <a:ln w="27940">
             <a:solidFill>
-              <a:srgbClr val="BE932E"/>
+              <a:srgbClr val="DCA62A"/>
             </a:solidFill>
           </a:ln>
           <a:effectLst/>
@@ -9912,7 +9912,7 @@
             </a:avLst>
           </a:prstGeom>
           <a:solidFill>
-            <a:srgbClr val="A9744F"/>
+            <a:srgbClr val="C18150"/>
           </a:solidFill>
           <a:ln>
             <a:noFill/>
@@ -10049,7 +10049,7 @@
             </a:avLst>
           </a:prstGeom>
           <a:solidFill>
-            <a:srgbClr val="A9744F"/>
+            <a:srgbClr val="C18150"/>
           </a:solidFill>
           <a:ln>
             <a:noFill/>
@@ -10667,7 +10667,7 @@
               </a:lnSpc>
             </a:pPr>
             <a:r>
-              <a:rPr sz="1250" b="1" i="0">
+              <a:rPr sz="1449" b="1" i="0">
                 <a:solidFill>
                   <a:srgbClr val="6B4A34"/>
                 </a:solidFill>
@@ -10706,9 +10706,9 @@
               </a:lnSpc>
             </a:pPr>
             <a:r>
-              <a:rPr sz="5800" b="1" i="0">
+              <a:rPr sz="6728" b="1" i="0">
                 <a:solidFill>
-                  <a:srgbClr val="BE932E"/>
+                  <a:srgbClr val="DCA62A"/>
                 </a:solidFill>
                 <a:latin typeface="Calibri"/>
               </a:rPr>
@@ -10745,7 +10745,7 @@
               </a:lnSpc>
             </a:pPr>
             <a:r>
-              <a:rPr sz="2500" b="1" i="0">
+              <a:rPr sz="2899" b="1" i="0">
                 <a:solidFill>
                   <a:srgbClr val="3E2C1E"/>
                 </a:solidFill>
@@ -10771,7 +10771,7 @@
             <a:avLst/>
           </a:prstGeom>
           <a:solidFill>
-            <a:srgbClr val="BE932E"/>
+            <a:srgbClr val="DCA62A"/>
           </a:solidFill>
           <a:ln>
             <a:noFill/>
@@ -10828,7 +10828,7 @@
               </a:lnSpc>
             </a:pPr>
             <a:r>
-              <a:rPr sz="1100" b="0" i="0">
+              <a:rPr sz="1276" b="0" i="0">
                 <a:solidFill>
                   <a:srgbClr val="9B8571"/>
                 </a:solidFill>
@@ -10937,9 +10937,9 @@
               </a:lnSpc>
             </a:pPr>
             <a:r>
-              <a:rPr sz="1300" b="1" i="0" spc="420">
+              <a:rPr sz="1507" b="1" i="0" spc="420">
                 <a:solidFill>
-                  <a:srgbClr val="A9744F"/>
+                  <a:srgbClr val="C18150"/>
                 </a:solidFill>
                 <a:latin typeface="Calibri"/>
               </a:rPr>
@@ -10964,7 +10964,7 @@
           </a:prstGeom>
           <a:ln w="27940">
             <a:solidFill>
-              <a:srgbClr val="A9744F"/>
+              <a:srgbClr val="C18150"/>
             </a:solidFill>
           </a:ln>
           <a:effectLst/>
@@ -11091,7 +11091,7 @@
             </a:avLst>
           </a:prstGeom>
           <a:solidFill>
-            <a:srgbClr val="A9744F"/>
+            <a:srgbClr val="C18150"/>
           </a:solidFill>
           <a:ln>
             <a:noFill/>
@@ -11242,9 +11242,9 @@
               </a:lnSpc>
             </a:pPr>
             <a:r>
-              <a:rPr sz="4800" b="1" i="0">
+              <a:rPr sz="5567" b="1" i="0">
                 <a:solidFill>
-                  <a:srgbClr val="6E8FC0"/>
+                  <a:srgbClr val="5A93DE"/>
                 </a:solidFill>
                 <a:latin typeface="Calibri"/>
               </a:rPr>
@@ -11369,9 +11369,9 @@
               </a:lnSpc>
             </a:pPr>
             <a:r>
-              <a:rPr sz="4800" b="1" i="0">
+              <a:rPr sz="5567" b="1" i="0">
                 <a:solidFill>
-                  <a:srgbClr val="D6749C"/>
+                  <a:srgbClr val="E96CA4"/>
                 </a:solidFill>
                 <a:latin typeface="Calibri"/>
               </a:rPr>
@@ -11388,8 +11388,8 @@
         </p:nvSpPr>
         <p:spPr>
           <a:xfrm>
-            <a:off x="700887" y="5486400"/>
-            <a:ext cx="10789920" cy="868680"/>
+            <a:off x="518007" y="5486400"/>
+            <a:ext cx="11155680" cy="868680"/>
           </a:xfrm>
           <a:prstGeom prst="rect">
             <a:avLst/>
@@ -11408,13 +11408,13 @@
               </a:lnSpc>
             </a:pPr>
             <a:r>
-              <a:rPr sz="2300" b="1" i="0">
+              <a:rPr sz="2668" b="1" i="0">
                 <a:solidFill>
                   <a:srgbClr val="3E2C1E"/>
                 </a:solidFill>
                 <a:latin typeface="Georgia"/>
               </a:rPr>
-              <a:t>Fairness training may over-correct — tipping slightly toward women</a:t>
+              <a:t>Fairness training may over-correct — tipping toward women</a:t>
             </a:r>
           </a:p>
         </p:txBody>
@@ -11434,7 +11434,7 @@
             <a:avLst/>
           </a:prstGeom>
           <a:solidFill>
-            <a:srgbClr val="A9744F"/>
+            <a:srgbClr val="C18150"/>
           </a:solidFill>
           <a:ln>
             <a:noFill/>
@@ -11491,7 +11491,7 @@
               </a:lnSpc>
             </a:pPr>
             <a:r>
-              <a:rPr sz="1100" b="0" i="0">
+              <a:rPr sz="1276" b="0" i="0">
                 <a:solidFill>
                   <a:srgbClr val="9B8571"/>
                 </a:solidFill>
@@ -11600,9 +11600,9 @@
               </a:lnSpc>
             </a:pPr>
             <a:r>
-              <a:rPr sz="1300" b="1" i="0" spc="420">
+              <a:rPr sz="1507" b="1" i="0" spc="420">
                 <a:solidFill>
-                  <a:srgbClr val="A9744F"/>
+                  <a:srgbClr val="C18150"/>
                 </a:solidFill>
                 <a:latin typeface="Calibri"/>
               </a:rPr>
@@ -11627,7 +11627,7 @@
           </a:prstGeom>
           <a:ln w="27940">
             <a:solidFill>
-              <a:srgbClr val="A9744F"/>
+              <a:srgbClr val="C18150"/>
             </a:solidFill>
           </a:ln>
           <a:effectLst/>
@@ -11675,7 +11675,7 @@
               </a:lnSpc>
             </a:pPr>
             <a:r>
-              <a:rPr sz="3300" b="1" i="0">
+              <a:rPr sz="3827" b="1" i="0">
                 <a:solidFill>
                   <a:srgbClr val="3E2C1E"/>
                 </a:solidFill>
@@ -11691,7 +11691,7 @@
               </a:lnSpc>
             </a:pPr>
             <a:r>
-              <a:rPr sz="3300" b="1" i="0">
+              <a:rPr sz="3827" b="1" i="0">
                 <a:solidFill>
                   <a:srgbClr val="3E2C1E"/>
                 </a:solidFill>
@@ -11700,9 +11700,9 @@
               <a:t/>
             </a:r>
             <a:r>
-              <a:rPr sz="3300" b="1" i="0">
+              <a:rPr sz="3827" b="1" i="0">
                 <a:solidFill>
-                  <a:srgbClr val="B0563A"/>
+                  <a:srgbClr val="CE5A38"/>
                 </a:solidFill>
                 <a:latin typeface="Georgia"/>
               </a:rPr>
@@ -11739,9 +11739,9 @@
               </a:lnSpc>
             </a:pPr>
             <a:r>
-              <a:rPr sz="2000" b="1" i="1">
+              <a:rPr sz="2320" b="1" i="1">
                 <a:solidFill>
-                  <a:srgbClr val="A9744F"/>
+                  <a:srgbClr val="C18150"/>
                 </a:solidFill>
                 <a:latin typeface="Georgia"/>
               </a:rPr>
@@ -11765,7 +11765,7 @@
             <a:avLst/>
           </a:prstGeom>
           <a:solidFill>
-            <a:srgbClr val="A9744F"/>
+            <a:srgbClr val="C18150"/>
           </a:solidFill>
           <a:ln>
             <a:noFill/>
@@ -11822,7 +11822,7 @@
               </a:lnSpc>
             </a:pPr>
             <a:r>
-              <a:rPr sz="1100" b="0" i="0">
+              <a:rPr sz="1276" b="0" i="0">
                 <a:solidFill>
                   <a:srgbClr val="9B8571"/>
                 </a:solidFill>

--- a/presentation/gender_bias_llm_hiring.pptx
+++ b/presentation/gender_bias_llm_hiring.pptx
@@ -3156,9 +3156,9 @@
           <p:nvPr/>
         </p:nvSpPr>
         <p:spPr>
-          <a:xfrm rot="21060000">
-            <a:off x="868680" y="1143000"/>
-            <a:ext cx="1691640" cy="2148840"/>
+          <a:xfrm>
+            <a:off x="960119" y="1965960"/>
+            <a:ext cx="1828800" cy="2377440"/>
           </a:xfrm>
           <a:prstGeom prst="roundRect">
             <a:avLst>
@@ -3168,7 +3168,7 @@
           <a:solidFill>
             <a:srgbClr val="FCF7EF"/>
           </a:solidFill>
-          <a:ln w="12700">
+          <a:ln w="16510">
             <a:solidFill>
               <a:srgbClr val="E4D5C0"/>
             </a:solidFill>
@@ -3210,9 +3210,415 @@
           <p:nvPr/>
         </p:nvSpPr>
         <p:spPr>
-          <a:xfrm rot="480000">
-            <a:off x="9646920" y="3611880"/>
-            <a:ext cx="1691640" cy="2148840"/>
+          <a:xfrm>
+            <a:off x="1929384" y="2240280"/>
+            <a:ext cx="585216" cy="655441"/>
+          </a:xfrm>
+          <a:prstGeom prst="roundRect">
+            <a:avLst>
+              <a:gd name="adj" fmla="val 12000"/>
+            </a:avLst>
+          </a:prstGeom>
+          <a:solidFill>
+            <a:srgbClr val="E96CA4"/>
+          </a:solidFill>
+          <a:ln>
+            <a:noFill/>
+          </a:ln>
+          <a:effectLst/>
+        </p:spPr>
+        <p:style>
+          <a:lnRef idx="1">
+            <a:schemeClr val="accent1"/>
+          </a:lnRef>
+          <a:fillRef idx="3">
+            <a:schemeClr val="accent1"/>
+          </a:fillRef>
+          <a:effectRef idx="2">
+            <a:schemeClr val="accent1"/>
+          </a:effectRef>
+          <a:fontRef idx="minor">
+            <a:schemeClr val="lt1"/>
+          </a:fontRef>
+        </p:style>
+        <p:txBody>
+          <a:bodyPr rtlCol="0" anchor="ctr"/>
+          <a:lstStyle/>
+          <a:p>
+            <a:pPr algn="ctr"/>
+          </a:p>
+        </p:txBody>
+      </p:sp>
+      <p:sp>
+        <p:nvSpPr>
+          <p:cNvPr id="5" name="Oval 4"/>
+          <p:cNvSpPr/>
+          <p:nvPr/>
+        </p:nvSpPr>
+        <p:spPr>
+          <a:xfrm>
+            <a:off x="2104948" y="2322210"/>
+            <a:ext cx="234086" cy="234086"/>
+          </a:xfrm>
+          <a:prstGeom prst="ellipse">
+            <a:avLst/>
+          </a:prstGeom>
+          <a:solidFill>
+            <a:srgbClr val="FCF7EF"/>
+          </a:solidFill>
+          <a:ln>
+            <a:noFill/>
+          </a:ln>
+          <a:effectLst/>
+        </p:spPr>
+        <p:style>
+          <a:lnRef idx="1">
+            <a:schemeClr val="accent1"/>
+          </a:lnRef>
+          <a:fillRef idx="3">
+            <a:schemeClr val="accent1"/>
+          </a:fillRef>
+          <a:effectRef idx="2">
+            <a:schemeClr val="accent1"/>
+          </a:effectRef>
+          <a:fontRef idx="minor">
+            <a:schemeClr val="lt1"/>
+          </a:fontRef>
+        </p:style>
+        <p:txBody>
+          <a:bodyPr rtlCol="0" anchor="ctr"/>
+          <a:lstStyle/>
+          <a:p>
+            <a:pPr algn="ctr"/>
+          </a:p>
+        </p:txBody>
+      </p:sp>
+      <p:sp>
+        <p:nvSpPr>
+          <p:cNvPr id="6" name="Round Same Side Corner Rectangle 5"/>
+          <p:cNvSpPr/>
+          <p:nvPr/>
+        </p:nvSpPr>
+        <p:spPr>
+          <a:xfrm>
+            <a:off x="2023018" y="2579705"/>
+            <a:ext cx="397946" cy="198973"/>
+          </a:xfrm>
+          <a:prstGeom prst="round2SameRect">
+            <a:avLst>
+              <a:gd name="adj1" fmla="val 50000"/>
+              <a:gd name="adj2" fmla="val 0"/>
+            </a:avLst>
+          </a:prstGeom>
+          <a:solidFill>
+            <a:srgbClr val="FCF7EF"/>
+          </a:solidFill>
+          <a:ln>
+            <a:noFill/>
+          </a:ln>
+          <a:effectLst/>
+        </p:spPr>
+        <p:style>
+          <a:lnRef idx="1">
+            <a:schemeClr val="accent1"/>
+          </a:lnRef>
+          <a:fillRef idx="3">
+            <a:schemeClr val="accent1"/>
+          </a:fillRef>
+          <a:effectRef idx="2">
+            <a:schemeClr val="accent1"/>
+          </a:effectRef>
+          <a:fontRef idx="minor">
+            <a:schemeClr val="lt1"/>
+          </a:fontRef>
+        </p:style>
+        <p:txBody>
+          <a:bodyPr rtlCol="0" anchor="ctr"/>
+          <a:lstStyle/>
+          <a:p>
+            <a:pPr algn="ctr"/>
+          </a:p>
+        </p:txBody>
+      </p:sp>
+      <p:sp>
+        <p:nvSpPr>
+          <p:cNvPr id="7" name="Rounded Rectangle 6"/>
+          <p:cNvSpPr/>
+          <p:nvPr/>
+        </p:nvSpPr>
+        <p:spPr>
+          <a:xfrm>
+            <a:off x="1234439" y="2267712"/>
+            <a:ext cx="731520" cy="142646"/>
+          </a:xfrm>
+          <a:prstGeom prst="roundRect">
+            <a:avLst>
+              <a:gd name="adj" fmla="val 50000"/>
+            </a:avLst>
+          </a:prstGeom>
+          <a:solidFill>
+            <a:srgbClr val="E96CA4"/>
+          </a:solidFill>
+          <a:ln>
+            <a:noFill/>
+          </a:ln>
+          <a:effectLst/>
+        </p:spPr>
+        <p:style>
+          <a:lnRef idx="1">
+            <a:schemeClr val="accent1"/>
+          </a:lnRef>
+          <a:fillRef idx="3">
+            <a:schemeClr val="accent1"/>
+          </a:fillRef>
+          <a:effectRef idx="2">
+            <a:schemeClr val="accent1"/>
+          </a:effectRef>
+          <a:fontRef idx="minor">
+            <a:schemeClr val="lt1"/>
+          </a:fontRef>
+        </p:style>
+        <p:txBody>
+          <a:bodyPr rtlCol="0" anchor="ctr"/>
+          <a:lstStyle/>
+          <a:p>
+            <a:pPr algn="ctr"/>
+          </a:p>
+        </p:txBody>
+      </p:sp>
+      <p:sp>
+        <p:nvSpPr>
+          <p:cNvPr id="8" name="Rounded Rectangle 7"/>
+          <p:cNvSpPr/>
+          <p:nvPr/>
+        </p:nvSpPr>
+        <p:spPr>
+          <a:xfrm>
+            <a:off x="1234439" y="2596896"/>
+            <a:ext cx="585216" cy="106984"/>
+          </a:xfrm>
+          <a:prstGeom prst="roundRect">
+            <a:avLst>
+              <a:gd name="adj" fmla="val 50000"/>
+            </a:avLst>
+          </a:prstGeom>
+          <a:solidFill>
+            <a:srgbClr val="E4D5C0"/>
+          </a:solidFill>
+          <a:ln>
+            <a:noFill/>
+          </a:ln>
+          <a:effectLst/>
+        </p:spPr>
+        <p:style>
+          <a:lnRef idx="1">
+            <a:schemeClr val="accent1"/>
+          </a:lnRef>
+          <a:fillRef idx="3">
+            <a:schemeClr val="accent1"/>
+          </a:fillRef>
+          <a:effectRef idx="2">
+            <a:schemeClr val="accent1"/>
+          </a:effectRef>
+          <a:fontRef idx="minor">
+            <a:schemeClr val="lt1"/>
+          </a:fontRef>
+        </p:style>
+        <p:txBody>
+          <a:bodyPr rtlCol="0" anchor="ctr"/>
+          <a:lstStyle/>
+          <a:p>
+            <a:pPr algn="ctr"/>
+          </a:p>
+        </p:txBody>
+      </p:sp>
+      <p:sp>
+        <p:nvSpPr>
+          <p:cNvPr id="9" name="Rounded Rectangle 8"/>
+          <p:cNvSpPr/>
+          <p:nvPr/>
+        </p:nvSpPr>
+        <p:spPr>
+          <a:xfrm>
+            <a:off x="1234439" y="3035808"/>
+            <a:ext cx="1316736" cy="106984"/>
+          </a:xfrm>
+          <a:prstGeom prst="roundRect">
+            <a:avLst>
+              <a:gd name="adj" fmla="val 50000"/>
+            </a:avLst>
+          </a:prstGeom>
+          <a:solidFill>
+            <a:srgbClr val="E4D5C0"/>
+          </a:solidFill>
+          <a:ln>
+            <a:noFill/>
+          </a:ln>
+          <a:effectLst/>
+        </p:spPr>
+        <p:style>
+          <a:lnRef idx="1">
+            <a:schemeClr val="accent1"/>
+          </a:lnRef>
+          <a:fillRef idx="3">
+            <a:schemeClr val="accent1"/>
+          </a:fillRef>
+          <a:effectRef idx="2">
+            <a:schemeClr val="accent1"/>
+          </a:effectRef>
+          <a:fontRef idx="minor">
+            <a:schemeClr val="lt1"/>
+          </a:fontRef>
+        </p:style>
+        <p:txBody>
+          <a:bodyPr rtlCol="0" anchor="ctr"/>
+          <a:lstStyle/>
+          <a:p>
+            <a:pPr algn="ctr"/>
+          </a:p>
+        </p:txBody>
+      </p:sp>
+      <p:sp>
+        <p:nvSpPr>
+          <p:cNvPr id="10" name="Rounded Rectangle 9"/>
+          <p:cNvSpPr/>
+          <p:nvPr/>
+        </p:nvSpPr>
+        <p:spPr>
+          <a:xfrm>
+            <a:off x="1234439" y="3321100"/>
+            <a:ext cx="1170432" cy="106984"/>
+          </a:xfrm>
+          <a:prstGeom prst="roundRect">
+            <a:avLst>
+              <a:gd name="adj" fmla="val 50000"/>
+            </a:avLst>
+          </a:prstGeom>
+          <a:solidFill>
+            <a:srgbClr val="E4D5C0"/>
+          </a:solidFill>
+          <a:ln>
+            <a:noFill/>
+          </a:ln>
+          <a:effectLst/>
+        </p:spPr>
+        <p:style>
+          <a:lnRef idx="1">
+            <a:schemeClr val="accent1"/>
+          </a:lnRef>
+          <a:fillRef idx="3">
+            <a:schemeClr val="accent1"/>
+          </a:fillRef>
+          <a:effectRef idx="2">
+            <a:schemeClr val="accent1"/>
+          </a:effectRef>
+          <a:fontRef idx="minor">
+            <a:schemeClr val="lt1"/>
+          </a:fontRef>
+        </p:style>
+        <p:txBody>
+          <a:bodyPr rtlCol="0" anchor="ctr"/>
+          <a:lstStyle/>
+          <a:p>
+            <a:pPr algn="ctr"/>
+          </a:p>
+        </p:txBody>
+      </p:sp>
+      <p:sp>
+        <p:nvSpPr>
+          <p:cNvPr id="11" name="Rounded Rectangle 10"/>
+          <p:cNvSpPr/>
+          <p:nvPr/>
+        </p:nvSpPr>
+        <p:spPr>
+          <a:xfrm>
+            <a:off x="1234439" y="3606393"/>
+            <a:ext cx="1243584" cy="106984"/>
+          </a:xfrm>
+          <a:prstGeom prst="roundRect">
+            <a:avLst>
+              <a:gd name="adj" fmla="val 50000"/>
+            </a:avLst>
+          </a:prstGeom>
+          <a:solidFill>
+            <a:srgbClr val="E4D5C0"/>
+          </a:solidFill>
+          <a:ln>
+            <a:noFill/>
+          </a:ln>
+          <a:effectLst/>
+        </p:spPr>
+        <p:style>
+          <a:lnRef idx="1">
+            <a:schemeClr val="accent1"/>
+          </a:lnRef>
+          <a:fillRef idx="3">
+            <a:schemeClr val="accent1"/>
+          </a:fillRef>
+          <a:effectRef idx="2">
+            <a:schemeClr val="accent1"/>
+          </a:effectRef>
+          <a:fontRef idx="minor">
+            <a:schemeClr val="lt1"/>
+          </a:fontRef>
+        </p:style>
+        <p:txBody>
+          <a:bodyPr rtlCol="0" anchor="ctr"/>
+          <a:lstStyle/>
+          <a:p>
+            <a:pPr algn="ctr"/>
+          </a:p>
+        </p:txBody>
+      </p:sp>
+      <p:sp>
+        <p:nvSpPr>
+          <p:cNvPr id="12" name="TextBox 11"/>
+          <p:cNvSpPr txBox="1"/>
+          <p:nvPr/>
+        </p:nvSpPr>
+        <p:spPr>
+          <a:xfrm>
+            <a:off x="960119" y="3772814"/>
+            <a:ext cx="1828800" cy="618134"/>
+          </a:xfrm>
+          <a:prstGeom prst="rect">
+            <a:avLst/>
+          </a:prstGeom>
+          <a:noFill/>
+        </p:spPr>
+        <p:txBody>
+          <a:bodyPr wrap="square" anchor="ctr" lIns="0" rIns="0" tIns="0" bIns="0">
+            <a:spAutoFit/>
+          </a:bodyPr>
+          <a:lstStyle/>
+          <a:p>
+            <a:pPr algn="ctr">
+              <a:lnSpc>
+                <a:spcPct val="100000"/>
+              </a:lnSpc>
+            </a:pPr>
+            <a:r>
+              <a:rPr sz="4176" b="0" i="0">
+                <a:solidFill>
+                  <a:srgbClr val="E96CA4"/>
+                </a:solidFill>
+                <a:latin typeface="Calibri"/>
+              </a:rPr>
+              <a:t>♀</a:t>
+            </a:r>
+          </a:p>
+        </p:txBody>
+      </p:sp>
+      <p:sp>
+        <p:nvSpPr>
+          <p:cNvPr id="13" name="Rounded Rectangle 12"/>
+          <p:cNvSpPr/>
+          <p:nvPr/>
+        </p:nvSpPr>
+        <p:spPr>
+          <a:xfrm>
+            <a:off x="9400032" y="1965960"/>
+            <a:ext cx="1828800" cy="2377440"/>
           </a:xfrm>
           <a:prstGeom prst="roundRect">
             <a:avLst>
@@ -3222,7 +3628,7 @@
           <a:solidFill>
             <a:srgbClr val="FCF7EF"/>
           </a:solidFill>
-          <a:ln w="12700">
+          <a:ln w="16510">
             <a:solidFill>
               <a:srgbClr val="E4D5C0"/>
             </a:solidFill>
@@ -3259,14 +3665,381 @@
       </p:sp>
       <p:sp>
         <p:nvSpPr>
-          <p:cNvPr id="5" name="TextBox 4"/>
+          <p:cNvPr id="14" name="Rounded Rectangle 13"/>
+          <p:cNvSpPr/>
+          <p:nvPr/>
+        </p:nvSpPr>
+        <p:spPr>
+          <a:xfrm>
+            <a:off x="10369295" y="2240280"/>
+            <a:ext cx="585216" cy="655441"/>
+          </a:xfrm>
+          <a:prstGeom prst="roundRect">
+            <a:avLst>
+              <a:gd name="adj" fmla="val 12000"/>
+            </a:avLst>
+          </a:prstGeom>
+          <a:solidFill>
+            <a:srgbClr val="5A93DE"/>
+          </a:solidFill>
+          <a:ln>
+            <a:noFill/>
+          </a:ln>
+          <a:effectLst/>
+        </p:spPr>
+        <p:style>
+          <a:lnRef idx="1">
+            <a:schemeClr val="accent1"/>
+          </a:lnRef>
+          <a:fillRef idx="3">
+            <a:schemeClr val="accent1"/>
+          </a:fillRef>
+          <a:effectRef idx="2">
+            <a:schemeClr val="accent1"/>
+          </a:effectRef>
+          <a:fontRef idx="minor">
+            <a:schemeClr val="lt1"/>
+          </a:fontRef>
+        </p:style>
+        <p:txBody>
+          <a:bodyPr rtlCol="0" anchor="ctr"/>
+          <a:lstStyle/>
+          <a:p>
+            <a:pPr algn="ctr"/>
+          </a:p>
+        </p:txBody>
+      </p:sp>
+      <p:sp>
+        <p:nvSpPr>
+          <p:cNvPr id="15" name="Oval 14"/>
+          <p:cNvSpPr/>
+          <p:nvPr/>
+        </p:nvSpPr>
+        <p:spPr>
+          <a:xfrm>
+            <a:off x="10544860" y="2322210"/>
+            <a:ext cx="234086" cy="234086"/>
+          </a:xfrm>
+          <a:prstGeom prst="ellipse">
+            <a:avLst/>
+          </a:prstGeom>
+          <a:solidFill>
+            <a:srgbClr val="FCF7EF"/>
+          </a:solidFill>
+          <a:ln>
+            <a:noFill/>
+          </a:ln>
+          <a:effectLst/>
+        </p:spPr>
+        <p:style>
+          <a:lnRef idx="1">
+            <a:schemeClr val="accent1"/>
+          </a:lnRef>
+          <a:fillRef idx="3">
+            <a:schemeClr val="accent1"/>
+          </a:fillRef>
+          <a:effectRef idx="2">
+            <a:schemeClr val="accent1"/>
+          </a:effectRef>
+          <a:fontRef idx="minor">
+            <a:schemeClr val="lt1"/>
+          </a:fontRef>
+        </p:style>
+        <p:txBody>
+          <a:bodyPr rtlCol="0" anchor="ctr"/>
+          <a:lstStyle/>
+          <a:p>
+            <a:pPr algn="ctr"/>
+          </a:p>
+        </p:txBody>
+      </p:sp>
+      <p:sp>
+        <p:nvSpPr>
+          <p:cNvPr id="16" name="Round Same Side Corner Rectangle 15"/>
+          <p:cNvSpPr/>
+          <p:nvPr/>
+        </p:nvSpPr>
+        <p:spPr>
+          <a:xfrm>
+            <a:off x="10462930" y="2579705"/>
+            <a:ext cx="397946" cy="198973"/>
+          </a:xfrm>
+          <a:prstGeom prst="round2SameRect">
+            <a:avLst>
+              <a:gd name="adj1" fmla="val 50000"/>
+              <a:gd name="adj2" fmla="val 0"/>
+            </a:avLst>
+          </a:prstGeom>
+          <a:solidFill>
+            <a:srgbClr val="FCF7EF"/>
+          </a:solidFill>
+          <a:ln>
+            <a:noFill/>
+          </a:ln>
+          <a:effectLst/>
+        </p:spPr>
+        <p:style>
+          <a:lnRef idx="1">
+            <a:schemeClr val="accent1"/>
+          </a:lnRef>
+          <a:fillRef idx="3">
+            <a:schemeClr val="accent1"/>
+          </a:fillRef>
+          <a:effectRef idx="2">
+            <a:schemeClr val="accent1"/>
+          </a:effectRef>
+          <a:fontRef idx="minor">
+            <a:schemeClr val="lt1"/>
+          </a:fontRef>
+        </p:style>
+        <p:txBody>
+          <a:bodyPr rtlCol="0" anchor="ctr"/>
+          <a:lstStyle/>
+          <a:p>
+            <a:pPr algn="ctr"/>
+          </a:p>
+        </p:txBody>
+      </p:sp>
+      <p:sp>
+        <p:nvSpPr>
+          <p:cNvPr id="17" name="Rounded Rectangle 16"/>
+          <p:cNvSpPr/>
+          <p:nvPr/>
+        </p:nvSpPr>
+        <p:spPr>
+          <a:xfrm>
+            <a:off x="9674352" y="2267712"/>
+            <a:ext cx="731520" cy="142646"/>
+          </a:xfrm>
+          <a:prstGeom prst="roundRect">
+            <a:avLst>
+              <a:gd name="adj" fmla="val 50000"/>
+            </a:avLst>
+          </a:prstGeom>
+          <a:solidFill>
+            <a:srgbClr val="5A93DE"/>
+          </a:solidFill>
+          <a:ln>
+            <a:noFill/>
+          </a:ln>
+          <a:effectLst/>
+        </p:spPr>
+        <p:style>
+          <a:lnRef idx="1">
+            <a:schemeClr val="accent1"/>
+          </a:lnRef>
+          <a:fillRef idx="3">
+            <a:schemeClr val="accent1"/>
+          </a:fillRef>
+          <a:effectRef idx="2">
+            <a:schemeClr val="accent1"/>
+          </a:effectRef>
+          <a:fontRef idx="minor">
+            <a:schemeClr val="lt1"/>
+          </a:fontRef>
+        </p:style>
+        <p:txBody>
+          <a:bodyPr rtlCol="0" anchor="ctr"/>
+          <a:lstStyle/>
+          <a:p>
+            <a:pPr algn="ctr"/>
+          </a:p>
+        </p:txBody>
+      </p:sp>
+      <p:sp>
+        <p:nvSpPr>
+          <p:cNvPr id="18" name="Rounded Rectangle 17"/>
+          <p:cNvSpPr/>
+          <p:nvPr/>
+        </p:nvSpPr>
+        <p:spPr>
+          <a:xfrm>
+            <a:off x="9674352" y="2596896"/>
+            <a:ext cx="585216" cy="106984"/>
+          </a:xfrm>
+          <a:prstGeom prst="roundRect">
+            <a:avLst>
+              <a:gd name="adj" fmla="val 50000"/>
+            </a:avLst>
+          </a:prstGeom>
+          <a:solidFill>
+            <a:srgbClr val="E4D5C0"/>
+          </a:solidFill>
+          <a:ln>
+            <a:noFill/>
+          </a:ln>
+          <a:effectLst/>
+        </p:spPr>
+        <p:style>
+          <a:lnRef idx="1">
+            <a:schemeClr val="accent1"/>
+          </a:lnRef>
+          <a:fillRef idx="3">
+            <a:schemeClr val="accent1"/>
+          </a:fillRef>
+          <a:effectRef idx="2">
+            <a:schemeClr val="accent1"/>
+          </a:effectRef>
+          <a:fontRef idx="minor">
+            <a:schemeClr val="lt1"/>
+          </a:fontRef>
+        </p:style>
+        <p:txBody>
+          <a:bodyPr rtlCol="0" anchor="ctr"/>
+          <a:lstStyle/>
+          <a:p>
+            <a:pPr algn="ctr"/>
+          </a:p>
+        </p:txBody>
+      </p:sp>
+      <p:sp>
+        <p:nvSpPr>
+          <p:cNvPr id="19" name="Rounded Rectangle 18"/>
+          <p:cNvSpPr/>
+          <p:nvPr/>
+        </p:nvSpPr>
+        <p:spPr>
+          <a:xfrm>
+            <a:off x="9674352" y="3035808"/>
+            <a:ext cx="1316736" cy="106984"/>
+          </a:xfrm>
+          <a:prstGeom prst="roundRect">
+            <a:avLst>
+              <a:gd name="adj" fmla="val 50000"/>
+            </a:avLst>
+          </a:prstGeom>
+          <a:solidFill>
+            <a:srgbClr val="E4D5C0"/>
+          </a:solidFill>
+          <a:ln>
+            <a:noFill/>
+          </a:ln>
+          <a:effectLst/>
+        </p:spPr>
+        <p:style>
+          <a:lnRef idx="1">
+            <a:schemeClr val="accent1"/>
+          </a:lnRef>
+          <a:fillRef idx="3">
+            <a:schemeClr val="accent1"/>
+          </a:fillRef>
+          <a:effectRef idx="2">
+            <a:schemeClr val="accent1"/>
+          </a:effectRef>
+          <a:fontRef idx="minor">
+            <a:schemeClr val="lt1"/>
+          </a:fontRef>
+        </p:style>
+        <p:txBody>
+          <a:bodyPr rtlCol="0" anchor="ctr"/>
+          <a:lstStyle/>
+          <a:p>
+            <a:pPr algn="ctr"/>
+          </a:p>
+        </p:txBody>
+      </p:sp>
+      <p:sp>
+        <p:nvSpPr>
+          <p:cNvPr id="20" name="Rounded Rectangle 19"/>
+          <p:cNvSpPr/>
+          <p:nvPr/>
+        </p:nvSpPr>
+        <p:spPr>
+          <a:xfrm>
+            <a:off x="9674352" y="3321100"/>
+            <a:ext cx="1170432" cy="106984"/>
+          </a:xfrm>
+          <a:prstGeom prst="roundRect">
+            <a:avLst>
+              <a:gd name="adj" fmla="val 50000"/>
+            </a:avLst>
+          </a:prstGeom>
+          <a:solidFill>
+            <a:srgbClr val="E4D5C0"/>
+          </a:solidFill>
+          <a:ln>
+            <a:noFill/>
+          </a:ln>
+          <a:effectLst/>
+        </p:spPr>
+        <p:style>
+          <a:lnRef idx="1">
+            <a:schemeClr val="accent1"/>
+          </a:lnRef>
+          <a:fillRef idx="3">
+            <a:schemeClr val="accent1"/>
+          </a:fillRef>
+          <a:effectRef idx="2">
+            <a:schemeClr val="accent1"/>
+          </a:effectRef>
+          <a:fontRef idx="minor">
+            <a:schemeClr val="lt1"/>
+          </a:fontRef>
+        </p:style>
+        <p:txBody>
+          <a:bodyPr rtlCol="0" anchor="ctr"/>
+          <a:lstStyle/>
+          <a:p>
+            <a:pPr algn="ctr"/>
+          </a:p>
+        </p:txBody>
+      </p:sp>
+      <p:sp>
+        <p:nvSpPr>
+          <p:cNvPr id="21" name="Rounded Rectangle 20"/>
+          <p:cNvSpPr/>
+          <p:nvPr/>
+        </p:nvSpPr>
+        <p:spPr>
+          <a:xfrm>
+            <a:off x="9674352" y="3606393"/>
+            <a:ext cx="1243584" cy="106984"/>
+          </a:xfrm>
+          <a:prstGeom prst="roundRect">
+            <a:avLst>
+              <a:gd name="adj" fmla="val 50000"/>
+            </a:avLst>
+          </a:prstGeom>
+          <a:solidFill>
+            <a:srgbClr val="E4D5C0"/>
+          </a:solidFill>
+          <a:ln>
+            <a:noFill/>
+          </a:ln>
+          <a:effectLst/>
+        </p:spPr>
+        <p:style>
+          <a:lnRef idx="1">
+            <a:schemeClr val="accent1"/>
+          </a:lnRef>
+          <a:fillRef idx="3">
+            <a:schemeClr val="accent1"/>
+          </a:fillRef>
+          <a:effectRef idx="2">
+            <a:schemeClr val="accent1"/>
+          </a:effectRef>
+          <a:fontRef idx="minor">
+            <a:schemeClr val="lt1"/>
+          </a:fontRef>
+        </p:style>
+        <p:txBody>
+          <a:bodyPr rtlCol="0" anchor="ctr"/>
+          <a:lstStyle/>
+          <a:p>
+            <a:pPr algn="ctr"/>
+          </a:p>
+        </p:txBody>
+      </p:sp>
+      <p:sp>
+        <p:nvSpPr>
+          <p:cNvPr id="22" name="TextBox 21"/>
           <p:cNvSpPr txBox="1"/>
           <p:nvPr/>
         </p:nvSpPr>
         <p:spPr>
           <a:xfrm>
-            <a:off x="3169767" y="1325880"/>
-            <a:ext cx="5852160" cy="1280160"/>
+            <a:off x="9400032" y="3772814"/>
+            <a:ext cx="1828800" cy="618134"/>
           </a:xfrm>
           <a:prstGeom prst="rect">
             <a:avLst/>
@@ -3285,25 +4058,7 @@
               </a:lnSpc>
             </a:pPr>
             <a:r>
-              <a:rPr sz="7192" b="0" i="0">
-                <a:solidFill>
-                  <a:srgbClr val="E96CA4"/>
-                </a:solidFill>
-                <a:latin typeface="Calibri"/>
-              </a:rPr>
-              <a:t>♀</a:t>
-            </a:r>
-            <a:r>
-              <a:rPr sz="7192" b="0" i="0">
-                <a:solidFill>
-                  <a:srgbClr val="9B8571"/>
-                </a:solidFill>
-                <a:latin typeface="Calibri"/>
-              </a:rPr>
-              <a:t>   vs   </a:t>
-            </a:r>
-            <a:r>
-              <a:rPr sz="7192" b="0" i="0">
+              <a:rPr sz="4176" b="0" i="0">
                 <a:solidFill>
                   <a:srgbClr val="5A93DE"/>
                 </a:solidFill>
@@ -3316,14 +4071,14 @@
       </p:sp>
       <p:sp>
         <p:nvSpPr>
-          <p:cNvPr id="6" name="TextBox 5"/>
+          <p:cNvPr id="23" name="TextBox 22"/>
           <p:cNvSpPr txBox="1"/>
           <p:nvPr/>
         </p:nvSpPr>
         <p:spPr>
           <a:xfrm>
-            <a:off x="518007" y="2880360"/>
-            <a:ext cx="11155680" cy="1737360"/>
+            <a:off x="2895447" y="1874519"/>
+            <a:ext cx="6400800" cy="1371600"/>
           </a:xfrm>
           <a:prstGeom prst="rect">
             <a:avLst/>
@@ -3338,11 +4093,11 @@
           <a:p>
             <a:pPr algn="ctr">
               <a:lnSpc>
-                <a:spcPct val="103000"/>
+                <a:spcPct val="104000"/>
               </a:lnSpc>
             </a:pPr>
             <a:r>
-              <a:rPr sz="4291" b="1" i="0">
+              <a:rPr sz="3944" b="1" i="0">
                 <a:solidFill>
                   <a:srgbClr val="3E2C1E"/>
                 </a:solidFill>
@@ -3351,7 +4106,7 @@
               <a:t>Gender bias when </a:t>
             </a:r>
             <a:r>
-              <a:rPr sz="4291" b="1" i="0">
+              <a:rPr sz="3944" b="1" i="0">
                 <a:solidFill>
                   <a:srgbClr val="CE5A38"/>
                 </a:solidFill>
@@ -3360,27 +4115,43 @@
               <a:t>AI</a:t>
             </a:r>
             <a:r>
-              <a:rPr sz="4291" b="1" i="0">
+              <a:rPr sz="3944" b="1" i="0">
                 <a:solidFill>
                   <a:srgbClr val="3E2C1E"/>
                 </a:solidFill>
                 <a:latin typeface="Georgia"/>
               </a:rPr>
-              <a:t> screens resumes</a:t>
+              <a:t/>
             </a:r>
           </a:p>
-        </p:txBody>
-      </p:sp>
-      <p:sp>
-        <p:nvSpPr>
-          <p:cNvPr id="7" name="TextBox 6"/>
+          <a:p>
+            <a:pPr algn="ctr">
+              <a:lnSpc>
+                <a:spcPct val="104000"/>
+              </a:lnSpc>
+            </a:pPr>
+            <a:r>
+              <a:rPr sz="3944" b="1" i="0">
+                <a:solidFill>
+                  <a:srgbClr val="3E2C1E"/>
+                </a:solidFill>
+                <a:latin typeface="Georgia"/>
+              </a:rPr>
+              <a:t>screens resumes</a:t>
+            </a:r>
+          </a:p>
+        </p:txBody>
+      </p:sp>
+      <p:sp>
+        <p:nvSpPr>
+          <p:cNvPr id="24" name="TextBox 23"/>
           <p:cNvSpPr txBox="1"/>
           <p:nvPr/>
         </p:nvSpPr>
         <p:spPr>
           <a:xfrm>
-            <a:off x="2438247" y="4800600"/>
-            <a:ext cx="7315200" cy="457200"/>
+            <a:off x="2804007" y="3749039"/>
+            <a:ext cx="6583680" cy="365760"/>
           </a:xfrm>
           <a:prstGeom prst="rect">
             <a:avLst/>
@@ -3399,7 +4170,85 @@
               </a:lnSpc>
             </a:pPr>
             <a:r>
-              <a:rPr sz="1739" b="1" i="0" spc="340">
+              <a:rPr sz="1391" b="1" i="0" spc="300">
+                <a:solidFill>
+                  <a:srgbClr val="C18150"/>
+                </a:solidFill>
+                <a:latin typeface="Calibri"/>
+              </a:rPr>
+              <a:t>BASED ON THE STUDY</a:t>
+            </a:r>
+          </a:p>
+        </p:txBody>
+      </p:sp>
+      <p:sp>
+        <p:nvSpPr>
+          <p:cNvPr id="25" name="TextBox 24"/>
+          <p:cNvSpPr txBox="1"/>
+          <p:nvPr/>
+        </p:nvSpPr>
+        <p:spPr>
+          <a:xfrm>
+            <a:off x="2712567" y="4114800"/>
+            <a:ext cx="6766560" cy="1234440"/>
+          </a:xfrm>
+          <a:prstGeom prst="rect">
+            <a:avLst/>
+          </a:prstGeom>
+          <a:noFill/>
+        </p:spPr>
+        <p:txBody>
+          <a:bodyPr wrap="square" anchor="ctr" lIns="0" rIns="0" tIns="0" bIns="0">
+            <a:spAutoFit/>
+          </a:bodyPr>
+          <a:lstStyle/>
+          <a:p>
+            <a:pPr algn="ctr">
+              <a:lnSpc>
+                <a:spcPct val="114000"/>
+              </a:lnSpc>
+            </a:pPr>
+            <a:r>
+              <a:rPr sz="1507" b="0" i="1">
+                <a:solidFill>
+                  <a:srgbClr val="3E2C1E"/>
+                </a:solidFill>
+                <a:latin typeface="Georgia"/>
+              </a:rPr>
+              <a:t>“Gender Bias in LLM Hiring Decisions: Evidence from a Japanese Context and Evaluation of Mitigation Strategies”</a:t>
+            </a:r>
+          </a:p>
+        </p:txBody>
+      </p:sp>
+      <p:sp>
+        <p:nvSpPr>
+          <p:cNvPr id="26" name="TextBox 25"/>
+          <p:cNvSpPr txBox="1"/>
+          <p:nvPr/>
+        </p:nvSpPr>
+        <p:spPr>
+          <a:xfrm>
+            <a:off x="2438247" y="5715000"/>
+            <a:ext cx="7315200" cy="411480"/>
+          </a:xfrm>
+          <a:prstGeom prst="rect">
+            <a:avLst/>
+          </a:prstGeom>
+          <a:noFill/>
+        </p:spPr>
+        <p:txBody>
+          <a:bodyPr wrap="square" anchor="ctr" lIns="0" rIns="0" tIns="0" bIns="0">
+            <a:spAutoFit/>
+          </a:bodyPr>
+          <a:lstStyle/>
+          <a:p>
+            <a:pPr algn="ctr">
+              <a:lnSpc>
+                <a:spcPct val="100000"/>
+              </a:lnSpc>
+            </a:pPr>
+            <a:r>
+              <a:rPr sz="1623" b="1" i="0" spc="300">
                 <a:solidFill>
                   <a:srgbClr val="C18150"/>
                 </a:solidFill>
@@ -3545,8 +4394,8 @@
         </p:nvSpPr>
         <p:spPr>
           <a:xfrm>
-            <a:off x="1523847" y="3749039"/>
-            <a:ext cx="9144000" cy="914400"/>
+            <a:off x="1523847" y="3703320"/>
+            <a:ext cx="9144000" cy="1005840"/>
           </a:xfrm>
           <a:prstGeom prst="rect">
             <a:avLst/>
@@ -3565,7 +4414,7 @@
               </a:lnSpc>
             </a:pPr>
             <a:r>
-              <a:rPr sz="5567" b="1" i="0">
+              <a:rPr sz="6495" b="1" i="0">
                 <a:solidFill>
                   <a:srgbClr val="3E2C1E"/>
                 </a:solidFill>
@@ -3693,8 +4542,8 @@
         </p:nvSpPr>
         <p:spPr>
           <a:xfrm>
-            <a:off x="2438247" y="566928"/>
-            <a:ext cx="7315200" cy="365760"/>
+            <a:off x="2438247" y="530352"/>
+            <a:ext cx="7315200" cy="402336"/>
           </a:xfrm>
           <a:prstGeom prst="rect">
             <a:avLst/>
@@ -3713,7 +4562,7 @@
               </a:lnSpc>
             </a:pPr>
             <a:r>
-              <a:rPr sz="1507" b="1" i="0" spc="420">
+              <a:rPr sz="1855" b="1" i="0" spc="420">
                 <a:solidFill>
                   <a:srgbClr val="C18150"/>
                 </a:solidFill>
@@ -3732,13 +4581,13 @@
         </p:nvCxnSpPr>
         <p:spPr>
           <a:xfrm>
-            <a:off x="5803239" y="987552"/>
-            <a:ext cx="585216" cy="0"/>
+            <a:off x="5730087" y="1024128"/>
+            <a:ext cx="731520" cy="0"/>
           </a:xfrm>
           <a:prstGeom prst="bentConnector3">
             <a:avLst/>
           </a:prstGeom>
-          <a:ln w="27940">
+          <a:ln w="30480">
             <a:solidFill>
               <a:srgbClr val="C18150"/>
             </a:solidFill>
@@ -3775,7 +4624,7 @@
             <a:avLst/>
           </a:prstGeom>
           <a:solidFill>
-            <a:srgbClr val="6B4A34"/>
+            <a:srgbClr val="C18150"/>
           </a:solidFill>
           <a:ln>
             <a:noFill/>
@@ -3828,7 +4677,7 @@
             </a:avLst>
           </a:prstGeom>
           <a:solidFill>
-            <a:srgbClr val="6B4A34"/>
+            <a:srgbClr val="C18150"/>
           </a:solidFill>
           <a:ln>
             <a:noFill/>
@@ -4538,9 +5387,9 @@
               </a:lnSpc>
             </a:pPr>
             <a:r>
-              <a:rPr sz="1507" b="1" i="0" spc="240">
+              <a:rPr sz="1623" b="1" i="0" spc="240">
                 <a:solidFill>
-                  <a:srgbClr val="6B4A34"/>
+                  <a:srgbClr val="C18150"/>
                 </a:solidFill>
                 <a:latin typeface="Calibri"/>
               </a:rPr>
@@ -4577,7 +5426,7 @@
               </a:lnSpc>
             </a:pPr>
             <a:r>
-              <a:rPr sz="1507" b="1" i="0" spc="240">
+              <a:rPr sz="1623" b="1" i="0" spc="240">
                 <a:solidFill>
                   <a:srgbClr val="CE5A38"/>
                 </a:solidFill>
@@ -4616,7 +5465,7 @@
               </a:lnSpc>
             </a:pPr>
             <a:r>
-              <a:rPr sz="1507" b="1" i="0" spc="240">
+              <a:rPr sz="1623" b="1" i="0" spc="240">
                 <a:solidFill>
                   <a:srgbClr val="6B4A34"/>
                 </a:solidFill>
@@ -4635,8 +5484,8 @@
         </p:nvSpPr>
         <p:spPr>
           <a:xfrm>
-            <a:off x="1158087" y="5212080"/>
-            <a:ext cx="9875520" cy="640080"/>
+            <a:off x="335127" y="5166360"/>
+            <a:ext cx="11521440" cy="731520"/>
           </a:xfrm>
           <a:prstGeom prst="rect">
             <a:avLst/>
@@ -4655,7 +5504,7 @@
               </a:lnSpc>
             </a:pPr>
             <a:r>
-              <a:rPr sz="2899" b="1" i="0">
+              <a:rPr sz="3015" b="1" i="0">
                 <a:solidFill>
                   <a:srgbClr val="3E2C1E"/>
                 </a:solidFill>
@@ -4827,8 +5676,8 @@
         </p:nvSpPr>
         <p:spPr>
           <a:xfrm>
-            <a:off x="2438247" y="566928"/>
-            <a:ext cx="7315200" cy="365760"/>
+            <a:off x="2438247" y="530352"/>
+            <a:ext cx="7315200" cy="402336"/>
           </a:xfrm>
           <a:prstGeom prst="rect">
             <a:avLst/>
@@ -4847,7 +5696,7 @@
               </a:lnSpc>
             </a:pPr>
             <a:r>
-              <a:rPr sz="1507" b="1" i="0" spc="420">
+              <a:rPr sz="1855" b="1" i="0" spc="420">
                 <a:solidFill>
                   <a:srgbClr val="C18150"/>
                 </a:solidFill>
@@ -4866,13 +5715,13 @@
         </p:nvCxnSpPr>
         <p:spPr>
           <a:xfrm>
-            <a:off x="5803239" y="987552"/>
-            <a:ext cx="585216" cy="0"/>
+            <a:off x="5730087" y="1024128"/>
+            <a:ext cx="731520" cy="0"/>
           </a:xfrm>
           <a:prstGeom prst="bentConnector3">
             <a:avLst/>
           </a:prstGeom>
-          <a:ln w="27940">
+          <a:ln w="30480">
             <a:solidFill>
               <a:srgbClr val="C18150"/>
             </a:solidFill>
@@ -5748,8 +6597,8 @@
         </p:nvSpPr>
         <p:spPr>
           <a:xfrm>
-            <a:off x="2438247" y="566928"/>
-            <a:ext cx="7315200" cy="365760"/>
+            <a:off x="2438247" y="530352"/>
+            <a:ext cx="7315200" cy="402336"/>
           </a:xfrm>
           <a:prstGeom prst="rect">
             <a:avLst/>
@@ -5768,7 +6617,7 @@
               </a:lnSpc>
             </a:pPr>
             <a:r>
-              <a:rPr sz="1507" b="1" i="0" spc="420">
+              <a:rPr sz="1855" b="1" i="0" spc="420">
                 <a:solidFill>
                   <a:srgbClr val="CE5A38"/>
                 </a:solidFill>
@@ -5787,13 +6636,13 @@
         </p:nvCxnSpPr>
         <p:spPr>
           <a:xfrm>
-            <a:off x="5803239" y="987552"/>
-            <a:ext cx="585216" cy="0"/>
+            <a:off x="5730087" y="1024128"/>
+            <a:ext cx="731520" cy="0"/>
           </a:xfrm>
           <a:prstGeom prst="bentConnector3">
             <a:avLst/>
           </a:prstGeom>
-          <a:ln w="27940">
+          <a:ln w="30480">
             <a:solidFill>
               <a:srgbClr val="CE5A38"/>
             </a:solidFill>
@@ -6258,8 +7107,8 @@
         </p:nvSpPr>
         <p:spPr>
           <a:xfrm>
-            <a:off x="975207" y="5440680"/>
-            <a:ext cx="10241280" cy="822960"/>
+            <a:off x="335127" y="5394960"/>
+            <a:ext cx="11521440" cy="822960"/>
           </a:xfrm>
           <a:prstGeom prst="rect">
             <a:avLst/>
@@ -6278,7 +7127,7 @@
               </a:lnSpc>
             </a:pPr>
             <a:r>
-              <a:rPr sz="2783" b="1" i="0">
+              <a:rPr sz="3015" b="1" i="0">
                 <a:solidFill>
                   <a:srgbClr val="3E2C1E"/>
                 </a:solidFill>
@@ -6450,8 +7299,8 @@
         </p:nvSpPr>
         <p:spPr>
           <a:xfrm>
-            <a:off x="2438247" y="566928"/>
-            <a:ext cx="7315200" cy="365760"/>
+            <a:off x="2438247" y="530352"/>
+            <a:ext cx="7315200" cy="402336"/>
           </a:xfrm>
           <a:prstGeom prst="rect">
             <a:avLst/>
@@ -6470,7 +7319,7 @@
               </a:lnSpc>
             </a:pPr>
             <a:r>
-              <a:rPr sz="1507" b="1" i="0" spc="420">
+              <a:rPr sz="1855" b="1" i="0" spc="420">
                 <a:solidFill>
                   <a:srgbClr val="C18150"/>
                 </a:solidFill>
@@ -6489,13 +7338,13 @@
         </p:nvCxnSpPr>
         <p:spPr>
           <a:xfrm>
-            <a:off x="5803239" y="987552"/>
-            <a:ext cx="585216" cy="0"/>
+            <a:off x="5730087" y="1024128"/>
+            <a:ext cx="731520" cy="0"/>
           </a:xfrm>
           <a:prstGeom prst="bentConnector3">
             <a:avLst/>
           </a:prstGeom>
-          <a:ln w="27940">
+          <a:ln w="30480">
             <a:solidFill>
               <a:srgbClr val="C18150"/>
             </a:solidFill>
@@ -7484,8 +8333,8 @@
         </p:nvSpPr>
         <p:spPr>
           <a:xfrm>
-            <a:off x="975207" y="4572000"/>
-            <a:ext cx="10241280" cy="548640"/>
+            <a:off x="335127" y="4572000"/>
+            <a:ext cx="11521440" cy="548640"/>
           </a:xfrm>
           <a:prstGeom prst="rect">
             <a:avLst/>
@@ -7504,7 +8353,7 @@
               </a:lnSpc>
             </a:pPr>
             <a:r>
-              <a:rPr sz="2783" b="1" i="0">
+              <a:rPr sz="3015" b="1" i="0">
                 <a:solidFill>
                   <a:srgbClr val="3E2C1E"/>
                 </a:solidFill>
@@ -8400,8 +9249,8 @@
         </p:nvSpPr>
         <p:spPr>
           <a:xfrm>
-            <a:off x="2438247" y="566928"/>
-            <a:ext cx="7315200" cy="365760"/>
+            <a:off x="2438247" y="530352"/>
+            <a:ext cx="7315200" cy="402336"/>
           </a:xfrm>
           <a:prstGeom prst="rect">
             <a:avLst/>
@@ -8420,7 +9269,7 @@
               </a:lnSpc>
             </a:pPr>
             <a:r>
-              <a:rPr sz="1507" b="1" i="0" spc="420">
+              <a:rPr sz="1855" b="1" i="0" spc="420">
                 <a:solidFill>
                   <a:srgbClr val="CE5A38"/>
                 </a:solidFill>
@@ -8439,13 +9288,13 @@
         </p:nvCxnSpPr>
         <p:spPr>
           <a:xfrm>
-            <a:off x="5803239" y="987552"/>
-            <a:ext cx="585216" cy="0"/>
+            <a:off x="5730087" y="1024128"/>
+            <a:ext cx="731520" cy="0"/>
           </a:xfrm>
           <a:prstGeom prst="bentConnector3">
             <a:avLst/>
           </a:prstGeom>
-          <a:ln w="27940">
+          <a:ln w="30480">
             <a:solidFill>
               <a:srgbClr val="CE5A38"/>
             </a:solidFill>
@@ -9564,8 +10413,8 @@
         </p:nvSpPr>
         <p:spPr>
           <a:xfrm>
-            <a:off x="700887" y="5623560"/>
-            <a:ext cx="10789920" cy="731520"/>
+            <a:off x="243687" y="5577840"/>
+            <a:ext cx="11704320" cy="822960"/>
           </a:xfrm>
           <a:prstGeom prst="rect">
             <a:avLst/>
@@ -9584,7 +10433,7 @@
               </a:lnSpc>
             </a:pPr>
             <a:r>
-              <a:rPr sz="2899" b="1" i="0">
+              <a:rPr sz="3015" b="1" i="0">
                 <a:solidFill>
                   <a:srgbClr val="3E2C1E"/>
                 </a:solidFill>
@@ -9593,7 +10442,7 @@
               <a:t>Female names scored </a:t>
             </a:r>
             <a:r>
-              <a:rPr sz="2899" b="1" i="0">
+              <a:rPr sz="3015" b="1" i="0">
                 <a:solidFill>
                   <a:srgbClr val="E96CA4"/>
                 </a:solidFill>
@@ -9602,7 +10451,7 @@
               <a:t>slightly higher</a:t>
             </a:r>
             <a:r>
-              <a:rPr sz="2899" b="1" i="0">
+              <a:rPr sz="3015" b="1" i="0">
                 <a:solidFill>
                   <a:srgbClr val="3E2C1E"/>
                 </a:solidFill>
@@ -9774,8 +10623,8 @@
         </p:nvSpPr>
         <p:spPr>
           <a:xfrm>
-            <a:off x="2438247" y="566928"/>
-            <a:ext cx="7315200" cy="365760"/>
+            <a:off x="2438247" y="530352"/>
+            <a:ext cx="7315200" cy="402336"/>
           </a:xfrm>
           <a:prstGeom prst="rect">
             <a:avLst/>
@@ -9794,7 +10643,7 @@
               </a:lnSpc>
             </a:pPr>
             <a:r>
-              <a:rPr sz="1507" b="1" i="0" spc="420">
+              <a:rPr sz="1855" b="1" i="0" spc="420">
                 <a:solidFill>
                   <a:srgbClr val="DCA62A"/>
                 </a:solidFill>
@@ -9813,13 +10662,13 @@
         </p:nvCxnSpPr>
         <p:spPr>
           <a:xfrm>
-            <a:off x="5803239" y="987552"/>
-            <a:ext cx="585216" cy="0"/>
+            <a:off x="5730087" y="1024128"/>
+            <a:ext cx="731520" cy="0"/>
           </a:xfrm>
           <a:prstGeom prst="bentConnector3">
             <a:avLst/>
           </a:prstGeom>
-          <a:ln w="27940">
+          <a:ln w="30480">
             <a:solidFill>
               <a:srgbClr val="DCA62A"/>
             </a:solidFill>
@@ -10725,8 +11574,8 @@
         </p:nvSpPr>
         <p:spPr>
           <a:xfrm>
-            <a:off x="700887" y="5440680"/>
-            <a:ext cx="10789920" cy="640080"/>
+            <a:off x="518007" y="5440680"/>
+            <a:ext cx="11155680" cy="640080"/>
           </a:xfrm>
           <a:prstGeom prst="rect">
             <a:avLst/>
@@ -10745,7 +11594,7 @@
               </a:lnSpc>
             </a:pPr>
             <a:r>
-              <a:rPr sz="2899" b="1" i="0">
+              <a:rPr sz="3247" b="1" i="0">
                 <a:solidFill>
                   <a:srgbClr val="3E2C1E"/>
                 </a:solidFill>
@@ -10917,8 +11766,8 @@
         </p:nvSpPr>
         <p:spPr>
           <a:xfrm>
-            <a:off x="2438247" y="566928"/>
-            <a:ext cx="7315200" cy="365760"/>
+            <a:off x="2438247" y="530352"/>
+            <a:ext cx="7315200" cy="402336"/>
           </a:xfrm>
           <a:prstGeom prst="rect">
             <a:avLst/>
@@ -10937,7 +11786,7 @@
               </a:lnSpc>
             </a:pPr>
             <a:r>
-              <a:rPr sz="1507" b="1" i="0" spc="420">
+              <a:rPr sz="1855" b="1" i="0" spc="420">
                 <a:solidFill>
                   <a:srgbClr val="C18150"/>
                 </a:solidFill>
@@ -10956,13 +11805,13 @@
         </p:nvCxnSpPr>
         <p:spPr>
           <a:xfrm>
-            <a:off x="5803239" y="987552"/>
-            <a:ext cx="585216" cy="0"/>
+            <a:off x="5730087" y="1024128"/>
+            <a:ext cx="731520" cy="0"/>
           </a:xfrm>
           <a:prstGeom prst="bentConnector3">
             <a:avLst/>
           </a:prstGeom>
-          <a:ln w="27940">
+          <a:ln w="30480">
             <a:solidFill>
               <a:srgbClr val="C18150"/>
             </a:solidFill>
@@ -11388,8 +12237,8 @@
         </p:nvSpPr>
         <p:spPr>
           <a:xfrm>
-            <a:off x="518007" y="5486400"/>
-            <a:ext cx="11155680" cy="868680"/>
+            <a:off x="518007" y="5166360"/>
+            <a:ext cx="11155680" cy="1234440"/>
           </a:xfrm>
           <a:prstGeom prst="rect">
             <a:avLst/>
@@ -11404,17 +12253,33 @@
           <a:p>
             <a:pPr algn="ctr">
               <a:lnSpc>
-                <a:spcPct val="104000"/>
+                <a:spcPct val="106000"/>
               </a:lnSpc>
             </a:pPr>
             <a:r>
-              <a:rPr sz="2668" b="1" i="0">
+              <a:rPr sz="3131" b="1" i="0">
                 <a:solidFill>
                   <a:srgbClr val="3E2C1E"/>
                 </a:solidFill>
                 <a:latin typeface="Georgia"/>
               </a:rPr>
-              <a:t>Fairness training may over-correct — tipping toward women</a:t>
+              <a:t>Fairness training may over-correct —</a:t>
+            </a:r>
+          </a:p>
+          <a:p>
+            <a:pPr algn="ctr">
+              <a:lnSpc>
+                <a:spcPct val="106000"/>
+              </a:lnSpc>
+            </a:pPr>
+            <a:r>
+              <a:rPr sz="3131" b="1" i="0">
+                <a:solidFill>
+                  <a:srgbClr val="3E2C1E"/>
+                </a:solidFill>
+                <a:latin typeface="Georgia"/>
+              </a:rPr>
+              <a:t>tipping toward women</a:t>
             </a:r>
           </a:p>
         </p:txBody>
@@ -11580,8 +12445,8 @@
         </p:nvSpPr>
         <p:spPr>
           <a:xfrm>
-            <a:off x="2438247" y="566928"/>
-            <a:ext cx="7315200" cy="365760"/>
+            <a:off x="2438247" y="530352"/>
+            <a:ext cx="7315200" cy="402336"/>
           </a:xfrm>
           <a:prstGeom prst="rect">
             <a:avLst/>
@@ -11600,7 +12465,7 @@
               </a:lnSpc>
             </a:pPr>
             <a:r>
-              <a:rPr sz="1507" b="1" i="0" spc="420">
+              <a:rPr sz="1855" b="1" i="0" spc="420">
                 <a:solidFill>
                   <a:srgbClr val="C18150"/>
                 </a:solidFill>
@@ -11619,13 +12484,13 @@
         </p:nvCxnSpPr>
         <p:spPr>
           <a:xfrm>
-            <a:off x="5803239" y="987552"/>
-            <a:ext cx="585216" cy="0"/>
+            <a:off x="5730087" y="1024128"/>
+            <a:ext cx="731520" cy="0"/>
           </a:xfrm>
           <a:prstGeom prst="bentConnector3">
             <a:avLst/>
           </a:prstGeom>
-          <a:ln w="27940">
+          <a:ln w="30480">
             <a:solidFill>
               <a:srgbClr val="C18150"/>
             </a:solidFill>
@@ -11655,8 +12520,8 @@
         </p:nvSpPr>
         <p:spPr>
           <a:xfrm>
-            <a:off x="700887" y="2286000"/>
-            <a:ext cx="10789920" cy="2011680"/>
+            <a:off x="335127" y="2194560"/>
+            <a:ext cx="11521440" cy="2103120"/>
           </a:xfrm>
           <a:prstGeom prst="rect">
             <a:avLst/>
@@ -11675,7 +12540,7 @@
               </a:lnSpc>
             </a:pPr>
             <a:r>
-              <a:rPr sz="3827" b="1" i="0">
+              <a:rPr sz="4291" b="1" i="0">
                 <a:solidFill>
                   <a:srgbClr val="3E2C1E"/>
                 </a:solidFill>
@@ -11691,7 +12556,7 @@
               </a:lnSpc>
             </a:pPr>
             <a:r>
-              <a:rPr sz="3827" b="1" i="0">
+              <a:rPr sz="4291" b="1" i="0">
                 <a:solidFill>
                   <a:srgbClr val="3E2C1E"/>
                 </a:solidFill>
@@ -11700,7 +12565,7 @@
               <a:t/>
             </a:r>
             <a:r>
-              <a:rPr sz="3827" b="1" i="0">
+              <a:rPr sz="4291" b="1" i="0">
                 <a:solidFill>
                   <a:srgbClr val="CE5A38"/>
                 </a:solidFill>
@@ -11719,8 +12584,8 @@
         </p:nvSpPr>
         <p:spPr>
           <a:xfrm>
-            <a:off x="1066647" y="4892040"/>
-            <a:ext cx="10058400" cy="640080"/>
+            <a:off x="883767" y="4937760"/>
+            <a:ext cx="10424160" cy="640080"/>
           </a:xfrm>
           <a:prstGeom prst="rect">
             <a:avLst/>
@@ -11739,7 +12604,7 @@
               </a:lnSpc>
             </a:pPr>
             <a:r>
-              <a:rPr sz="2320" b="1" i="1">
+              <a:rPr sz="2668" b="1" i="1">
                 <a:solidFill>
                   <a:srgbClr val="C18150"/>
                 </a:solidFill>

--- a/presentation/gender_bias_llm_hiring.pptx
+++ b/presentation/gender_bias_llm_hiring.pptx
@@ -4077,8 +4077,8 @@
         </p:nvSpPr>
         <p:spPr>
           <a:xfrm>
-            <a:off x="2895447" y="1874519"/>
-            <a:ext cx="6400800" cy="1371600"/>
+            <a:off x="2804007" y="1828800"/>
+            <a:ext cx="6583680" cy="1463040"/>
           </a:xfrm>
           <a:prstGeom prst="rect">
             <a:avLst/>
@@ -4097,7 +4097,7 @@
               </a:lnSpc>
             </a:pPr>
             <a:r>
-              <a:rPr sz="3944" b="1" i="0">
+              <a:rPr sz="4523" b="1" i="0">
                 <a:solidFill>
                   <a:srgbClr val="3E2C1E"/>
                 </a:solidFill>
@@ -4106,7 +4106,7 @@
               <a:t>Gender bias when </a:t>
             </a:r>
             <a:r>
-              <a:rPr sz="3944" b="1" i="0">
+              <a:rPr sz="4523" b="1" i="0">
                 <a:solidFill>
                   <a:srgbClr val="CE5A38"/>
                 </a:solidFill>
@@ -4115,7 +4115,7 @@
               <a:t>AI</a:t>
             </a:r>
             <a:r>
-              <a:rPr sz="3944" b="1" i="0">
+              <a:rPr sz="4523" b="1" i="0">
                 <a:solidFill>
                   <a:srgbClr val="3E2C1E"/>
                 </a:solidFill>
@@ -4131,7 +4131,7 @@
               </a:lnSpc>
             </a:pPr>
             <a:r>
-              <a:rPr sz="3944" b="1" i="0">
+              <a:rPr sz="4523" b="1" i="0">
                 <a:solidFill>
                   <a:srgbClr val="3E2C1E"/>
                 </a:solidFill>
@@ -4337,8 +4337,8 @@
         </p:nvSpPr>
         <p:spPr>
           <a:xfrm>
-            <a:off x="3169767" y="2468880"/>
-            <a:ext cx="5852160" cy="1280160"/>
+            <a:off x="3169767" y="2057400"/>
+            <a:ext cx="5852160" cy="1188720"/>
           </a:xfrm>
           <a:prstGeom prst="rect">
             <a:avLst/>
@@ -4357,7 +4357,7 @@
               </a:lnSpc>
             </a:pPr>
             <a:r>
-              <a:rPr sz="6728" b="0" i="0">
+              <a:rPr sz="6263" b="0" i="0">
                 <a:solidFill>
                   <a:srgbClr val="E96CA4"/>
                 </a:solidFill>
@@ -4366,7 +4366,7 @@
               <a:t>♀</a:t>
             </a:r>
             <a:r>
-              <a:rPr sz="6728" b="0" i="0">
+              <a:rPr sz="6263" b="0" i="0">
                 <a:solidFill>
                   <a:srgbClr val="3E2C1E"/>
                 </a:solidFill>
@@ -4375,7 +4375,7 @@
               <a:t>    </a:t>
             </a:r>
             <a:r>
-              <a:rPr sz="6728" b="0" i="0">
+              <a:rPr sz="6263" b="0" i="0">
                 <a:solidFill>
                   <a:srgbClr val="5A93DE"/>
                 </a:solidFill>
@@ -4394,7 +4394,7 @@
         </p:nvSpPr>
         <p:spPr>
           <a:xfrm>
-            <a:off x="1523847" y="3703320"/>
+            <a:off x="1523847" y="3154680"/>
             <a:ext cx="9144000" cy="1005840"/>
           </a:xfrm>
           <a:prstGeom prst="rect">
@@ -4414,7 +4414,7 @@
               </a:lnSpc>
             </a:pPr>
             <a:r>
-              <a:rPr sz="6495" b="1" i="0">
+              <a:rPr sz="6959" b="1" i="0">
                 <a:solidFill>
                   <a:srgbClr val="3E2C1E"/>
                 </a:solidFill>
@@ -4425,16 +4425,52 @@
           </a:p>
         </p:txBody>
       </p:sp>
-      <p:sp>
-        <p:nvSpPr>
-          <p:cNvPr id="5" name="TextBox 4"/>
+      <p:cxnSp>
+        <p:nvCxnSpPr>
+          <p:cNvPr id="5" name="Connector 4"/>
+          <p:cNvCxnSpPr/>
+          <p:nvPr/>
+        </p:nvCxnSpPr>
+        <p:spPr>
+          <a:xfrm>
+            <a:off x="5181447" y="4526280"/>
+            <a:ext cx="1828800" cy="0"/>
+          </a:xfrm>
+          <a:prstGeom prst="bentConnector3">
+            <a:avLst/>
+          </a:prstGeom>
+          <a:ln w="25400">
+            <a:solidFill>
+              <a:srgbClr val="C18150"/>
+            </a:solidFill>
+          </a:ln>
+          <a:effectLst/>
+        </p:spPr>
+        <p:style>
+          <a:lnRef idx="2">
+            <a:schemeClr val="accent1"/>
+          </a:lnRef>
+          <a:fillRef idx="0">
+            <a:schemeClr val="accent1"/>
+          </a:fillRef>
+          <a:effectRef idx="1">
+            <a:schemeClr val="accent1"/>
+          </a:effectRef>
+          <a:fontRef idx="minor">
+            <a:schemeClr val="tx1"/>
+          </a:fontRef>
+        </p:style>
+      </p:cxnSp>
+      <p:sp>
+        <p:nvSpPr>
+          <p:cNvPr id="6" name="TextBox 5"/>
           <p:cNvSpPr txBox="1"/>
           <p:nvPr/>
         </p:nvSpPr>
         <p:spPr>
           <a:xfrm>
-            <a:off x="1066647" y="4800600"/>
-            <a:ext cx="10058400" cy="457200"/>
+            <a:off x="2438247" y="4709160"/>
+            <a:ext cx="7315200" cy="365760"/>
           </a:xfrm>
           <a:prstGeom prst="rect">
             <a:avLst/>
@@ -4453,13 +4489,68 @@
               </a:lnSpc>
             </a:pPr>
             <a:r>
-              <a:rPr sz="1623" b="1" i="0" spc="160">
+              <a:rPr sz="1391" b="1" i="0" spc="320">
                 <a:solidFill>
                   <a:srgbClr val="C18150"/>
                 </a:solidFill>
                 <a:latin typeface="Calibri"/>
               </a:rPr>
-              <a:t>Gender Bias in LLM Hiring Decisions  ·  Evidence from Japan</a:t>
+              <a:t>SOURCE</a:t>
+            </a:r>
+          </a:p>
+        </p:txBody>
+      </p:sp>
+      <p:sp>
+        <p:nvSpPr>
+          <p:cNvPr id="7" name="TextBox 6"/>
+          <p:cNvSpPr txBox="1"/>
+          <p:nvPr/>
+        </p:nvSpPr>
+        <p:spPr>
+          <a:xfrm>
+            <a:off x="426567" y="5029200"/>
+            <a:ext cx="11338560" cy="1143000"/>
+          </a:xfrm>
+          <a:prstGeom prst="rect">
+            <a:avLst/>
+          </a:prstGeom>
+          <a:noFill/>
+        </p:spPr>
+        <p:txBody>
+          <a:bodyPr wrap="square" anchor="ctr" lIns="0" rIns="0" tIns="0" bIns="0">
+            <a:spAutoFit/>
+          </a:bodyPr>
+          <a:lstStyle/>
+          <a:p>
+            <a:pPr algn="ctr">
+              <a:lnSpc>
+                <a:spcPct val="125000"/>
+              </a:lnSpc>
+            </a:pPr>
+            <a:r>
+              <a:rPr sz="1391" b="0" i="1">
+                <a:solidFill>
+                  <a:srgbClr val="5A4433"/>
+                </a:solidFill>
+                <a:latin typeface="Georgia"/>
+              </a:rPr>
+              <a:t>Hoffstedde, S. A., Hirota, M., Nadayanur Sathis Kanna, A., Kotani, R., Kumar, U., Trovato, G., &amp; Tan, P. X. (2026).</a:t>
+            </a:r>
+          </a:p>
+          <a:p>
+            <a:pPr algn="ctr">
+              <a:lnSpc>
+                <a:spcPct val="125000"/>
+              </a:lnSpc>
+            </a:pPr>
+            <a:r>
+              <a:rPr sz="1391" b="0" i="1">
+                <a:solidFill>
+                  <a:srgbClr val="5A4433"/>
+                </a:solidFill>
+                <a:latin typeface="Georgia"/>
+              </a:rPr>
+              <a:t>Gender Bias in LLM Hiring Decisions: Evidence from a Japanese Context and Evaluation of Mitigation Strategies. arXiv:2606.18649.</a:t>
             </a:r>
           </a:p>
         </p:txBody>
@@ -4542,8 +4633,8 @@
         </p:nvSpPr>
         <p:spPr>
           <a:xfrm>
-            <a:off x="2438247" y="530352"/>
-            <a:ext cx="7315200" cy="402336"/>
+            <a:off x="2438247" y="512064"/>
+            <a:ext cx="7315200" cy="420624"/>
           </a:xfrm>
           <a:prstGeom prst="rect">
             <a:avLst/>
@@ -4562,7 +4653,7 @@
               </a:lnSpc>
             </a:pPr>
             <a:r>
-              <a:rPr sz="1855" b="1" i="0" spc="420">
+              <a:rPr sz="2088" b="1" i="0" spc="420">
                 <a:solidFill>
                   <a:srgbClr val="C18150"/>
                 </a:solidFill>
@@ -4581,13 +4672,13 @@
         </p:nvCxnSpPr>
         <p:spPr>
           <a:xfrm>
-            <a:off x="5730087" y="1024128"/>
-            <a:ext cx="731520" cy="0"/>
+            <a:off x="5684367" y="1042415"/>
+            <a:ext cx="822960" cy="0"/>
           </a:xfrm>
           <a:prstGeom prst="bentConnector3">
             <a:avLst/>
           </a:prstGeom>
-          <a:ln w="30480">
+          <a:ln w="33020">
             <a:solidFill>
               <a:srgbClr val="C18150"/>
             </a:solidFill>
@@ -5484,8 +5575,8 @@
         </p:nvSpPr>
         <p:spPr>
           <a:xfrm>
-            <a:off x="335127" y="5166360"/>
-            <a:ext cx="11521440" cy="731520"/>
+            <a:off x="335127" y="5029200"/>
+            <a:ext cx="11521440" cy="1005840"/>
           </a:xfrm>
           <a:prstGeom prst="rect">
             <a:avLst/>
@@ -5500,17 +5591,33 @@
           <a:p>
             <a:pPr algn="ctr">
               <a:lnSpc>
-                <a:spcPct val="100000"/>
+                <a:spcPct val="106000"/>
               </a:lnSpc>
             </a:pPr>
             <a:r>
-              <a:rPr sz="3015" b="1" i="0">
+              <a:rPr sz="3479" b="1" i="0">
                 <a:solidFill>
                   <a:srgbClr val="3E2C1E"/>
                 </a:solidFill>
                 <a:latin typeface="Georgia"/>
               </a:rPr>
-              <a:t>AI screens your resume before a human ever sees it</a:t>
+              <a:t>AI screens your resume</a:t>
+            </a:r>
+          </a:p>
+          <a:p>
+            <a:pPr algn="ctr">
+              <a:lnSpc>
+                <a:spcPct val="106000"/>
+              </a:lnSpc>
+            </a:pPr>
+            <a:r>
+              <a:rPr sz="3479" b="1" i="0">
+                <a:solidFill>
+                  <a:srgbClr val="3E2C1E"/>
+                </a:solidFill>
+                <a:latin typeface="Georgia"/>
+              </a:rPr>
+              <a:t>before a human ever sees it</a:t>
             </a:r>
           </a:p>
         </p:txBody>
@@ -5676,8 +5783,8 @@
         </p:nvSpPr>
         <p:spPr>
           <a:xfrm>
-            <a:off x="2438247" y="530352"/>
-            <a:ext cx="7315200" cy="402336"/>
+            <a:off x="2438247" y="512064"/>
+            <a:ext cx="7315200" cy="420624"/>
           </a:xfrm>
           <a:prstGeom prst="rect">
             <a:avLst/>
@@ -5696,7 +5803,7 @@
               </a:lnSpc>
             </a:pPr>
             <a:r>
-              <a:rPr sz="1855" b="1" i="0" spc="420">
+              <a:rPr sz="2088" b="1" i="0" spc="420">
                 <a:solidFill>
                   <a:srgbClr val="C18150"/>
                 </a:solidFill>
@@ -5715,13 +5822,13 @@
         </p:nvCxnSpPr>
         <p:spPr>
           <a:xfrm>
-            <a:off x="5730087" y="1024128"/>
-            <a:ext cx="731520" cy="0"/>
+            <a:off x="5684367" y="1042415"/>
+            <a:ext cx="822960" cy="0"/>
           </a:xfrm>
           <a:prstGeom prst="bentConnector3">
             <a:avLst/>
           </a:prstGeom>
-          <a:ln w="30480">
+          <a:ln w="33020">
             <a:solidFill>
               <a:srgbClr val="C18150"/>
             </a:solidFill>
@@ -5751,7 +5858,7 @@
         </p:nvSpPr>
         <p:spPr>
           <a:xfrm>
-            <a:off x="2446020" y="2631186"/>
+            <a:off x="3268979" y="2631186"/>
             <a:ext cx="1874519" cy="374904"/>
           </a:xfrm>
           <a:prstGeom prst="roundRect">
@@ -5805,7 +5912,7 @@
         </p:nvSpPr>
         <p:spPr>
           <a:xfrm>
-            <a:off x="2595981" y="2743657"/>
+            <a:off x="3418941" y="2743657"/>
             <a:ext cx="299923" cy="149961"/>
           </a:xfrm>
           <a:prstGeom prst="roundRect">
@@ -5851,7 +5958,7 @@
         </p:nvSpPr>
         <p:spPr>
           <a:xfrm>
-            <a:off x="2446020" y="3193541"/>
+            <a:off x="3268979" y="3193541"/>
             <a:ext cx="1874519" cy="374904"/>
           </a:xfrm>
           <a:prstGeom prst="roundRect">
@@ -5905,7 +6012,7 @@
         </p:nvSpPr>
         <p:spPr>
           <a:xfrm>
-            <a:off x="2595981" y="3306013"/>
+            <a:off x="3418941" y="3306013"/>
             <a:ext cx="299923" cy="149961"/>
           </a:xfrm>
           <a:prstGeom prst="roundRect">
@@ -5951,7 +6058,7 @@
         </p:nvSpPr>
         <p:spPr>
           <a:xfrm>
-            <a:off x="2446020" y="3755898"/>
+            <a:off x="3268979" y="3755898"/>
             <a:ext cx="1874519" cy="374904"/>
           </a:xfrm>
           <a:prstGeom prst="roundRect">
@@ -6005,7 +6112,7 @@
         </p:nvSpPr>
         <p:spPr>
           <a:xfrm>
-            <a:off x="2595981" y="3868369"/>
+            <a:off x="3418941" y="3868369"/>
             <a:ext cx="299923" cy="149961"/>
           </a:xfrm>
           <a:prstGeom prst="roundRect">
@@ -6051,7 +6158,7 @@
         </p:nvSpPr>
         <p:spPr>
           <a:xfrm>
-            <a:off x="4823459" y="3310127"/>
+            <a:off x="5616244" y="3310127"/>
             <a:ext cx="960120" cy="329184"/>
           </a:xfrm>
           <a:prstGeom prst="rightArrow">
@@ -6098,7 +6205,7 @@
         </p:nvCxnSpPr>
         <p:spPr>
           <a:xfrm>
-            <a:off x="7452360" y="2542946"/>
+            <a:off x="8001000" y="2542946"/>
             <a:ext cx="0" cy="237744"/>
           </a:xfrm>
           <a:prstGeom prst="bentConnector3">
@@ -6134,7 +6241,7 @@
         </p:nvSpPr>
         <p:spPr>
           <a:xfrm>
-            <a:off x="7370064" y="2396642"/>
+            <a:off x="7918704" y="2396642"/>
             <a:ext cx="164592" cy="164592"/>
           </a:xfrm>
           <a:prstGeom prst="ellipse">
@@ -6178,7 +6285,7 @@
         </p:nvSpPr>
         <p:spPr>
           <a:xfrm>
-            <a:off x="6583680" y="2780690"/>
+            <a:off x="7132320" y="2780690"/>
             <a:ext cx="1737360" cy="1424635"/>
           </a:xfrm>
           <a:prstGeom prst="roundRect">
@@ -6232,7 +6339,7 @@
         </p:nvSpPr>
         <p:spPr>
           <a:xfrm>
-            <a:off x="6939838" y="3407529"/>
+            <a:off x="7488478" y="3407529"/>
             <a:ext cx="260603" cy="260603"/>
           </a:xfrm>
           <a:prstGeom prst="ellipse">
@@ -6276,7 +6383,7 @@
         </p:nvSpPr>
         <p:spPr>
           <a:xfrm>
-            <a:off x="7704277" y="3407529"/>
+            <a:off x="8252917" y="3407529"/>
             <a:ext cx="260603" cy="260603"/>
           </a:xfrm>
           <a:prstGeom prst="ellipse">
@@ -6320,7 +6427,7 @@
         </p:nvSpPr>
         <p:spPr>
           <a:xfrm>
-            <a:off x="7104888" y="3777935"/>
+            <a:off x="7653527" y="3777935"/>
             <a:ext cx="694944" cy="99724"/>
           </a:xfrm>
           <a:prstGeom prst="roundRect">
@@ -6366,7 +6473,7 @@
         </p:nvSpPr>
         <p:spPr>
           <a:xfrm>
-            <a:off x="1828800" y="5029200"/>
+            <a:off x="2651760" y="5029200"/>
             <a:ext cx="3108960" cy="457200"/>
           </a:xfrm>
           <a:prstGeom prst="rect">
@@ -6405,7 +6512,7 @@
         </p:nvSpPr>
         <p:spPr>
           <a:xfrm>
-            <a:off x="5897880" y="5029200"/>
+            <a:off x="6446520" y="5029200"/>
             <a:ext cx="3108960" cy="457200"/>
           </a:xfrm>
           <a:prstGeom prst="rect">
@@ -6597,8 +6704,8 @@
         </p:nvSpPr>
         <p:spPr>
           <a:xfrm>
-            <a:off x="2438247" y="530352"/>
-            <a:ext cx="7315200" cy="402336"/>
+            <a:off x="2438247" y="512064"/>
+            <a:ext cx="7315200" cy="420624"/>
           </a:xfrm>
           <a:prstGeom prst="rect">
             <a:avLst/>
@@ -6617,7 +6724,7 @@
               </a:lnSpc>
             </a:pPr>
             <a:r>
-              <a:rPr sz="1855" b="1" i="0" spc="420">
+              <a:rPr sz="2088" b="1" i="0" spc="420">
                 <a:solidFill>
                   <a:srgbClr val="CE5A38"/>
                 </a:solidFill>
@@ -6636,13 +6743,13 @@
         </p:nvCxnSpPr>
         <p:spPr>
           <a:xfrm>
-            <a:off x="5730087" y="1024128"/>
-            <a:ext cx="731520" cy="0"/>
+            <a:off x="5684367" y="1042415"/>
+            <a:ext cx="822960" cy="0"/>
           </a:xfrm>
           <a:prstGeom prst="bentConnector3">
             <a:avLst/>
           </a:prstGeom>
-          <a:ln w="30480">
+          <a:ln w="33020">
             <a:solidFill>
               <a:srgbClr val="CE5A38"/>
             </a:solidFill>
@@ -7107,8 +7214,8 @@
         </p:nvSpPr>
         <p:spPr>
           <a:xfrm>
-            <a:off x="335127" y="5394960"/>
-            <a:ext cx="11521440" cy="822960"/>
+            <a:off x="335127" y="5166360"/>
+            <a:ext cx="11521440" cy="1005840"/>
           </a:xfrm>
           <a:prstGeom prst="rect">
             <a:avLst/>
@@ -7123,17 +7230,33 @@
           <a:p>
             <a:pPr algn="ctr">
               <a:lnSpc>
-                <a:spcPct val="100000"/>
+                <a:spcPct val="106000"/>
               </a:lnSpc>
             </a:pPr>
             <a:r>
-              <a:rPr sz="3015" b="1" i="0">
+              <a:rPr sz="3479" b="1" i="0">
                 <a:solidFill>
                   <a:srgbClr val="3E2C1E"/>
                 </a:solidFill>
                 <a:latin typeface="Georgia"/>
               </a:rPr>
-              <a:t>If AI learns from people, could it learn our bias?</a:t>
+              <a:t>If AI learns from people,</a:t>
+            </a:r>
+          </a:p>
+          <a:p>
+            <a:pPr algn="ctr">
+              <a:lnSpc>
+                <a:spcPct val="106000"/>
+              </a:lnSpc>
+            </a:pPr>
+            <a:r>
+              <a:rPr sz="3479" b="1" i="0">
+                <a:solidFill>
+                  <a:srgbClr val="3E2C1E"/>
+                </a:solidFill>
+                <a:latin typeface="Georgia"/>
+              </a:rPr>
+              <a:t>could it learn our bias?</a:t>
             </a:r>
           </a:p>
         </p:txBody>
@@ -7299,8 +7422,8 @@
         </p:nvSpPr>
         <p:spPr>
           <a:xfrm>
-            <a:off x="2438247" y="530352"/>
-            <a:ext cx="7315200" cy="402336"/>
+            <a:off x="2438247" y="512064"/>
+            <a:ext cx="7315200" cy="420624"/>
           </a:xfrm>
           <a:prstGeom prst="rect">
             <a:avLst/>
@@ -7319,7 +7442,7 @@
               </a:lnSpc>
             </a:pPr>
             <a:r>
-              <a:rPr sz="1855" b="1" i="0" spc="420">
+              <a:rPr sz="2088" b="1" i="0" spc="420">
                 <a:solidFill>
                   <a:srgbClr val="C18150"/>
                 </a:solidFill>
@@ -7338,13 +7461,13 @@
         </p:nvCxnSpPr>
         <p:spPr>
           <a:xfrm>
-            <a:off x="5730087" y="1024128"/>
-            <a:ext cx="731520" cy="0"/>
+            <a:off x="5684367" y="1042415"/>
+            <a:ext cx="822960" cy="0"/>
           </a:xfrm>
           <a:prstGeom prst="bentConnector3">
             <a:avLst/>
           </a:prstGeom>
-          <a:ln w="30480">
+          <a:ln w="33020">
             <a:solidFill>
               <a:srgbClr val="C18150"/>
             </a:solidFill>
@@ -8333,7 +8456,7 @@
         </p:nvSpPr>
         <p:spPr>
           <a:xfrm>
-            <a:off x="335127" y="4572000"/>
+            <a:off x="335127" y="4553712"/>
             <a:ext cx="11521440" cy="548640"/>
           </a:xfrm>
           <a:prstGeom prst="rect">
@@ -8353,7 +8476,7 @@
               </a:lnSpc>
             </a:pPr>
             <a:r>
-              <a:rPr sz="3015" b="1" i="0">
+              <a:rPr sz="3247" b="1" i="0">
                 <a:solidFill>
                   <a:srgbClr val="3E2C1E"/>
                 </a:solidFill>
@@ -9249,8 +9372,8 @@
         </p:nvSpPr>
         <p:spPr>
           <a:xfrm>
-            <a:off x="2438247" y="530352"/>
-            <a:ext cx="7315200" cy="402336"/>
+            <a:off x="2438247" y="512064"/>
+            <a:ext cx="7315200" cy="420624"/>
           </a:xfrm>
           <a:prstGeom prst="rect">
             <a:avLst/>
@@ -9269,7 +9392,7 @@
               </a:lnSpc>
             </a:pPr>
             <a:r>
-              <a:rPr sz="1855" b="1" i="0" spc="420">
+              <a:rPr sz="2088" b="1" i="0" spc="420">
                 <a:solidFill>
                   <a:srgbClr val="CE5A38"/>
                 </a:solidFill>
@@ -9288,13 +9411,13 @@
         </p:nvCxnSpPr>
         <p:spPr>
           <a:xfrm>
-            <a:off x="5730087" y="1024128"/>
-            <a:ext cx="731520" cy="0"/>
+            <a:off x="5684367" y="1042415"/>
+            <a:ext cx="822960" cy="0"/>
           </a:xfrm>
           <a:prstGeom prst="bentConnector3">
             <a:avLst/>
           </a:prstGeom>
-          <a:ln w="30480">
+          <a:ln w="33020">
             <a:solidFill>
               <a:srgbClr val="CE5A38"/>
             </a:solidFill>
@@ -10433,7 +10556,7 @@
               </a:lnSpc>
             </a:pPr>
             <a:r>
-              <a:rPr sz="3015" b="1" i="0">
+              <a:rPr sz="3247" b="1" i="0">
                 <a:solidFill>
                   <a:srgbClr val="3E2C1E"/>
                 </a:solidFill>
@@ -10442,7 +10565,7 @@
               <a:t>Female names scored </a:t>
             </a:r>
             <a:r>
-              <a:rPr sz="3015" b="1" i="0">
+              <a:rPr sz="3247" b="1" i="0">
                 <a:solidFill>
                   <a:srgbClr val="E96CA4"/>
                 </a:solidFill>
@@ -10451,7 +10574,7 @@
               <a:t>slightly higher</a:t>
             </a:r>
             <a:r>
-              <a:rPr sz="3015" b="1" i="0">
+              <a:rPr sz="3247" b="1" i="0">
                 <a:solidFill>
                   <a:srgbClr val="3E2C1E"/>
                 </a:solidFill>
@@ -10623,8 +10746,8 @@
         </p:nvSpPr>
         <p:spPr>
           <a:xfrm>
-            <a:off x="2438247" y="530352"/>
-            <a:ext cx="7315200" cy="402336"/>
+            <a:off x="2438247" y="512064"/>
+            <a:ext cx="7315200" cy="420624"/>
           </a:xfrm>
           <a:prstGeom prst="rect">
             <a:avLst/>
@@ -10643,7 +10766,7 @@
               </a:lnSpc>
             </a:pPr>
             <a:r>
-              <a:rPr sz="1855" b="1" i="0" spc="420">
+              <a:rPr sz="2088" b="1" i="0" spc="420">
                 <a:solidFill>
                   <a:srgbClr val="DCA62A"/>
                 </a:solidFill>
@@ -10662,13 +10785,13 @@
         </p:nvCxnSpPr>
         <p:spPr>
           <a:xfrm>
-            <a:off x="5730087" y="1024128"/>
-            <a:ext cx="731520" cy="0"/>
+            <a:off x="5684367" y="1042415"/>
+            <a:ext cx="822960" cy="0"/>
           </a:xfrm>
           <a:prstGeom prst="bentConnector3">
             <a:avLst/>
           </a:prstGeom>
-          <a:ln w="30480">
+          <a:ln w="33020">
             <a:solidFill>
               <a:srgbClr val="DCA62A"/>
             </a:solidFill>
@@ -11594,7 +11717,7 @@
               </a:lnSpc>
             </a:pPr>
             <a:r>
-              <a:rPr sz="3247" b="1" i="0">
+              <a:rPr sz="3596" b="1" i="0">
                 <a:solidFill>
                   <a:srgbClr val="3E2C1E"/>
                 </a:solidFill>
@@ -11766,8 +11889,8 @@
         </p:nvSpPr>
         <p:spPr>
           <a:xfrm>
-            <a:off x="2438247" y="530352"/>
-            <a:ext cx="7315200" cy="402336"/>
+            <a:off x="2438247" y="512064"/>
+            <a:ext cx="7315200" cy="420624"/>
           </a:xfrm>
           <a:prstGeom prst="rect">
             <a:avLst/>
@@ -11786,7 +11909,7 @@
               </a:lnSpc>
             </a:pPr>
             <a:r>
-              <a:rPr sz="1855" b="1" i="0" spc="420">
+              <a:rPr sz="2088" b="1" i="0" spc="420">
                 <a:solidFill>
                   <a:srgbClr val="C18150"/>
                 </a:solidFill>
@@ -11805,13 +11928,13 @@
         </p:nvCxnSpPr>
         <p:spPr>
           <a:xfrm>
-            <a:off x="5730087" y="1024128"/>
-            <a:ext cx="731520" cy="0"/>
+            <a:off x="5684367" y="1042415"/>
+            <a:ext cx="822960" cy="0"/>
           </a:xfrm>
           <a:prstGeom prst="bentConnector3">
             <a:avLst/>
           </a:prstGeom>
-          <a:ln w="30480">
+          <a:ln w="33020">
             <a:solidFill>
               <a:srgbClr val="C18150"/>
             </a:solidFill>
@@ -12237,8 +12360,8 @@
         </p:nvSpPr>
         <p:spPr>
           <a:xfrm>
-            <a:off x="518007" y="5166360"/>
-            <a:ext cx="11155680" cy="1234440"/>
+            <a:off x="518007" y="5120640"/>
+            <a:ext cx="11155680" cy="1280160"/>
           </a:xfrm>
           <a:prstGeom prst="rect">
             <a:avLst/>
@@ -12257,7 +12380,7 @@
               </a:lnSpc>
             </a:pPr>
             <a:r>
-              <a:rPr sz="3131" b="1" i="0">
+              <a:rPr sz="3479" b="1" i="0">
                 <a:solidFill>
                   <a:srgbClr val="3E2C1E"/>
                 </a:solidFill>
@@ -12273,7 +12396,7 @@
               </a:lnSpc>
             </a:pPr>
             <a:r>
-              <a:rPr sz="3131" b="1" i="0">
+              <a:rPr sz="3479" b="1" i="0">
                 <a:solidFill>
                   <a:srgbClr val="3E2C1E"/>
                 </a:solidFill>
@@ -12445,8 +12568,8 @@
         </p:nvSpPr>
         <p:spPr>
           <a:xfrm>
-            <a:off x="2438247" y="530352"/>
-            <a:ext cx="7315200" cy="402336"/>
+            <a:off x="2438247" y="512064"/>
+            <a:ext cx="7315200" cy="420624"/>
           </a:xfrm>
           <a:prstGeom prst="rect">
             <a:avLst/>
@@ -12465,7 +12588,7 @@
               </a:lnSpc>
             </a:pPr>
             <a:r>
-              <a:rPr sz="1855" b="1" i="0" spc="420">
+              <a:rPr sz="2088" b="1" i="0" spc="420">
                 <a:solidFill>
                   <a:srgbClr val="C18150"/>
                 </a:solidFill>
@@ -12484,13 +12607,13 @@
         </p:nvCxnSpPr>
         <p:spPr>
           <a:xfrm>
-            <a:off x="5730087" y="1024128"/>
-            <a:ext cx="731520" cy="0"/>
+            <a:off x="5684367" y="1042415"/>
+            <a:ext cx="822960" cy="0"/>
           </a:xfrm>
           <a:prstGeom prst="bentConnector3">
             <a:avLst/>
           </a:prstGeom>
-          <a:ln w="30480">
+          <a:ln w="33020">
             <a:solidFill>
               <a:srgbClr val="C18150"/>
             </a:solidFill>
@@ -12520,8 +12643,8 @@
         </p:nvSpPr>
         <p:spPr>
           <a:xfrm>
-            <a:off x="335127" y="2194560"/>
-            <a:ext cx="11521440" cy="2103120"/>
+            <a:off x="335127" y="2148840"/>
+            <a:ext cx="11521440" cy="2148840"/>
           </a:xfrm>
           <a:prstGeom prst="rect">
             <a:avLst/>
@@ -12540,7 +12663,7 @@
               </a:lnSpc>
             </a:pPr>
             <a:r>
-              <a:rPr sz="4291" b="1" i="0">
+              <a:rPr sz="4755" b="1" i="0">
                 <a:solidFill>
                   <a:srgbClr val="3E2C1E"/>
                 </a:solidFill>
@@ -12556,7 +12679,7 @@
               </a:lnSpc>
             </a:pPr>
             <a:r>
-              <a:rPr sz="4291" b="1" i="0">
+              <a:rPr sz="4755" b="1" i="0">
                 <a:solidFill>
                   <a:srgbClr val="3E2C1E"/>
                 </a:solidFill>
@@ -12565,7 +12688,7 @@
               <a:t/>
             </a:r>
             <a:r>
-              <a:rPr sz="4291" b="1" i="0">
+              <a:rPr sz="4755" b="1" i="0">
                 <a:solidFill>
                   <a:srgbClr val="CE5A38"/>
                 </a:solidFill>
@@ -12584,7 +12707,7 @@
         </p:nvSpPr>
         <p:spPr>
           <a:xfrm>
-            <a:off x="883767" y="4937760"/>
+            <a:off x="883767" y="5029200"/>
             <a:ext cx="10424160" cy="640080"/>
           </a:xfrm>
           <a:prstGeom prst="rect">
@@ -12604,7 +12727,7 @@
               </a:lnSpc>
             </a:pPr>
             <a:r>
-              <a:rPr sz="2668" b="1" i="1">
+              <a:rPr sz="2783" b="1" i="1">
                 <a:solidFill>
                   <a:srgbClr val="C18150"/>
                 </a:solidFill>
